--- a/Dot Net/Business.pptx
+++ b/Dot Net/Business.pptx
@@ -47,37 +47,42 @@
     <p:sldId id="325" r:id="rId41"/>
     <p:sldId id="328" r:id="rId42"/>
     <p:sldId id="329" r:id="rId43"/>
-    <p:sldId id="331" r:id="rId44"/>
-    <p:sldId id="330" r:id="rId45"/>
-    <p:sldId id="324" r:id="rId46"/>
-    <p:sldId id="314" r:id="rId47"/>
-    <p:sldId id="283" r:id="rId48"/>
-    <p:sldId id="307" r:id="rId49"/>
-    <p:sldId id="308" r:id="rId50"/>
-    <p:sldId id="309" r:id="rId51"/>
-    <p:sldId id="310" r:id="rId52"/>
-    <p:sldId id="311" r:id="rId53"/>
-    <p:sldId id="312" r:id="rId54"/>
-    <p:sldId id="288" r:id="rId55"/>
-    <p:sldId id="282" r:id="rId56"/>
-    <p:sldId id="293" r:id="rId57"/>
-    <p:sldId id="294" r:id="rId58"/>
-    <p:sldId id="296" r:id="rId59"/>
-    <p:sldId id="297" r:id="rId60"/>
-    <p:sldId id="299" r:id="rId61"/>
-    <p:sldId id="298" r:id="rId62"/>
-    <p:sldId id="300" r:id="rId63"/>
-    <p:sldId id="301" r:id="rId64"/>
-    <p:sldId id="319" r:id="rId65"/>
-    <p:sldId id="303" r:id="rId66"/>
-    <p:sldId id="276" r:id="rId67"/>
-    <p:sldId id="289" r:id="rId68"/>
-    <p:sldId id="290" r:id="rId69"/>
-    <p:sldId id="295" r:id="rId70"/>
-    <p:sldId id="302" r:id="rId71"/>
-    <p:sldId id="320" r:id="rId72"/>
-    <p:sldId id="321" r:id="rId73"/>
-    <p:sldId id="332" r:id="rId74"/>
+    <p:sldId id="334" r:id="rId44"/>
+    <p:sldId id="331" r:id="rId45"/>
+    <p:sldId id="330" r:id="rId46"/>
+    <p:sldId id="324" r:id="rId47"/>
+    <p:sldId id="314" r:id="rId48"/>
+    <p:sldId id="283" r:id="rId49"/>
+    <p:sldId id="307" r:id="rId50"/>
+    <p:sldId id="308" r:id="rId51"/>
+    <p:sldId id="309" r:id="rId52"/>
+    <p:sldId id="310" r:id="rId53"/>
+    <p:sldId id="311" r:id="rId54"/>
+    <p:sldId id="312" r:id="rId55"/>
+    <p:sldId id="288" r:id="rId56"/>
+    <p:sldId id="282" r:id="rId57"/>
+    <p:sldId id="293" r:id="rId58"/>
+    <p:sldId id="294" r:id="rId59"/>
+    <p:sldId id="296" r:id="rId60"/>
+    <p:sldId id="297" r:id="rId61"/>
+    <p:sldId id="299" r:id="rId62"/>
+    <p:sldId id="298" r:id="rId63"/>
+    <p:sldId id="300" r:id="rId64"/>
+    <p:sldId id="301" r:id="rId65"/>
+    <p:sldId id="319" r:id="rId66"/>
+    <p:sldId id="303" r:id="rId67"/>
+    <p:sldId id="276" r:id="rId68"/>
+    <p:sldId id="289" r:id="rId69"/>
+    <p:sldId id="290" r:id="rId70"/>
+    <p:sldId id="321" r:id="rId71"/>
+    <p:sldId id="333" r:id="rId72"/>
+    <p:sldId id="332" r:id="rId73"/>
+    <p:sldId id="320" r:id="rId74"/>
+    <p:sldId id="335" r:id="rId75"/>
+    <p:sldId id="336" r:id="rId76"/>
+    <p:sldId id="337" r:id="rId77"/>
+    <p:sldId id="295" r:id="rId78"/>
+    <p:sldId id="302" r:id="rId79"/>
   </p:sldIdLst>
   <p:sldSz cx="12192000" cy="6858000"/>
   <p:notesSz cx="6858000" cy="9144000"/>
@@ -11393,8 +11398,38 @@
         </p:blipFill>
         <p:spPr>
           <a:xfrm>
-            <a:off x="6596165" y="1238154"/>
+            <a:off x="7609098" y="1670773"/>
             <a:ext cx="4671392" cy="4381692"/>
+          </a:xfrm>
+          <a:prstGeom prst="rect">
+            <a:avLst/>
+          </a:prstGeom>
+        </p:spPr>
+      </p:pic>
+      <p:pic>
+        <p:nvPicPr>
+          <p:cNvPr id="6" name="Picture 5">
+            <a:extLst>
+              <a:ext uri="{FF2B5EF4-FFF2-40B4-BE49-F238E27FC236}">
+                <a16:creationId xmlns:a16="http://schemas.microsoft.com/office/drawing/2014/main" id="{4550F3C6-6EC4-3A36-41C3-C96C4DBFB2E3}"/>
+              </a:ext>
+            </a:extLst>
+          </p:cNvPr>
+          <p:cNvPicPr>
+            <a:picLocks noChangeAspect="1"/>
+          </p:cNvPicPr>
+          <p:nvPr/>
+        </p:nvPicPr>
+        <p:blipFill>
+          <a:blip r:embed="rId3"/>
+          <a:stretch>
+            <a:fillRect/>
+          </a:stretch>
+        </p:blipFill>
+        <p:spPr>
+          <a:xfrm>
+            <a:off x="97253" y="3763297"/>
+            <a:ext cx="7423355" cy="2878393"/>
           </a:xfrm>
           <a:prstGeom prst="rect">
             <a:avLst/>
@@ -11749,8 +11784,8 @@
         </p:nvSpPr>
         <p:spPr>
           <a:xfrm>
-            <a:off x="147484" y="648928"/>
-            <a:ext cx="11916697" cy="6209071"/>
+            <a:off x="0" y="648928"/>
+            <a:ext cx="12064181" cy="6209071"/>
           </a:xfrm>
         </p:spPr>
         <p:txBody>
@@ -11767,56 +11802,119 @@
           <a:p>
             <a:pPr lvl="1"/>
             <a:r>
+              <a:rPr lang="en-US" sz="1600" b="1">
+                <a:solidFill>
+                  <a:srgbClr val="00B0F0"/>
+                </a:solidFill>
+              </a:rPr>
+              <a:t>Inprocess</a:t>
+            </a:r>
+            <a:r>
               <a:rPr lang="en-US" sz="1600"/>
-              <a:t>Inprocess // LO just create the Request</a:t>
-            </a:r>
+              <a:t> // LO just create the Request  </a:t>
+            </a:r>
+            <a:r>
+              <a:rPr lang="ar-EG"/>
+              <a:t>طلبات غير مرسلة</a:t>
+            </a:r>
+            <a:endParaRPr lang="en-US" sz="1600"/>
           </a:p>
           <a:p>
             <a:pPr lvl="1"/>
             <a:r>
+              <a:rPr lang="en-US" sz="1600" b="1">
+                <a:solidFill>
+                  <a:srgbClr val="00B0F0"/>
+                </a:solidFill>
+              </a:rPr>
+              <a:t>Approved</a:t>
+            </a:r>
+            <a:r>
               <a:rPr lang="en-US" sz="1600"/>
-              <a:t>Approved // </a:t>
-            </a:r>
+              <a:t> // REQUEST IS Approved </a:t>
+            </a:r>
+            <a:r>
+              <a:rPr lang="ar-EG" sz="1600"/>
+              <a:t>قبول_حقول</a:t>
+            </a:r>
+            <a:endParaRPr lang="en-US" sz="1600"/>
           </a:p>
           <a:p>
             <a:pPr lvl="1"/>
             <a:r>
+              <a:rPr lang="en-US" sz="1600" b="1">
+                <a:solidFill>
+                  <a:srgbClr val="00B0F0"/>
+                </a:solidFill>
+              </a:rPr>
+              <a:t>Failed Iscore Customer // </a:t>
+            </a:r>
+          </a:p>
+          <a:p>
+            <a:pPr lvl="1"/>
+            <a:r>
+              <a:rPr lang="en-US" sz="1600" b="1">
+                <a:solidFill>
+                  <a:srgbClr val="00B0F0"/>
+                </a:solidFill>
+              </a:rPr>
+              <a:t>Failed Iscore Guarantor</a:t>
+            </a:r>
+          </a:p>
+          <a:p>
+            <a:pPr lvl="1"/>
+            <a:r>
+              <a:rPr lang="en-US" sz="1600" b="1">
+                <a:solidFill>
+                  <a:srgbClr val="00B0F0"/>
+                </a:solidFill>
+              </a:rPr>
+              <a:t>Final Reject // </a:t>
+            </a:r>
+            <a:r>
+              <a:rPr lang="ar-EG"/>
+              <a:t>طلبات مرفوضة نهائى</a:t>
+            </a:r>
+            <a:endParaRPr lang="en-US" sz="1600" b="1">
+              <a:solidFill>
+                <a:srgbClr val="00B0F0"/>
+              </a:solidFill>
+            </a:endParaRPr>
+          </a:p>
+          <a:p>
+            <a:pPr lvl="1"/>
+            <a:r>
+              <a:rPr lang="en-US" sz="1600" b="1">
+                <a:solidFill>
+                  <a:srgbClr val="00B0F0"/>
+                </a:solidFill>
+              </a:rPr>
+              <a:t>Final Reject Guarantor</a:t>
+            </a:r>
+          </a:p>
+          <a:p>
+            <a:pPr lvl="1"/>
+            <a:r>
+              <a:rPr lang="en-US" sz="1600" b="1">
+                <a:solidFill>
+                  <a:srgbClr val="00B0F0"/>
+                </a:solidFill>
+              </a:rPr>
+              <a:t>Reject</a:t>
+            </a:r>
+            <a:r>
               <a:rPr lang="en-US" sz="1600"/>
-              <a:t>Failed Iscore Customer</a:t>
+              <a:t> // rejected by CO</a:t>
             </a:r>
           </a:p>
           <a:p>
             <a:pPr lvl="1"/>
             <a:r>
-              <a:rPr lang="en-US" sz="1600"/>
-              <a:t>Failed Iscore Guarantor</a:t>
-            </a:r>
-          </a:p>
-          <a:p>
-            <a:pPr lvl="1"/>
-            <a:r>
-              <a:rPr lang="en-US" sz="1600"/>
-              <a:t>Final Reject</a:t>
-            </a:r>
-          </a:p>
-          <a:p>
-            <a:pPr lvl="1"/>
-            <a:r>
-              <a:rPr lang="en-US" sz="1600"/>
-              <a:t>Final Reject Guarantor</a:t>
-            </a:r>
-          </a:p>
-          <a:p>
-            <a:pPr lvl="1"/>
-            <a:r>
-              <a:rPr lang="en-US" sz="1600"/>
-              <a:t>Reject // rejected by LO</a:t>
-            </a:r>
-          </a:p>
-          <a:p>
-            <a:pPr lvl="1"/>
-            <a:r>
-              <a:rPr lang="en-US" sz="1600"/>
+              <a:rPr lang="en-US" sz="1600" b="1">
+                <a:solidFill>
+                  <a:srgbClr val="00B0F0"/>
+                </a:solidFill>
+              </a:rPr>
               <a:t>Reject Guarantor</a:t>
             </a:r>
           </a:p>
@@ -14811,7 +14909,7 @@
           <p:cNvPr id="2" name="Title 1">
             <a:extLst>
               <a:ext uri="{FF2B5EF4-FFF2-40B4-BE49-F238E27FC236}">
-                <a16:creationId xmlns:a16="http://schemas.microsoft.com/office/drawing/2014/main" id="{187DD218-4D33-78EB-31A6-2CF981235BA3}"/>
+                <a16:creationId xmlns:a16="http://schemas.microsoft.com/office/drawing/2014/main" id="{DBDC371A-EF07-CBCD-1233-CFDD455359D4}"/>
               </a:ext>
             </a:extLst>
           </p:cNvPr>
@@ -14825,13 +14923,11 @@
         <p:spPr>
           <a:xfrm>
             <a:off x="913795" y="0"/>
-            <a:ext cx="10353762" cy="639097"/>
-          </a:xfrm>
-        </p:spPr>
-        <p:txBody>
-          <a:bodyPr>
-            <a:normAutofit fontScale="90000"/>
-          </a:bodyPr>
+            <a:ext cx="10353762" cy="970450"/>
+          </a:xfrm>
+        </p:spPr>
+        <p:txBody>
+          <a:bodyPr/>
           <a:lstStyle/>
           <a:p>
             <a:r>
@@ -14840,7 +14936,7 @@
                   <a:srgbClr val="FFFF00"/>
                 </a:solidFill>
               </a:rPr>
-              <a:t>SWF</a:t>
+              <a:t>TDWF</a:t>
             </a:r>
             <a:r>
               <a:rPr lang="en-US"/>
@@ -14852,24 +14948,9 @@
                   <a:srgbClr val="FF0000"/>
                 </a:solidFill>
               </a:rPr>
-              <a:t>Flow_Tabs [</a:t>
-            </a:r>
-            <a:r>
-              <a:rPr lang="ar-EG" b="1">
-                <a:solidFill>
-                  <a:srgbClr val="FF0000"/>
-                </a:solidFill>
-              </a:rPr>
-              <a:t>الشاشات</a:t>
-            </a:r>
-            <a:r>
-              <a:rPr lang="en-US" b="1">
-                <a:solidFill>
-                  <a:srgbClr val="FF0000"/>
-                </a:solidFill>
-              </a:rPr>
-              <a:t>]</a:t>
-            </a:r>
+              <a:t>Flow_Rejections_SubOne [cont.1]</a:t>
+            </a:r>
+            <a:endParaRPr lang="en-US"/>
           </a:p>
         </p:txBody>
       </p:sp>
@@ -14878,7 +14959,7 @@
           <p:cNvPr id="3" name="Content Placeholder 2">
             <a:extLst>
               <a:ext uri="{FF2B5EF4-FFF2-40B4-BE49-F238E27FC236}">
-                <a16:creationId xmlns:a16="http://schemas.microsoft.com/office/drawing/2014/main" id="{D07FEF39-BF4B-C831-5910-CAC918C3E7CD}"/>
+                <a16:creationId xmlns:a16="http://schemas.microsoft.com/office/drawing/2014/main" id="{0B200E3E-059A-C3FB-2BFA-B1B945F5D940}"/>
               </a:ext>
             </a:extLst>
           </p:cNvPr>
@@ -14891,8 +14972,8 @@
         </p:nvSpPr>
         <p:spPr>
           <a:xfrm>
-            <a:off x="294968" y="737419"/>
-            <a:ext cx="11641393" cy="5909187"/>
+            <a:off x="176980" y="970451"/>
+            <a:ext cx="12929419" cy="5705652"/>
           </a:xfrm>
         </p:spPr>
         <p:txBody>
@@ -14900,75 +14981,690 @@
           <a:lstStyle/>
           <a:p>
             <a:r>
-              <a:rPr lang="en-US"/>
-              <a:t>tabs_code </a:t>
-            </a:r>
-            <a:r>
               <a:rPr lang="en-US" b="1">
                 <a:solidFill>
                   <a:srgbClr val="FF0000"/>
                 </a:solidFill>
               </a:rPr>
-              <a:t>[PK] </a:t>
-            </a:r>
-          </a:p>
-          <a:p>
-            <a:r>
-              <a:rPr lang="en-US"/>
-              <a:t>Description: string</a:t>
-            </a:r>
-          </a:p>
-          <a:p>
-            <a:r>
-              <a:rPr lang="en-US"/>
-              <a:t>Screen_name_Eng: string</a:t>
-            </a:r>
-          </a:p>
-          <a:p>
-            <a:r>
-              <a:rPr lang="en-US"/>
-              <a:t>Scr_DefCode: string</a:t>
-            </a:r>
+              <a:t>After request is rejected via CO </a:t>
+            </a:r>
+            <a:r>
+              <a:rPr lang="ar-EG" b="1">
+                <a:solidFill>
+                  <a:srgbClr val="FF0000"/>
+                </a:solidFill>
+              </a:rPr>
+              <a:t>رفض</a:t>
+            </a:r>
+            <a:endParaRPr lang="en-US" b="1">
+              <a:solidFill>
+                <a:srgbClr val="FF0000"/>
+              </a:solidFill>
+            </a:endParaRPr>
+          </a:p>
+          <a:p>
+            <a:pPr lvl="1"/>
+            <a:r>
+              <a:rPr lang="en-US" b="1">
+                <a:solidFill>
+                  <a:schemeClr val="tx1"/>
+                </a:solidFill>
+              </a:rPr>
+              <a:t>The CO rejected at screen [ </a:t>
+            </a:r>
+            <a:r>
+              <a:rPr lang="ar-EG" b="1">
+                <a:solidFill>
+                  <a:schemeClr val="tx1"/>
+                </a:solidFill>
+              </a:rPr>
+              <a:t>: طلب قرض</a:t>
+            </a:r>
+            <a:r>
+              <a:rPr lang="en-US" b="1">
+                <a:solidFill>
+                  <a:schemeClr val="tx1"/>
+                </a:solidFill>
+              </a:rPr>
+              <a:t> </a:t>
+            </a:r>
+            <a:r>
+              <a:rPr lang="ar-EG" b="1">
+                <a:solidFill>
+                  <a:schemeClr val="tx1"/>
+                </a:solidFill>
+              </a:rPr>
+              <a:t>2</a:t>
+            </a:r>
+            <a:r>
+              <a:rPr lang="en-US" b="1">
+                <a:solidFill>
+                  <a:schemeClr val="tx1"/>
+                </a:solidFill>
+              </a:rPr>
+              <a:t>] </a:t>
+            </a:r>
+            <a:r>
+              <a:rPr lang="ar-EG" b="1">
+                <a:solidFill>
+                  <a:schemeClr val="tx1"/>
+                </a:solidFill>
+              </a:rPr>
+              <a:t>صله العميل بالضامن</a:t>
+            </a:r>
+            <a:endParaRPr lang="en-US" b="1">
+              <a:solidFill>
+                <a:schemeClr val="tx1"/>
+              </a:solidFill>
+            </a:endParaRPr>
+          </a:p>
+          <a:p>
+            <a:pPr lvl="1"/>
+            <a:r>
+              <a:rPr lang="en-US" b="1">
+                <a:solidFill>
+                  <a:schemeClr val="tx1"/>
+                </a:solidFill>
+              </a:rPr>
+              <a:t>The CO rejected </a:t>
+            </a:r>
+            <a:r>
+              <a:rPr lang="ar-EG" b="1">
+                <a:solidFill>
+                  <a:schemeClr val="tx1"/>
+                </a:solidFill>
+              </a:rPr>
+              <a:t>الاسم الاول</a:t>
+            </a:r>
+            <a:endParaRPr lang="en-US" b="1">
+              <a:solidFill>
+                <a:schemeClr val="tx1"/>
+              </a:solidFill>
+            </a:endParaRPr>
+          </a:p>
+          <a:p>
+            <a:pPr lvl="1"/>
+            <a:r>
+              <a:rPr lang="en-US" b="1">
+                <a:solidFill>
+                  <a:schemeClr val="tx1"/>
+                </a:solidFill>
+              </a:rPr>
+              <a:t>The CO rejected </a:t>
+            </a:r>
+            <a:r>
+              <a:rPr lang="ar-EG" b="1">
+                <a:solidFill>
+                  <a:schemeClr val="tx1"/>
+                </a:solidFill>
+              </a:rPr>
+              <a:t>اسم الشخص</a:t>
+            </a:r>
+            <a:endParaRPr lang="en-US" b="1">
+              <a:solidFill>
+                <a:schemeClr val="tx1"/>
+              </a:solidFill>
+            </a:endParaRPr>
+          </a:p>
+          <a:p>
+            <a:endParaRPr lang="en-US" b="1">
+              <a:solidFill>
+                <a:srgbClr val="FF0000"/>
+              </a:solidFill>
+            </a:endParaRPr>
           </a:p>
           <a:p>
             <a:endParaRPr lang="en-US"/>
           </a:p>
-        </p:txBody>
-      </p:sp>
-      <p:pic>
-        <p:nvPicPr>
-          <p:cNvPr id="7" name="Picture 6">
+          <a:p>
+            <a:endParaRPr lang="en-US"/>
+          </a:p>
+        </p:txBody>
+      </p:sp>
+      <p:graphicFrame>
+        <p:nvGraphicFramePr>
+          <p:cNvPr id="4" name="Table 3">
             <a:extLst>
               <a:ext uri="{FF2B5EF4-FFF2-40B4-BE49-F238E27FC236}">
-                <a16:creationId xmlns:a16="http://schemas.microsoft.com/office/drawing/2014/main" id="{072252D4-CE45-CBFE-D823-DE8EF0202B3D}"/>
+                <a16:creationId xmlns:a16="http://schemas.microsoft.com/office/drawing/2014/main" id="{87413163-944C-737B-8975-BCC4417383FE}"/>
               </a:ext>
             </a:extLst>
           </p:cNvPr>
-          <p:cNvPicPr>
-            <a:picLocks noChangeAspect="1"/>
-          </p:cNvPicPr>
-          <p:nvPr/>
-        </p:nvPicPr>
-        <p:blipFill>
-          <a:blip r:embed="rId2"/>
-          <a:stretch>
-            <a:fillRect/>
-          </a:stretch>
-        </p:blipFill>
-        <p:spPr>
-          <a:xfrm>
-            <a:off x="7377126" y="560439"/>
-            <a:ext cx="4028294" cy="4198904"/>
-          </a:xfrm>
-          <a:prstGeom prst="rect">
-            <a:avLst/>
-          </a:prstGeom>
-        </p:spPr>
-      </p:pic>
+          <p:cNvGraphicFramePr>
+            <a:graphicFrameLocks noGrp="1"/>
+          </p:cNvGraphicFramePr>
+          <p:nvPr>
+            <p:extLst>
+              <p:ext uri="{D42A27DB-BD31-4B8C-83A1-F6EECF244321}">
+                <p14:modId xmlns:p14="http://schemas.microsoft.com/office/powerpoint/2010/main" val="863933099"/>
+              </p:ext>
+            </p:extLst>
+          </p:nvPr>
+        </p:nvGraphicFramePr>
+        <p:xfrm>
+          <a:off x="442452" y="2931924"/>
+          <a:ext cx="11425085" cy="1483360"/>
+        </p:xfrm>
+        <a:graphic>
+          <a:graphicData uri="http://schemas.openxmlformats.org/drawingml/2006/table">
+            <a:tbl>
+              <a:tblPr firstRow="1" bandRow="1">
+                <a:tableStyleId>{5C22544A-7EE6-4342-B048-85BDC9FD1C3A}</a:tableStyleId>
+              </a:tblPr>
+              <a:tblGrid>
+                <a:gridCol w="1573161">
+                  <a:extLst>
+                    <a:ext uri="{9D8B030D-6E8A-4147-A177-3AD203B41FA5}">
+                      <a16:colId xmlns:a16="http://schemas.microsoft.com/office/drawing/2014/main" val="1232553221"/>
+                    </a:ext>
+                  </a:extLst>
+                </a:gridCol>
+                <a:gridCol w="1897626">
+                  <a:extLst>
+                    <a:ext uri="{9D8B030D-6E8A-4147-A177-3AD203B41FA5}">
+                      <a16:colId xmlns:a16="http://schemas.microsoft.com/office/drawing/2014/main" val="753264519"/>
+                    </a:ext>
+                  </a:extLst>
+                </a:gridCol>
+                <a:gridCol w="1425678">
+                  <a:extLst>
+                    <a:ext uri="{9D8B030D-6E8A-4147-A177-3AD203B41FA5}">
+                      <a16:colId xmlns:a16="http://schemas.microsoft.com/office/drawing/2014/main" val="1508910083"/>
+                    </a:ext>
+                  </a:extLst>
+                </a:gridCol>
+                <a:gridCol w="1291078">
+                  <a:extLst>
+                    <a:ext uri="{9D8B030D-6E8A-4147-A177-3AD203B41FA5}">
+                      <a16:colId xmlns:a16="http://schemas.microsoft.com/office/drawing/2014/main" val="1295832117"/>
+                    </a:ext>
+                  </a:extLst>
+                </a:gridCol>
+                <a:gridCol w="1973232">
+                  <a:extLst>
+                    <a:ext uri="{9D8B030D-6E8A-4147-A177-3AD203B41FA5}">
+                      <a16:colId xmlns:a16="http://schemas.microsoft.com/office/drawing/2014/main" val="3577669660"/>
+                    </a:ext>
+                  </a:extLst>
+                </a:gridCol>
+                <a:gridCol w="1632155">
+                  <a:extLst>
+                    <a:ext uri="{9D8B030D-6E8A-4147-A177-3AD203B41FA5}">
+                      <a16:colId xmlns:a16="http://schemas.microsoft.com/office/drawing/2014/main" val="3223476129"/>
+                    </a:ext>
+                  </a:extLst>
+                </a:gridCol>
+                <a:gridCol w="1632155">
+                  <a:extLst>
+                    <a:ext uri="{9D8B030D-6E8A-4147-A177-3AD203B41FA5}">
+                      <a16:colId xmlns:a16="http://schemas.microsoft.com/office/drawing/2014/main" val="488725321"/>
+                    </a:ext>
+                  </a:extLst>
+                </a:gridCol>
+              </a:tblGrid>
+              <a:tr h="370840">
+                <a:tc>
+                  <a:txBody>
+                    <a:bodyPr/>
+                    <a:lstStyle/>
+                    <a:p>
+                      <a:pPr algn="ctr"/>
+                      <a:r>
+                        <a:rPr lang="en-US" b="1"/>
+                        <a:t>Tabs code</a:t>
+                      </a:r>
+                    </a:p>
+                  </a:txBody>
+                  <a:tcPr/>
+                </a:tc>
+                <a:tc>
+                  <a:txBody>
+                    <a:bodyPr/>
+                    <a:lstStyle/>
+                    <a:p>
+                      <a:pPr algn="ctr"/>
+                      <a:r>
+                        <a:rPr lang="en-US" b="1"/>
+                        <a:t>Field_name</a:t>
+                      </a:r>
+                    </a:p>
+                  </a:txBody>
+                  <a:tcPr/>
+                </a:tc>
+                <a:tc>
+                  <a:txBody>
+                    <a:bodyPr/>
+                    <a:lstStyle/>
+                    <a:p>
+                      <a:pPr algn="ctr"/>
+                      <a:r>
+                        <a:rPr lang="en-US" b="1"/>
+                        <a:t>Field_code</a:t>
+                      </a:r>
+                    </a:p>
+                  </a:txBody>
+                  <a:tcPr/>
+                </a:tc>
+                <a:tc>
+                  <a:txBody>
+                    <a:bodyPr/>
+                    <a:lstStyle/>
+                    <a:p>
+                      <a:pPr algn="ctr"/>
+                      <a:r>
+                        <a:rPr lang="en-US" b="1"/>
+                        <a:t>UserId</a:t>
+                      </a:r>
+                    </a:p>
+                  </a:txBody>
+                  <a:tcPr/>
+                </a:tc>
+                <a:tc>
+                  <a:txBody>
+                    <a:bodyPr/>
+                    <a:lstStyle/>
+                    <a:p>
+                      <a:pPr algn="ctr"/>
+                      <a:r>
+                        <a:rPr lang="en-US" b="1"/>
+                        <a:t>Phase_back_to</a:t>
+                      </a:r>
+                    </a:p>
+                  </a:txBody>
+                  <a:tcPr/>
+                </a:tc>
+                <a:tc>
+                  <a:txBody>
+                    <a:bodyPr/>
+                    <a:lstStyle/>
+                    <a:p>
+                      <a:pPr algn="ctr"/>
+                      <a:r>
+                        <a:rPr lang="en-US" b="1"/>
+                        <a:t>Comment</a:t>
+                      </a:r>
+                    </a:p>
+                  </a:txBody>
+                  <a:tcPr/>
+                </a:tc>
+                <a:tc>
+                  <a:txBody>
+                    <a:bodyPr/>
+                    <a:lstStyle/>
+                    <a:p>
+                      <a:pPr algn="ctr"/>
+                      <a:r>
+                        <a:rPr lang="en-US" b="1"/>
+                        <a:t>FRM_ID</a:t>
+                      </a:r>
+                    </a:p>
+                  </a:txBody>
+                  <a:tcPr/>
+                </a:tc>
+                <a:extLst>
+                  <a:ext uri="{0D108BD9-81ED-4DB2-BD59-A6C34878D82A}">
+                    <a16:rowId xmlns:a16="http://schemas.microsoft.com/office/drawing/2014/main" val="2212852566"/>
+                  </a:ext>
+                </a:extLst>
+              </a:tr>
+              <a:tr h="370840">
+                <a:tc>
+                  <a:txBody>
+                    <a:bodyPr/>
+                    <a:lstStyle/>
+                    <a:p>
+                      <a:pPr algn="ctr"/>
+                      <a:r>
+                        <a:rPr lang="en-US" b="1"/>
+                        <a:t>2 [flow_tab]</a:t>
+                      </a:r>
+                    </a:p>
+                  </a:txBody>
+                  <a:tcPr/>
+                </a:tc>
+                <a:tc>
+                  <a:txBody>
+                    <a:bodyPr/>
+                    <a:lstStyle/>
+                    <a:p>
+                      <a:pPr algn="ctr"/>
+                      <a:r>
+                        <a:rPr lang="ar-EG" b="1"/>
+                        <a:t>صله العميل بالضامن</a:t>
+                      </a:r>
+                      <a:endParaRPr lang="en-US" b="1"/>
+                    </a:p>
+                  </a:txBody>
+                  <a:tcPr/>
+                </a:tc>
+                <a:tc>
+                  <a:txBody>
+                    <a:bodyPr/>
+                    <a:lstStyle/>
+                    <a:p>
+                      <a:pPr algn="ctr"/>
+                      <a:r>
+                        <a:rPr lang="en-US" b="1"/>
+                        <a:t>1</a:t>
+                      </a:r>
+                    </a:p>
+                  </a:txBody>
+                  <a:tcPr/>
+                </a:tc>
+                <a:tc>
+                  <a:txBody>
+                    <a:bodyPr/>
+                    <a:lstStyle/>
+                    <a:p>
+                      <a:pPr algn="ctr"/>
+                      <a:r>
+                        <a:rPr lang="en-US" b="1"/>
+                        <a:t>1132 [LO]</a:t>
+                      </a:r>
+                    </a:p>
+                  </a:txBody>
+                  <a:tcPr/>
+                </a:tc>
+                <a:tc>
+                  <a:txBody>
+                    <a:bodyPr/>
+                    <a:lstStyle/>
+                    <a:p>
+                      <a:pPr algn="ctr"/>
+                      <a:r>
+                        <a:rPr lang="en-US" b="1"/>
+                        <a:t>R111</a:t>
+                      </a:r>
+                    </a:p>
+                  </a:txBody>
+                  <a:tcPr/>
+                </a:tc>
+                <a:tc>
+                  <a:txBody>
+                    <a:bodyPr/>
+                    <a:lstStyle/>
+                    <a:p>
+                      <a:pPr algn="ctr"/>
+                      <a:r>
+                        <a:rPr lang="en-US" b="1"/>
+                        <a:t>test</a:t>
+                      </a:r>
+                    </a:p>
+                  </a:txBody>
+                  <a:tcPr/>
+                </a:tc>
+                <a:tc>
+                  <a:txBody>
+                    <a:bodyPr/>
+                    <a:lstStyle/>
+                    <a:p>
+                      <a:pPr algn="ctr"/>
+                      <a:r>
+                        <a:rPr lang="en-US" b="1"/>
+                        <a:t>93453</a:t>
+                      </a:r>
+                    </a:p>
+                  </a:txBody>
+                  <a:tcPr/>
+                </a:tc>
+                <a:extLst>
+                  <a:ext uri="{0D108BD9-81ED-4DB2-BD59-A6C34878D82A}">
+                    <a16:rowId xmlns:a16="http://schemas.microsoft.com/office/drawing/2014/main" val="2950472985"/>
+                  </a:ext>
+                </a:extLst>
+              </a:tr>
+              <a:tr h="370840">
+                <a:tc>
+                  <a:txBody>
+                    <a:bodyPr/>
+                    <a:lstStyle/>
+                    <a:p>
+                      <a:pPr algn="ctr"/>
+                      <a:r>
+                        <a:rPr lang="en-US" b="1"/>
+                        <a:t>3</a:t>
+                      </a:r>
+                    </a:p>
+                  </a:txBody>
+                  <a:tcPr/>
+                </a:tc>
+                <a:tc>
+                  <a:txBody>
+                    <a:bodyPr/>
+                    <a:lstStyle/>
+                    <a:p>
+                      <a:pPr algn="ctr"/>
+                      <a:r>
+                        <a:rPr lang="ar-EG" b="1"/>
+                        <a:t>الاسم الاول</a:t>
+                      </a:r>
+                      <a:endParaRPr lang="en-US" b="1"/>
+                    </a:p>
+                  </a:txBody>
+                  <a:tcPr/>
+                </a:tc>
+                <a:tc>
+                  <a:txBody>
+                    <a:bodyPr/>
+                    <a:lstStyle/>
+                    <a:p>
+                      <a:pPr algn="ctr"/>
+                      <a:r>
+                        <a:rPr lang="en-US" b="1"/>
+                        <a:t>2</a:t>
+                      </a:r>
+                    </a:p>
+                  </a:txBody>
+                  <a:tcPr/>
+                </a:tc>
+                <a:tc>
+                  <a:txBody>
+                    <a:bodyPr/>
+                    <a:lstStyle/>
+                    <a:p>
+                      <a:pPr marL="0" marR="0" lvl="0" indent="0" algn="ctr" defTabSz="457200" rtl="0" eaLnBrk="1" fontAlgn="auto" latinLnBrk="0" hangingPunct="1">
+                        <a:lnSpc>
+                          <a:spcPct val="100000"/>
+                        </a:lnSpc>
+                        <a:spcBef>
+                          <a:spcPts val="0"/>
+                        </a:spcBef>
+                        <a:spcAft>
+                          <a:spcPts val="0"/>
+                        </a:spcAft>
+                        <a:buClrTx/>
+                        <a:buSzTx/>
+                        <a:buFontTx/>
+                        <a:buNone/>
+                        <a:tabLst/>
+                        <a:defRPr/>
+                      </a:pPr>
+                      <a:r>
+                        <a:rPr lang="en-US" b="1"/>
+                        <a:t>1132 [LO]</a:t>
+                      </a:r>
+                    </a:p>
+                  </a:txBody>
+                  <a:tcPr/>
+                </a:tc>
+                <a:tc>
+                  <a:txBody>
+                    <a:bodyPr/>
+                    <a:lstStyle/>
+                    <a:p>
+                      <a:pPr algn="ctr"/>
+                      <a:r>
+                        <a:rPr lang="en-US" b="1"/>
+                        <a:t>R111</a:t>
+                      </a:r>
+                    </a:p>
+                  </a:txBody>
+                  <a:tcPr/>
+                </a:tc>
+                <a:tc>
+                  <a:txBody>
+                    <a:bodyPr/>
+                    <a:lstStyle/>
+                    <a:p>
+                      <a:pPr algn="ctr"/>
+                      <a:r>
+                        <a:rPr lang="en-US" b="1"/>
+                        <a:t>test</a:t>
+                      </a:r>
+                    </a:p>
+                  </a:txBody>
+                  <a:tcPr/>
+                </a:tc>
+                <a:tc>
+                  <a:txBody>
+                    <a:bodyPr/>
+                    <a:lstStyle/>
+                    <a:p>
+                      <a:pPr algn="ctr"/>
+                      <a:r>
+                        <a:rPr lang="en-US" b="1"/>
+                        <a:t>93453</a:t>
+                      </a:r>
+                    </a:p>
+                  </a:txBody>
+                  <a:tcPr/>
+                </a:tc>
+                <a:extLst>
+                  <a:ext uri="{0D108BD9-81ED-4DB2-BD59-A6C34878D82A}">
+                    <a16:rowId xmlns:a16="http://schemas.microsoft.com/office/drawing/2014/main" val="1881440603"/>
+                  </a:ext>
+                </a:extLst>
+              </a:tr>
+              <a:tr h="370840">
+                <a:tc>
+                  <a:txBody>
+                    <a:bodyPr/>
+                    <a:lstStyle/>
+                    <a:p>
+                      <a:pPr algn="ctr"/>
+                      <a:r>
+                        <a:rPr lang="en-US" b="1"/>
+                        <a:t>1</a:t>
+                      </a:r>
+                    </a:p>
+                  </a:txBody>
+                  <a:tcPr/>
+                </a:tc>
+                <a:tc>
+                  <a:txBody>
+                    <a:bodyPr/>
+                    <a:lstStyle/>
+                    <a:p>
+                      <a:pPr algn="ctr"/>
+                      <a:r>
+                        <a:rPr lang="ar-EG" b="1"/>
+                        <a:t>اسم الشخص</a:t>
+                      </a:r>
+                      <a:endParaRPr lang="en-US" b="1"/>
+                    </a:p>
+                  </a:txBody>
+                  <a:tcPr/>
+                </a:tc>
+                <a:tc>
+                  <a:txBody>
+                    <a:bodyPr/>
+                    <a:lstStyle/>
+                    <a:p>
+                      <a:pPr algn="ctr"/>
+                      <a:r>
+                        <a:rPr lang="en-US" b="1"/>
+                        <a:t>11</a:t>
+                      </a:r>
+                    </a:p>
+                  </a:txBody>
+                  <a:tcPr/>
+                </a:tc>
+                <a:tc>
+                  <a:txBody>
+                    <a:bodyPr/>
+                    <a:lstStyle/>
+                    <a:p>
+                      <a:pPr marL="0" marR="0" lvl="0" indent="0" algn="ctr" defTabSz="457200" rtl="0" eaLnBrk="1" fontAlgn="auto" latinLnBrk="0" hangingPunct="1">
+                        <a:lnSpc>
+                          <a:spcPct val="100000"/>
+                        </a:lnSpc>
+                        <a:spcBef>
+                          <a:spcPts val="0"/>
+                        </a:spcBef>
+                        <a:spcAft>
+                          <a:spcPts val="0"/>
+                        </a:spcAft>
+                        <a:buClrTx/>
+                        <a:buSzTx/>
+                        <a:buFontTx/>
+                        <a:buNone/>
+                        <a:tabLst/>
+                        <a:defRPr/>
+                      </a:pPr>
+                      <a:r>
+                        <a:rPr lang="en-US" b="1"/>
+                        <a:t>1132 [LO]</a:t>
+                      </a:r>
+                    </a:p>
+                  </a:txBody>
+                  <a:tcPr/>
+                </a:tc>
+                <a:tc>
+                  <a:txBody>
+                    <a:bodyPr/>
+                    <a:lstStyle/>
+                    <a:p>
+                      <a:pPr algn="ctr"/>
+                      <a:r>
+                        <a:rPr lang="en-US" b="1"/>
+                        <a:t>R111</a:t>
+                      </a:r>
+                    </a:p>
+                  </a:txBody>
+                  <a:tcPr/>
+                </a:tc>
+                <a:tc>
+                  <a:txBody>
+                    <a:bodyPr/>
+                    <a:lstStyle/>
+                    <a:p>
+                      <a:pPr algn="ctr"/>
+                      <a:r>
+                        <a:rPr lang="en-US" b="1"/>
+                        <a:t>test</a:t>
+                      </a:r>
+                    </a:p>
+                  </a:txBody>
+                  <a:tcPr/>
+                </a:tc>
+                <a:tc>
+                  <a:txBody>
+                    <a:bodyPr/>
+                    <a:lstStyle/>
+                    <a:p>
+                      <a:pPr algn="ctr"/>
+                      <a:r>
+                        <a:rPr lang="en-US" b="1"/>
+                        <a:t>93453</a:t>
+                      </a:r>
+                    </a:p>
+                  </a:txBody>
+                  <a:tcPr/>
+                </a:tc>
+                <a:extLst>
+                  <a:ext uri="{0D108BD9-81ED-4DB2-BD59-A6C34878D82A}">
+                    <a16:rowId xmlns:a16="http://schemas.microsoft.com/office/drawing/2014/main" val="1836126872"/>
+                  </a:ext>
+                </a:extLst>
+              </a:tr>
+            </a:tbl>
+          </a:graphicData>
+        </a:graphic>
+      </p:graphicFrame>
     </p:spTree>
     <p:extLst>
       <p:ext uri="{BB962C8B-B14F-4D97-AF65-F5344CB8AC3E}">
-        <p14:creationId xmlns:p14="http://schemas.microsoft.com/office/powerpoint/2010/main" val="1593523026"/>
+        <p14:creationId xmlns:p14="http://schemas.microsoft.com/office/powerpoint/2010/main" val="195875864"/>
       </p:ext>
     </p:extLst>
   </p:cSld>
@@ -15000,7 +15696,7 @@
           <p:cNvPr id="2" name="Title 1">
             <a:extLst>
               <a:ext uri="{FF2B5EF4-FFF2-40B4-BE49-F238E27FC236}">
-                <a16:creationId xmlns:a16="http://schemas.microsoft.com/office/drawing/2014/main" id="{590B867D-BC17-ABD8-54A2-CC85071ABF21}"/>
+                <a16:creationId xmlns:a16="http://schemas.microsoft.com/office/drawing/2014/main" id="{187DD218-4D33-78EB-31A6-2CF981235BA3}"/>
               </a:ext>
             </a:extLst>
           </p:cNvPr>
@@ -15013,8 +15709,8 @@
         </p:nvSpPr>
         <p:spPr>
           <a:xfrm>
-            <a:off x="919119" y="0"/>
-            <a:ext cx="10353762" cy="648929"/>
+            <a:off x="913795" y="0"/>
+            <a:ext cx="10353762" cy="639097"/>
           </a:xfrm>
         </p:spPr>
         <p:txBody>
@@ -15041,7 +15737,23 @@
                   <a:srgbClr val="FF0000"/>
                 </a:solidFill>
               </a:rPr>
-              <a:t>Flow_Screen_components</a:t>
+              <a:t>Flow_Tabs [</a:t>
+            </a:r>
+            <a:r>
+              <a:rPr lang="ar-EG" b="1">
+                <a:solidFill>
+                  <a:srgbClr val="FF0000"/>
+                </a:solidFill>
+              </a:rPr>
+              <a:t>الشاشات</a:t>
+            </a:r>
+            <a:r>
+              <a:rPr lang="en-US" b="1">
+                <a:solidFill>
+                  <a:srgbClr val="FF0000"/>
+                </a:solidFill>
+              </a:rPr>
+              <a:t>]</a:t>
             </a:r>
           </a:p>
         </p:txBody>
@@ -15051,7 +15763,7 @@
           <p:cNvPr id="3" name="Content Placeholder 2">
             <a:extLst>
               <a:ext uri="{FF2B5EF4-FFF2-40B4-BE49-F238E27FC236}">
-                <a16:creationId xmlns:a16="http://schemas.microsoft.com/office/drawing/2014/main" id="{EACFA8A6-1689-F4A2-3D60-756B96143BBA}"/>
+                <a16:creationId xmlns:a16="http://schemas.microsoft.com/office/drawing/2014/main" id="{D07FEF39-BF4B-C831-5910-CAC918C3E7CD}"/>
               </a:ext>
             </a:extLst>
           </p:cNvPr>
@@ -15064,8 +15776,8 @@
         </p:nvSpPr>
         <p:spPr>
           <a:xfrm>
-            <a:off x="226142" y="648929"/>
-            <a:ext cx="11749548" cy="6096000"/>
+            <a:off x="245806" y="737418"/>
+            <a:ext cx="11690556" cy="5978013"/>
           </a:xfrm>
         </p:spPr>
         <p:txBody>
@@ -15074,49 +15786,37 @@
           <a:p>
             <a:r>
               <a:rPr lang="en-US"/>
-              <a:t>screen_code: int [PK], identity</a:t>
-            </a:r>
-          </a:p>
-          <a:p>
-            <a:r>
-              <a:rPr lang="en-US"/>
-              <a:t>tabs_code: int , </a:t>
+              <a:t>tabs_code </a:t>
             </a:r>
             <a:r>
               <a:rPr lang="en-US" b="1">
                 <a:solidFill>
-                  <a:srgbClr val="FFFF00"/>
-                </a:solidFill>
-              </a:rPr>
-              <a:t>[FK] from </a:t>
-            </a:r>
-            <a:r>
-              <a:rPr lang="en-US"/>
-              <a:t>Flow_Tabs</a:t>
-            </a:r>
-            <a:endParaRPr lang="en-US" b="1">
-              <a:solidFill>
-                <a:srgbClr val="FFFF00"/>
-              </a:solidFill>
-            </a:endParaRPr>
-          </a:p>
-          <a:p>
-            <a:r>
-              <a:rPr lang="en-US"/>
-              <a:t>fieldName: string </a:t>
-            </a:r>
-          </a:p>
-          <a:p>
-            <a:r>
-              <a:rPr lang="en-US"/>
-              <a:t>field_code: int</a:t>
-            </a:r>
-          </a:p>
-          <a:p>
-            <a:endParaRPr lang="en-US"/>
-          </a:p>
-          <a:p>
-            <a:endParaRPr lang="en-US"/>
+                  <a:srgbClr val="FF0000"/>
+                </a:solidFill>
+              </a:rPr>
+              <a:t>[PK] </a:t>
+            </a:r>
+          </a:p>
+          <a:p>
+            <a:r>
+              <a:rPr lang="en-US"/>
+              <a:t>Description: string</a:t>
+            </a:r>
+          </a:p>
+          <a:p>
+            <a:r>
+              <a:rPr lang="en-US"/>
+              <a:t>Screen_name_Eng: string</a:t>
+            </a:r>
+          </a:p>
+          <a:p>
+            <a:r>
+              <a:rPr lang="en-US"/>
+              <a:t>Scr_DefCode: string</a:t>
+            </a:r>
+          </a:p>
+          <a:p>
+            <a:endParaRPr lang="ar-EG"/>
           </a:p>
           <a:p>
             <a:endParaRPr lang="en-US"/>
@@ -15125,10 +15825,10 @@
       </p:sp>
       <p:pic>
         <p:nvPicPr>
-          <p:cNvPr id="5" name="Picture 4">
+          <p:cNvPr id="7" name="Picture 6">
             <a:extLst>
               <a:ext uri="{FF2B5EF4-FFF2-40B4-BE49-F238E27FC236}">
-                <a16:creationId xmlns:a16="http://schemas.microsoft.com/office/drawing/2014/main" id="{A9FD775A-C4BE-B9E8-F57F-3CAC5592794F}"/>
+                <a16:creationId xmlns:a16="http://schemas.microsoft.com/office/drawing/2014/main" id="{072252D4-CE45-CBFE-D823-DE8EF0202B3D}"/>
               </a:ext>
             </a:extLst>
           </p:cNvPr>
@@ -15145,53 +15845,18 @@
         </p:blipFill>
         <p:spPr>
           <a:xfrm>
-            <a:off x="6220836" y="648929"/>
-            <a:ext cx="4555318" cy="2595716"/>
+            <a:off x="7377126" y="560439"/>
+            <a:ext cx="4028294" cy="4198904"/>
           </a:xfrm>
           <a:prstGeom prst="rect">
             <a:avLst/>
           </a:prstGeom>
         </p:spPr>
       </p:pic>
-      <p:sp>
-        <p:nvSpPr>
-          <p:cNvPr id="6" name="TextBox 5">
-            <a:extLst>
-              <a:ext uri="{FF2B5EF4-FFF2-40B4-BE49-F238E27FC236}">
-                <a16:creationId xmlns:a16="http://schemas.microsoft.com/office/drawing/2014/main" id="{029C1112-E0B3-9E9D-ECBF-277EB116EC39}"/>
-              </a:ext>
-            </a:extLst>
-          </p:cNvPr>
-          <p:cNvSpPr txBox="1"/>
-          <p:nvPr/>
-        </p:nvSpPr>
-        <p:spPr>
-          <a:xfrm>
-            <a:off x="7325032" y="3429000"/>
-            <a:ext cx="3805084" cy="369332"/>
-          </a:xfrm>
-          <a:prstGeom prst="rect">
-            <a:avLst/>
-          </a:prstGeom>
-          <a:noFill/>
-        </p:spPr>
-        <p:txBody>
-          <a:bodyPr wrap="square" rtlCol="0">
-            <a:spAutoFit/>
-          </a:bodyPr>
-          <a:lstStyle/>
-          <a:p>
-            <a:r>
-              <a:rPr lang="en-US"/>
-              <a:t>Description here is from join </a:t>
-            </a:r>
-          </a:p>
-        </p:txBody>
-      </p:sp>
     </p:spTree>
     <p:extLst>
       <p:ext uri="{BB962C8B-B14F-4D97-AF65-F5344CB8AC3E}">
-        <p14:creationId xmlns:p14="http://schemas.microsoft.com/office/powerpoint/2010/main" val="604022268"/>
+        <p14:creationId xmlns:p14="http://schemas.microsoft.com/office/powerpoint/2010/main" val="1593523026"/>
       </p:ext>
     </p:extLst>
   </p:cSld>
@@ -15223,7 +15888,7 @@
           <p:cNvPr id="2" name="Title 1">
             <a:extLst>
               <a:ext uri="{FF2B5EF4-FFF2-40B4-BE49-F238E27FC236}">
-                <a16:creationId xmlns:a16="http://schemas.microsoft.com/office/drawing/2014/main" id="{66BD3B53-B836-0405-734D-4B281D1E77AC}"/>
+                <a16:creationId xmlns:a16="http://schemas.microsoft.com/office/drawing/2014/main" id="{590B867D-BC17-ABD8-54A2-CC85071ABF21}"/>
               </a:ext>
             </a:extLst>
           </p:cNvPr>
@@ -15237,12 +15902,12 @@
         <p:spPr>
           <a:xfrm>
             <a:off x="919119" y="0"/>
-            <a:ext cx="10353762" cy="752061"/>
+            <a:ext cx="10353762" cy="648929"/>
           </a:xfrm>
         </p:spPr>
         <p:txBody>
           <a:bodyPr>
-            <a:normAutofit/>
+            <a:normAutofit fontScale="90000"/>
           </a:bodyPr>
           <a:lstStyle/>
           <a:p>
@@ -15264,7 +15929,7 @@
                   <a:srgbClr val="FF0000"/>
                 </a:solidFill>
               </a:rPr>
-              <a:t>Flow_Actions</a:t>
+              <a:t>Flow_Screen_components</a:t>
             </a:r>
           </a:p>
         </p:txBody>
@@ -15274,7 +15939,7 @@
           <p:cNvPr id="3" name="Content Placeholder 2">
             <a:extLst>
               <a:ext uri="{FF2B5EF4-FFF2-40B4-BE49-F238E27FC236}">
-                <a16:creationId xmlns:a16="http://schemas.microsoft.com/office/drawing/2014/main" id="{835AAC1E-80E6-763F-4B4B-60C2C3B28629}"/>
+                <a16:creationId xmlns:a16="http://schemas.microsoft.com/office/drawing/2014/main" id="{EACFA8A6-1689-F4A2-3D60-756B96143BBA}"/>
               </a:ext>
             </a:extLst>
           </p:cNvPr>
@@ -15287,8 +15952,8 @@
         </p:nvSpPr>
         <p:spPr>
           <a:xfrm>
-            <a:off x="238538" y="752061"/>
-            <a:ext cx="11767931" cy="6036365"/>
+            <a:off x="226142" y="648929"/>
+            <a:ext cx="11749548" cy="6096000"/>
           </a:xfrm>
         </p:spPr>
         <p:txBody>
@@ -15297,8 +15962,49 @@
           <a:p>
             <a:r>
               <a:rPr lang="en-US"/>
-              <a:t>Code_FA: int [PK, identity]</a:t>
-            </a:r>
+              <a:t>screen_code: int [PK], identity</a:t>
+            </a:r>
+          </a:p>
+          <a:p>
+            <a:r>
+              <a:rPr lang="en-US"/>
+              <a:t>tabs_code: int , </a:t>
+            </a:r>
+            <a:r>
+              <a:rPr lang="en-US" b="1">
+                <a:solidFill>
+                  <a:srgbClr val="FFFF00"/>
+                </a:solidFill>
+              </a:rPr>
+              <a:t>[FK] from </a:t>
+            </a:r>
+            <a:r>
+              <a:rPr lang="en-US"/>
+              <a:t>Flow_Tabs</a:t>
+            </a:r>
+            <a:endParaRPr lang="en-US" b="1">
+              <a:solidFill>
+                <a:srgbClr val="FFFF00"/>
+              </a:solidFill>
+            </a:endParaRPr>
+          </a:p>
+          <a:p>
+            <a:r>
+              <a:rPr lang="en-US"/>
+              <a:t>fieldName: string </a:t>
+            </a:r>
+          </a:p>
+          <a:p>
+            <a:r>
+              <a:rPr lang="en-US"/>
+              <a:t>field_code: int</a:t>
+            </a:r>
+          </a:p>
+          <a:p>
+            <a:endParaRPr lang="en-US"/>
+          </a:p>
+          <a:p>
+            <a:endParaRPr lang="en-US"/>
           </a:p>
           <a:p>
             <a:endParaRPr lang="en-US"/>
@@ -15310,7 +16016,7 @@
           <p:cNvPr id="5" name="Picture 4">
             <a:extLst>
               <a:ext uri="{FF2B5EF4-FFF2-40B4-BE49-F238E27FC236}">
-                <a16:creationId xmlns:a16="http://schemas.microsoft.com/office/drawing/2014/main" id="{F154AA93-DA80-428E-5ADA-801AE10A397F}"/>
+                <a16:creationId xmlns:a16="http://schemas.microsoft.com/office/drawing/2014/main" id="{A9FD775A-C4BE-B9E8-F57F-3CAC5592794F}"/>
               </a:ext>
             </a:extLst>
           </p:cNvPr>
@@ -15327,18 +16033,53 @@
         </p:blipFill>
         <p:spPr>
           <a:xfrm>
-            <a:off x="397565" y="1598588"/>
-            <a:ext cx="10614992" cy="3642006"/>
+            <a:off x="6220836" y="648929"/>
+            <a:ext cx="4555318" cy="2595716"/>
           </a:xfrm>
           <a:prstGeom prst="rect">
             <a:avLst/>
           </a:prstGeom>
         </p:spPr>
       </p:pic>
+      <p:sp>
+        <p:nvSpPr>
+          <p:cNvPr id="6" name="TextBox 5">
+            <a:extLst>
+              <a:ext uri="{FF2B5EF4-FFF2-40B4-BE49-F238E27FC236}">
+                <a16:creationId xmlns:a16="http://schemas.microsoft.com/office/drawing/2014/main" id="{029C1112-E0B3-9E9D-ECBF-277EB116EC39}"/>
+              </a:ext>
+            </a:extLst>
+          </p:cNvPr>
+          <p:cNvSpPr txBox="1"/>
+          <p:nvPr/>
+        </p:nvSpPr>
+        <p:spPr>
+          <a:xfrm>
+            <a:off x="7325032" y="3429000"/>
+            <a:ext cx="3805084" cy="369332"/>
+          </a:xfrm>
+          <a:prstGeom prst="rect">
+            <a:avLst/>
+          </a:prstGeom>
+          <a:noFill/>
+        </p:spPr>
+        <p:txBody>
+          <a:bodyPr wrap="square" rtlCol="0">
+            <a:spAutoFit/>
+          </a:bodyPr>
+          <a:lstStyle/>
+          <a:p>
+            <a:r>
+              <a:rPr lang="en-US"/>
+              <a:t>Description here is from join </a:t>
+            </a:r>
+          </a:p>
+        </p:txBody>
+      </p:sp>
     </p:spTree>
     <p:extLst>
       <p:ext uri="{BB962C8B-B14F-4D97-AF65-F5344CB8AC3E}">
-        <p14:creationId xmlns:p14="http://schemas.microsoft.com/office/powerpoint/2010/main" val="2146910038"/>
+        <p14:creationId xmlns:p14="http://schemas.microsoft.com/office/powerpoint/2010/main" val="604022268"/>
       </p:ext>
     </p:extLst>
   </p:cSld>
@@ -15370,7 +16111,7 @@
           <p:cNvPr id="2" name="Title 1">
             <a:extLst>
               <a:ext uri="{FF2B5EF4-FFF2-40B4-BE49-F238E27FC236}">
-                <a16:creationId xmlns:a16="http://schemas.microsoft.com/office/drawing/2014/main" id="{F5E3A7F0-BDD0-62DB-01D9-1F536CC89E65}"/>
+                <a16:creationId xmlns:a16="http://schemas.microsoft.com/office/drawing/2014/main" id="{66BD3B53-B836-0405-734D-4B281D1E77AC}"/>
               </a:ext>
             </a:extLst>
           </p:cNvPr>
@@ -15383,18 +16124,18 @@
         </p:nvSpPr>
         <p:spPr>
           <a:xfrm>
-            <a:off x="913795" y="0"/>
-            <a:ext cx="10353762" cy="629265"/>
+            <a:off x="0" y="0"/>
+            <a:ext cx="12192000" cy="752061"/>
           </a:xfrm>
         </p:spPr>
         <p:txBody>
           <a:bodyPr>
-            <a:normAutofit fontScale="90000"/>
+            <a:normAutofit/>
           </a:bodyPr>
           <a:lstStyle/>
           <a:p>
             <a:r>
-              <a:rPr lang="en-US">
+              <a:rPr lang="en-US" sz="3600" b="1">
                 <a:solidFill>
                   <a:srgbClr val="FFFF00"/>
                 </a:solidFill>
@@ -15402,16 +16143,52 @@
               <a:t>SWF</a:t>
             </a:r>
             <a:r>
-              <a:rPr lang="en-US"/>
+              <a:rPr lang="en-US" sz="3600"/>
               <a:t>.</a:t>
             </a:r>
             <a:r>
-              <a:rPr lang="en-US" b="1">
+              <a:rPr lang="en-US" sz="3600" b="1">
                 <a:solidFill>
                   <a:srgbClr val="FF0000"/>
                 </a:solidFill>
               </a:rPr>
-              <a:t>Flow_Types</a:t>
+              <a:t>Flow_Actions </a:t>
+            </a:r>
+            <a:r>
+              <a:rPr lang="en-US" sz="3600" b="1">
+                <a:solidFill>
+                  <a:schemeClr val="tx1"/>
+                </a:solidFill>
+              </a:rPr>
+              <a:t>,</a:t>
+            </a:r>
+            <a:r>
+              <a:rPr lang="en-US" sz="3600" b="1">
+                <a:solidFill>
+                  <a:srgbClr val="FF0000"/>
+                </a:solidFill>
+              </a:rPr>
+              <a:t> </a:t>
+            </a:r>
+            <a:r>
+              <a:rPr lang="en-US" sz="3600" b="1">
+                <a:solidFill>
+                  <a:srgbClr val="FFFF00"/>
+                </a:solidFill>
+              </a:rPr>
+              <a:t>SWF</a:t>
+            </a:r>
+            <a:r>
+              <a:rPr lang="en-US" sz="3600"/>
+              <a:t>.</a:t>
+            </a:r>
+            <a:r>
+              <a:rPr lang="en-US" sz="3600" b="1">
+                <a:solidFill>
+                  <a:srgbClr val="FF0000"/>
+                </a:solidFill>
+              </a:rPr>
+              <a:t>Flow_Action_workflow</a:t>
             </a:r>
           </a:p>
         </p:txBody>
@@ -15421,7 +16198,7 @@
           <p:cNvPr id="3" name="Content Placeholder 2">
             <a:extLst>
               <a:ext uri="{FF2B5EF4-FFF2-40B4-BE49-F238E27FC236}">
-                <a16:creationId xmlns:a16="http://schemas.microsoft.com/office/drawing/2014/main" id="{A09F7DB1-F504-0D08-6D9D-74E2647CAD91}"/>
+                <a16:creationId xmlns:a16="http://schemas.microsoft.com/office/drawing/2014/main" id="{835AAC1E-80E6-763F-4B4B-60C2C3B28629}"/>
               </a:ext>
             </a:extLst>
           </p:cNvPr>
@@ -15434,8 +16211,8 @@
         </p:nvSpPr>
         <p:spPr>
           <a:xfrm>
-            <a:off x="913794" y="629265"/>
-            <a:ext cx="10816089" cy="5161935"/>
+            <a:off x="238538" y="752061"/>
+            <a:ext cx="11767931" cy="6036365"/>
           </a:xfrm>
         </p:spPr>
         <p:txBody>
@@ -15443,52 +16220,8 @@
           <a:lstStyle/>
           <a:p>
             <a:r>
-              <a:rPr lang="en-US" sz="1800"/>
-              <a:t>int Type_code </a:t>
-            </a:r>
-            <a:r>
-              <a:rPr lang="en-US" sz="1800" b="1">
-                <a:solidFill>
-                  <a:srgbClr val="FFFF00"/>
-                </a:solidFill>
-              </a:rPr>
-              <a:t>[PK]</a:t>
-            </a:r>
-          </a:p>
-          <a:p>
-            <a:r>
-              <a:rPr lang="en-US" sz="1800"/>
-              <a:t>string description</a:t>
-            </a:r>
-          </a:p>
-          <a:p>
-            <a:r>
-              <a:rPr lang="en-US" sz="1800"/>
-              <a:t>ICollection&lt;Flow_Actions&gt; Flow_Actions</a:t>
-            </a:r>
-          </a:p>
-          <a:p>
-            <a:r>
-              <a:rPr lang="en-US" sz="1800"/>
-              <a:t>ICollection&lt;Flow_Products&gt; Flow_Products</a:t>
-            </a:r>
-          </a:p>
-          <a:p>
-            <a:r>
-              <a:rPr lang="en-US" sz="1800"/>
-              <a:t>ICollection&lt;Flow_Tabs_available&gt; Flow_Tabs_available</a:t>
-            </a:r>
-          </a:p>
-          <a:p>
-            <a:r>
-              <a:rPr lang="en-US" sz="1800"/>
-              <a:t>ICollection&lt;Flow_Action_workflow&gt;  Flow_Action_workflow</a:t>
-            </a:r>
-          </a:p>
-          <a:p>
-            <a:r>
-              <a:rPr lang="en-US" sz="1800"/>
-              <a:t>ICollection&lt;Flow_Request_Deportation&gt; Flow_Request_Deportation</a:t>
+              <a:rPr lang="en-US"/>
+              <a:t>Code_FA: int [PK, identity]</a:t>
             </a:r>
           </a:p>
           <a:p>
@@ -15498,10 +16231,10 @@
       </p:sp>
       <p:pic>
         <p:nvPicPr>
-          <p:cNvPr id="7" name="Picture 6">
+          <p:cNvPr id="5" name="Picture 4">
             <a:extLst>
               <a:ext uri="{FF2B5EF4-FFF2-40B4-BE49-F238E27FC236}">
-                <a16:creationId xmlns:a16="http://schemas.microsoft.com/office/drawing/2014/main" id="{0CAECF5C-0FAB-5F50-CAF8-361FBEF9EAD4}"/>
+                <a16:creationId xmlns:a16="http://schemas.microsoft.com/office/drawing/2014/main" id="{F154AA93-DA80-428E-5ADA-801AE10A397F}"/>
               </a:ext>
             </a:extLst>
           </p:cNvPr>
@@ -15518,8 +16251,38 @@
         </p:blipFill>
         <p:spPr>
           <a:xfrm>
-            <a:off x="8248465" y="1049190"/>
-            <a:ext cx="3344372" cy="1366517"/>
+            <a:off x="0" y="1173526"/>
+            <a:ext cx="7551174" cy="3927173"/>
+          </a:xfrm>
+          <a:prstGeom prst="rect">
+            <a:avLst/>
+          </a:prstGeom>
+        </p:spPr>
+      </p:pic>
+      <p:pic>
+        <p:nvPicPr>
+          <p:cNvPr id="6" name="Picture 5">
+            <a:extLst>
+              <a:ext uri="{FF2B5EF4-FFF2-40B4-BE49-F238E27FC236}">
+                <a16:creationId xmlns:a16="http://schemas.microsoft.com/office/drawing/2014/main" id="{5A0F96E1-B6D0-72A5-7EFE-33820455086B}"/>
+              </a:ext>
+            </a:extLst>
+          </p:cNvPr>
+          <p:cNvPicPr>
+            <a:picLocks noChangeAspect="1"/>
+          </p:cNvPicPr>
+          <p:nvPr/>
+        </p:nvPicPr>
+        <p:blipFill>
+          <a:blip r:embed="rId3"/>
+          <a:stretch>
+            <a:fillRect/>
+          </a:stretch>
+        </p:blipFill>
+        <p:spPr>
+          <a:xfrm>
+            <a:off x="7551174" y="1504122"/>
+            <a:ext cx="4640826" cy="2973027"/>
           </a:xfrm>
           <a:prstGeom prst="rect">
             <a:avLst/>
@@ -15529,7 +16292,7 @@
     </p:spTree>
     <p:extLst>
       <p:ext uri="{BB962C8B-B14F-4D97-AF65-F5344CB8AC3E}">
-        <p14:creationId xmlns:p14="http://schemas.microsoft.com/office/powerpoint/2010/main" val="885741556"/>
+        <p14:creationId xmlns:p14="http://schemas.microsoft.com/office/powerpoint/2010/main" val="2146910038"/>
       </p:ext>
     </p:extLst>
   </p:cSld>
@@ -15561,7 +16324,7 @@
           <p:cNvPr id="2" name="Title 1">
             <a:extLst>
               <a:ext uri="{FF2B5EF4-FFF2-40B4-BE49-F238E27FC236}">
-                <a16:creationId xmlns:a16="http://schemas.microsoft.com/office/drawing/2014/main" id="{2D14F211-A475-DBF7-9EED-1D353ADE10A6}"/>
+                <a16:creationId xmlns:a16="http://schemas.microsoft.com/office/drawing/2014/main" id="{F5E3A7F0-BDD0-62DB-01D9-1F536CC89E65}"/>
               </a:ext>
             </a:extLst>
           </p:cNvPr>
@@ -15574,8 +16337,8 @@
         </p:nvSpPr>
         <p:spPr>
           <a:xfrm>
-            <a:off x="913795" y="1"/>
-            <a:ext cx="10353762" cy="521110"/>
+            <a:off x="913795" y="0"/>
+            <a:ext cx="10353762" cy="629265"/>
           </a:xfrm>
         </p:spPr>
         <p:txBody>
@@ -15585,34 +16348,25 @@
           <a:lstStyle/>
           <a:p>
             <a:r>
-              <a:rPr lang="en-US" sz="3600" b="1">
+              <a:rPr lang="en-US">
                 <a:solidFill>
                   <a:srgbClr val="FFFF00"/>
                 </a:solidFill>
-                <a:effectLst/>
-              </a:rPr>
-              <a:t>TWT</a:t>
-            </a:r>
-            <a:r>
-              <a:rPr lang="en-US" sz="3600" b="1">
-                <a:effectLst/>
-              </a:rPr>
+              </a:rPr>
+              <a:t>SWF</a:t>
+            </a:r>
+            <a:r>
+              <a:rPr lang="en-US"/>
               <a:t>.</a:t>
             </a:r>
             <a:r>
-              <a:rPr lang="en-US" sz="3600" b="1">
+              <a:rPr lang="en-US" b="1">
                 <a:solidFill>
                   <a:srgbClr val="FF0000"/>
                 </a:solidFill>
-                <a:effectLst/>
-              </a:rPr>
-              <a:t>Flow_Products</a:t>
-            </a:r>
-            <a:endParaRPr lang="en-US" sz="3600">
-              <a:solidFill>
-                <a:srgbClr val="FF0000"/>
-              </a:solidFill>
-            </a:endParaRPr>
+              </a:rPr>
+              <a:t>Flow_Types</a:t>
+            </a:r>
           </a:p>
         </p:txBody>
       </p:sp>
@@ -15621,7 +16375,7 @@
           <p:cNvPr id="3" name="Content Placeholder 2">
             <a:extLst>
               <a:ext uri="{FF2B5EF4-FFF2-40B4-BE49-F238E27FC236}">
-                <a16:creationId xmlns:a16="http://schemas.microsoft.com/office/drawing/2014/main" id="{9195FB53-6728-18BE-505F-340013210440}"/>
+                <a16:creationId xmlns:a16="http://schemas.microsoft.com/office/drawing/2014/main" id="{A09F7DB1-F504-0D08-6D9D-74E2647CAD91}"/>
               </a:ext>
             </a:extLst>
           </p:cNvPr>
@@ -15634,148 +16388,74 @@
         </p:nvSpPr>
         <p:spPr>
           <a:xfrm>
-            <a:off x="0" y="707923"/>
-            <a:ext cx="12192000" cy="6037006"/>
-          </a:xfrm>
-        </p:spPr>
-        <p:txBody>
-          <a:bodyPr>
-            <a:normAutofit lnSpcReduction="10000"/>
-          </a:bodyPr>
+            <a:off x="913794" y="629265"/>
+            <a:ext cx="10816089" cy="5161935"/>
+          </a:xfrm>
+        </p:spPr>
+        <p:txBody>
+          <a:bodyPr/>
           <a:lstStyle/>
           <a:p>
             <a:r>
-              <a:rPr lang="en-US" sz="1700"/>
-              <a:t>product</a:t>
-            </a:r>
-            <a:r>
-              <a:rPr lang="en-US" sz="1700" err="1"/>
-              <a:t>_Id</a:t>
-            </a:r>
-            <a:r>
-              <a:rPr lang="en-US" sz="1700"/>
-              <a:t>: int , </a:t>
-            </a:r>
-            <a:r>
-              <a:rPr lang="en-US" sz="1700" b="1">
+              <a:rPr lang="en-US" sz="1800"/>
+              <a:t>int Type_code </a:t>
+            </a:r>
+            <a:r>
+              <a:rPr lang="en-US" sz="1800" b="1">
                 <a:solidFill>
                   <a:srgbClr val="FFFF00"/>
                 </a:solidFill>
               </a:rPr>
-              <a:t>PK</a:t>
-            </a:r>
-          </a:p>
-          <a:p>
-            <a:r>
-              <a:rPr lang="en-US" sz="1700" err="1"/>
-              <a:t>Loan_code</a:t>
-            </a:r>
-            <a:r>
-              <a:rPr lang="en-US" sz="1700"/>
-              <a:t>: int</a:t>
-            </a:r>
-          </a:p>
-          <a:p>
-            <a:pPr lvl="1"/>
-            <a:r>
-              <a:rPr lang="en-US" sz="1500"/>
-              <a:t>Not unique</a:t>
-            </a:r>
-          </a:p>
-          <a:p>
-            <a:r>
-              <a:rPr lang="en-US" sz="1700"/>
-              <a:t>Layer</a:t>
-            </a:r>
-            <a:r>
-              <a:rPr lang="en-US" sz="1700" err="1"/>
-              <a:t>_code</a:t>
-            </a:r>
-            <a:r>
-              <a:rPr lang="en-US" sz="1700"/>
-              <a:t>: int</a:t>
-            </a:r>
-          </a:p>
-          <a:p>
-            <a:r>
-              <a:rPr lang="en-US" sz="1700"/>
-              <a:t>name_AR: string</a:t>
-            </a:r>
-          </a:p>
-          <a:p>
-            <a:r>
-              <a:rPr lang="en-US" sz="1700"/>
-              <a:t>name_Eng: string</a:t>
-            </a:r>
-          </a:p>
-          <a:p>
-            <a:r>
-              <a:rPr lang="en-US" sz="1700"/>
-              <a:t>min_loan_amount: decimal</a:t>
-            </a:r>
-          </a:p>
-          <a:p>
-            <a:r>
-              <a:rPr lang="en-US" sz="1700"/>
-              <a:t>max_loan_amount: decimal</a:t>
-            </a:r>
-          </a:p>
-          <a:p>
-            <a:r>
-              <a:rPr lang="en-US" sz="1700"/>
-              <a:t>min_customer_age: decimal</a:t>
-            </a:r>
-          </a:p>
-          <a:p>
-            <a:r>
-              <a:rPr lang="en-US" sz="1700"/>
-              <a:t>max_customer_age: decimal</a:t>
-            </a:r>
-          </a:p>
-          <a:p>
-            <a:r>
-              <a:rPr lang="en-US" sz="1700"/>
-              <a:t>Max_Age_Guarantor</a:t>
-            </a:r>
-          </a:p>
-          <a:p>
-            <a:r>
-              <a:rPr lang="en-US" sz="1700"/>
-              <a:t>Min_Age_Guarantor</a:t>
-            </a:r>
-          </a:p>
-          <a:p>
-            <a:r>
-              <a:rPr lang="en-US" sz="1700"/>
-              <a:t>min_loan_period: decimal</a:t>
-            </a:r>
-          </a:p>
-          <a:p>
-            <a:r>
-              <a:rPr lang="en-US" sz="1700"/>
-              <a:t>max_loan_period: decimal</a:t>
-            </a:r>
-          </a:p>
-          <a:p>
-            <a:r>
-              <a:rPr lang="en-US" sz="1700"/>
-              <a:t>Ramping_Amount: int</a:t>
-            </a:r>
-          </a:p>
-          <a:p>
-            <a:r>
-              <a:rPr lang="en-US" sz="1700"/>
-              <a:t>Ramping_Ratio: decimal</a:t>
-            </a:r>
+              <a:t>[PK]</a:t>
+            </a:r>
+          </a:p>
+          <a:p>
+            <a:r>
+              <a:rPr lang="en-US" sz="1800"/>
+              <a:t>string description</a:t>
+            </a:r>
+          </a:p>
+          <a:p>
+            <a:r>
+              <a:rPr lang="en-US" sz="1800"/>
+              <a:t>ICollection&lt;Flow_Actions&gt; Flow_Actions</a:t>
+            </a:r>
+          </a:p>
+          <a:p>
+            <a:r>
+              <a:rPr lang="en-US" sz="1800"/>
+              <a:t>ICollection&lt;Flow_Products&gt; Flow_Products</a:t>
+            </a:r>
+          </a:p>
+          <a:p>
+            <a:r>
+              <a:rPr lang="en-US" sz="1800"/>
+              <a:t>ICollection&lt;Flow_Tabs_available&gt; Flow_Tabs_available</a:t>
+            </a:r>
+          </a:p>
+          <a:p>
+            <a:r>
+              <a:rPr lang="en-US" sz="1800"/>
+              <a:t>ICollection&lt;Flow_Action_workflow&gt;  Flow_Action_workflow</a:t>
+            </a:r>
+          </a:p>
+          <a:p>
+            <a:r>
+              <a:rPr lang="en-US" sz="1800"/>
+              <a:t>ICollection&lt;Flow_Request_Deportation&gt; Flow_Request_Deportation</a:t>
+            </a:r>
+          </a:p>
+          <a:p>
+            <a:endParaRPr lang="en-US"/>
           </a:p>
         </p:txBody>
       </p:sp>
       <p:pic>
         <p:nvPicPr>
-          <p:cNvPr id="5" name="Picture 4">
+          <p:cNvPr id="7" name="Picture 6">
             <a:extLst>
               <a:ext uri="{FF2B5EF4-FFF2-40B4-BE49-F238E27FC236}">
-                <a16:creationId xmlns:a16="http://schemas.microsoft.com/office/drawing/2014/main" id="{1FF40305-221F-8654-F2E3-FFFF313A43FD}"/>
+                <a16:creationId xmlns:a16="http://schemas.microsoft.com/office/drawing/2014/main" id="{0CAECF5C-0FAB-5F50-CAF8-361FBEF9EAD4}"/>
               </a:ext>
             </a:extLst>
           </p:cNvPr>
@@ -15792,188 +16472,8 @@
         </p:blipFill>
         <p:spPr>
           <a:xfrm>
-            <a:off x="4562061" y="825937"/>
-            <a:ext cx="7588564" cy="639097"/>
-          </a:xfrm>
-          <a:prstGeom prst="rect">
-            <a:avLst/>
-          </a:prstGeom>
-        </p:spPr>
-      </p:pic>
-      <p:pic>
-        <p:nvPicPr>
-          <p:cNvPr id="7" name="Picture 6">
-            <a:extLst>
-              <a:ext uri="{FF2B5EF4-FFF2-40B4-BE49-F238E27FC236}">
-                <a16:creationId xmlns:a16="http://schemas.microsoft.com/office/drawing/2014/main" id="{496278A0-E80D-F74A-726C-6B068E985577}"/>
-              </a:ext>
-            </a:extLst>
-          </p:cNvPr>
-          <p:cNvPicPr>
-            <a:picLocks noChangeAspect="1"/>
-          </p:cNvPicPr>
-          <p:nvPr/>
-        </p:nvPicPr>
-        <p:blipFill>
-          <a:blip r:embed="rId3"/>
-          <a:stretch>
-            <a:fillRect/>
-          </a:stretch>
-        </p:blipFill>
-        <p:spPr>
-          <a:xfrm>
-            <a:off x="4562061" y="1602659"/>
-            <a:ext cx="7629938" cy="488556"/>
-          </a:xfrm>
-          <a:prstGeom prst="rect">
-            <a:avLst/>
-          </a:prstGeom>
-        </p:spPr>
-      </p:pic>
-      <p:pic>
-        <p:nvPicPr>
-          <p:cNvPr id="9" name="Picture 8">
-            <a:extLst>
-              <a:ext uri="{FF2B5EF4-FFF2-40B4-BE49-F238E27FC236}">
-                <a16:creationId xmlns:a16="http://schemas.microsoft.com/office/drawing/2014/main" id="{919F5981-2F44-83C4-CD88-D9ED8D95874F}"/>
-              </a:ext>
-            </a:extLst>
-          </p:cNvPr>
-          <p:cNvPicPr>
-            <a:picLocks noChangeAspect="1"/>
-          </p:cNvPicPr>
-          <p:nvPr/>
-        </p:nvPicPr>
-        <p:blipFill>
-          <a:blip r:embed="rId4"/>
-          <a:stretch>
-            <a:fillRect/>
-          </a:stretch>
-        </p:blipFill>
-        <p:spPr>
-          <a:xfrm>
-            <a:off x="4562060" y="2150209"/>
-            <a:ext cx="7629939" cy="488556"/>
-          </a:xfrm>
-          <a:prstGeom prst="rect">
-            <a:avLst/>
-          </a:prstGeom>
-        </p:spPr>
-      </p:pic>
-      <p:pic>
-        <p:nvPicPr>
-          <p:cNvPr id="11" name="Picture 10">
-            <a:extLst>
-              <a:ext uri="{FF2B5EF4-FFF2-40B4-BE49-F238E27FC236}">
-                <a16:creationId xmlns:a16="http://schemas.microsoft.com/office/drawing/2014/main" id="{116C0BE6-8A9A-49DD-6C5D-76A11B72563E}"/>
-              </a:ext>
-            </a:extLst>
-          </p:cNvPr>
-          <p:cNvPicPr>
-            <a:picLocks noChangeAspect="1"/>
-          </p:cNvPicPr>
-          <p:nvPr/>
-        </p:nvPicPr>
-        <p:blipFill>
-          <a:blip r:embed="rId5"/>
-          <a:stretch>
-            <a:fillRect/>
-          </a:stretch>
-        </p:blipFill>
-        <p:spPr>
-          <a:xfrm>
-            <a:off x="4562060" y="2724509"/>
-            <a:ext cx="7629940" cy="520800"/>
-          </a:xfrm>
-          <a:prstGeom prst="rect">
-            <a:avLst/>
-          </a:prstGeom>
-        </p:spPr>
-      </p:pic>
-      <p:pic>
-        <p:nvPicPr>
-          <p:cNvPr id="13" name="Picture 12">
-            <a:extLst>
-              <a:ext uri="{FF2B5EF4-FFF2-40B4-BE49-F238E27FC236}">
-                <a16:creationId xmlns:a16="http://schemas.microsoft.com/office/drawing/2014/main" id="{C7EA477B-679D-B66A-783E-E156B2239F92}"/>
-              </a:ext>
-            </a:extLst>
-          </p:cNvPr>
-          <p:cNvPicPr>
-            <a:picLocks noChangeAspect="1"/>
-          </p:cNvPicPr>
-          <p:nvPr/>
-        </p:nvPicPr>
-        <p:blipFill>
-          <a:blip r:embed="rId6"/>
-          <a:stretch>
-            <a:fillRect/>
-          </a:stretch>
-        </p:blipFill>
-        <p:spPr>
-          <a:xfrm>
-            <a:off x="4562058" y="3363097"/>
-            <a:ext cx="7629941" cy="520800"/>
-          </a:xfrm>
-          <a:prstGeom prst="rect">
-            <a:avLst/>
-          </a:prstGeom>
-        </p:spPr>
-      </p:pic>
-      <p:pic>
-        <p:nvPicPr>
-          <p:cNvPr id="15" name="Picture 14">
-            <a:extLst>
-              <a:ext uri="{FF2B5EF4-FFF2-40B4-BE49-F238E27FC236}">
-                <a16:creationId xmlns:a16="http://schemas.microsoft.com/office/drawing/2014/main" id="{2D5B9370-3592-44AE-ACFD-D82AD1F56770}"/>
-              </a:ext>
-            </a:extLst>
-          </p:cNvPr>
-          <p:cNvPicPr>
-            <a:picLocks noChangeAspect="1"/>
-          </p:cNvPicPr>
-          <p:nvPr/>
-        </p:nvPicPr>
-        <p:blipFill>
-          <a:blip r:embed="rId7"/>
-          <a:stretch>
-            <a:fillRect/>
-          </a:stretch>
-        </p:blipFill>
-        <p:spPr>
-          <a:xfrm>
-            <a:off x="4562058" y="4009114"/>
-            <a:ext cx="7637730" cy="520800"/>
-          </a:xfrm>
-          <a:prstGeom prst="rect">
-            <a:avLst/>
-          </a:prstGeom>
-        </p:spPr>
-      </p:pic>
-      <p:pic>
-        <p:nvPicPr>
-          <p:cNvPr id="17" name="Picture 16">
-            <a:extLst>
-              <a:ext uri="{FF2B5EF4-FFF2-40B4-BE49-F238E27FC236}">
-                <a16:creationId xmlns:a16="http://schemas.microsoft.com/office/drawing/2014/main" id="{8E216CC5-6031-6680-C5F8-EB8B296EE3F5}"/>
-              </a:ext>
-            </a:extLst>
-          </p:cNvPr>
-          <p:cNvPicPr>
-            <a:picLocks noChangeAspect="1"/>
-          </p:cNvPicPr>
-          <p:nvPr/>
-        </p:nvPicPr>
-        <p:blipFill>
-          <a:blip r:embed="rId8"/>
-          <a:stretch>
-            <a:fillRect/>
-          </a:stretch>
-        </p:blipFill>
-        <p:spPr>
-          <a:xfrm>
-            <a:off x="4520283" y="4655131"/>
-            <a:ext cx="7637730" cy="600210"/>
+            <a:off x="8248465" y="1049190"/>
+            <a:ext cx="3344372" cy="1366517"/>
           </a:xfrm>
           <a:prstGeom prst="rect">
             <a:avLst/>
@@ -15983,7 +16483,7 @@
     </p:spTree>
     <p:extLst>
       <p:ext uri="{BB962C8B-B14F-4D97-AF65-F5344CB8AC3E}">
-        <p14:creationId xmlns:p14="http://schemas.microsoft.com/office/powerpoint/2010/main" val="3596534220"/>
+        <p14:creationId xmlns:p14="http://schemas.microsoft.com/office/powerpoint/2010/main" val="885741556"/>
       </p:ext>
     </p:extLst>
   </p:cSld>
@@ -16015,7 +16515,7 @@
           <p:cNvPr id="2" name="Title 1">
             <a:extLst>
               <a:ext uri="{FF2B5EF4-FFF2-40B4-BE49-F238E27FC236}">
-                <a16:creationId xmlns:a16="http://schemas.microsoft.com/office/drawing/2014/main" id="{E3DBF16B-5632-6543-20D2-952872D818B9}"/>
+                <a16:creationId xmlns:a16="http://schemas.microsoft.com/office/drawing/2014/main" id="{2D14F211-A475-DBF7-9EED-1D353ADE10A6}"/>
               </a:ext>
             </a:extLst>
           </p:cNvPr>
@@ -16028,8 +16528,8 @@
         </p:nvSpPr>
         <p:spPr>
           <a:xfrm>
-            <a:off x="913795" y="0"/>
-            <a:ext cx="10353762" cy="491613"/>
+            <a:off x="913795" y="1"/>
+            <a:ext cx="10353762" cy="521110"/>
           </a:xfrm>
         </p:spPr>
         <p:txBody>
@@ -16039,25 +16539,34 @@
           <a:lstStyle/>
           <a:p>
             <a:r>
-              <a:rPr lang="en-US" b="1">
+              <a:rPr lang="en-US" sz="3600" b="1">
                 <a:solidFill>
                   <a:srgbClr val="FFFF00"/>
                 </a:solidFill>
-              </a:rPr>
-              <a:t>TWF</a:t>
-            </a:r>
-            <a:r>
-              <a:rPr lang="en-US"/>
+                <a:effectLst/>
+              </a:rPr>
+              <a:t>TWT</a:t>
+            </a:r>
+            <a:r>
+              <a:rPr lang="en-US" sz="3600" b="1">
+                <a:effectLst/>
+              </a:rPr>
               <a:t>.</a:t>
             </a:r>
             <a:r>
-              <a:rPr lang="en-US" b="1">
+              <a:rPr lang="en-US" sz="3600" b="1">
                 <a:solidFill>
                   <a:srgbClr val="FF0000"/>
                 </a:solidFill>
-              </a:rPr>
-              <a:t>Flow_Customers</a:t>
-            </a:r>
+                <a:effectLst/>
+              </a:rPr>
+              <a:t>Flow_Products</a:t>
+            </a:r>
+            <a:endParaRPr lang="en-US" sz="3600">
+              <a:solidFill>
+                <a:srgbClr val="FF0000"/>
+              </a:solidFill>
+            </a:endParaRPr>
           </a:p>
         </p:txBody>
       </p:sp>
@@ -16066,7 +16575,7 @@
           <p:cNvPr id="3" name="Content Placeholder 2">
             <a:extLst>
               <a:ext uri="{FF2B5EF4-FFF2-40B4-BE49-F238E27FC236}">
-                <a16:creationId xmlns:a16="http://schemas.microsoft.com/office/drawing/2014/main" id="{2E6F3D00-E0DA-547C-36CB-2E21C1CFDD29}"/>
+                <a16:creationId xmlns:a16="http://schemas.microsoft.com/office/drawing/2014/main" id="{9195FB53-6728-18BE-505F-340013210440}"/>
               </a:ext>
             </a:extLst>
           </p:cNvPr>
@@ -16079,39 +16588,139 @@
         </p:nvSpPr>
         <p:spPr>
           <a:xfrm>
-            <a:off x="108154" y="491613"/>
-            <a:ext cx="12083845" cy="6164826"/>
-          </a:xfrm>
-        </p:spPr>
-        <p:txBody>
-          <a:bodyPr/>
+            <a:off x="0" y="707923"/>
+            <a:ext cx="12192000" cy="6037006"/>
+          </a:xfrm>
+        </p:spPr>
+        <p:txBody>
+          <a:bodyPr>
+            <a:normAutofit lnSpcReduction="10000"/>
+          </a:bodyPr>
           <a:lstStyle/>
           <a:p>
             <a:r>
-              <a:rPr lang="en-US"/>
-              <a:t>CustomerId </a:t>
-            </a:r>
-            <a:r>
-              <a:rPr lang="en-US" b="1">
+              <a:rPr lang="en-US" sz="1700"/>
+              <a:t>product</a:t>
+            </a:r>
+            <a:r>
+              <a:rPr lang="en-US" sz="1700" err="1"/>
+              <a:t>_Id</a:t>
+            </a:r>
+            <a:r>
+              <a:rPr lang="en-US" sz="1700"/>
+              <a:t>: int , </a:t>
+            </a:r>
+            <a:r>
+              <a:rPr lang="en-US" sz="1700" b="1">
                 <a:solidFill>
                   <a:srgbClr val="FFFF00"/>
                 </a:solidFill>
               </a:rPr>
-              <a:t>[PK]</a:t>
-            </a:r>
-          </a:p>
-          <a:p>
-            <a:r>
-              <a:rPr lang="en-US" sz="1800"/>
-              <a:t>creationUser [FK] from user</a:t>
-            </a:r>
-          </a:p>
-          <a:p>
-            <a:endParaRPr lang="en-US" b="1">
-              <a:solidFill>
-                <a:srgbClr val="FFFF00"/>
-              </a:solidFill>
-            </a:endParaRPr>
+              <a:t>PK</a:t>
+            </a:r>
+          </a:p>
+          <a:p>
+            <a:r>
+              <a:rPr lang="en-US" sz="1700" err="1"/>
+              <a:t>Loan_code</a:t>
+            </a:r>
+            <a:r>
+              <a:rPr lang="en-US" sz="1700"/>
+              <a:t>: int</a:t>
+            </a:r>
+          </a:p>
+          <a:p>
+            <a:pPr lvl="1"/>
+            <a:r>
+              <a:rPr lang="en-US" sz="1500"/>
+              <a:t>Not unique</a:t>
+            </a:r>
+          </a:p>
+          <a:p>
+            <a:r>
+              <a:rPr lang="en-US" sz="1700"/>
+              <a:t>Layer</a:t>
+            </a:r>
+            <a:r>
+              <a:rPr lang="en-US" sz="1700" err="1"/>
+              <a:t>_code</a:t>
+            </a:r>
+            <a:r>
+              <a:rPr lang="en-US" sz="1700"/>
+              <a:t>: int</a:t>
+            </a:r>
+          </a:p>
+          <a:p>
+            <a:r>
+              <a:rPr lang="en-US" sz="1700"/>
+              <a:t>name_AR: string</a:t>
+            </a:r>
+          </a:p>
+          <a:p>
+            <a:r>
+              <a:rPr lang="en-US" sz="1700"/>
+              <a:t>name_Eng: string</a:t>
+            </a:r>
+          </a:p>
+          <a:p>
+            <a:r>
+              <a:rPr lang="en-US" sz="1700"/>
+              <a:t>min_loan_amount: decimal</a:t>
+            </a:r>
+          </a:p>
+          <a:p>
+            <a:r>
+              <a:rPr lang="en-US" sz="1700"/>
+              <a:t>max_loan_amount: decimal</a:t>
+            </a:r>
+          </a:p>
+          <a:p>
+            <a:r>
+              <a:rPr lang="en-US" sz="1700"/>
+              <a:t>min_customer_age: decimal</a:t>
+            </a:r>
+          </a:p>
+          <a:p>
+            <a:r>
+              <a:rPr lang="en-US" sz="1700"/>
+              <a:t>max_customer_age: decimal</a:t>
+            </a:r>
+          </a:p>
+          <a:p>
+            <a:r>
+              <a:rPr lang="en-US" sz="1700"/>
+              <a:t>Max_Age_Guarantor</a:t>
+            </a:r>
+          </a:p>
+          <a:p>
+            <a:r>
+              <a:rPr lang="en-US" sz="1700"/>
+              <a:t>Min_Age_Guarantor</a:t>
+            </a:r>
+          </a:p>
+          <a:p>
+            <a:r>
+              <a:rPr lang="en-US" sz="1700"/>
+              <a:t>min_loan_period: decimal</a:t>
+            </a:r>
+          </a:p>
+          <a:p>
+            <a:r>
+              <a:rPr lang="en-US" sz="1700"/>
+              <a:t>max_loan_period: decimal</a:t>
+            </a:r>
+          </a:p>
+          <a:p>
+            <a:r>
+              <a:rPr lang="en-US" sz="1700"/>
+              <a:t>Ramping_Amount: int</a:t>
+            </a:r>
+          </a:p>
+          <a:p>
+            <a:r>
+              <a:rPr lang="en-US" sz="1700"/>
+              <a:t>Ramping_Ratio: decimal</a:t>
+            </a:r>
           </a:p>
         </p:txBody>
       </p:sp>
@@ -16120,7 +16729,7 @@
           <p:cNvPr id="5" name="Picture 4">
             <a:extLst>
               <a:ext uri="{FF2B5EF4-FFF2-40B4-BE49-F238E27FC236}">
-                <a16:creationId xmlns:a16="http://schemas.microsoft.com/office/drawing/2014/main" id="{025D9512-5EE2-6EA6-52B5-B024211BAE94}"/>
+                <a16:creationId xmlns:a16="http://schemas.microsoft.com/office/drawing/2014/main" id="{1FF40305-221F-8654-F2E3-FFFF313A43FD}"/>
               </a:ext>
             </a:extLst>
           </p:cNvPr>
@@ -16137,8 +16746,8 @@
         </p:blipFill>
         <p:spPr>
           <a:xfrm>
-            <a:off x="3480619" y="1548025"/>
-            <a:ext cx="8711381" cy="501444"/>
+            <a:off x="4562061" y="825937"/>
+            <a:ext cx="7588564" cy="639097"/>
           </a:xfrm>
           <a:prstGeom prst="rect">
             <a:avLst/>
@@ -16150,7 +16759,7 @@
           <p:cNvPr id="7" name="Picture 6">
             <a:extLst>
               <a:ext uri="{FF2B5EF4-FFF2-40B4-BE49-F238E27FC236}">
-                <a16:creationId xmlns:a16="http://schemas.microsoft.com/office/drawing/2014/main" id="{908568C5-2438-725A-6BA0-E2FCF0DC059C}"/>
+                <a16:creationId xmlns:a16="http://schemas.microsoft.com/office/drawing/2014/main" id="{496278A0-E80D-F74A-726C-6B068E985577}"/>
               </a:ext>
             </a:extLst>
           </p:cNvPr>
@@ -16167,8 +16776,8 @@
         </p:blipFill>
         <p:spPr>
           <a:xfrm>
-            <a:off x="3480619" y="2142876"/>
-            <a:ext cx="8711381" cy="501444"/>
+            <a:off x="4562061" y="1602659"/>
+            <a:ext cx="7629938" cy="488556"/>
           </a:xfrm>
           <a:prstGeom prst="rect">
             <a:avLst/>
@@ -16180,7 +16789,7 @@
           <p:cNvPr id="9" name="Picture 8">
             <a:extLst>
               <a:ext uri="{FF2B5EF4-FFF2-40B4-BE49-F238E27FC236}">
-                <a16:creationId xmlns:a16="http://schemas.microsoft.com/office/drawing/2014/main" id="{9C3BAB53-239E-B505-4C2A-B6AB9F9EB67F}"/>
+                <a16:creationId xmlns:a16="http://schemas.microsoft.com/office/drawing/2014/main" id="{919F5981-2F44-83C4-CD88-D9ED8D95874F}"/>
               </a:ext>
             </a:extLst>
           </p:cNvPr>
@@ -16197,8 +16806,128 @@
         </p:blipFill>
         <p:spPr>
           <a:xfrm>
-            <a:off x="5262936" y="2732811"/>
-            <a:ext cx="5444393" cy="502560"/>
+            <a:off x="4562060" y="2150209"/>
+            <a:ext cx="7629939" cy="488556"/>
+          </a:xfrm>
+          <a:prstGeom prst="rect">
+            <a:avLst/>
+          </a:prstGeom>
+        </p:spPr>
+      </p:pic>
+      <p:pic>
+        <p:nvPicPr>
+          <p:cNvPr id="11" name="Picture 10">
+            <a:extLst>
+              <a:ext uri="{FF2B5EF4-FFF2-40B4-BE49-F238E27FC236}">
+                <a16:creationId xmlns:a16="http://schemas.microsoft.com/office/drawing/2014/main" id="{116C0BE6-8A9A-49DD-6C5D-76A11B72563E}"/>
+              </a:ext>
+            </a:extLst>
+          </p:cNvPr>
+          <p:cNvPicPr>
+            <a:picLocks noChangeAspect="1"/>
+          </p:cNvPicPr>
+          <p:nvPr/>
+        </p:nvPicPr>
+        <p:blipFill>
+          <a:blip r:embed="rId5"/>
+          <a:stretch>
+            <a:fillRect/>
+          </a:stretch>
+        </p:blipFill>
+        <p:spPr>
+          <a:xfrm>
+            <a:off x="4562060" y="2724509"/>
+            <a:ext cx="7629940" cy="520800"/>
+          </a:xfrm>
+          <a:prstGeom prst="rect">
+            <a:avLst/>
+          </a:prstGeom>
+        </p:spPr>
+      </p:pic>
+      <p:pic>
+        <p:nvPicPr>
+          <p:cNvPr id="13" name="Picture 12">
+            <a:extLst>
+              <a:ext uri="{FF2B5EF4-FFF2-40B4-BE49-F238E27FC236}">
+                <a16:creationId xmlns:a16="http://schemas.microsoft.com/office/drawing/2014/main" id="{C7EA477B-679D-B66A-783E-E156B2239F92}"/>
+              </a:ext>
+            </a:extLst>
+          </p:cNvPr>
+          <p:cNvPicPr>
+            <a:picLocks noChangeAspect="1"/>
+          </p:cNvPicPr>
+          <p:nvPr/>
+        </p:nvPicPr>
+        <p:blipFill>
+          <a:blip r:embed="rId6"/>
+          <a:stretch>
+            <a:fillRect/>
+          </a:stretch>
+        </p:blipFill>
+        <p:spPr>
+          <a:xfrm>
+            <a:off x="4562058" y="3363097"/>
+            <a:ext cx="7629941" cy="520800"/>
+          </a:xfrm>
+          <a:prstGeom prst="rect">
+            <a:avLst/>
+          </a:prstGeom>
+        </p:spPr>
+      </p:pic>
+      <p:pic>
+        <p:nvPicPr>
+          <p:cNvPr id="15" name="Picture 14">
+            <a:extLst>
+              <a:ext uri="{FF2B5EF4-FFF2-40B4-BE49-F238E27FC236}">
+                <a16:creationId xmlns:a16="http://schemas.microsoft.com/office/drawing/2014/main" id="{2D5B9370-3592-44AE-ACFD-D82AD1F56770}"/>
+              </a:ext>
+            </a:extLst>
+          </p:cNvPr>
+          <p:cNvPicPr>
+            <a:picLocks noChangeAspect="1"/>
+          </p:cNvPicPr>
+          <p:nvPr/>
+        </p:nvPicPr>
+        <p:blipFill>
+          <a:blip r:embed="rId7"/>
+          <a:stretch>
+            <a:fillRect/>
+          </a:stretch>
+        </p:blipFill>
+        <p:spPr>
+          <a:xfrm>
+            <a:off x="4562058" y="4009114"/>
+            <a:ext cx="7637730" cy="520800"/>
+          </a:xfrm>
+          <a:prstGeom prst="rect">
+            <a:avLst/>
+          </a:prstGeom>
+        </p:spPr>
+      </p:pic>
+      <p:pic>
+        <p:nvPicPr>
+          <p:cNvPr id="17" name="Picture 16">
+            <a:extLst>
+              <a:ext uri="{FF2B5EF4-FFF2-40B4-BE49-F238E27FC236}">
+                <a16:creationId xmlns:a16="http://schemas.microsoft.com/office/drawing/2014/main" id="{8E216CC5-6031-6680-C5F8-EB8B296EE3F5}"/>
+              </a:ext>
+            </a:extLst>
+          </p:cNvPr>
+          <p:cNvPicPr>
+            <a:picLocks noChangeAspect="1"/>
+          </p:cNvPicPr>
+          <p:nvPr/>
+        </p:nvPicPr>
+        <p:blipFill>
+          <a:blip r:embed="rId8"/>
+          <a:stretch>
+            <a:fillRect/>
+          </a:stretch>
+        </p:blipFill>
+        <p:spPr>
+          <a:xfrm>
+            <a:off x="4520283" y="4655131"/>
+            <a:ext cx="7637730" cy="600210"/>
           </a:xfrm>
           <a:prstGeom prst="rect">
             <a:avLst/>
@@ -16208,7 +16937,7 @@
     </p:spTree>
     <p:extLst>
       <p:ext uri="{BB962C8B-B14F-4D97-AF65-F5344CB8AC3E}">
-        <p14:creationId xmlns:p14="http://schemas.microsoft.com/office/powerpoint/2010/main" val="1516757871"/>
+        <p14:creationId xmlns:p14="http://schemas.microsoft.com/office/powerpoint/2010/main" val="3596534220"/>
       </p:ext>
     </p:extLst>
   </p:cSld>
@@ -16240,7 +16969,7 @@
           <p:cNvPr id="2" name="Title 1">
             <a:extLst>
               <a:ext uri="{FF2B5EF4-FFF2-40B4-BE49-F238E27FC236}">
-                <a16:creationId xmlns:a16="http://schemas.microsoft.com/office/drawing/2014/main" id="{20F730D3-0F79-5F7C-895F-52331C63FED7}"/>
+                <a16:creationId xmlns:a16="http://schemas.microsoft.com/office/drawing/2014/main" id="{E3DBF16B-5632-6543-20D2-952872D818B9}"/>
               </a:ext>
             </a:extLst>
           </p:cNvPr>
@@ -16254,11 +16983,13 @@
         <p:spPr>
           <a:xfrm>
             <a:off x="913795" y="0"/>
-            <a:ext cx="10353762" cy="717755"/>
-          </a:xfrm>
-        </p:spPr>
-        <p:txBody>
-          <a:bodyPr/>
+            <a:ext cx="10353762" cy="491613"/>
+          </a:xfrm>
+        </p:spPr>
+        <p:txBody>
+          <a:bodyPr>
+            <a:normAutofit fontScale="90000"/>
+          </a:bodyPr>
           <a:lstStyle/>
           <a:p>
             <a:r>
@@ -16279,17 +17010,17 @@
                   <a:srgbClr val="FF0000"/>
                 </a:solidFill>
               </a:rPr>
-              <a:t>Flow_Contact_Us</a:t>
-            </a:r>
-          </a:p>
-        </p:txBody>
-      </p:sp>
-      <p:sp>
-        <p:nvSpPr>
-          <p:cNvPr id="7" name="Content Placeholder 6">
+              <a:t>Flow_Customers</a:t>
+            </a:r>
+          </a:p>
+        </p:txBody>
+      </p:sp>
+      <p:sp>
+        <p:nvSpPr>
+          <p:cNvPr id="3" name="Content Placeholder 2">
             <a:extLst>
               <a:ext uri="{FF2B5EF4-FFF2-40B4-BE49-F238E27FC236}">
-                <a16:creationId xmlns:a16="http://schemas.microsoft.com/office/drawing/2014/main" id="{3073AE93-BA35-FB28-BA39-B0CDEE52D4B1}"/>
+                <a16:creationId xmlns:a16="http://schemas.microsoft.com/office/drawing/2014/main" id="{2E6F3D00-E0DA-547C-36CB-2E21C1CFDD29}"/>
               </a:ext>
             </a:extLst>
           </p:cNvPr>
@@ -16302,8 +17033,8 @@
         </p:nvSpPr>
         <p:spPr>
           <a:xfrm>
-            <a:off x="913795" y="717755"/>
-            <a:ext cx="10353762" cy="5073445"/>
+            <a:off x="108154" y="491613"/>
+            <a:ext cx="12083845" cy="6164826"/>
           </a:xfrm>
         </p:spPr>
         <p:txBody>
@@ -16312,21 +17043,27 @@
           <a:p>
             <a:r>
               <a:rPr lang="en-US"/>
-              <a:t>Id_contact </a:t>
+              <a:t>CustomerId </a:t>
             </a:r>
             <a:r>
               <a:rPr lang="en-US" b="1">
                 <a:solidFill>
-                  <a:srgbClr val="FF0000"/>
+                  <a:srgbClr val="FFFF00"/>
                 </a:solidFill>
               </a:rPr>
               <a:t>[PK]</a:t>
+            </a:r>
+          </a:p>
+          <a:p>
+            <a:r>
+              <a:rPr lang="en-US" sz="1800"/>
+              <a:t>creationUser [FK] from user</a:t>
             </a:r>
           </a:p>
           <a:p>
             <a:endParaRPr lang="en-US" b="1">
               <a:solidFill>
-                <a:srgbClr val="FF0000"/>
+                <a:srgbClr val="FFFF00"/>
               </a:solidFill>
             </a:endParaRPr>
           </a:p>
@@ -16334,10 +17071,10 @@
       </p:sp>
       <p:pic>
         <p:nvPicPr>
-          <p:cNvPr id="8" name="Content Placeholder 4">
+          <p:cNvPr id="5" name="Picture 4">
             <a:extLst>
               <a:ext uri="{FF2B5EF4-FFF2-40B4-BE49-F238E27FC236}">
-                <a16:creationId xmlns:a16="http://schemas.microsoft.com/office/drawing/2014/main" id="{5F698F2B-A00E-4F18-B669-C748A374EDF1}"/>
+                <a16:creationId xmlns:a16="http://schemas.microsoft.com/office/drawing/2014/main" id="{025D9512-5EE2-6EA6-52B5-B024211BAE94}"/>
               </a:ext>
             </a:extLst>
           </p:cNvPr>
@@ -16354,25 +17091,78 @@
         </p:blipFill>
         <p:spPr>
           <a:xfrm>
-            <a:off x="5553042" y="717755"/>
-            <a:ext cx="6306106" cy="1012972"/>
+            <a:off x="3480619" y="1548025"/>
+            <a:ext cx="8711381" cy="501444"/>
           </a:xfrm>
           <a:prstGeom prst="rect">
             <a:avLst/>
           </a:prstGeom>
-          <a:effectLst>
-            <a:outerShdw blurRad="25400" dir="17880000">
-              <a:srgbClr val="000000">
-                <a:alpha val="46000"/>
-              </a:srgbClr>
-            </a:outerShdw>
-          </a:effectLst>
+        </p:spPr>
+      </p:pic>
+      <p:pic>
+        <p:nvPicPr>
+          <p:cNvPr id="7" name="Picture 6">
+            <a:extLst>
+              <a:ext uri="{FF2B5EF4-FFF2-40B4-BE49-F238E27FC236}">
+                <a16:creationId xmlns:a16="http://schemas.microsoft.com/office/drawing/2014/main" id="{908568C5-2438-725A-6BA0-E2FCF0DC059C}"/>
+              </a:ext>
+            </a:extLst>
+          </p:cNvPr>
+          <p:cNvPicPr>
+            <a:picLocks noChangeAspect="1"/>
+          </p:cNvPicPr>
+          <p:nvPr/>
+        </p:nvPicPr>
+        <p:blipFill>
+          <a:blip r:embed="rId3"/>
+          <a:stretch>
+            <a:fillRect/>
+          </a:stretch>
+        </p:blipFill>
+        <p:spPr>
+          <a:xfrm>
+            <a:off x="3480619" y="2142876"/>
+            <a:ext cx="8711381" cy="501444"/>
+          </a:xfrm>
+          <a:prstGeom prst="rect">
+            <a:avLst/>
+          </a:prstGeom>
+        </p:spPr>
+      </p:pic>
+      <p:pic>
+        <p:nvPicPr>
+          <p:cNvPr id="9" name="Picture 8">
+            <a:extLst>
+              <a:ext uri="{FF2B5EF4-FFF2-40B4-BE49-F238E27FC236}">
+                <a16:creationId xmlns:a16="http://schemas.microsoft.com/office/drawing/2014/main" id="{9C3BAB53-239E-B505-4C2A-B6AB9F9EB67F}"/>
+              </a:ext>
+            </a:extLst>
+          </p:cNvPr>
+          <p:cNvPicPr>
+            <a:picLocks noChangeAspect="1"/>
+          </p:cNvPicPr>
+          <p:nvPr/>
+        </p:nvPicPr>
+        <p:blipFill>
+          <a:blip r:embed="rId4"/>
+          <a:stretch>
+            <a:fillRect/>
+          </a:stretch>
+        </p:blipFill>
+        <p:spPr>
+          <a:xfrm>
+            <a:off x="5262936" y="2732811"/>
+            <a:ext cx="5444393" cy="502560"/>
+          </a:xfrm>
+          <a:prstGeom prst="rect">
+            <a:avLst/>
+          </a:prstGeom>
         </p:spPr>
       </p:pic>
     </p:spTree>
     <p:extLst>
       <p:ext uri="{BB962C8B-B14F-4D97-AF65-F5344CB8AC3E}">
-        <p14:creationId xmlns:p14="http://schemas.microsoft.com/office/powerpoint/2010/main" val="1793705591"/>
+        <p14:creationId xmlns:p14="http://schemas.microsoft.com/office/powerpoint/2010/main" val="1516757871"/>
       </p:ext>
     </p:extLst>
   </p:cSld>
@@ -16677,7 +17467,7 @@
           <p:cNvPr id="2" name="Title 1">
             <a:extLst>
               <a:ext uri="{FF2B5EF4-FFF2-40B4-BE49-F238E27FC236}">
-                <a16:creationId xmlns:a16="http://schemas.microsoft.com/office/drawing/2014/main" id="{59D0BE0D-D7D9-C836-9C7A-D44C993466C6}"/>
+                <a16:creationId xmlns:a16="http://schemas.microsoft.com/office/drawing/2014/main" id="{20F730D3-0F79-5F7C-895F-52331C63FED7}"/>
               </a:ext>
             </a:extLst>
           </p:cNvPr>
@@ -16690,14 +17480,12 @@
         </p:nvSpPr>
         <p:spPr>
           <a:xfrm>
-            <a:off x="919119" y="0"/>
-            <a:ext cx="10353762" cy="698090"/>
-          </a:xfrm>
-        </p:spPr>
-        <p:txBody>
-          <a:bodyPr>
-            <a:normAutofit fontScale="90000"/>
-          </a:bodyPr>
+            <a:off x="913795" y="0"/>
+            <a:ext cx="10353762" cy="717755"/>
+          </a:xfrm>
+        </p:spPr>
+        <p:txBody>
+          <a:bodyPr/>
           <a:lstStyle/>
           <a:p>
             <a:r>
@@ -16718,17 +17506,17 @@
                   <a:srgbClr val="FF0000"/>
                 </a:solidFill>
               </a:rPr>
-              <a:t>Flow_Enterprises</a:t>
-            </a:r>
-          </a:p>
-        </p:txBody>
-      </p:sp>
-      <p:sp>
-        <p:nvSpPr>
-          <p:cNvPr id="3" name="Content Placeholder 2">
+              <a:t>Flow_Contact_Us</a:t>
+            </a:r>
+          </a:p>
+        </p:txBody>
+      </p:sp>
+      <p:sp>
+        <p:nvSpPr>
+          <p:cNvPr id="7" name="Content Placeholder 6">
             <a:extLst>
               <a:ext uri="{FF2B5EF4-FFF2-40B4-BE49-F238E27FC236}">
-                <a16:creationId xmlns:a16="http://schemas.microsoft.com/office/drawing/2014/main" id="{B2BAA4F4-1B4B-9AB2-BD76-7AA41529A8EB}"/>
+                <a16:creationId xmlns:a16="http://schemas.microsoft.com/office/drawing/2014/main" id="{3073AE93-BA35-FB28-BA39-B0CDEE52D4B1}"/>
               </a:ext>
             </a:extLst>
           </p:cNvPr>
@@ -16741,154 +17529,42 @@
         </p:nvSpPr>
         <p:spPr>
           <a:xfrm>
-            <a:off x="7552" y="698091"/>
-            <a:ext cx="12176896" cy="5987844"/>
-          </a:xfrm>
-        </p:spPr>
-        <p:txBody>
-          <a:bodyPr>
-            <a:normAutofit/>
-          </a:bodyPr>
+            <a:off x="913795" y="717755"/>
+            <a:ext cx="10353762" cy="5073445"/>
+          </a:xfrm>
+        </p:spPr>
+        <p:txBody>
+          <a:bodyPr/>
           <a:lstStyle/>
           <a:p>
             <a:r>
-              <a:rPr lang="en-US" sz="1800"/>
-              <a:t>Enterprise_ID [PK], [identity]</a:t>
-            </a:r>
-          </a:p>
-          <a:p>
-            <a:r>
-              <a:rPr lang="en-US" sz="1800"/>
-              <a:t>Code_Sector: </a:t>
-            </a:r>
-            <a:r>
-              <a:rPr lang="ar-EG" b="1">
-                <a:effectLst/>
-              </a:rPr>
-              <a:t>القطاع</a:t>
+              <a:rPr lang="en-US"/>
+              <a:t>Id_contact </a:t>
             </a:r>
             <a:r>
               <a:rPr lang="en-US" b="1">
-                <a:effectLst/>
-              </a:rPr>
-              <a:t>: </a:t>
-            </a:r>
-            <a:r>
-              <a:rPr lang="ar-EG" b="1">
-                <a:effectLst/>
-              </a:rPr>
-              <a:t>تجاري</a:t>
-            </a:r>
-          </a:p>
-          <a:p>
-            <a:r>
-              <a:rPr lang="en-US" b="1">
-                <a:effectLst/>
-              </a:rPr>
-              <a:t>Code_main: </a:t>
-            </a:r>
-            <a:r>
-              <a:rPr lang="ar-EG" b="1">
-                <a:effectLst/>
-              </a:rPr>
-              <a:t>النشاط الرئيسي</a:t>
-            </a:r>
-            <a:endParaRPr lang="en-US" b="1">
-              <a:effectLst/>
-            </a:endParaRPr>
-          </a:p>
-          <a:p>
-            <a:r>
-              <a:rPr lang="en-US" b="1">
-                <a:effectLst/>
-              </a:rPr>
-              <a:t>Code: </a:t>
-            </a:r>
-            <a:r>
-              <a:rPr lang="ar-EG" b="1">
-                <a:effectLst/>
-              </a:rPr>
-              <a:t>النشاط الفرعى</a:t>
-            </a:r>
-          </a:p>
-          <a:p>
-            <a:r>
-              <a:rPr lang="en-US"/>
-              <a:t>Nature_enterprise: </a:t>
-            </a:r>
-            <a:r>
-              <a:rPr lang="ar-EG"/>
-              <a:t>النشاط التجاري</a:t>
-            </a:r>
-          </a:p>
-          <a:p>
-            <a:r>
-              <a:rPr lang="en-US"/>
-              <a:t>Type_enterprise: </a:t>
-            </a:r>
-            <a:r>
-              <a:rPr lang="ar-EG"/>
-              <a:t>طبيعة المنشأة</a:t>
-            </a:r>
-            <a:endParaRPr lang="en-US"/>
-          </a:p>
-          <a:p>
-            <a:r>
-              <a:rPr lang="en-US"/>
-              <a:t>Org_Id</a:t>
-            </a:r>
-          </a:p>
-          <a:p>
-            <a:endParaRPr lang="en-US"/>
-          </a:p>
-          <a:p>
-            <a:endParaRPr lang="ar-EG" b="1">
-              <a:effectLst/>
-            </a:endParaRPr>
-          </a:p>
-          <a:p>
-            <a:r>
-              <a:rPr lang="en-US"/>
-              <a:t>ICollection&lt;</a:t>
-            </a:r>
-            <a:r>
-              <a:rPr lang="en-US" b="1">
-                <a:solidFill>
-                  <a:srgbClr val="00B0F0"/>
-                </a:solidFill>
-              </a:rPr>
-              <a:t>Flow_Funding_request</a:t>
-            </a:r>
-            <a:r>
-              <a:rPr lang="en-US"/>
-              <a:t>&gt; </a:t>
-            </a:r>
-            <a:r>
-              <a:rPr lang="en-US" b="1">
                 <a:solidFill>
                   <a:srgbClr val="FF0000"/>
                 </a:solidFill>
               </a:rPr>
-              <a:t>Flow_Funding_request</a:t>
-            </a:r>
+              <a:t>[PK]</a:t>
+            </a:r>
+          </a:p>
+          <a:p>
             <a:endParaRPr lang="en-US" b="1">
               <a:solidFill>
                 <a:srgbClr val="FF0000"/>
               </a:solidFill>
-              <a:effectLst/>
             </a:endParaRPr>
-          </a:p>
-          <a:p>
-            <a:endParaRPr lang="en-US" sz="1800"/>
           </a:p>
         </p:txBody>
       </p:sp>
       <p:pic>
         <p:nvPicPr>
-          <p:cNvPr id="5" name="Picture 4">
+          <p:cNvPr id="8" name="Content Placeholder 4">
             <a:extLst>
               <a:ext uri="{FF2B5EF4-FFF2-40B4-BE49-F238E27FC236}">
-                <a16:creationId xmlns:a16="http://schemas.microsoft.com/office/drawing/2014/main" id="{402484BB-426D-0F9D-C948-4107D86BA9A9}"/>
+                <a16:creationId xmlns:a16="http://schemas.microsoft.com/office/drawing/2014/main" id="{5F698F2B-A00E-4F18-B669-C748A374EDF1}"/>
               </a:ext>
             </a:extLst>
           </p:cNvPr>
@@ -16905,48 +17581,25 @@
         </p:blipFill>
         <p:spPr>
           <a:xfrm>
-            <a:off x="3824748" y="2807862"/>
-            <a:ext cx="8359700" cy="550606"/>
+            <a:off x="5553042" y="717755"/>
+            <a:ext cx="6306106" cy="1012972"/>
           </a:xfrm>
           <a:prstGeom prst="rect">
             <a:avLst/>
           </a:prstGeom>
-        </p:spPr>
-      </p:pic>
-      <p:pic>
-        <p:nvPicPr>
-          <p:cNvPr id="7" name="Picture 6">
-            <a:extLst>
-              <a:ext uri="{FF2B5EF4-FFF2-40B4-BE49-F238E27FC236}">
-                <a16:creationId xmlns:a16="http://schemas.microsoft.com/office/drawing/2014/main" id="{F2B73201-E84B-4641-692B-6663995EC0DE}"/>
-              </a:ext>
-            </a:extLst>
-          </p:cNvPr>
-          <p:cNvPicPr>
-            <a:picLocks noChangeAspect="1"/>
-          </p:cNvPicPr>
-          <p:nvPr/>
-        </p:nvPicPr>
-        <p:blipFill>
-          <a:blip r:embed="rId3"/>
-          <a:stretch>
-            <a:fillRect/>
-          </a:stretch>
-        </p:blipFill>
-        <p:spPr>
-          <a:xfrm>
-            <a:off x="2654710" y="3499531"/>
-            <a:ext cx="9537290" cy="460432"/>
-          </a:xfrm>
-          <a:prstGeom prst="rect">
-            <a:avLst/>
-          </a:prstGeom>
+          <a:effectLst>
+            <a:outerShdw blurRad="25400" dir="17880000">
+              <a:srgbClr val="000000">
+                <a:alpha val="46000"/>
+              </a:srgbClr>
+            </a:outerShdw>
+          </a:effectLst>
         </p:spPr>
       </p:pic>
     </p:spTree>
     <p:extLst>
       <p:ext uri="{BB962C8B-B14F-4D97-AF65-F5344CB8AC3E}">
-        <p14:creationId xmlns:p14="http://schemas.microsoft.com/office/powerpoint/2010/main" val="3358242464"/>
+        <p14:creationId xmlns:p14="http://schemas.microsoft.com/office/powerpoint/2010/main" val="1793705591"/>
       </p:ext>
     </p:extLst>
   </p:cSld>
@@ -16978,7 +17631,7 @@
           <p:cNvPr id="2" name="Title 1">
             <a:extLst>
               <a:ext uri="{FF2B5EF4-FFF2-40B4-BE49-F238E27FC236}">
-                <a16:creationId xmlns:a16="http://schemas.microsoft.com/office/drawing/2014/main" id="{91937158-7743-9EE1-4BAF-D2210E79E2D1}"/>
+                <a16:creationId xmlns:a16="http://schemas.microsoft.com/office/drawing/2014/main" id="{59D0BE0D-D7D9-C836-9C7A-D44C993466C6}"/>
               </a:ext>
             </a:extLst>
           </p:cNvPr>
@@ -16991,12 +17644,14 @@
         </p:nvSpPr>
         <p:spPr>
           <a:xfrm>
-            <a:off x="913795" y="0"/>
-            <a:ext cx="10353762" cy="747252"/>
-          </a:xfrm>
-        </p:spPr>
-        <p:txBody>
-          <a:bodyPr/>
+            <a:off x="919119" y="0"/>
+            <a:ext cx="10353762" cy="698090"/>
+          </a:xfrm>
+        </p:spPr>
+        <p:txBody>
+          <a:bodyPr>
+            <a:normAutofit fontScale="90000"/>
+          </a:bodyPr>
           <a:lstStyle/>
           <a:p>
             <a:r>
@@ -17005,7 +17660,7 @@
                   <a:srgbClr val="FFFF00"/>
                 </a:solidFill>
               </a:rPr>
-              <a:t>SWF</a:t>
+              <a:t>TWF</a:t>
             </a:r>
             <a:r>
               <a:rPr lang="en-US"/>
@@ -17017,7 +17672,7 @@
                   <a:srgbClr val="FF0000"/>
                 </a:solidFill>
               </a:rPr>
-              <a:t>Flow_Sectors</a:t>
+              <a:t>Flow_Enterprises</a:t>
             </a:r>
           </a:p>
         </p:txBody>
@@ -17027,7 +17682,7 @@
           <p:cNvPr id="3" name="Content Placeholder 2">
             <a:extLst>
               <a:ext uri="{FF2B5EF4-FFF2-40B4-BE49-F238E27FC236}">
-                <a16:creationId xmlns:a16="http://schemas.microsoft.com/office/drawing/2014/main" id="{3191A6B9-0A9D-DC5E-EB63-BEA30659E4E3}"/>
+                <a16:creationId xmlns:a16="http://schemas.microsoft.com/office/drawing/2014/main" id="{B2BAA4F4-1B4B-9AB2-BD76-7AA41529A8EB}"/>
               </a:ext>
             </a:extLst>
           </p:cNvPr>
@@ -17040,45 +17695,145 @@
         </p:nvSpPr>
         <p:spPr>
           <a:xfrm>
-            <a:off x="304800" y="747252"/>
-            <a:ext cx="11552903" cy="5899353"/>
-          </a:xfrm>
-        </p:spPr>
-        <p:txBody>
-          <a:bodyPr/>
+            <a:off x="7552" y="698091"/>
+            <a:ext cx="12176896" cy="5987844"/>
+          </a:xfrm>
+        </p:spPr>
+        <p:txBody>
+          <a:bodyPr>
+            <a:normAutofit/>
+          </a:bodyPr>
           <a:lstStyle/>
           <a:p>
             <a:r>
-              <a:rPr lang="en-US"/>
-              <a:t>Code_Sectors </a:t>
-            </a:r>
-          </a:p>
-          <a:p>
-            <a:r>
-              <a:rPr lang="en-US"/>
-              <a:t>string name_ar</a:t>
-            </a:r>
-          </a:p>
-          <a:p>
-            <a:r>
-              <a:rPr lang="en-US"/>
-              <a:t>string name_eng</a:t>
-            </a:r>
-          </a:p>
-          <a:p>
-            <a:r>
-              <a:rPr lang="en-US"/>
-              <a:t>public virtual ICollection&lt;Flow_Enterprises&gt; Flow_Enterprises</a:t>
-            </a:r>
-          </a:p>
-          <a:p>
-            <a:r>
-              <a:rPr lang="en-US"/>
-              <a:t>public virtual ICollection&lt;Flow_Main_activity&gt; Flow_Main_activity</a:t>
-            </a:r>
-          </a:p>
-          <a:p>
+              <a:rPr lang="en-US" sz="1800"/>
+              <a:t>Enterprise_ID [PK], [identity]</a:t>
+            </a:r>
+          </a:p>
+          <a:p>
+            <a:r>
+              <a:rPr lang="en-US" sz="1800"/>
+              <a:t>Code_Sector: </a:t>
+            </a:r>
+            <a:r>
+              <a:rPr lang="ar-EG" b="1">
+                <a:effectLst/>
+              </a:rPr>
+              <a:t>القطاع</a:t>
+            </a:r>
+            <a:r>
+              <a:rPr lang="en-US" b="1">
+                <a:effectLst/>
+              </a:rPr>
+              <a:t>: </a:t>
+            </a:r>
+            <a:r>
+              <a:rPr lang="ar-EG" b="1">
+                <a:effectLst/>
+              </a:rPr>
+              <a:t>تجاري</a:t>
+            </a:r>
+          </a:p>
+          <a:p>
+            <a:r>
+              <a:rPr lang="en-US" b="1">
+                <a:effectLst/>
+              </a:rPr>
+              <a:t>Code_main: </a:t>
+            </a:r>
+            <a:r>
+              <a:rPr lang="ar-EG" b="1">
+                <a:effectLst/>
+              </a:rPr>
+              <a:t>النشاط الرئيسي</a:t>
+            </a:r>
+            <a:endParaRPr lang="en-US" b="1">
+              <a:effectLst/>
+            </a:endParaRPr>
+          </a:p>
+          <a:p>
+            <a:r>
+              <a:rPr lang="en-US" b="1">
+                <a:effectLst/>
+              </a:rPr>
+              <a:t>Code: </a:t>
+            </a:r>
+            <a:r>
+              <a:rPr lang="ar-EG" b="1">
+                <a:effectLst/>
+              </a:rPr>
+              <a:t>النشاط الفرعى</a:t>
+            </a:r>
+          </a:p>
+          <a:p>
+            <a:r>
+              <a:rPr lang="en-US"/>
+              <a:t>Nature_enterprise: </a:t>
+            </a:r>
+            <a:r>
+              <a:rPr lang="ar-EG"/>
+              <a:t>النشاط التجاري</a:t>
+            </a:r>
+          </a:p>
+          <a:p>
+            <a:r>
+              <a:rPr lang="en-US"/>
+              <a:t>Type_enterprise: </a:t>
+            </a:r>
+            <a:r>
+              <a:rPr lang="ar-EG"/>
+              <a:t>طبيعة المنشأة</a:t>
+            </a:r>
             <a:endParaRPr lang="en-US"/>
+          </a:p>
+          <a:p>
+            <a:r>
+              <a:rPr lang="en-US"/>
+              <a:t>Org_Id</a:t>
+            </a:r>
+          </a:p>
+          <a:p>
+            <a:endParaRPr lang="en-US"/>
+          </a:p>
+          <a:p>
+            <a:endParaRPr lang="ar-EG" b="1">
+              <a:effectLst/>
+            </a:endParaRPr>
+          </a:p>
+          <a:p>
+            <a:r>
+              <a:rPr lang="en-US"/>
+              <a:t>ICollection&lt;</a:t>
+            </a:r>
+            <a:r>
+              <a:rPr lang="en-US" b="1">
+                <a:solidFill>
+                  <a:srgbClr val="00B0F0"/>
+                </a:solidFill>
+              </a:rPr>
+              <a:t>Flow_Funding_request</a:t>
+            </a:r>
+            <a:r>
+              <a:rPr lang="en-US"/>
+              <a:t>&gt; </a:t>
+            </a:r>
+            <a:r>
+              <a:rPr lang="en-US" b="1">
+                <a:solidFill>
+                  <a:srgbClr val="FF0000"/>
+                </a:solidFill>
+              </a:rPr>
+              <a:t>Flow_Funding_request</a:t>
+            </a:r>
+            <a:endParaRPr lang="en-US" b="1">
+              <a:solidFill>
+                <a:srgbClr val="FF0000"/>
+              </a:solidFill>
+              <a:effectLst/>
+            </a:endParaRPr>
+          </a:p>
+          <a:p>
+            <a:endParaRPr lang="en-US" sz="1800"/>
           </a:p>
         </p:txBody>
       </p:sp>
@@ -17087,7 +17842,7 @@
           <p:cNvPr id="5" name="Picture 4">
             <a:extLst>
               <a:ext uri="{FF2B5EF4-FFF2-40B4-BE49-F238E27FC236}">
-                <a16:creationId xmlns:a16="http://schemas.microsoft.com/office/drawing/2014/main" id="{CCAF1E98-3135-028C-5CA3-C5AD3F870432}"/>
+                <a16:creationId xmlns:a16="http://schemas.microsoft.com/office/drawing/2014/main" id="{402484BB-426D-0F9D-C948-4107D86BA9A9}"/>
               </a:ext>
             </a:extLst>
           </p:cNvPr>
@@ -17104,8 +17859,38 @@
         </p:blipFill>
         <p:spPr>
           <a:xfrm>
-            <a:off x="8233810" y="674455"/>
-            <a:ext cx="3486242" cy="1419851"/>
+            <a:off x="3824748" y="2807862"/>
+            <a:ext cx="8359700" cy="550606"/>
+          </a:xfrm>
+          <a:prstGeom prst="rect">
+            <a:avLst/>
+          </a:prstGeom>
+        </p:spPr>
+      </p:pic>
+      <p:pic>
+        <p:nvPicPr>
+          <p:cNvPr id="7" name="Picture 6">
+            <a:extLst>
+              <a:ext uri="{FF2B5EF4-FFF2-40B4-BE49-F238E27FC236}">
+                <a16:creationId xmlns:a16="http://schemas.microsoft.com/office/drawing/2014/main" id="{F2B73201-E84B-4641-692B-6663995EC0DE}"/>
+              </a:ext>
+            </a:extLst>
+          </p:cNvPr>
+          <p:cNvPicPr>
+            <a:picLocks noChangeAspect="1"/>
+          </p:cNvPicPr>
+          <p:nvPr/>
+        </p:nvPicPr>
+        <p:blipFill>
+          <a:blip r:embed="rId3"/>
+          <a:stretch>
+            <a:fillRect/>
+          </a:stretch>
+        </p:blipFill>
+        <p:spPr>
+          <a:xfrm>
+            <a:off x="2654710" y="3499531"/>
+            <a:ext cx="9537290" cy="460432"/>
           </a:xfrm>
           <a:prstGeom prst="rect">
             <a:avLst/>
@@ -17115,7 +17900,7 @@
     </p:spTree>
     <p:extLst>
       <p:ext uri="{BB962C8B-B14F-4D97-AF65-F5344CB8AC3E}">
-        <p14:creationId xmlns:p14="http://schemas.microsoft.com/office/powerpoint/2010/main" val="1373041962"/>
+        <p14:creationId xmlns:p14="http://schemas.microsoft.com/office/powerpoint/2010/main" val="3358242464"/>
       </p:ext>
     </p:extLst>
   </p:cSld>
@@ -17147,7 +17932,7 @@
           <p:cNvPr id="2" name="Title 1">
             <a:extLst>
               <a:ext uri="{FF2B5EF4-FFF2-40B4-BE49-F238E27FC236}">
-                <a16:creationId xmlns:a16="http://schemas.microsoft.com/office/drawing/2014/main" id="{B50DD817-260C-AF04-11DE-8E1E001CB164}"/>
+                <a16:creationId xmlns:a16="http://schemas.microsoft.com/office/drawing/2014/main" id="{91937158-7743-9EE1-4BAF-D2210E79E2D1}"/>
               </a:ext>
             </a:extLst>
           </p:cNvPr>
@@ -17160,14 +17945,12 @@
         </p:nvSpPr>
         <p:spPr>
           <a:xfrm>
-            <a:off x="919119" y="0"/>
-            <a:ext cx="10353762" cy="599768"/>
-          </a:xfrm>
-        </p:spPr>
-        <p:txBody>
-          <a:bodyPr>
-            <a:normAutofit fontScale="90000"/>
-          </a:bodyPr>
+            <a:off x="913795" y="0"/>
+            <a:ext cx="10353762" cy="747252"/>
+          </a:xfrm>
+        </p:spPr>
+        <p:txBody>
+          <a:bodyPr/>
           <a:lstStyle/>
           <a:p>
             <a:r>
@@ -17188,7 +17971,7 @@
                   <a:srgbClr val="FF0000"/>
                 </a:solidFill>
               </a:rPr>
-              <a:t>Flow_Main_activity</a:t>
+              <a:t>Flow_Sectors</a:t>
             </a:r>
           </a:p>
         </p:txBody>
@@ -17198,7 +17981,7 @@
           <p:cNvPr id="3" name="Content Placeholder 2">
             <a:extLst>
               <a:ext uri="{FF2B5EF4-FFF2-40B4-BE49-F238E27FC236}">
-                <a16:creationId xmlns:a16="http://schemas.microsoft.com/office/drawing/2014/main" id="{F7D378FD-9F52-03D3-BD02-7346B02022EE}"/>
+                <a16:creationId xmlns:a16="http://schemas.microsoft.com/office/drawing/2014/main" id="{3191A6B9-0A9D-DC5E-EB63-BEA30659E4E3}"/>
               </a:ext>
             </a:extLst>
           </p:cNvPr>
@@ -17211,80 +17994,45 @@
         </p:nvSpPr>
         <p:spPr>
           <a:xfrm>
-            <a:off x="0" y="599769"/>
-            <a:ext cx="11267557" cy="6096000"/>
-          </a:xfrm>
-        </p:spPr>
-        <p:txBody>
-          <a:bodyPr>
-            <a:normAutofit/>
-          </a:bodyPr>
+            <a:off x="304800" y="747252"/>
+            <a:ext cx="11552903" cy="5899353"/>
+          </a:xfrm>
+        </p:spPr>
+        <p:txBody>
+          <a:bodyPr/>
           <a:lstStyle/>
           <a:p>
             <a:r>
               <a:rPr lang="en-US"/>
-              <a:t> int Code_Main </a:t>
-            </a:r>
-          </a:p>
-          <a:p>
-            <a:r>
-              <a:rPr lang="en-US"/>
-              <a:t> string name_ar </a:t>
-            </a:r>
-          </a:p>
-          <a:p>
-            <a:r>
-              <a:rPr lang="en-US"/>
-              <a:t>string name_eng </a:t>
-            </a:r>
-          </a:p>
-          <a:p>
-            <a:r>
-              <a:rPr lang="en-US"/>
-              <a:t>int Code_Sectors </a:t>
-            </a:r>
-          </a:p>
-          <a:p>
-            <a:r>
-              <a:rPr lang="en-US"/>
-              <a:t>int? Data_Migration </a:t>
-            </a:r>
-          </a:p>
-          <a:p>
-            <a:r>
-              <a:rPr lang="en-US"/>
-              <a:t>virtual ICollection&lt;Flow_Enterprises&gt; Flow_Enterprises </a:t>
-            </a:r>
-          </a:p>
-          <a:p>
-            <a:r>
-              <a:rPr lang="en-US"/>
-              <a:t>Flow_Sectors Flow_Sectors </a:t>
-            </a:r>
-          </a:p>
-          <a:p>
-            <a:r>
-              <a:rPr lang="en-US"/>
-              <a:t>ICollection&lt;</a:t>
-            </a:r>
-            <a:r>
-              <a:rPr lang="en-US">
-                <a:solidFill>
-                  <a:srgbClr val="FF0000"/>
-                </a:solidFill>
-              </a:rPr>
-              <a:t>Flow_Sub_activities</a:t>
-            </a:r>
-            <a:r>
-              <a:rPr lang="en-US"/>
-              <a:t>&gt; Flow_Sub_activities </a:t>
-            </a:r>
-          </a:p>
-          <a:p>
-            <a:r>
-              <a:rPr lang="en-US"/>
-              <a:t>ICollection&lt;Nano_Business_Owner&gt; Nano_Business_Owner </a:t>
-            </a:r>
+              <a:t>Code_Sectors </a:t>
+            </a:r>
+          </a:p>
+          <a:p>
+            <a:r>
+              <a:rPr lang="en-US"/>
+              <a:t>string name_ar</a:t>
+            </a:r>
+          </a:p>
+          <a:p>
+            <a:r>
+              <a:rPr lang="en-US"/>
+              <a:t>string name_eng</a:t>
+            </a:r>
+          </a:p>
+          <a:p>
+            <a:r>
+              <a:rPr lang="en-US"/>
+              <a:t>public virtual ICollection&lt;Flow_Enterprises&gt; Flow_Enterprises</a:t>
+            </a:r>
+          </a:p>
+          <a:p>
+            <a:r>
+              <a:rPr lang="en-US"/>
+              <a:t>public virtual ICollection&lt;Flow_Main_activity&gt; Flow_Main_activity</a:t>
+            </a:r>
+          </a:p>
+          <a:p>
+            <a:endParaRPr lang="en-US"/>
           </a:p>
         </p:txBody>
       </p:sp>
@@ -17293,7 +18041,7 @@
           <p:cNvPr id="5" name="Picture 4">
             <a:extLst>
               <a:ext uri="{FF2B5EF4-FFF2-40B4-BE49-F238E27FC236}">
-                <a16:creationId xmlns:a16="http://schemas.microsoft.com/office/drawing/2014/main" id="{6381B033-0C5D-35D4-B6AA-90CFA43B0169}"/>
+                <a16:creationId xmlns:a16="http://schemas.microsoft.com/office/drawing/2014/main" id="{CCAF1E98-3135-028C-5CA3-C5AD3F870432}"/>
               </a:ext>
             </a:extLst>
           </p:cNvPr>
@@ -17310,8 +18058,8 @@
         </p:blipFill>
         <p:spPr>
           <a:xfrm>
-            <a:off x="6723254" y="738587"/>
-            <a:ext cx="5174106" cy="1864727"/>
+            <a:off x="8233810" y="674455"/>
+            <a:ext cx="3486242" cy="1419851"/>
           </a:xfrm>
           <a:prstGeom prst="rect">
             <a:avLst/>
@@ -17321,7 +18069,7 @@
     </p:spTree>
     <p:extLst>
       <p:ext uri="{BB962C8B-B14F-4D97-AF65-F5344CB8AC3E}">
-        <p14:creationId xmlns:p14="http://schemas.microsoft.com/office/powerpoint/2010/main" val="1436350754"/>
+        <p14:creationId xmlns:p14="http://schemas.microsoft.com/office/powerpoint/2010/main" val="1373041962"/>
       </p:ext>
     </p:extLst>
   </p:cSld>
@@ -17353,7 +18101,7 @@
           <p:cNvPr id="2" name="Title 1">
             <a:extLst>
               <a:ext uri="{FF2B5EF4-FFF2-40B4-BE49-F238E27FC236}">
-                <a16:creationId xmlns:a16="http://schemas.microsoft.com/office/drawing/2014/main" id="{8EE48D99-553D-4B5A-62F8-F30EBF2FF581}"/>
+                <a16:creationId xmlns:a16="http://schemas.microsoft.com/office/drawing/2014/main" id="{B50DD817-260C-AF04-11DE-8E1E001CB164}"/>
               </a:ext>
             </a:extLst>
           </p:cNvPr>
@@ -17366,8 +18114,8 @@
         </p:nvSpPr>
         <p:spPr>
           <a:xfrm>
-            <a:off x="913795" y="78659"/>
-            <a:ext cx="10353762" cy="678426"/>
+            <a:off x="919119" y="0"/>
+            <a:ext cx="10353762" cy="599768"/>
           </a:xfrm>
         </p:spPr>
         <p:txBody>
@@ -17394,7 +18142,7 @@
                   <a:srgbClr val="FF0000"/>
                 </a:solidFill>
               </a:rPr>
-              <a:t>Flow_Sub_activities</a:t>
+              <a:t>Flow_Main_activity</a:t>
             </a:r>
           </a:p>
         </p:txBody>
@@ -17404,7 +18152,7 @@
           <p:cNvPr id="3" name="Content Placeholder 2">
             <a:extLst>
               <a:ext uri="{FF2B5EF4-FFF2-40B4-BE49-F238E27FC236}">
-                <a16:creationId xmlns:a16="http://schemas.microsoft.com/office/drawing/2014/main" id="{B622469A-E6CE-8E6D-FEDC-224855C38A77}"/>
+                <a16:creationId xmlns:a16="http://schemas.microsoft.com/office/drawing/2014/main" id="{F7D378FD-9F52-03D3-BD02-7346B02022EE}"/>
               </a:ext>
             </a:extLst>
           </p:cNvPr>
@@ -17417,65 +18165,79 @@
         </p:nvSpPr>
         <p:spPr>
           <a:xfrm>
-            <a:off x="363794" y="757085"/>
-            <a:ext cx="11670890" cy="5751870"/>
-          </a:xfrm>
-        </p:spPr>
-        <p:txBody>
-          <a:bodyPr/>
+            <a:off x="0" y="599769"/>
+            <a:ext cx="11267557" cy="6096000"/>
+          </a:xfrm>
+        </p:spPr>
+        <p:txBody>
+          <a:bodyPr>
+            <a:normAutofit/>
+          </a:bodyPr>
           <a:lstStyle/>
           <a:p>
             <a:r>
               <a:rPr lang="en-US"/>
-              <a:t>Code</a:t>
-            </a:r>
-          </a:p>
-          <a:p>
-            <a:r>
-              <a:rPr lang="en-US"/>
-              <a:t>name_ar</a:t>
-            </a:r>
-          </a:p>
-          <a:p>
-            <a:r>
-              <a:rPr lang="en-US"/>
-              <a:t>name_eng</a:t>
-            </a:r>
-          </a:p>
-          <a:p>
-            <a:r>
-              <a:rPr lang="en-US"/>
-              <a:t>Code_Main [FK]</a:t>
-            </a:r>
-          </a:p>
-          <a:p>
-            <a:r>
-              <a:rPr lang="en-US"/>
-              <a:t>Flag_Block</a:t>
-            </a:r>
-          </a:p>
-          <a:p>
-            <a:r>
-              <a:rPr lang="en-US"/>
-              <a:t>Data_Migration</a:t>
-            </a:r>
-          </a:p>
-          <a:p>
-            <a:r>
-              <a:rPr lang="en-US"/>
-              <a:t>Flow_Main_activity Flow_Main_activity</a:t>
-            </a:r>
-          </a:p>
-          <a:p>
-            <a:r>
-              <a:rPr lang="en-US"/>
-              <a:t>ICollection&lt;Flow_Enterprises&gt; Flow_Enterprises</a:t>
-            </a:r>
-          </a:p>
-          <a:p>
-            <a:r>
-              <a:rPr lang="en-US"/>
-              <a:t>ICollection&lt;Nano_Business_Owner&gt; Nano_Business_Owner</a:t>
+              <a:t> int Code_Main </a:t>
+            </a:r>
+          </a:p>
+          <a:p>
+            <a:r>
+              <a:rPr lang="en-US"/>
+              <a:t> string name_ar </a:t>
+            </a:r>
+          </a:p>
+          <a:p>
+            <a:r>
+              <a:rPr lang="en-US"/>
+              <a:t>string name_eng </a:t>
+            </a:r>
+          </a:p>
+          <a:p>
+            <a:r>
+              <a:rPr lang="en-US"/>
+              <a:t>int Code_Sectors </a:t>
+            </a:r>
+          </a:p>
+          <a:p>
+            <a:r>
+              <a:rPr lang="en-US"/>
+              <a:t>int? Data_Migration </a:t>
+            </a:r>
+          </a:p>
+          <a:p>
+            <a:r>
+              <a:rPr lang="en-US"/>
+              <a:t>virtual ICollection&lt;Flow_Enterprises&gt; Flow_Enterprises </a:t>
+            </a:r>
+          </a:p>
+          <a:p>
+            <a:r>
+              <a:rPr lang="en-US"/>
+              <a:t>Flow_Sectors Flow_Sectors </a:t>
+            </a:r>
+          </a:p>
+          <a:p>
+            <a:r>
+              <a:rPr lang="en-US"/>
+              <a:t>ICollection&lt;</a:t>
+            </a:r>
+            <a:r>
+              <a:rPr lang="en-US">
+                <a:solidFill>
+                  <a:srgbClr val="FF0000"/>
+                </a:solidFill>
+              </a:rPr>
+              <a:t>Flow_Sub_activities</a:t>
+            </a:r>
+            <a:r>
+              <a:rPr lang="en-US"/>
+              <a:t>&gt; Flow_Sub_activities </a:t>
+            </a:r>
+          </a:p>
+          <a:p>
+            <a:r>
+              <a:rPr lang="en-US"/>
+              <a:t>ICollection&lt;Nano_Business_Owner&gt; Nano_Business_Owner </a:t>
             </a:r>
           </a:p>
         </p:txBody>
@@ -17485,7 +18247,7 @@
           <p:cNvPr id="5" name="Picture 4">
             <a:extLst>
               <a:ext uri="{FF2B5EF4-FFF2-40B4-BE49-F238E27FC236}">
-                <a16:creationId xmlns:a16="http://schemas.microsoft.com/office/drawing/2014/main" id="{298D9C30-50D0-9E8F-825A-10BEB70F8038}"/>
+                <a16:creationId xmlns:a16="http://schemas.microsoft.com/office/drawing/2014/main" id="{6381B033-0C5D-35D4-B6AA-90CFA43B0169}"/>
               </a:ext>
             </a:extLst>
           </p:cNvPr>
@@ -17502,8 +18264,8 @@
         </p:blipFill>
         <p:spPr>
           <a:xfrm>
-            <a:off x="6527612" y="757085"/>
-            <a:ext cx="5428415" cy="2738660"/>
+            <a:off x="6723254" y="738587"/>
+            <a:ext cx="5174106" cy="1864727"/>
           </a:xfrm>
           <a:prstGeom prst="rect">
             <a:avLst/>
@@ -17513,7 +18275,7 @@
     </p:spTree>
     <p:extLst>
       <p:ext uri="{BB962C8B-B14F-4D97-AF65-F5344CB8AC3E}">
-        <p14:creationId xmlns:p14="http://schemas.microsoft.com/office/powerpoint/2010/main" val="2120671679"/>
+        <p14:creationId xmlns:p14="http://schemas.microsoft.com/office/powerpoint/2010/main" val="1436350754"/>
       </p:ext>
     </p:extLst>
   </p:cSld>
@@ -17545,7 +18307,7 @@
           <p:cNvPr id="2" name="Title 1">
             <a:extLst>
               <a:ext uri="{FF2B5EF4-FFF2-40B4-BE49-F238E27FC236}">
-                <a16:creationId xmlns:a16="http://schemas.microsoft.com/office/drawing/2014/main" id="{A76C32AC-2553-DF57-69EF-10F25DFBA585}"/>
+                <a16:creationId xmlns:a16="http://schemas.microsoft.com/office/drawing/2014/main" id="{8EE48D99-553D-4B5A-62F8-F30EBF2FF581}"/>
               </a:ext>
             </a:extLst>
           </p:cNvPr>
@@ -17558,8 +18320,8 @@
         </p:nvSpPr>
         <p:spPr>
           <a:xfrm>
-            <a:off x="913795" y="0"/>
-            <a:ext cx="10353762" cy="609600"/>
+            <a:off x="913795" y="78659"/>
+            <a:ext cx="10353762" cy="678426"/>
           </a:xfrm>
         </p:spPr>
         <p:txBody>
@@ -17571,10 +18333,22 @@
             <a:r>
               <a:rPr lang="en-US" b="1">
                 <a:solidFill>
+                  <a:srgbClr val="FFFF00"/>
+                </a:solidFill>
+              </a:rPr>
+              <a:t>SWF</a:t>
+            </a:r>
+            <a:r>
+              <a:rPr lang="en-US"/>
+              <a:t>.</a:t>
+            </a:r>
+            <a:r>
+              <a:rPr lang="en-US" b="1">
+                <a:solidFill>
                   <a:srgbClr val="FF0000"/>
                 </a:solidFill>
               </a:rPr>
-              <a:t>Company entity</a:t>
+              <a:t>Flow_Sub_activities</a:t>
             </a:r>
           </a:p>
         </p:txBody>
@@ -17584,7 +18358,7 @@
           <p:cNvPr id="3" name="Content Placeholder 2">
             <a:extLst>
               <a:ext uri="{FF2B5EF4-FFF2-40B4-BE49-F238E27FC236}">
-                <a16:creationId xmlns:a16="http://schemas.microsoft.com/office/drawing/2014/main" id="{301C27C4-CEF0-6A83-1EE8-4CA6A731E206}"/>
+                <a16:creationId xmlns:a16="http://schemas.microsoft.com/office/drawing/2014/main" id="{B622469A-E6CE-8E6D-FEDC-224855C38A77}"/>
               </a:ext>
             </a:extLst>
           </p:cNvPr>
@@ -17597,8 +18371,8 @@
         </p:nvSpPr>
         <p:spPr>
           <a:xfrm>
-            <a:off x="285135" y="609600"/>
-            <a:ext cx="11700388" cy="6095999"/>
+            <a:off x="363794" y="757085"/>
+            <a:ext cx="11670890" cy="5751870"/>
           </a:xfrm>
         </p:spPr>
         <p:txBody>
@@ -17607,34 +18381,93 @@
           <a:p>
             <a:r>
               <a:rPr lang="en-US"/>
-              <a:t>int </a:t>
-            </a:r>
-            <a:r>
-              <a:rPr lang="en-US" err="1"/>
-              <a:t>ComId</a:t>
-            </a:r>
-            <a:endParaRPr lang="en-US"/>
-          </a:p>
-          <a:p>
-            <a:r>
-              <a:rPr lang="en-US" err="1"/>
-              <a:t>ComNameAR</a:t>
-            </a:r>
-            <a:endParaRPr lang="en-US"/>
-          </a:p>
-          <a:p>
-            <a:r>
-              <a:rPr lang="en-US" err="1"/>
-              <a:t>ComNameEn</a:t>
-            </a:r>
-            <a:endParaRPr lang="en-US"/>
-          </a:p>
-        </p:txBody>
-      </p:sp>
+              <a:t>Code</a:t>
+            </a:r>
+          </a:p>
+          <a:p>
+            <a:r>
+              <a:rPr lang="en-US"/>
+              <a:t>name_ar</a:t>
+            </a:r>
+          </a:p>
+          <a:p>
+            <a:r>
+              <a:rPr lang="en-US"/>
+              <a:t>name_eng</a:t>
+            </a:r>
+          </a:p>
+          <a:p>
+            <a:r>
+              <a:rPr lang="en-US"/>
+              <a:t>Code_Main [FK]</a:t>
+            </a:r>
+          </a:p>
+          <a:p>
+            <a:r>
+              <a:rPr lang="en-US"/>
+              <a:t>Flag_Block</a:t>
+            </a:r>
+          </a:p>
+          <a:p>
+            <a:r>
+              <a:rPr lang="en-US"/>
+              <a:t>Data_Migration</a:t>
+            </a:r>
+          </a:p>
+          <a:p>
+            <a:r>
+              <a:rPr lang="en-US"/>
+              <a:t>Flow_Main_activity Flow_Main_activity</a:t>
+            </a:r>
+          </a:p>
+          <a:p>
+            <a:r>
+              <a:rPr lang="en-US"/>
+              <a:t>ICollection&lt;Flow_Enterprises&gt; Flow_Enterprises</a:t>
+            </a:r>
+          </a:p>
+          <a:p>
+            <a:r>
+              <a:rPr lang="en-US"/>
+              <a:t>ICollection&lt;Nano_Business_Owner&gt; Nano_Business_Owner</a:t>
+            </a:r>
+          </a:p>
+        </p:txBody>
+      </p:sp>
+      <p:pic>
+        <p:nvPicPr>
+          <p:cNvPr id="5" name="Picture 4">
+            <a:extLst>
+              <a:ext uri="{FF2B5EF4-FFF2-40B4-BE49-F238E27FC236}">
+                <a16:creationId xmlns:a16="http://schemas.microsoft.com/office/drawing/2014/main" id="{298D9C30-50D0-9E8F-825A-10BEB70F8038}"/>
+              </a:ext>
+            </a:extLst>
+          </p:cNvPr>
+          <p:cNvPicPr>
+            <a:picLocks noChangeAspect="1"/>
+          </p:cNvPicPr>
+          <p:nvPr/>
+        </p:nvPicPr>
+        <p:blipFill>
+          <a:blip r:embed="rId2"/>
+          <a:stretch>
+            <a:fillRect/>
+          </a:stretch>
+        </p:blipFill>
+        <p:spPr>
+          <a:xfrm>
+            <a:off x="6527612" y="757085"/>
+            <a:ext cx="5428415" cy="2738660"/>
+          </a:xfrm>
+          <a:prstGeom prst="rect">
+            <a:avLst/>
+          </a:prstGeom>
+        </p:spPr>
+      </p:pic>
     </p:spTree>
     <p:extLst>
       <p:ext uri="{BB962C8B-B14F-4D97-AF65-F5344CB8AC3E}">
-        <p14:creationId xmlns:p14="http://schemas.microsoft.com/office/powerpoint/2010/main" val="2911064299"/>
+        <p14:creationId xmlns:p14="http://schemas.microsoft.com/office/powerpoint/2010/main" val="2120671679"/>
       </p:ext>
     </p:extLst>
   </p:cSld>
@@ -17666,7 +18499,7 @@
           <p:cNvPr id="2" name="Title 1">
             <a:extLst>
               <a:ext uri="{FF2B5EF4-FFF2-40B4-BE49-F238E27FC236}">
-                <a16:creationId xmlns:a16="http://schemas.microsoft.com/office/drawing/2014/main" id="{68F406B8-441A-11E8-B385-FD94F50259DC}"/>
+                <a16:creationId xmlns:a16="http://schemas.microsoft.com/office/drawing/2014/main" id="{A76C32AC-2553-DF57-69EF-10F25DFBA585}"/>
               </a:ext>
             </a:extLst>
           </p:cNvPr>
@@ -17680,7 +18513,7 @@
         <p:spPr>
           <a:xfrm>
             <a:off x="913795" y="0"/>
-            <a:ext cx="10353762" cy="471948"/>
+            <a:ext cx="10353762" cy="609600"/>
           </a:xfrm>
         </p:spPr>
         <p:txBody>
@@ -17690,20 +18523,12 @@
           <a:lstStyle/>
           <a:p>
             <a:r>
-              <a:rPr lang="en-US" b="1" err="1">
+              <a:rPr lang="en-US" b="1">
                 <a:solidFill>
                   <a:srgbClr val="FF0000"/>
                 </a:solidFill>
               </a:rPr>
-              <a:t>Acc_Chart_Account</a:t>
-            </a:r>
-            <a:r>
-              <a:rPr lang="en-US" b="1">
-                <a:solidFill>
-                  <a:srgbClr val="FF0000"/>
-                </a:solidFill>
-              </a:rPr>
-              <a:t> entity</a:t>
+              <a:t>Company entity</a:t>
             </a:r>
           </a:p>
         </p:txBody>
@@ -17713,7 +18538,7 @@
           <p:cNvPr id="3" name="Content Placeholder 2">
             <a:extLst>
               <a:ext uri="{FF2B5EF4-FFF2-40B4-BE49-F238E27FC236}">
-                <a16:creationId xmlns:a16="http://schemas.microsoft.com/office/drawing/2014/main" id="{0C4B6636-C47E-9A5C-7DAD-A3E52C048CAB}"/>
+                <a16:creationId xmlns:a16="http://schemas.microsoft.com/office/drawing/2014/main" id="{301C27C4-CEF0-6A83-1EE8-4CA6A731E206}"/>
               </a:ext>
             </a:extLst>
           </p:cNvPr>
@@ -17726,8 +18551,8 @@
         </p:nvSpPr>
         <p:spPr>
           <a:xfrm>
-            <a:off x="913795" y="471949"/>
-            <a:ext cx="10353762" cy="5319252"/>
+            <a:off x="285135" y="609600"/>
+            <a:ext cx="11700388" cy="6095999"/>
           </a:xfrm>
         </p:spPr>
         <p:txBody>
@@ -17736,15 +18561,26 @@
           <a:p>
             <a:r>
               <a:rPr lang="en-US"/>
-              <a:t>namespace </a:t>
+              <a:t>int </a:t>
             </a:r>
             <a:r>
               <a:rPr lang="en-US" err="1"/>
-              <a:t>Tamweely.Infrastruture.Data.Project_Modules.Accounts</a:t>
+              <a:t>ComId</a:t>
             </a:r>
             <a:endParaRPr lang="en-US"/>
           </a:p>
           <a:p>
+            <a:r>
+              <a:rPr lang="en-US" err="1"/>
+              <a:t>ComNameAR</a:t>
+            </a:r>
+            <a:endParaRPr lang="en-US"/>
+          </a:p>
+          <a:p>
+            <a:r>
+              <a:rPr lang="en-US" err="1"/>
+              <a:t>ComNameEn</a:t>
+            </a:r>
             <a:endParaRPr lang="en-US"/>
           </a:p>
         </p:txBody>
@@ -17752,7 +18588,7 @@
     </p:spTree>
     <p:extLst>
       <p:ext uri="{BB962C8B-B14F-4D97-AF65-F5344CB8AC3E}">
-        <p14:creationId xmlns:p14="http://schemas.microsoft.com/office/powerpoint/2010/main" val="999857900"/>
+        <p14:creationId xmlns:p14="http://schemas.microsoft.com/office/powerpoint/2010/main" val="2911064299"/>
       </p:ext>
     </p:extLst>
   </p:cSld>
@@ -17784,7 +18620,7 @@
           <p:cNvPr id="2" name="Title 1">
             <a:extLst>
               <a:ext uri="{FF2B5EF4-FFF2-40B4-BE49-F238E27FC236}">
-                <a16:creationId xmlns:a16="http://schemas.microsoft.com/office/drawing/2014/main" id="{9D736718-CD91-8036-6E3E-58E76553F235}"/>
+                <a16:creationId xmlns:a16="http://schemas.microsoft.com/office/drawing/2014/main" id="{68F406B8-441A-11E8-B385-FD94F50259DC}"/>
               </a:ext>
             </a:extLst>
           </p:cNvPr>
@@ -17798,7 +18634,7 @@
         <p:spPr>
           <a:xfrm>
             <a:off x="913795" y="0"/>
-            <a:ext cx="10353762" cy="530942"/>
+            <a:ext cx="10353762" cy="471948"/>
           </a:xfrm>
         </p:spPr>
         <p:txBody>
@@ -17808,20 +18644,20 @@
           <a:lstStyle/>
           <a:p>
             <a:r>
+              <a:rPr lang="en-US" b="1" err="1">
+                <a:solidFill>
+                  <a:srgbClr val="FF0000"/>
+                </a:solidFill>
+              </a:rPr>
+              <a:t>Acc_Chart_Account</a:t>
+            </a:r>
+            <a:r>
               <a:rPr lang="en-US" b="1">
                 <a:solidFill>
-                  <a:srgbClr val="FFFF00"/>
-                </a:solidFill>
-              </a:rPr>
-              <a:t>SWF</a:t>
-            </a:r>
-            <a:r>
-              <a:rPr lang="en-US" b="1">
-                <a:solidFill>
                   <a:srgbClr val="FF0000"/>
                 </a:solidFill>
               </a:rPr>
-              <a:t>.Flow_Relationships</a:t>
+              <a:t> entity</a:t>
             </a:r>
           </a:p>
         </p:txBody>
@@ -17831,7 +18667,7 @@
           <p:cNvPr id="3" name="Content Placeholder 2">
             <a:extLst>
               <a:ext uri="{FF2B5EF4-FFF2-40B4-BE49-F238E27FC236}">
-                <a16:creationId xmlns:a16="http://schemas.microsoft.com/office/drawing/2014/main" id="{9D71FCDA-98E2-D135-C67C-DB3B026CF36C}"/>
+                <a16:creationId xmlns:a16="http://schemas.microsoft.com/office/drawing/2014/main" id="{0C4B6636-C47E-9A5C-7DAD-A3E52C048CAB}"/>
               </a:ext>
             </a:extLst>
           </p:cNvPr>
@@ -17844,8 +18680,8 @@
         </p:nvSpPr>
         <p:spPr>
           <a:xfrm>
-            <a:off x="353961" y="530942"/>
-            <a:ext cx="11552904" cy="6115663"/>
+            <a:off x="913795" y="471949"/>
+            <a:ext cx="10353762" cy="5319252"/>
           </a:xfrm>
         </p:spPr>
         <p:txBody>
@@ -17854,61 +18690,23 @@
           <a:p>
             <a:r>
               <a:rPr lang="en-US"/>
-              <a:t> code_relation: int [PK]</a:t>
-            </a:r>
-          </a:p>
-          <a:p>
-            <a:r>
-              <a:rPr lang="en-US"/>
-              <a:t> name_Ar : string </a:t>
-            </a:r>
-          </a:p>
-          <a:p>
-            <a:r>
-              <a:rPr lang="en-US"/>
-              <a:t> name_Eng : string</a:t>
-            </a:r>
-            <a:endParaRPr lang="ar-EG"/>
-          </a:p>
-          <a:p>
+              <a:t>namespace </a:t>
+            </a:r>
+            <a:r>
+              <a:rPr lang="en-US" err="1"/>
+              <a:t>Tamweely.Infrastruture.Data.Project_Modules.Accounts</a:t>
+            </a:r>
             <a:endParaRPr lang="en-US"/>
           </a:p>
-        </p:txBody>
-      </p:sp>
-      <p:pic>
-        <p:nvPicPr>
-          <p:cNvPr id="7" name="Picture 6">
-            <a:extLst>
-              <a:ext uri="{FF2B5EF4-FFF2-40B4-BE49-F238E27FC236}">
-                <a16:creationId xmlns:a16="http://schemas.microsoft.com/office/drawing/2014/main" id="{95B5E2DA-2922-4310-7254-CE8696B703F4}"/>
-              </a:ext>
-            </a:extLst>
-          </p:cNvPr>
-          <p:cNvPicPr>
-            <a:picLocks noChangeAspect="1"/>
-          </p:cNvPicPr>
-          <p:nvPr/>
-        </p:nvPicPr>
-        <p:blipFill>
-          <a:blip r:embed="rId2"/>
-          <a:stretch>
-            <a:fillRect/>
-          </a:stretch>
-        </p:blipFill>
-        <p:spPr>
-          <a:xfrm>
-            <a:off x="3988992" y="704793"/>
-            <a:ext cx="2107007" cy="1546344"/>
-          </a:xfrm>
-          <a:prstGeom prst="rect">
-            <a:avLst/>
-          </a:prstGeom>
-        </p:spPr>
-      </p:pic>
+          <a:p>
+            <a:endParaRPr lang="en-US"/>
+          </a:p>
+        </p:txBody>
+      </p:sp>
     </p:spTree>
     <p:extLst>
       <p:ext uri="{BB962C8B-B14F-4D97-AF65-F5344CB8AC3E}">
-        <p14:creationId xmlns:p14="http://schemas.microsoft.com/office/powerpoint/2010/main" val="2209266919"/>
+        <p14:creationId xmlns:p14="http://schemas.microsoft.com/office/powerpoint/2010/main" val="999857900"/>
       </p:ext>
     </p:extLst>
   </p:cSld>
@@ -17940,7 +18738,7 @@
           <p:cNvPr id="2" name="Title 1">
             <a:extLst>
               <a:ext uri="{FF2B5EF4-FFF2-40B4-BE49-F238E27FC236}">
-                <a16:creationId xmlns:a16="http://schemas.microsoft.com/office/drawing/2014/main" id="{FC644BE0-7FCA-9F05-5A0B-F1E727580102}"/>
+                <a16:creationId xmlns:a16="http://schemas.microsoft.com/office/drawing/2014/main" id="{9D736718-CD91-8036-6E3E-58E76553F235}"/>
               </a:ext>
             </a:extLst>
           </p:cNvPr>
@@ -17954,7 +18752,7 @@
         <p:spPr>
           <a:xfrm>
             <a:off x="913795" y="0"/>
-            <a:ext cx="10353762" cy="491613"/>
+            <a:ext cx="10353762" cy="530942"/>
           </a:xfrm>
         </p:spPr>
         <p:txBody>
@@ -17972,16 +18770,12 @@
               <a:t>SWF</a:t>
             </a:r>
             <a:r>
-              <a:rPr lang="en-US" b="1"/>
-              <a:t>.</a:t>
-            </a:r>
-            <a:r>
               <a:rPr lang="en-US" b="1">
                 <a:solidFill>
                   <a:srgbClr val="FF0000"/>
                 </a:solidFill>
               </a:rPr>
-              <a:t>Flow_Purpose_loan</a:t>
+              <a:t>.Flow_Relationships</a:t>
             </a:r>
           </a:p>
         </p:txBody>
@@ -17991,7 +18785,7 @@
           <p:cNvPr id="3" name="Content Placeholder 2">
             <a:extLst>
               <a:ext uri="{FF2B5EF4-FFF2-40B4-BE49-F238E27FC236}">
-                <a16:creationId xmlns:a16="http://schemas.microsoft.com/office/drawing/2014/main" id="{A1BB4664-5AD0-3304-20B3-8D964D0DDC14}"/>
+                <a16:creationId xmlns:a16="http://schemas.microsoft.com/office/drawing/2014/main" id="{9D71FCDA-98E2-D135-C67C-DB3B026CF36C}"/>
               </a:ext>
             </a:extLst>
           </p:cNvPr>
@@ -18004,8 +18798,8 @@
         </p:nvSpPr>
         <p:spPr>
           <a:xfrm>
-            <a:off x="363794" y="737419"/>
-            <a:ext cx="11484077" cy="5053781"/>
+            <a:off x="353961" y="530942"/>
+            <a:ext cx="11552904" cy="6115663"/>
           </a:xfrm>
         </p:spPr>
         <p:txBody>
@@ -18014,20 +18808,21 @@
           <a:p>
             <a:r>
               <a:rPr lang="en-US"/>
-              <a:t>purpose_Id: int,  [Key]</a:t>
-            </a:r>
-          </a:p>
-          <a:p>
-            <a:r>
-              <a:rPr lang="en-US"/>
-              <a:t>purpose: string </a:t>
-            </a:r>
-          </a:p>
-          <a:p>
-            <a:endParaRPr lang="en-US"/>
-          </a:p>
-          <a:p>
-            <a:endParaRPr lang="en-US"/>
+              <a:t> code_relation: int [PK]</a:t>
+            </a:r>
+          </a:p>
+          <a:p>
+            <a:r>
+              <a:rPr lang="en-US"/>
+              <a:t> name_Ar : string </a:t>
+            </a:r>
+          </a:p>
+          <a:p>
+            <a:r>
+              <a:rPr lang="en-US"/>
+              <a:t> name_Eng : string</a:t>
+            </a:r>
+            <a:endParaRPr lang="ar-EG"/>
           </a:p>
           <a:p>
             <a:endParaRPr lang="en-US"/>
@@ -18036,10 +18831,10 @@
       </p:sp>
       <p:pic>
         <p:nvPicPr>
-          <p:cNvPr id="5" name="Picture 4">
+          <p:cNvPr id="7" name="Picture 6">
             <a:extLst>
               <a:ext uri="{FF2B5EF4-FFF2-40B4-BE49-F238E27FC236}">
-                <a16:creationId xmlns:a16="http://schemas.microsoft.com/office/drawing/2014/main" id="{4EB67A28-E5BF-56BD-A7EA-172A8BA6C45F}"/>
+                <a16:creationId xmlns:a16="http://schemas.microsoft.com/office/drawing/2014/main" id="{95B5E2DA-2922-4310-7254-CE8696B703F4}"/>
               </a:ext>
             </a:extLst>
           </p:cNvPr>
@@ -18056,8 +18851,8 @@
         </p:blipFill>
         <p:spPr>
           <a:xfrm>
-            <a:off x="4350456" y="747250"/>
-            <a:ext cx="3790951" cy="1956621"/>
+            <a:off x="3988992" y="704793"/>
+            <a:ext cx="2107007" cy="1546344"/>
           </a:xfrm>
           <a:prstGeom prst="rect">
             <a:avLst/>
@@ -18067,7 +18862,7 @@
     </p:spTree>
     <p:extLst>
       <p:ext uri="{BB962C8B-B14F-4D97-AF65-F5344CB8AC3E}">
-        <p14:creationId xmlns:p14="http://schemas.microsoft.com/office/powerpoint/2010/main" val="1293081978"/>
+        <p14:creationId xmlns:p14="http://schemas.microsoft.com/office/powerpoint/2010/main" val="2209266919"/>
       </p:ext>
     </p:extLst>
   </p:cSld>
@@ -18099,7 +18894,7 @@
           <p:cNvPr id="2" name="Title 1">
             <a:extLst>
               <a:ext uri="{FF2B5EF4-FFF2-40B4-BE49-F238E27FC236}">
-                <a16:creationId xmlns:a16="http://schemas.microsoft.com/office/drawing/2014/main" id="{16CD2FC7-BCA3-0947-4C4F-377029E22462}"/>
+                <a16:creationId xmlns:a16="http://schemas.microsoft.com/office/drawing/2014/main" id="{FC644BE0-7FCA-9F05-5A0B-F1E727580102}"/>
               </a:ext>
             </a:extLst>
           </p:cNvPr>
@@ -18112,12 +18907,14 @@
         </p:nvSpPr>
         <p:spPr>
           <a:xfrm>
-            <a:off x="919119" y="98323"/>
-            <a:ext cx="10353762" cy="766916"/>
-          </a:xfrm>
-        </p:spPr>
-        <p:txBody>
-          <a:bodyPr/>
+            <a:off x="913795" y="0"/>
+            <a:ext cx="10353762" cy="491613"/>
+          </a:xfrm>
+        </p:spPr>
+        <p:txBody>
+          <a:bodyPr>
+            <a:normAutofit fontScale="90000"/>
+          </a:bodyPr>
           <a:lstStyle/>
           <a:p>
             <a:r>
@@ -18125,39 +18922,30 @@
                 <a:solidFill>
                   <a:srgbClr val="FFFF00"/>
                 </a:solidFill>
-                <a:effectLst/>
               </a:rPr>
               <a:t>SWF</a:t>
             </a:r>
             <a:r>
+              <a:rPr lang="en-US" b="1"/>
+              <a:t>.</a:t>
+            </a:r>
+            <a:r>
               <a:rPr lang="en-US" b="1">
-                <a:effectLst/>
-              </a:rPr>
-              <a:t>.</a:t>
-            </a:r>
-            <a:r>
-              <a:rPr lang="en-US" b="1">
                 <a:solidFill>
                   <a:srgbClr val="FF0000"/>
                 </a:solidFill>
-                <a:effectLst/>
-              </a:rPr>
-              <a:t>Flow_Customers_jobs</a:t>
-            </a:r>
-            <a:endParaRPr lang="en-US">
-              <a:solidFill>
-                <a:srgbClr val="FF0000"/>
-              </a:solidFill>
-            </a:endParaRPr>
-          </a:p>
-        </p:txBody>
-      </p:sp>
-      <p:sp>
-        <p:nvSpPr>
-          <p:cNvPr id="7" name="Content Placeholder 6">
+              </a:rPr>
+              <a:t>Flow_Purpose_loan</a:t>
+            </a:r>
+          </a:p>
+        </p:txBody>
+      </p:sp>
+      <p:sp>
+        <p:nvSpPr>
+          <p:cNvPr id="3" name="Content Placeholder 2">
             <a:extLst>
               <a:ext uri="{FF2B5EF4-FFF2-40B4-BE49-F238E27FC236}">
-                <a16:creationId xmlns:a16="http://schemas.microsoft.com/office/drawing/2014/main" id="{05F54450-0FD0-65BB-EFB7-DDF37D562034}"/>
+                <a16:creationId xmlns:a16="http://schemas.microsoft.com/office/drawing/2014/main" id="{A1BB4664-5AD0-3304-20B3-8D964D0DDC14}"/>
               </a:ext>
             </a:extLst>
           </p:cNvPr>
@@ -18170,8 +18958,8 @@
         </p:nvSpPr>
         <p:spPr>
           <a:xfrm>
-            <a:off x="324466" y="1149639"/>
-            <a:ext cx="11326760" cy="5398645"/>
+            <a:off x="363794" y="737419"/>
+            <a:ext cx="11484077" cy="5053781"/>
           </a:xfrm>
         </p:spPr>
         <p:txBody>
@@ -18180,35 +18968,32 @@
           <a:p>
             <a:r>
               <a:rPr lang="en-US"/>
-              <a:t>public int Code_job </a:t>
-            </a:r>
-          </a:p>
-          <a:p>
-            <a:r>
-              <a:rPr lang="en-US"/>
-              <a:t>public string name_Ar </a:t>
-            </a:r>
-          </a:p>
-          <a:p>
-            <a:r>
-              <a:rPr lang="en-US"/>
-              <a:t>public string name_Eng </a:t>
-            </a:r>
-          </a:p>
-          <a:p>
-            <a:r>
-              <a:rPr lang="en-US"/>
-              <a:t>public int I_score </a:t>
-            </a:r>
+              <a:t>purpose_Id: int,  [Key]</a:t>
+            </a:r>
+          </a:p>
+          <a:p>
+            <a:r>
+              <a:rPr lang="en-US"/>
+              <a:t>purpose: string </a:t>
+            </a:r>
+          </a:p>
+          <a:p>
+            <a:endParaRPr lang="en-US"/>
+          </a:p>
+          <a:p>
+            <a:endParaRPr lang="en-US"/>
+          </a:p>
+          <a:p>
+            <a:endParaRPr lang="en-US"/>
           </a:p>
         </p:txBody>
       </p:sp>
       <p:pic>
         <p:nvPicPr>
-          <p:cNvPr id="8" name="Content Placeholder 4">
+          <p:cNvPr id="5" name="Picture 4">
             <a:extLst>
               <a:ext uri="{FF2B5EF4-FFF2-40B4-BE49-F238E27FC236}">
-                <a16:creationId xmlns:a16="http://schemas.microsoft.com/office/drawing/2014/main" id="{0045C470-86DA-1BAD-F025-6D3EAC01831E}"/>
+                <a16:creationId xmlns:a16="http://schemas.microsoft.com/office/drawing/2014/main" id="{4EB67A28-E5BF-56BD-A7EA-172A8BA6C45F}"/>
               </a:ext>
             </a:extLst>
           </p:cNvPr>
@@ -18225,25 +19010,18 @@
         </p:blipFill>
         <p:spPr>
           <a:xfrm>
-            <a:off x="6999937" y="1149639"/>
-            <a:ext cx="4464450" cy="2802501"/>
+            <a:off x="4350456" y="747250"/>
+            <a:ext cx="3790951" cy="1956621"/>
           </a:xfrm>
           <a:prstGeom prst="rect">
             <a:avLst/>
           </a:prstGeom>
-          <a:effectLst>
-            <a:outerShdw blurRad="25400" dir="17880000">
-              <a:srgbClr val="000000">
-                <a:alpha val="46000"/>
-              </a:srgbClr>
-            </a:outerShdw>
-          </a:effectLst>
         </p:spPr>
       </p:pic>
     </p:spTree>
     <p:extLst>
       <p:ext uri="{BB962C8B-B14F-4D97-AF65-F5344CB8AC3E}">
-        <p14:creationId xmlns:p14="http://schemas.microsoft.com/office/powerpoint/2010/main" val="1523134920"/>
+        <p14:creationId xmlns:p14="http://schemas.microsoft.com/office/powerpoint/2010/main" val="1293081978"/>
       </p:ext>
     </p:extLst>
   </p:cSld>
@@ -18275,7 +19053,7 @@
           <p:cNvPr id="2" name="Title 1">
             <a:extLst>
               <a:ext uri="{FF2B5EF4-FFF2-40B4-BE49-F238E27FC236}">
-                <a16:creationId xmlns:a16="http://schemas.microsoft.com/office/drawing/2014/main" id="{F5D5051E-20B0-456A-27A0-A849223FE5DE}"/>
+                <a16:creationId xmlns:a16="http://schemas.microsoft.com/office/drawing/2014/main" id="{16CD2FC7-BCA3-0947-4C4F-377029E22462}"/>
               </a:ext>
             </a:extLst>
           </p:cNvPr>
@@ -18288,14 +19066,12 @@
         </p:nvSpPr>
         <p:spPr>
           <a:xfrm>
-            <a:off x="913795" y="0"/>
-            <a:ext cx="10353762" cy="550606"/>
-          </a:xfrm>
-        </p:spPr>
-        <p:txBody>
-          <a:bodyPr>
-            <a:normAutofit fontScale="90000"/>
-          </a:bodyPr>
+            <a:off x="919119" y="98323"/>
+            <a:ext cx="10353762" cy="766916"/>
+          </a:xfrm>
+        </p:spPr>
+        <p:txBody>
+          <a:bodyPr/>
           <a:lstStyle/>
           <a:p>
             <a:r>
@@ -18303,11 +19079,14 @@
                 <a:solidFill>
                   <a:srgbClr val="FFFF00"/>
                 </a:solidFill>
+                <a:effectLst/>
               </a:rPr>
               <a:t>SWF</a:t>
             </a:r>
             <a:r>
-              <a:rPr lang="en-US"/>
+              <a:rPr lang="en-US" b="1">
+                <a:effectLst/>
+              </a:rPr>
               <a:t>.</a:t>
             </a:r>
             <a:r>
@@ -18315,18 +19094,24 @@
                 <a:solidFill>
                   <a:srgbClr val="FF0000"/>
                 </a:solidFill>
-              </a:rPr>
-              <a:t>Flow_districts</a:t>
-            </a:r>
-          </a:p>
-        </p:txBody>
-      </p:sp>
-      <p:sp>
-        <p:nvSpPr>
-          <p:cNvPr id="3" name="Content Placeholder 2">
+                <a:effectLst/>
+              </a:rPr>
+              <a:t>Flow_Customers_jobs</a:t>
+            </a:r>
+            <a:endParaRPr lang="en-US">
+              <a:solidFill>
+                <a:srgbClr val="FF0000"/>
+              </a:solidFill>
+            </a:endParaRPr>
+          </a:p>
+        </p:txBody>
+      </p:sp>
+      <p:sp>
+        <p:nvSpPr>
+          <p:cNvPr id="7" name="Content Placeholder 6">
             <a:extLst>
               <a:ext uri="{FF2B5EF4-FFF2-40B4-BE49-F238E27FC236}">
-                <a16:creationId xmlns:a16="http://schemas.microsoft.com/office/drawing/2014/main" id="{7CABE9C4-1036-08DF-688D-224BA7DC9F6A}"/>
+                <a16:creationId xmlns:a16="http://schemas.microsoft.com/office/drawing/2014/main" id="{05F54450-0FD0-65BB-EFB7-DDF37D562034}"/>
               </a:ext>
             </a:extLst>
           </p:cNvPr>
@@ -18339,8 +19124,8 @@
         </p:nvSpPr>
         <p:spPr>
           <a:xfrm>
-            <a:off x="383458" y="550606"/>
-            <a:ext cx="11405419" cy="6076335"/>
+            <a:off x="324466" y="1149639"/>
+            <a:ext cx="11326760" cy="5398645"/>
           </a:xfrm>
         </p:spPr>
         <p:txBody>
@@ -18349,45 +19134,35 @@
           <a:p>
             <a:r>
               <a:rPr lang="en-US"/>
-              <a:t>public int Code_district   </a:t>
-            </a:r>
-            <a:r>
-              <a:rPr lang="en-US" b="1"/>
-              <a:t>[FK]</a:t>
-            </a:r>
-          </a:p>
-          <a:p>
-            <a:r>
-              <a:rPr lang="en-US"/>
-              <a:t>public string name_ar </a:t>
-            </a:r>
-          </a:p>
-          <a:p>
-            <a:r>
-              <a:rPr lang="en-US"/>
-              <a:t>public string name_eng </a:t>
-            </a:r>
-          </a:p>
-          <a:p>
-            <a:r>
-              <a:rPr lang="en-US"/>
-              <a:t>public int GovId </a:t>
-            </a:r>
-          </a:p>
-          <a:p>
-            <a:r>
-              <a:rPr lang="en-US"/>
-              <a:t>public string District_DB_Code </a:t>
+              <a:t>public int Code_job </a:t>
+            </a:r>
+          </a:p>
+          <a:p>
+            <a:r>
+              <a:rPr lang="en-US"/>
+              <a:t>public string name_Ar </a:t>
+            </a:r>
+          </a:p>
+          <a:p>
+            <a:r>
+              <a:rPr lang="en-US"/>
+              <a:t>public string name_Eng </a:t>
+            </a:r>
+          </a:p>
+          <a:p>
+            <a:r>
+              <a:rPr lang="en-US"/>
+              <a:t>public int I_score </a:t>
             </a:r>
           </a:p>
         </p:txBody>
       </p:sp>
       <p:pic>
         <p:nvPicPr>
-          <p:cNvPr id="5" name="Picture 4">
+          <p:cNvPr id="8" name="Content Placeholder 4">
             <a:extLst>
               <a:ext uri="{FF2B5EF4-FFF2-40B4-BE49-F238E27FC236}">
-                <a16:creationId xmlns:a16="http://schemas.microsoft.com/office/drawing/2014/main" id="{DF86862D-330E-AEFE-3F7C-1878620572C9}"/>
+                <a16:creationId xmlns:a16="http://schemas.microsoft.com/office/drawing/2014/main" id="{0045C470-86DA-1BAD-F025-6D3EAC01831E}"/>
               </a:ext>
             </a:extLst>
           </p:cNvPr>
@@ -18404,18 +19179,25 @@
         </p:blipFill>
         <p:spPr>
           <a:xfrm>
-            <a:off x="7236142" y="734029"/>
-            <a:ext cx="4552735" cy="2138406"/>
+            <a:off x="6999937" y="1149639"/>
+            <a:ext cx="4464450" cy="2802501"/>
           </a:xfrm>
           <a:prstGeom prst="rect">
             <a:avLst/>
           </a:prstGeom>
+          <a:effectLst>
+            <a:outerShdw blurRad="25400" dir="17880000">
+              <a:srgbClr val="000000">
+                <a:alpha val="46000"/>
+              </a:srgbClr>
+            </a:outerShdw>
+          </a:effectLst>
         </p:spPr>
       </p:pic>
     </p:spTree>
     <p:extLst>
       <p:ext uri="{BB962C8B-B14F-4D97-AF65-F5344CB8AC3E}">
-        <p14:creationId xmlns:p14="http://schemas.microsoft.com/office/powerpoint/2010/main" val="1815671470"/>
+        <p14:creationId xmlns:p14="http://schemas.microsoft.com/office/powerpoint/2010/main" val="1523134920"/>
       </p:ext>
     </p:extLst>
   </p:cSld>
@@ -18666,7 +19448,7 @@
           <p:cNvPr id="2" name="Title 1">
             <a:extLst>
               <a:ext uri="{FF2B5EF4-FFF2-40B4-BE49-F238E27FC236}">
-                <a16:creationId xmlns:a16="http://schemas.microsoft.com/office/drawing/2014/main" id="{1BCCF5D2-C14B-752B-7094-17DF4075385B}"/>
+                <a16:creationId xmlns:a16="http://schemas.microsoft.com/office/drawing/2014/main" id="{F5D5051E-20B0-456A-27A0-A849223FE5DE}"/>
               </a:ext>
             </a:extLst>
           </p:cNvPr>
@@ -18679,8 +19461,8 @@
         </p:nvSpPr>
         <p:spPr>
           <a:xfrm>
-            <a:off x="919119" y="16721"/>
-            <a:ext cx="10353762" cy="573214"/>
+            <a:off x="913795" y="0"/>
+            <a:ext cx="10353762" cy="550606"/>
           </a:xfrm>
         </p:spPr>
         <p:txBody>
@@ -18694,30 +19476,21 @@
                 <a:solidFill>
                   <a:srgbClr val="FFFF00"/>
                 </a:solidFill>
-                <a:effectLst/>
               </a:rPr>
               <a:t>SWF</a:t>
             </a:r>
             <a:r>
+              <a:rPr lang="en-US"/>
+              <a:t>.</a:t>
+            </a:r>
+            <a:r>
               <a:rPr lang="en-US" b="1">
-                <a:effectLst/>
-              </a:rPr>
-              <a:t>.</a:t>
-            </a:r>
-            <a:r>
-              <a:rPr lang="en-US" b="1">
                 <a:solidFill>
                   <a:srgbClr val="FF0000"/>
                 </a:solidFill>
-                <a:effectLst/>
-              </a:rPr>
-              <a:t>Flow_Sections</a:t>
-            </a:r>
-            <a:endParaRPr lang="en-US">
-              <a:solidFill>
-                <a:srgbClr val="FF0000"/>
-              </a:solidFill>
-            </a:endParaRPr>
+              </a:rPr>
+              <a:t>Flow_districts</a:t>
+            </a:r>
           </a:p>
         </p:txBody>
       </p:sp>
@@ -18726,7 +19499,7 @@
           <p:cNvPr id="3" name="Content Placeholder 2">
             <a:extLst>
               <a:ext uri="{FF2B5EF4-FFF2-40B4-BE49-F238E27FC236}">
-                <a16:creationId xmlns:a16="http://schemas.microsoft.com/office/drawing/2014/main" id="{EA4AE190-22B5-6065-BB91-B8685FAF1481}"/>
+                <a16:creationId xmlns:a16="http://schemas.microsoft.com/office/drawing/2014/main" id="{7CABE9C4-1036-08DF-688D-224BA7DC9F6A}"/>
               </a:ext>
             </a:extLst>
           </p:cNvPr>
@@ -18739,8 +19512,8 @@
         </p:nvSpPr>
         <p:spPr>
           <a:xfrm>
-            <a:off x="570271" y="704979"/>
-            <a:ext cx="11503742" cy="5980956"/>
+            <a:off x="383458" y="550606"/>
+            <a:ext cx="11405419" cy="6076335"/>
           </a:xfrm>
         </p:spPr>
         <p:txBody>
@@ -18749,11 +19522,36 @@
           <a:p>
             <a:r>
               <a:rPr lang="en-US"/>
-              <a:t>Code_Section [PK]</a:t>
-            </a:r>
-          </a:p>
-          <a:p>
-            <a:endParaRPr lang="en-US"/>
+              <a:t>public int Code_district   </a:t>
+            </a:r>
+            <a:r>
+              <a:rPr lang="en-US" b="1"/>
+              <a:t>[FK]</a:t>
+            </a:r>
+          </a:p>
+          <a:p>
+            <a:r>
+              <a:rPr lang="en-US"/>
+              <a:t>public string name_ar </a:t>
+            </a:r>
+          </a:p>
+          <a:p>
+            <a:r>
+              <a:rPr lang="en-US"/>
+              <a:t>public string name_eng </a:t>
+            </a:r>
+          </a:p>
+          <a:p>
+            <a:r>
+              <a:rPr lang="en-US"/>
+              <a:t>public int GovId </a:t>
+            </a:r>
+          </a:p>
+          <a:p>
+            <a:r>
+              <a:rPr lang="en-US"/>
+              <a:t>public string District_DB_Code </a:t>
+            </a:r>
           </a:p>
         </p:txBody>
       </p:sp>
@@ -18762,7 +19560,7 @@
           <p:cNvPr id="5" name="Picture 4">
             <a:extLst>
               <a:ext uri="{FF2B5EF4-FFF2-40B4-BE49-F238E27FC236}">
-                <a16:creationId xmlns:a16="http://schemas.microsoft.com/office/drawing/2014/main" id="{A01B557B-65C1-8D4D-AFB5-EEC7C2124C93}"/>
+                <a16:creationId xmlns:a16="http://schemas.microsoft.com/office/drawing/2014/main" id="{DF86862D-330E-AEFE-3F7C-1878620572C9}"/>
               </a:ext>
             </a:extLst>
           </p:cNvPr>
@@ -18779,8 +19577,8 @@
         </p:blipFill>
         <p:spPr>
           <a:xfrm>
-            <a:off x="6712176" y="704979"/>
-            <a:ext cx="5361837" cy="2647821"/>
+            <a:off x="7236142" y="734029"/>
+            <a:ext cx="4552735" cy="2138406"/>
           </a:xfrm>
           <a:prstGeom prst="rect">
             <a:avLst/>
@@ -18790,7 +19588,7 @@
     </p:spTree>
     <p:extLst>
       <p:ext uri="{BB962C8B-B14F-4D97-AF65-F5344CB8AC3E}">
-        <p14:creationId xmlns:p14="http://schemas.microsoft.com/office/powerpoint/2010/main" val="828287174"/>
+        <p14:creationId xmlns:p14="http://schemas.microsoft.com/office/powerpoint/2010/main" val="1815671470"/>
       </p:ext>
     </p:extLst>
   </p:cSld>
@@ -18822,7 +19620,7 @@
           <p:cNvPr id="2" name="Title 1">
             <a:extLst>
               <a:ext uri="{FF2B5EF4-FFF2-40B4-BE49-F238E27FC236}">
-                <a16:creationId xmlns:a16="http://schemas.microsoft.com/office/drawing/2014/main" id="{59B8C28E-61F7-6D4E-F31C-C60F41193EE4}"/>
+                <a16:creationId xmlns:a16="http://schemas.microsoft.com/office/drawing/2014/main" id="{1BCCF5D2-C14B-752B-7094-17DF4075385B}"/>
               </a:ext>
             </a:extLst>
           </p:cNvPr>
@@ -18835,8 +19633,8 @@
         </p:nvSpPr>
         <p:spPr>
           <a:xfrm>
-            <a:off x="913795" y="0"/>
-            <a:ext cx="10353762" cy="648929"/>
+            <a:off x="919119" y="16721"/>
+            <a:ext cx="10353762" cy="573214"/>
           </a:xfrm>
         </p:spPr>
         <p:txBody>
@@ -18867,7 +19665,7 @@
                 </a:solidFill>
                 <a:effectLst/>
               </a:rPr>
-              <a:t>Flow_Identity_Expiry</a:t>
+              <a:t>Flow_Sections</a:t>
             </a:r>
             <a:endParaRPr lang="en-US">
               <a:solidFill>
@@ -18882,7 +19680,7 @@
           <p:cNvPr id="3" name="Content Placeholder 2">
             <a:extLst>
               <a:ext uri="{FF2B5EF4-FFF2-40B4-BE49-F238E27FC236}">
-                <a16:creationId xmlns:a16="http://schemas.microsoft.com/office/drawing/2014/main" id="{D4D3C5DB-79B9-56B6-11BF-ABC07DE1220D}"/>
+                <a16:creationId xmlns:a16="http://schemas.microsoft.com/office/drawing/2014/main" id="{EA4AE190-22B5-6065-BB91-B8685FAF1481}"/>
               </a:ext>
             </a:extLst>
           </p:cNvPr>
@@ -18895,8 +19693,8 @@
         </p:nvSpPr>
         <p:spPr>
           <a:xfrm>
-            <a:off x="913795" y="648929"/>
-            <a:ext cx="10353762" cy="5142271"/>
+            <a:off x="570271" y="704979"/>
+            <a:ext cx="11503742" cy="5980956"/>
           </a:xfrm>
         </p:spPr>
         <p:txBody>
@@ -18905,25 +19703,7 @@
           <a:p>
             <a:r>
               <a:rPr lang="en-US"/>
-              <a:t>ssn_code : int</a:t>
-            </a:r>
-          </a:p>
-          <a:p>
-            <a:r>
-              <a:rPr lang="en-US"/>
-              <a:t>name_ar: string</a:t>
-            </a:r>
-          </a:p>
-          <a:p>
-            <a:r>
-              <a:rPr lang="en-US"/>
-              <a:t>name_eng: string</a:t>
-            </a:r>
-          </a:p>
-          <a:p>
-            <a:r>
-              <a:rPr lang="en-US"/>
-              <a:t>Expiry_date : string </a:t>
+              <a:t>Code_Section [PK]</a:t>
             </a:r>
           </a:p>
           <a:p>
@@ -18936,7 +19716,7 @@
           <p:cNvPr id="5" name="Picture 4">
             <a:extLst>
               <a:ext uri="{FF2B5EF4-FFF2-40B4-BE49-F238E27FC236}">
-                <a16:creationId xmlns:a16="http://schemas.microsoft.com/office/drawing/2014/main" id="{F245421B-EB2A-8CF4-9A6E-F2E8FF8537E8}"/>
+                <a16:creationId xmlns:a16="http://schemas.microsoft.com/office/drawing/2014/main" id="{A01B557B-65C1-8D4D-AFB5-EEC7C2124C93}"/>
               </a:ext>
             </a:extLst>
           </p:cNvPr>
@@ -18953,8 +19733,8 @@
         </p:blipFill>
         <p:spPr>
           <a:xfrm>
-            <a:off x="5801242" y="782700"/>
-            <a:ext cx="3698661" cy="568200"/>
+            <a:off x="6712176" y="704979"/>
+            <a:ext cx="5361837" cy="2647821"/>
           </a:xfrm>
           <a:prstGeom prst="rect">
             <a:avLst/>
@@ -18964,7 +19744,7 @@
     </p:spTree>
     <p:extLst>
       <p:ext uri="{BB962C8B-B14F-4D97-AF65-F5344CB8AC3E}">
-        <p14:creationId xmlns:p14="http://schemas.microsoft.com/office/powerpoint/2010/main" val="430898061"/>
+        <p14:creationId xmlns:p14="http://schemas.microsoft.com/office/powerpoint/2010/main" val="828287174"/>
       </p:ext>
     </p:extLst>
   </p:cSld>
@@ -18996,7 +19776,7 @@
           <p:cNvPr id="2" name="Title 1">
             <a:extLst>
               <a:ext uri="{FF2B5EF4-FFF2-40B4-BE49-F238E27FC236}">
-                <a16:creationId xmlns:a16="http://schemas.microsoft.com/office/drawing/2014/main" id="{331F7D08-A393-98DE-9C45-6689A32A2C38}"/>
+                <a16:creationId xmlns:a16="http://schemas.microsoft.com/office/drawing/2014/main" id="{59B8C28E-61F7-6D4E-F31C-C60F41193EE4}"/>
               </a:ext>
             </a:extLst>
           </p:cNvPr>
@@ -19009,8 +19789,8 @@
         </p:nvSpPr>
         <p:spPr>
           <a:xfrm>
-            <a:off x="919119" y="0"/>
-            <a:ext cx="10353762" cy="668594"/>
+            <a:off x="913795" y="0"/>
+            <a:ext cx="10353762" cy="648929"/>
           </a:xfrm>
         </p:spPr>
         <p:txBody>
@@ -19024,11 +19804,14 @@
                 <a:solidFill>
                   <a:srgbClr val="FFFF00"/>
                 </a:solidFill>
-              </a:rPr>
-              <a:t>Security</a:t>
-            </a:r>
-            <a:r>
-              <a:rPr lang="en-US"/>
+                <a:effectLst/>
+              </a:rPr>
+              <a:t>SWF</a:t>
+            </a:r>
+            <a:r>
+              <a:rPr lang="en-US" b="1">
+                <a:effectLst/>
+              </a:rPr>
               <a:t>.</a:t>
             </a:r>
             <a:r>
@@ -19036,27 +19819,85 @@
                 <a:solidFill>
                   <a:srgbClr val="FF0000"/>
                 </a:solidFill>
-              </a:rPr>
-              <a:t>SEC_Group</a:t>
-            </a:r>
+                <a:effectLst/>
+              </a:rPr>
+              <a:t>Flow_Identity_Expiry</a:t>
+            </a:r>
+            <a:endParaRPr lang="en-US">
+              <a:solidFill>
+                <a:srgbClr val="FF0000"/>
+              </a:solidFill>
+            </a:endParaRPr>
+          </a:p>
+        </p:txBody>
+      </p:sp>
+      <p:sp>
+        <p:nvSpPr>
+          <p:cNvPr id="3" name="Content Placeholder 2">
+            <a:extLst>
+              <a:ext uri="{FF2B5EF4-FFF2-40B4-BE49-F238E27FC236}">
+                <a16:creationId xmlns:a16="http://schemas.microsoft.com/office/drawing/2014/main" id="{D4D3C5DB-79B9-56B6-11BF-ABC07DE1220D}"/>
+              </a:ext>
+            </a:extLst>
+          </p:cNvPr>
+          <p:cNvSpPr>
+            <a:spLocks noGrp="1"/>
+          </p:cNvSpPr>
+          <p:nvPr>
+            <p:ph idx="1"/>
+          </p:nvPr>
+        </p:nvSpPr>
+        <p:spPr>
+          <a:xfrm>
+            <a:off x="913795" y="648929"/>
+            <a:ext cx="10353762" cy="5142271"/>
+          </a:xfrm>
+        </p:spPr>
+        <p:txBody>
+          <a:bodyPr/>
+          <a:lstStyle/>
+          <a:p>
+            <a:r>
+              <a:rPr lang="en-US"/>
+              <a:t>ssn_code : int</a:t>
+            </a:r>
+          </a:p>
+          <a:p>
+            <a:r>
+              <a:rPr lang="en-US"/>
+              <a:t>name_ar: string</a:t>
+            </a:r>
+          </a:p>
+          <a:p>
+            <a:r>
+              <a:rPr lang="en-US"/>
+              <a:t>name_eng: string</a:t>
+            </a:r>
+          </a:p>
+          <a:p>
+            <a:r>
+              <a:rPr lang="en-US"/>
+              <a:t>Expiry_date : string </a:t>
+            </a:r>
+          </a:p>
+          <a:p>
+            <a:endParaRPr lang="en-US"/>
           </a:p>
         </p:txBody>
       </p:sp>
       <p:pic>
         <p:nvPicPr>
-          <p:cNvPr id="5" name="Content Placeholder 4">
+          <p:cNvPr id="5" name="Picture 4">
             <a:extLst>
               <a:ext uri="{FF2B5EF4-FFF2-40B4-BE49-F238E27FC236}">
-                <a16:creationId xmlns:a16="http://schemas.microsoft.com/office/drawing/2014/main" id="{FDF058CE-131C-13EF-9962-3C2C8DBF70F1}"/>
+                <a16:creationId xmlns:a16="http://schemas.microsoft.com/office/drawing/2014/main" id="{F245421B-EB2A-8CF4-9A6E-F2E8FF8537E8}"/>
               </a:ext>
             </a:extLst>
           </p:cNvPr>
           <p:cNvPicPr>
-            <a:picLocks noGrp="1" noChangeAspect="1"/>
+            <a:picLocks noChangeAspect="1"/>
           </p:cNvPicPr>
-          <p:nvPr>
-            <p:ph idx="1"/>
-          </p:nvPr>
+          <p:nvPr/>
         </p:nvPicPr>
         <p:blipFill>
           <a:blip r:embed="rId2"/>
@@ -19066,25 +19907,18 @@
         </p:blipFill>
         <p:spPr>
           <a:xfrm>
-            <a:off x="278774" y="890828"/>
-            <a:ext cx="4971651" cy="4102949"/>
+            <a:off x="5801242" y="782700"/>
+            <a:ext cx="3698661" cy="568200"/>
           </a:xfrm>
           <a:prstGeom prst="rect">
             <a:avLst/>
           </a:prstGeom>
-          <a:effectLst>
-            <a:outerShdw blurRad="25400" dir="17880000">
-              <a:srgbClr val="000000">
-                <a:alpha val="46000"/>
-              </a:srgbClr>
-            </a:outerShdw>
-          </a:effectLst>
         </p:spPr>
       </p:pic>
     </p:spTree>
     <p:extLst>
       <p:ext uri="{BB962C8B-B14F-4D97-AF65-F5344CB8AC3E}">
-        <p14:creationId xmlns:p14="http://schemas.microsoft.com/office/powerpoint/2010/main" val="3910347904"/>
+        <p14:creationId xmlns:p14="http://schemas.microsoft.com/office/powerpoint/2010/main" val="430898061"/>
       </p:ext>
     </p:extLst>
   </p:cSld>
@@ -19116,7 +19950,7 @@
           <p:cNvPr id="2" name="Title 1">
             <a:extLst>
               <a:ext uri="{FF2B5EF4-FFF2-40B4-BE49-F238E27FC236}">
-                <a16:creationId xmlns:a16="http://schemas.microsoft.com/office/drawing/2014/main" id="{0DCBBD2D-BC72-9321-F9E7-A67BCB410D4C}"/>
+                <a16:creationId xmlns:a16="http://schemas.microsoft.com/office/drawing/2014/main" id="{331F7D08-A393-98DE-9C45-6689A32A2C38}"/>
               </a:ext>
             </a:extLst>
           </p:cNvPr>
@@ -19127,9 +19961,16 @@
             <p:ph type="title"/>
           </p:nvPr>
         </p:nvSpPr>
-        <p:spPr/>
-        <p:txBody>
-          <a:bodyPr/>
+        <p:spPr>
+          <a:xfrm>
+            <a:off x="919119" y="0"/>
+            <a:ext cx="10353762" cy="668594"/>
+          </a:xfrm>
+        </p:spPr>
+        <p:txBody>
+          <a:bodyPr>
+            <a:normAutofit fontScale="90000"/>
+          </a:bodyPr>
           <a:lstStyle/>
           <a:p>
             <a:r>
@@ -19150,9 +19991,8 @@
                   <a:srgbClr val="FF0000"/>
                 </a:solidFill>
               </a:rPr>
-              <a:t>SEC_Menu</a:t>
-            </a:r>
-            <a:endParaRPr lang="en-US"/>
+              <a:t>SEC_Group</a:t>
+            </a:r>
           </a:p>
         </p:txBody>
       </p:sp>
@@ -19161,7 +20001,7 @@
           <p:cNvPr id="5" name="Content Placeholder 4">
             <a:extLst>
               <a:ext uri="{FF2B5EF4-FFF2-40B4-BE49-F238E27FC236}">
-                <a16:creationId xmlns:a16="http://schemas.microsoft.com/office/drawing/2014/main" id="{A6EED765-6B26-3831-32AB-6C4D7F9CBE7E}"/>
+                <a16:creationId xmlns:a16="http://schemas.microsoft.com/office/drawing/2014/main" id="{FDF058CE-131C-13EF-9962-3C2C8DBF70F1}"/>
               </a:ext>
             </a:extLst>
           </p:cNvPr>
@@ -19180,8 +20020,8 @@
         </p:blipFill>
         <p:spPr>
           <a:xfrm>
-            <a:off x="663301" y="1580050"/>
-            <a:ext cx="7985453" cy="2195537"/>
+            <a:off x="7151521" y="639098"/>
+            <a:ext cx="4971651" cy="4102949"/>
           </a:xfrm>
           <a:prstGeom prst="rect">
             <a:avLst/>
@@ -19198,7 +20038,7 @@
     </p:spTree>
     <p:extLst>
       <p:ext uri="{BB962C8B-B14F-4D97-AF65-F5344CB8AC3E}">
-        <p14:creationId xmlns:p14="http://schemas.microsoft.com/office/powerpoint/2010/main" val="3576081585"/>
+        <p14:creationId xmlns:p14="http://schemas.microsoft.com/office/powerpoint/2010/main" val="3910347904"/>
       </p:ext>
     </p:extLst>
   </p:cSld>
@@ -19230,7 +20070,7 @@
           <p:cNvPr id="2" name="Title 1">
             <a:extLst>
               <a:ext uri="{FF2B5EF4-FFF2-40B4-BE49-F238E27FC236}">
-                <a16:creationId xmlns:a16="http://schemas.microsoft.com/office/drawing/2014/main" id="{E2EE6867-6E51-14F1-2A51-99D276A28E58}"/>
+                <a16:creationId xmlns:a16="http://schemas.microsoft.com/office/drawing/2014/main" id="{0DCBBD2D-BC72-9321-F9E7-A67BCB410D4C}"/>
               </a:ext>
             </a:extLst>
           </p:cNvPr>
@@ -19241,25 +20081,18 @@
             <p:ph type="title"/>
           </p:nvPr>
         </p:nvSpPr>
-        <p:spPr>
-          <a:xfrm>
-            <a:off x="913795" y="0"/>
-            <a:ext cx="10353762" cy="626165"/>
-          </a:xfrm>
-        </p:spPr>
-        <p:txBody>
-          <a:bodyPr>
-            <a:normAutofit fontScale="90000"/>
-          </a:bodyPr>
+        <p:spPr/>
+        <p:txBody>
+          <a:bodyPr/>
           <a:lstStyle/>
           <a:p>
             <a:r>
-              <a:rPr lang="en-US">
+              <a:rPr lang="en-US" b="1">
                 <a:solidFill>
                   <a:srgbClr val="FFFF00"/>
                 </a:solidFill>
               </a:rPr>
-              <a:t>Trans</a:t>
+              <a:t>Security</a:t>
             </a:r>
             <a:r>
               <a:rPr lang="en-US"/>
@@ -19271,69 +20104,27 @@
                   <a:srgbClr val="FF0000"/>
                 </a:solidFill>
               </a:rPr>
-              <a:t>Trans_BusDate [</a:t>
-            </a:r>
-            <a:r>
-              <a:rPr lang="ar-EG"/>
-              <a:t>تاريخ اليومية</a:t>
-            </a:r>
-            <a:r>
-              <a:rPr lang="en-US" b="1">
-                <a:solidFill>
-                  <a:srgbClr val="FF0000"/>
-                </a:solidFill>
-              </a:rPr>
-              <a:t>]</a:t>
-            </a:r>
-          </a:p>
-        </p:txBody>
-      </p:sp>
-      <p:sp>
-        <p:nvSpPr>
-          <p:cNvPr id="3" name="Content Placeholder 2">
+              <a:t>SEC_Menu</a:t>
+            </a:r>
+            <a:endParaRPr lang="en-US"/>
+          </a:p>
+        </p:txBody>
+      </p:sp>
+      <p:pic>
+        <p:nvPicPr>
+          <p:cNvPr id="5" name="Content Placeholder 4">
             <a:extLst>
               <a:ext uri="{FF2B5EF4-FFF2-40B4-BE49-F238E27FC236}">
-                <a16:creationId xmlns:a16="http://schemas.microsoft.com/office/drawing/2014/main" id="{86E90942-CEE9-522B-BDB4-9C8EDF3FB9A5}"/>
-              </a:ext>
-            </a:extLst>
-          </p:cNvPr>
-          <p:cNvSpPr>
-            <a:spLocks noGrp="1"/>
-          </p:cNvSpPr>
-          <p:nvPr>
-            <p:ph idx="1"/>
-          </p:nvPr>
-        </p:nvSpPr>
-        <p:spPr>
-          <a:xfrm>
-            <a:off x="308113" y="983975"/>
-            <a:ext cx="10959444" cy="4807226"/>
-          </a:xfrm>
-        </p:spPr>
-        <p:txBody>
-          <a:bodyPr/>
-          <a:lstStyle/>
-          <a:p>
-            <a:r>
-              <a:rPr lang="en-US"/>
-              <a:t>Trans</a:t>
-            </a:r>
-          </a:p>
-        </p:txBody>
-      </p:sp>
-      <p:pic>
-        <p:nvPicPr>
-          <p:cNvPr id="5" name="Picture 4">
-            <a:extLst>
-              <a:ext uri="{FF2B5EF4-FFF2-40B4-BE49-F238E27FC236}">
-                <a16:creationId xmlns:a16="http://schemas.microsoft.com/office/drawing/2014/main" id="{0D2F40EF-E3BC-1771-F69A-DA94F475A119}"/>
+                <a16:creationId xmlns:a16="http://schemas.microsoft.com/office/drawing/2014/main" id="{A6EED765-6B26-3831-32AB-6C4D7F9CBE7E}"/>
               </a:ext>
             </a:extLst>
           </p:cNvPr>
           <p:cNvPicPr>
-            <a:picLocks noChangeAspect="1"/>
+            <a:picLocks noGrp="1" noChangeAspect="1"/>
           </p:cNvPicPr>
-          <p:nvPr/>
+          <p:nvPr>
+            <p:ph idx="1"/>
+          </p:nvPr>
         </p:nvPicPr>
         <p:blipFill>
           <a:blip r:embed="rId2"/>
@@ -19343,18 +20134,25 @@
         </p:blipFill>
         <p:spPr>
           <a:xfrm>
-            <a:off x="8380822" y="2364465"/>
-            <a:ext cx="2886735" cy="1932442"/>
+            <a:off x="663301" y="1580050"/>
+            <a:ext cx="7985453" cy="2195537"/>
           </a:xfrm>
           <a:prstGeom prst="rect">
             <a:avLst/>
           </a:prstGeom>
+          <a:effectLst>
+            <a:outerShdw blurRad="25400" dir="17880000">
+              <a:srgbClr val="000000">
+                <a:alpha val="46000"/>
+              </a:srgbClr>
+            </a:outerShdw>
+          </a:effectLst>
         </p:spPr>
       </p:pic>
     </p:spTree>
     <p:extLst>
       <p:ext uri="{BB962C8B-B14F-4D97-AF65-F5344CB8AC3E}">
-        <p14:creationId xmlns:p14="http://schemas.microsoft.com/office/powerpoint/2010/main" val="560256876"/>
+        <p14:creationId xmlns:p14="http://schemas.microsoft.com/office/powerpoint/2010/main" val="3576081585"/>
       </p:ext>
     </p:extLst>
   </p:cSld>
@@ -19386,7 +20184,7 @@
           <p:cNvPr id="2" name="Title 1">
             <a:extLst>
               <a:ext uri="{FF2B5EF4-FFF2-40B4-BE49-F238E27FC236}">
-                <a16:creationId xmlns:a16="http://schemas.microsoft.com/office/drawing/2014/main" id="{A6EE02EF-272C-634F-E677-280B413E4B0C}"/>
+                <a16:creationId xmlns:a16="http://schemas.microsoft.com/office/drawing/2014/main" id="{E2EE6867-6E51-14F1-2A51-99D276A28E58}"/>
               </a:ext>
             </a:extLst>
           </p:cNvPr>
@@ -19400,7 +20198,7 @@
         <p:spPr>
           <a:xfrm>
             <a:off x="913795" y="0"/>
-            <a:ext cx="10353762" cy="688258"/>
+            <a:ext cx="10353762" cy="626165"/>
           </a:xfrm>
         </p:spPr>
         <p:txBody>
@@ -19410,34 +20208,37 @@
           <a:lstStyle/>
           <a:p>
             <a:r>
+              <a:rPr lang="en-US">
+                <a:solidFill>
+                  <a:srgbClr val="FFFF00"/>
+                </a:solidFill>
+              </a:rPr>
+              <a:t>Trans</a:t>
+            </a:r>
+            <a:r>
+              <a:rPr lang="en-US"/>
+              <a:t>.</a:t>
+            </a:r>
+            <a:r>
               <a:rPr lang="en-US" b="1">
                 <a:solidFill>
-                  <a:srgbClr val="FFFF00"/>
-                </a:solidFill>
-                <a:effectLst/>
-              </a:rPr>
-              <a:t>TWF</a:t>
+                  <a:srgbClr val="FF0000"/>
+                </a:solidFill>
+              </a:rPr>
+              <a:t>Trans_BusDate [</a:t>
+            </a:r>
+            <a:r>
+              <a:rPr lang="ar-EG"/>
+              <a:t>تاريخ اليومية</a:t>
             </a:r>
             <a:r>
               <a:rPr lang="en-US" b="1">
-                <a:effectLst/>
-              </a:rPr>
-              <a:t>.</a:t>
-            </a:r>
-            <a:r>
-              <a:rPr lang="en-US" b="1">
                 <a:solidFill>
                   <a:srgbClr val="FF0000"/>
                 </a:solidFill>
-                <a:effectLst/>
-              </a:rPr>
-              <a:t>Flow_ISCORE_Data</a:t>
-            </a:r>
-            <a:endParaRPr lang="en-US">
-              <a:solidFill>
-                <a:srgbClr val="FF0000"/>
-              </a:solidFill>
-            </a:endParaRPr>
+              </a:rPr>
+              <a:t>]</a:t>
+            </a:r>
           </a:p>
         </p:txBody>
       </p:sp>
@@ -19446,7 +20247,7 @@
           <p:cNvPr id="3" name="Content Placeholder 2">
             <a:extLst>
               <a:ext uri="{FF2B5EF4-FFF2-40B4-BE49-F238E27FC236}">
-                <a16:creationId xmlns:a16="http://schemas.microsoft.com/office/drawing/2014/main" id="{C73E78E3-34C6-E811-8BA5-3DA8C61B8FD3}"/>
+                <a16:creationId xmlns:a16="http://schemas.microsoft.com/office/drawing/2014/main" id="{86E90942-CEE9-522B-BDB4-9C8EDF3FB9A5}"/>
               </a:ext>
             </a:extLst>
           </p:cNvPr>
@@ -19459,181 +20260,55 @@
         </p:nvSpPr>
         <p:spPr>
           <a:xfrm>
-            <a:off x="353961" y="688259"/>
-            <a:ext cx="11503742" cy="6037006"/>
-          </a:xfrm>
-        </p:spPr>
-        <p:txBody>
-          <a:bodyPr>
-            <a:normAutofit lnSpcReduction="10000"/>
-          </a:bodyPr>
+            <a:off x="308113" y="983975"/>
+            <a:ext cx="10959444" cy="4807226"/>
+          </a:xfrm>
+        </p:spPr>
+        <p:txBody>
+          <a:bodyPr/>
           <a:lstStyle/>
           <a:p>
             <a:r>
               <a:rPr lang="en-US"/>
-              <a:t>int Code_FID  [PK]</a:t>
-            </a:r>
-          </a:p>
-          <a:p>
-            <a:r>
-              <a:rPr lang="en-US" b="1">
-                <a:effectLst/>
-              </a:rPr>
-              <a:t>Cust_IDNO: string // customer nationalId</a:t>
-            </a:r>
-          </a:p>
-          <a:p>
-            <a:r>
-              <a:rPr lang="en-US" b="1"/>
-              <a:t>Inquiry_Date: DateTime</a:t>
-            </a:r>
-            <a:r>
-              <a:rPr lang="en-US"/>
-              <a:t> // </a:t>
-            </a:r>
-          </a:p>
-          <a:p>
-            <a:r>
-              <a:rPr lang="en-US" b="1">
-                <a:effectLst/>
-              </a:rPr>
-              <a:t>Score: int   	// </a:t>
-            </a:r>
-            <a:r>
-              <a:rPr lang="ar-EG">
-                <a:effectLst/>
-              </a:rPr>
-              <a:t>هو رقم يعبر عن مدى التزام العميل</a:t>
-            </a:r>
-          </a:p>
-          <a:p>
-            <a:r>
-              <a:rPr lang="en-US">
-                <a:effectLst/>
-              </a:rPr>
-              <a:t>Open_credits // </a:t>
-            </a:r>
-            <a:r>
-              <a:rPr lang="ar-EG">
-                <a:effectLst/>
-              </a:rPr>
-              <a:t>أي عدد القروض أو البطاقات الائتمانية التي يستخدمها العميل حالياً ولم يغلقها.</a:t>
-            </a:r>
-            <a:endParaRPr lang="en-US">
-              <a:effectLst/>
-            </a:endParaRPr>
-          </a:p>
-          <a:p>
-            <a:r>
-              <a:rPr lang="en-US"/>
-              <a:t>Days_Due: int </a:t>
-            </a:r>
-            <a:r>
-              <a:rPr lang="ar-EG" sz="1800"/>
-              <a:t>أيام التأخير؛ ويقصد بها عدد الأيام التي تأخر فيها العميل عن سداد الأقساط المستحقة عليه (مؤشر خطر إذا كان الرقم </a:t>
-            </a:r>
-            <a:r>
-              <a:rPr lang="ar-EG"/>
-              <a:t>كبيراً).</a:t>
-            </a:r>
-            <a:endParaRPr lang="en-US"/>
-          </a:p>
-          <a:p>
-            <a:r>
-              <a:rPr lang="en-US"/>
-              <a:t>NO_OF_INQUIRES: </a:t>
-            </a:r>
-            <a:r>
-              <a:rPr lang="ar-EG"/>
-              <a:t>عدد الكرات التى تم فيها الاستعلام عن هذا الرقم</a:t>
-            </a:r>
-            <a:endParaRPr lang="en-US"/>
-          </a:p>
-          <a:p>
-            <a:r>
-              <a:rPr lang="en-US"/>
-              <a:t>Request_id</a:t>
-            </a:r>
-          </a:p>
-          <a:p>
-            <a:r>
-              <a:rPr lang="en-US"/>
-              <a:t>REF_NO</a:t>
-            </a:r>
-          </a:p>
-          <a:p>
-            <a:r>
-              <a:rPr lang="en-US"/>
-              <a:t>NotFound , int : </a:t>
-            </a:r>
-            <a:r>
-              <a:rPr lang="ar-EG"/>
-              <a:t>حالة العميل</a:t>
-            </a:r>
-          </a:p>
-          <a:p>
-            <a:pPr lvl="1"/>
-            <a:r>
-              <a:rPr lang="en-US"/>
-              <a:t>0 : </a:t>
-            </a:r>
-            <a:r>
-              <a:rPr lang="ar-EG"/>
-              <a:t>يوجد للعميل هذا بيانات فى الأيزكور</a:t>
-            </a:r>
-          </a:p>
-          <a:p>
-            <a:pPr lvl="1"/>
-            <a:r>
-              <a:rPr lang="en-US"/>
-              <a:t>1 : </a:t>
-            </a:r>
-            <a:r>
-              <a:rPr lang="ar-EG"/>
-              <a:t>العميل هذا لا توجد له بيانات فى الايزكور لأنه لم يأخذ قروض من اى بنك او اى جهة من قبل </a:t>
-            </a:r>
-          </a:p>
-          <a:p>
-            <a:pPr lvl="1"/>
-            <a:r>
-              <a:rPr lang="en-US"/>
-              <a:t>2 :</a:t>
-            </a:r>
-            <a:r>
-              <a:rPr lang="ar-EG"/>
-              <a:t> </a:t>
-            </a:r>
-            <a:r>
-              <a:rPr lang="en-US"/>
-              <a:t> </a:t>
-            </a:r>
-            <a:r>
-              <a:rPr lang="ar-EG"/>
-              <a:t>  يوجد مشكلة في الاتصال او اى مشكله أخرى لم تمكننى من الاستعلام عنه وبالتالي لايتم ترحيل الطلب الا اذا تم التحميل</a:t>
-            </a:r>
-            <a:r>
-              <a:rPr lang="en-US"/>
-              <a:t> </a:t>
-            </a:r>
-          </a:p>
-          <a:p>
-            <a:r>
-              <a:rPr lang="en-US"/>
-              <a:t>New_ISCORE</a:t>
-            </a:r>
-          </a:p>
-          <a:p>
-            <a:r>
-              <a:rPr lang="en-US"/>
-              <a:t>File_Code</a:t>
-            </a:r>
-          </a:p>
-        </p:txBody>
-      </p:sp>
+              <a:t>Trans</a:t>
+            </a:r>
+          </a:p>
+        </p:txBody>
+      </p:sp>
+      <p:pic>
+        <p:nvPicPr>
+          <p:cNvPr id="5" name="Picture 4">
+            <a:extLst>
+              <a:ext uri="{FF2B5EF4-FFF2-40B4-BE49-F238E27FC236}">
+                <a16:creationId xmlns:a16="http://schemas.microsoft.com/office/drawing/2014/main" id="{0D2F40EF-E3BC-1771-F69A-DA94F475A119}"/>
+              </a:ext>
+            </a:extLst>
+          </p:cNvPr>
+          <p:cNvPicPr>
+            <a:picLocks noChangeAspect="1"/>
+          </p:cNvPicPr>
+          <p:nvPr/>
+        </p:nvPicPr>
+        <p:blipFill>
+          <a:blip r:embed="rId2"/>
+          <a:stretch>
+            <a:fillRect/>
+          </a:stretch>
+        </p:blipFill>
+        <p:spPr>
+          <a:xfrm>
+            <a:off x="8380822" y="2364465"/>
+            <a:ext cx="2886735" cy="1932442"/>
+          </a:xfrm>
+          <a:prstGeom prst="rect">
+            <a:avLst/>
+          </a:prstGeom>
+        </p:spPr>
+      </p:pic>
     </p:spTree>
     <p:extLst>
       <p:ext uri="{BB962C8B-B14F-4D97-AF65-F5344CB8AC3E}">
-        <p14:creationId xmlns:p14="http://schemas.microsoft.com/office/powerpoint/2010/main" val="3449858060"/>
+        <p14:creationId xmlns:p14="http://schemas.microsoft.com/office/powerpoint/2010/main" val="560256876"/>
       </p:ext>
     </p:extLst>
   </p:cSld>
@@ -19665,7 +20340,7 @@
           <p:cNvPr id="2" name="Title 1">
             <a:extLst>
               <a:ext uri="{FF2B5EF4-FFF2-40B4-BE49-F238E27FC236}">
-                <a16:creationId xmlns:a16="http://schemas.microsoft.com/office/drawing/2014/main" id="{09B9A69E-06CE-97FD-204E-1EAB56654B9A}"/>
+                <a16:creationId xmlns:a16="http://schemas.microsoft.com/office/drawing/2014/main" id="{A6EE02EF-272C-634F-E677-280B413E4B0C}"/>
               </a:ext>
             </a:extLst>
           </p:cNvPr>
@@ -19678,8 +20353,8 @@
         </p:nvSpPr>
         <p:spPr>
           <a:xfrm>
-            <a:off x="795808" y="0"/>
-            <a:ext cx="10353762" cy="530942"/>
+            <a:off x="913795" y="0"/>
+            <a:ext cx="10353762" cy="688258"/>
           </a:xfrm>
         </p:spPr>
         <p:txBody>
@@ -19689,21 +20364,34 @@
           <a:lstStyle/>
           <a:p>
             <a:r>
-              <a:rPr lang="en-US" b="1" err="1">
+              <a:rPr lang="en-US" b="1">
+                <a:solidFill>
+                  <a:srgbClr val="FFFF00"/>
+                </a:solidFill>
+                <a:effectLst/>
+              </a:rPr>
+              <a:t>TWF</a:t>
+            </a:r>
+            <a:r>
+              <a:rPr lang="en-US" b="1">
+                <a:effectLst/>
+              </a:rPr>
+              <a:t>.</a:t>
+            </a:r>
+            <a:r>
+              <a:rPr lang="en-US" b="1">
                 <a:solidFill>
                   <a:srgbClr val="FF0000"/>
                 </a:solidFill>
-              </a:rPr>
-              <a:t>BranchGovernRegion</a:t>
-            </a:r>
-            <a:r>
-              <a:rPr lang="en-US" b="1">
-                <a:solidFill>
-                  <a:srgbClr val="FF0000"/>
-                </a:solidFill>
-              </a:rPr>
-              <a:t> VM</a:t>
-            </a:r>
+                <a:effectLst/>
+              </a:rPr>
+              <a:t>Flow_ISCORE_Data</a:t>
+            </a:r>
+            <a:endParaRPr lang="en-US">
+              <a:solidFill>
+                <a:srgbClr val="FF0000"/>
+              </a:solidFill>
+            </a:endParaRPr>
           </a:p>
         </p:txBody>
       </p:sp>
@@ -19712,7 +20400,7 @@
           <p:cNvPr id="3" name="Content Placeholder 2">
             <a:extLst>
               <a:ext uri="{FF2B5EF4-FFF2-40B4-BE49-F238E27FC236}">
-                <a16:creationId xmlns:a16="http://schemas.microsoft.com/office/drawing/2014/main" id="{8C64C52F-88D2-D45B-14B5-1C9472A1F8DB}"/>
+                <a16:creationId xmlns:a16="http://schemas.microsoft.com/office/drawing/2014/main" id="{C73E78E3-34C6-E811-8BA5-3DA8C61B8FD3}"/>
               </a:ext>
             </a:extLst>
           </p:cNvPr>
@@ -19725,50 +20413,181 @@
         </p:nvSpPr>
         <p:spPr>
           <a:xfrm>
-            <a:off x="353960" y="530943"/>
-            <a:ext cx="11533239" cy="6135328"/>
+            <a:off x="353961" y="688259"/>
+            <a:ext cx="11503742" cy="6037006"/>
           </a:xfrm>
         </p:spPr>
         <p:txBody>
           <a:bodyPr>
-            <a:normAutofit/>
+            <a:normAutofit lnSpcReduction="10000"/>
           </a:bodyPr>
           <a:lstStyle/>
           <a:p>
             <a:r>
-              <a:rPr lang="en-US" sz="1800"/>
-              <a:t>BranchId     		// From Table branch</a:t>
-            </a:r>
-          </a:p>
-          <a:p>
-            <a:r>
-              <a:rPr lang="en-US" sz="1800" err="1"/>
-              <a:t>Branch_code</a:t>
-            </a:r>
-            <a:r>
-              <a:rPr lang="en-US" sz="1800"/>
-              <a:t>		// From Table branch</a:t>
-            </a:r>
-          </a:p>
-          <a:p>
-            <a:r>
-              <a:rPr lang="en-US" sz="1800" err="1"/>
-              <a:t>ExterNum</a:t>
-            </a:r>
-            <a:r>
-              <a:rPr lang="en-US" sz="1800"/>
-              <a:t>		// From Table branch</a:t>
-            </a:r>
-          </a:p>
-          <a:p>
-            <a:endParaRPr lang="en-US" sz="1800"/>
+              <a:rPr lang="en-US"/>
+              <a:t>int Code_FID  [PK]</a:t>
+            </a:r>
+          </a:p>
+          <a:p>
+            <a:r>
+              <a:rPr lang="en-US" b="1">
+                <a:effectLst/>
+              </a:rPr>
+              <a:t>Cust_IDNO: string // customer nationalId</a:t>
+            </a:r>
+          </a:p>
+          <a:p>
+            <a:r>
+              <a:rPr lang="en-US" b="1"/>
+              <a:t>Inquiry_Date: DateTime</a:t>
+            </a:r>
+            <a:r>
+              <a:rPr lang="en-US"/>
+              <a:t> // </a:t>
+            </a:r>
+          </a:p>
+          <a:p>
+            <a:r>
+              <a:rPr lang="en-US" b="1">
+                <a:effectLst/>
+              </a:rPr>
+              <a:t>Score: int   	// </a:t>
+            </a:r>
+            <a:r>
+              <a:rPr lang="ar-EG">
+                <a:effectLst/>
+              </a:rPr>
+              <a:t>هو رقم يعبر عن مدى التزام العميل</a:t>
+            </a:r>
+          </a:p>
+          <a:p>
+            <a:r>
+              <a:rPr lang="en-US">
+                <a:effectLst/>
+              </a:rPr>
+              <a:t>Open_credits // </a:t>
+            </a:r>
+            <a:r>
+              <a:rPr lang="ar-EG">
+                <a:effectLst/>
+              </a:rPr>
+              <a:t>أي عدد القروض أو البطاقات الائتمانية التي يستخدمها العميل حالياً ولم يغلقها.</a:t>
+            </a:r>
+            <a:endParaRPr lang="en-US">
+              <a:effectLst/>
+            </a:endParaRPr>
+          </a:p>
+          <a:p>
+            <a:r>
+              <a:rPr lang="en-US"/>
+              <a:t>Days_Due: int </a:t>
+            </a:r>
+            <a:r>
+              <a:rPr lang="ar-EG" sz="1800"/>
+              <a:t>أيام التأخير؛ ويقصد بها عدد الأيام التي تأخر فيها العميل عن سداد الأقساط المستحقة عليه (مؤشر خطر إذا كان الرقم </a:t>
+            </a:r>
+            <a:r>
+              <a:rPr lang="ar-EG"/>
+              <a:t>كبيراً).</a:t>
+            </a:r>
+            <a:endParaRPr lang="en-US"/>
+          </a:p>
+          <a:p>
+            <a:r>
+              <a:rPr lang="en-US"/>
+              <a:t>NO_OF_INQUIRES: </a:t>
+            </a:r>
+            <a:r>
+              <a:rPr lang="ar-EG"/>
+              <a:t>عدد الكرات التى تم فيها الاستعلام عن هذا الرقم</a:t>
+            </a:r>
+            <a:endParaRPr lang="en-US"/>
+          </a:p>
+          <a:p>
+            <a:r>
+              <a:rPr lang="en-US"/>
+              <a:t>Request_id</a:t>
+            </a:r>
+          </a:p>
+          <a:p>
+            <a:r>
+              <a:rPr lang="en-US"/>
+              <a:t>REF_NO</a:t>
+            </a:r>
+          </a:p>
+          <a:p>
+            <a:r>
+              <a:rPr lang="en-US"/>
+              <a:t>NotFound , int : </a:t>
+            </a:r>
+            <a:r>
+              <a:rPr lang="ar-EG"/>
+              <a:t>حالة العميل</a:t>
+            </a:r>
+          </a:p>
+          <a:p>
+            <a:pPr lvl="1"/>
+            <a:r>
+              <a:rPr lang="en-US"/>
+              <a:t>0 : </a:t>
+            </a:r>
+            <a:r>
+              <a:rPr lang="ar-EG"/>
+              <a:t>يوجد للعميل هذا بيانات فى الأيزكور</a:t>
+            </a:r>
+          </a:p>
+          <a:p>
+            <a:pPr lvl="1"/>
+            <a:r>
+              <a:rPr lang="en-US"/>
+              <a:t>1 : </a:t>
+            </a:r>
+            <a:r>
+              <a:rPr lang="ar-EG"/>
+              <a:t>العميل هذا لا توجد له بيانات فى الايزكور لأنه لم يأخذ قروض من اى بنك او اى جهة من قبل </a:t>
+            </a:r>
+          </a:p>
+          <a:p>
+            <a:pPr lvl="1"/>
+            <a:r>
+              <a:rPr lang="en-US"/>
+              <a:t>2 :</a:t>
+            </a:r>
+            <a:r>
+              <a:rPr lang="ar-EG"/>
+              <a:t> </a:t>
+            </a:r>
+            <a:r>
+              <a:rPr lang="en-US"/>
+              <a:t> </a:t>
+            </a:r>
+            <a:r>
+              <a:rPr lang="ar-EG"/>
+              <a:t>  يوجد مشكلة في الاتصال او اى مشكله أخرى لم تمكننى من الاستعلام عنه وبالتالي لايتم ترحيل الطلب الا اذا تم التحميل</a:t>
+            </a:r>
+            <a:r>
+              <a:rPr lang="en-US"/>
+              <a:t> </a:t>
+            </a:r>
+          </a:p>
+          <a:p>
+            <a:r>
+              <a:rPr lang="en-US"/>
+              <a:t>New_ISCORE</a:t>
+            </a:r>
+          </a:p>
+          <a:p>
+            <a:r>
+              <a:rPr lang="en-US"/>
+              <a:t>File_Code</a:t>
+            </a:r>
           </a:p>
         </p:txBody>
       </p:sp>
     </p:spTree>
     <p:extLst>
       <p:ext uri="{BB962C8B-B14F-4D97-AF65-F5344CB8AC3E}">
-        <p14:creationId xmlns:p14="http://schemas.microsoft.com/office/powerpoint/2010/main" val="1678316031"/>
+        <p14:creationId xmlns:p14="http://schemas.microsoft.com/office/powerpoint/2010/main" val="3449858060"/>
       </p:ext>
     </p:extLst>
   </p:cSld>
@@ -19800,6 +20619,141 @@
           <p:cNvPr id="2" name="Title 1">
             <a:extLst>
               <a:ext uri="{FF2B5EF4-FFF2-40B4-BE49-F238E27FC236}">
+                <a16:creationId xmlns:a16="http://schemas.microsoft.com/office/drawing/2014/main" id="{09B9A69E-06CE-97FD-204E-1EAB56654B9A}"/>
+              </a:ext>
+            </a:extLst>
+          </p:cNvPr>
+          <p:cNvSpPr>
+            <a:spLocks noGrp="1"/>
+          </p:cNvSpPr>
+          <p:nvPr>
+            <p:ph type="title"/>
+          </p:nvPr>
+        </p:nvSpPr>
+        <p:spPr>
+          <a:xfrm>
+            <a:off x="795808" y="0"/>
+            <a:ext cx="10353762" cy="530942"/>
+          </a:xfrm>
+        </p:spPr>
+        <p:txBody>
+          <a:bodyPr>
+            <a:normAutofit fontScale="90000"/>
+          </a:bodyPr>
+          <a:lstStyle/>
+          <a:p>
+            <a:r>
+              <a:rPr lang="en-US" b="1" err="1">
+                <a:solidFill>
+                  <a:srgbClr val="FF0000"/>
+                </a:solidFill>
+              </a:rPr>
+              <a:t>BranchGovernRegion</a:t>
+            </a:r>
+            <a:r>
+              <a:rPr lang="en-US" b="1">
+                <a:solidFill>
+                  <a:srgbClr val="FF0000"/>
+                </a:solidFill>
+              </a:rPr>
+              <a:t> VM</a:t>
+            </a:r>
+          </a:p>
+        </p:txBody>
+      </p:sp>
+      <p:sp>
+        <p:nvSpPr>
+          <p:cNvPr id="3" name="Content Placeholder 2">
+            <a:extLst>
+              <a:ext uri="{FF2B5EF4-FFF2-40B4-BE49-F238E27FC236}">
+                <a16:creationId xmlns:a16="http://schemas.microsoft.com/office/drawing/2014/main" id="{8C64C52F-88D2-D45B-14B5-1C9472A1F8DB}"/>
+              </a:ext>
+            </a:extLst>
+          </p:cNvPr>
+          <p:cNvSpPr>
+            <a:spLocks noGrp="1"/>
+          </p:cNvSpPr>
+          <p:nvPr>
+            <p:ph idx="1"/>
+          </p:nvPr>
+        </p:nvSpPr>
+        <p:spPr>
+          <a:xfrm>
+            <a:off x="353960" y="530943"/>
+            <a:ext cx="11533239" cy="6135328"/>
+          </a:xfrm>
+        </p:spPr>
+        <p:txBody>
+          <a:bodyPr>
+            <a:normAutofit/>
+          </a:bodyPr>
+          <a:lstStyle/>
+          <a:p>
+            <a:r>
+              <a:rPr lang="en-US" sz="1800"/>
+              <a:t>BranchId     		// From Table branch</a:t>
+            </a:r>
+          </a:p>
+          <a:p>
+            <a:r>
+              <a:rPr lang="en-US" sz="1800" err="1"/>
+              <a:t>Branch_code</a:t>
+            </a:r>
+            <a:r>
+              <a:rPr lang="en-US" sz="1800"/>
+              <a:t>		// From Table branch</a:t>
+            </a:r>
+          </a:p>
+          <a:p>
+            <a:r>
+              <a:rPr lang="en-US" sz="1800" err="1"/>
+              <a:t>ExterNum</a:t>
+            </a:r>
+            <a:r>
+              <a:rPr lang="en-US" sz="1800"/>
+              <a:t>		// From Table branch</a:t>
+            </a:r>
+          </a:p>
+          <a:p>
+            <a:endParaRPr lang="en-US" sz="1800"/>
+          </a:p>
+        </p:txBody>
+      </p:sp>
+    </p:spTree>
+    <p:extLst>
+      <p:ext uri="{BB962C8B-B14F-4D97-AF65-F5344CB8AC3E}">
+        <p14:creationId xmlns:p14="http://schemas.microsoft.com/office/powerpoint/2010/main" val="1678316031"/>
+      </p:ext>
+    </p:extLst>
+  </p:cSld>
+  <p:clrMapOvr>
+    <a:masterClrMapping/>
+  </p:clrMapOvr>
+</p:sld>
+</file>
+
+<file path=ppt/slides/slide68.xml><?xml version="1.0" encoding="utf-8"?>
+<p:sld xmlns:a="http://schemas.openxmlformats.org/drawingml/2006/main" xmlns:r="http://schemas.openxmlformats.org/officeDocument/2006/relationships" xmlns:p="http://schemas.openxmlformats.org/presentationml/2006/main">
+  <p:cSld>
+    <p:spTree>
+      <p:nvGrpSpPr>
+        <p:cNvPr id="1" name=""/>
+        <p:cNvGrpSpPr/>
+        <p:nvPr/>
+      </p:nvGrpSpPr>
+      <p:grpSpPr>
+        <a:xfrm>
+          <a:off x="0" y="0"/>
+          <a:ext cx="0" cy="0"/>
+          <a:chOff x="0" y="0"/>
+          <a:chExt cx="0" cy="0"/>
+        </a:xfrm>
+      </p:grpSpPr>
+      <p:sp>
+        <p:nvSpPr>
+          <p:cNvPr id="2" name="Title 1">
+            <a:extLst>
+              <a:ext uri="{FF2B5EF4-FFF2-40B4-BE49-F238E27FC236}">
                 <a16:creationId xmlns:a16="http://schemas.microsoft.com/office/drawing/2014/main" id="{4EF5FE32-DD82-CBD6-386F-93F17B98F119}"/>
               </a:ext>
             </a:extLst>
@@ -20150,7 +21104,7 @@
 </p:sld>
 </file>
 
-<file path=ppt/slides/slide68.xml><?xml version="1.0" encoding="utf-8"?>
+<file path=ppt/slides/slide69.xml><?xml version="1.0" encoding="utf-8"?>
 <p:sld xmlns:a="http://schemas.openxmlformats.org/drawingml/2006/main" xmlns:r="http://schemas.openxmlformats.org/officeDocument/2006/relationships" xmlns:p="http://schemas.openxmlformats.org/presentationml/2006/main">
   <p:cSld>
     <p:spTree>
@@ -20590,144 +21544,6 @@
 </p:sld>
 </file>
 
-<file path=ppt/slides/slide69.xml><?xml version="1.0" encoding="utf-8"?>
-<p:sld xmlns:a="http://schemas.openxmlformats.org/drawingml/2006/main" xmlns:r="http://schemas.openxmlformats.org/officeDocument/2006/relationships" xmlns:p="http://schemas.openxmlformats.org/presentationml/2006/main">
-  <p:cSld>
-    <p:spTree>
-      <p:nvGrpSpPr>
-        <p:cNvPr id="1" name=""/>
-        <p:cNvGrpSpPr/>
-        <p:nvPr/>
-      </p:nvGrpSpPr>
-      <p:grpSpPr>
-        <a:xfrm>
-          <a:off x="0" y="0"/>
-          <a:ext cx="0" cy="0"/>
-          <a:chOff x="0" y="0"/>
-          <a:chExt cx="0" cy="0"/>
-        </a:xfrm>
-      </p:grpSpPr>
-      <p:sp>
-        <p:nvSpPr>
-          <p:cNvPr id="2" name="Title 1">
-            <a:extLst>
-              <a:ext uri="{FF2B5EF4-FFF2-40B4-BE49-F238E27FC236}">
-                <a16:creationId xmlns:a16="http://schemas.microsoft.com/office/drawing/2014/main" id="{2D479AA4-7A27-F7BB-18CC-807B27549E5F}"/>
-              </a:ext>
-            </a:extLst>
-          </p:cNvPr>
-          <p:cNvSpPr>
-            <a:spLocks noGrp="1"/>
-          </p:cNvSpPr>
-          <p:nvPr>
-            <p:ph type="title"/>
-          </p:nvPr>
-        </p:nvSpPr>
-        <p:spPr>
-          <a:xfrm>
-            <a:off x="992453" y="0"/>
-            <a:ext cx="10353762" cy="570271"/>
-          </a:xfrm>
-        </p:spPr>
-        <p:txBody>
-          <a:bodyPr>
-            <a:normAutofit fontScale="90000"/>
-          </a:bodyPr>
-          <a:lstStyle/>
-          <a:p>
-            <a:r>
-              <a:rPr lang="en-US" b="1">
-                <a:solidFill>
-                  <a:srgbClr val="00B0F0"/>
-                </a:solidFill>
-              </a:rPr>
-              <a:t>TransactionVM</a:t>
-            </a:r>
-          </a:p>
-        </p:txBody>
-      </p:sp>
-      <p:pic>
-        <p:nvPicPr>
-          <p:cNvPr id="5" name="Content Placeholder 4">
-            <a:extLst>
-              <a:ext uri="{FF2B5EF4-FFF2-40B4-BE49-F238E27FC236}">
-                <a16:creationId xmlns:a16="http://schemas.microsoft.com/office/drawing/2014/main" id="{551D13E4-7622-8C7C-0DCB-AF259538F592}"/>
-              </a:ext>
-            </a:extLst>
-          </p:cNvPr>
-          <p:cNvPicPr>
-            <a:picLocks noGrp="1" noChangeAspect="1"/>
-          </p:cNvPicPr>
-          <p:nvPr>
-            <p:ph idx="1"/>
-          </p:nvPr>
-        </p:nvPicPr>
-        <p:blipFill>
-          <a:blip r:embed="rId2"/>
-          <a:stretch>
-            <a:fillRect/>
-          </a:stretch>
-        </p:blipFill>
-        <p:spPr>
-          <a:xfrm>
-            <a:off x="167951" y="570271"/>
-            <a:ext cx="3342165" cy="2003594"/>
-          </a:xfrm>
-          <a:prstGeom prst="rect">
-            <a:avLst/>
-          </a:prstGeom>
-          <a:effectLst>
-            <a:outerShdw blurRad="25400" dir="17880000">
-              <a:srgbClr val="000000">
-                <a:alpha val="46000"/>
-              </a:srgbClr>
-            </a:outerShdw>
-          </a:effectLst>
-        </p:spPr>
-      </p:pic>
-      <p:pic>
-        <p:nvPicPr>
-          <p:cNvPr id="7" name="Picture 6">
-            <a:extLst>
-              <a:ext uri="{FF2B5EF4-FFF2-40B4-BE49-F238E27FC236}">
-                <a16:creationId xmlns:a16="http://schemas.microsoft.com/office/drawing/2014/main" id="{B2000730-5033-72F2-C16F-B5D5DFF5876B}"/>
-              </a:ext>
-            </a:extLst>
-          </p:cNvPr>
-          <p:cNvPicPr>
-            <a:picLocks noChangeAspect="1"/>
-          </p:cNvPicPr>
-          <p:nvPr/>
-        </p:nvPicPr>
-        <p:blipFill>
-          <a:blip r:embed="rId3"/>
-          <a:stretch>
-            <a:fillRect/>
-          </a:stretch>
-        </p:blipFill>
-        <p:spPr>
-          <a:xfrm>
-            <a:off x="167950" y="2682469"/>
-            <a:ext cx="6055263" cy="3605260"/>
-          </a:xfrm>
-          <a:prstGeom prst="rect">
-            <a:avLst/>
-          </a:prstGeom>
-        </p:spPr>
-      </p:pic>
-    </p:spTree>
-    <p:extLst>
-      <p:ext uri="{BB962C8B-B14F-4D97-AF65-F5344CB8AC3E}">
-        <p14:creationId xmlns:p14="http://schemas.microsoft.com/office/powerpoint/2010/main" val="4049467895"/>
-      </p:ext>
-    </p:extLst>
-  </p:cSld>
-  <p:clrMapOvr>
-    <a:masterClrMapping/>
-  </p:clrMapOvr>
-</p:sld>
-</file>
-
 <file path=ppt/slides/slide7.xml><?xml version="1.0" encoding="utf-8"?>
 <p:sld xmlns:a="http://schemas.openxmlformats.org/drawingml/2006/main" xmlns:r="http://schemas.openxmlformats.org/officeDocument/2006/relationships" xmlns:p="http://schemas.openxmlformats.org/presentationml/2006/main">
   <p:cSld>
@@ -20819,7 +21635,7 @@
           <p:cNvPr id="2" name="Title 1">
             <a:extLst>
               <a:ext uri="{FF2B5EF4-FFF2-40B4-BE49-F238E27FC236}">
-                <a16:creationId xmlns:a16="http://schemas.microsoft.com/office/drawing/2014/main" id="{CF1E26FB-A5E8-3CCA-EA68-AC697347FD56}"/>
+                <a16:creationId xmlns:a16="http://schemas.microsoft.com/office/drawing/2014/main" id="{272D7C44-A13E-6833-7D6F-1BAB07BEC642}"/>
               </a:ext>
             </a:extLst>
           </p:cNvPr>
@@ -20832,17 +21648,19 @@
         </p:nvSpPr>
         <p:spPr>
           <a:xfrm>
-            <a:off x="835137" y="0"/>
-            <a:ext cx="10353762" cy="970450"/>
-          </a:xfrm>
-        </p:spPr>
-        <p:txBody>
-          <a:bodyPr/>
+            <a:off x="834282" y="0"/>
+            <a:ext cx="10353762" cy="642730"/>
+          </a:xfrm>
+        </p:spPr>
+        <p:txBody>
+          <a:bodyPr>
+            <a:normAutofit fontScale="90000"/>
+          </a:bodyPr>
           <a:lstStyle/>
           <a:p>
             <a:r>
-              <a:rPr lang="en-US"/>
-              <a:t>LoginVM</a:t>
+              <a:rPr lang="en-US" b="1"/>
+              <a:t>When CO reject the FundingRequest</a:t>
             </a:r>
           </a:p>
         </p:txBody>
@@ -20852,7 +21670,7 @@
           <p:cNvPr id="3" name="Content Placeholder 2">
             <a:extLst>
               <a:ext uri="{FF2B5EF4-FFF2-40B4-BE49-F238E27FC236}">
-                <a16:creationId xmlns:a16="http://schemas.microsoft.com/office/drawing/2014/main" id="{B5F1CE3E-8FBA-4720-E027-74C182BEE6B6}"/>
+                <a16:creationId xmlns:a16="http://schemas.microsoft.com/office/drawing/2014/main" id="{4284F2B7-37DF-CFDD-2EEF-4ACC0B3D094B}"/>
               </a:ext>
             </a:extLst>
           </p:cNvPr>
@@ -20865,143 +21683,32 @@
         </p:nvSpPr>
         <p:spPr>
           <a:xfrm>
-            <a:off x="324464" y="970450"/>
-            <a:ext cx="11631561" cy="5794143"/>
-          </a:xfrm>
-        </p:spPr>
-        <p:txBody>
-          <a:bodyPr>
-            <a:normAutofit/>
-          </a:bodyPr>
+            <a:off x="198783" y="642730"/>
+            <a:ext cx="11068774" cy="5877339"/>
+          </a:xfrm>
+        </p:spPr>
+        <p:txBody>
+          <a:bodyPr/>
           <a:lstStyle/>
           <a:p>
             <a:r>
-              <a:rPr lang="en-US" sz="1600">
-                <a:effectLst/>
-              </a:rPr>
-              <a:t>UserId</a:t>
-            </a:r>
-          </a:p>
-          <a:p>
-            <a:r>
-              <a:rPr lang="en-US" sz="1600">
-                <a:effectLst/>
-              </a:rPr>
-              <a:t>UserNameAR</a:t>
-            </a:r>
-          </a:p>
-          <a:p>
-            <a:r>
-              <a:rPr lang="en-US" sz="1600">
-                <a:effectLst/>
-              </a:rPr>
-              <a:t>UserNameEng</a:t>
-            </a:r>
-          </a:p>
-          <a:p>
-            <a:r>
-              <a:rPr lang="en-US" sz="1600">
-                <a:effectLst/>
-              </a:rPr>
-              <a:t>BranchNameAR</a:t>
-            </a:r>
-          </a:p>
-          <a:p>
-            <a:r>
-              <a:rPr lang="en-US" sz="1600">
-                <a:effectLst/>
-              </a:rPr>
-              <a:t>BranchNameEN</a:t>
-            </a:r>
-          </a:p>
-          <a:p>
-            <a:r>
-              <a:rPr lang="en-US" sz="1600">
-                <a:effectLst/>
-              </a:rPr>
-              <a:t>JobNameAR</a:t>
-            </a:r>
-          </a:p>
-          <a:p>
-            <a:r>
-              <a:rPr lang="en-US" sz="1600">
-                <a:effectLst/>
-              </a:rPr>
-              <a:t>BranchId</a:t>
-            </a:r>
-          </a:p>
-          <a:p>
-            <a:r>
-              <a:rPr lang="en-US" sz="1600">
-                <a:effectLst/>
-              </a:rPr>
-              <a:t>RegionId</a:t>
-            </a:r>
-          </a:p>
-          <a:p>
-            <a:r>
-              <a:rPr lang="en-US" sz="1600">
-                <a:effectLst/>
-              </a:rPr>
-              <a:t>Branch_code</a:t>
-            </a:r>
-          </a:p>
-          <a:p>
-            <a:r>
-              <a:rPr lang="en-US" sz="1600">
-                <a:effectLst/>
-              </a:rPr>
-              <a:t>ComId</a:t>
-            </a:r>
-          </a:p>
-          <a:p>
-            <a:r>
-              <a:rPr lang="en-US" sz="1600">
-                <a:effectLst/>
-              </a:rPr>
-              <a:t>JobId</a:t>
-            </a:r>
-          </a:p>
-          <a:p>
-            <a:r>
-              <a:rPr lang="en-US" sz="1600">
-                <a:effectLst/>
-              </a:rPr>
-              <a:t>JobCode</a:t>
-            </a:r>
-          </a:p>
-          <a:p>
-            <a:r>
-              <a:rPr lang="en-US" sz="1600">
-                <a:effectLst/>
-              </a:rPr>
-              <a:t>UserCode</a:t>
-            </a:r>
-          </a:p>
-          <a:p>
-            <a:r>
-              <a:rPr lang="en-US" sz="1600">
-                <a:effectLst/>
-              </a:rPr>
-              <a:t>Numberofmonthsofappointment</a:t>
-            </a:r>
-          </a:p>
-          <a:p>
-            <a:endParaRPr lang="en-US" sz="1600">
-              <a:effectLst/>
-            </a:endParaRPr>
-          </a:p>
-          <a:p>
-            <a:endParaRPr lang="en-US" sz="1600">
-              <a:effectLst/>
-            </a:endParaRPr>
+              <a:rPr lang="en-US"/>
+              <a:t>TDWF.Flow_Request_Deportation</a:t>
+            </a:r>
+          </a:p>
+          <a:p>
+            <a:pPr lvl="1"/>
+            <a:endParaRPr lang="en-US"/>
+          </a:p>
+          <a:p>
+            <a:endParaRPr lang="en-US"/>
           </a:p>
         </p:txBody>
       </p:sp>
     </p:spTree>
     <p:extLst>
       <p:ext uri="{BB962C8B-B14F-4D97-AF65-F5344CB8AC3E}">
-        <p14:creationId xmlns:p14="http://schemas.microsoft.com/office/powerpoint/2010/main" val="3033957200"/>
+        <p14:creationId xmlns:p14="http://schemas.microsoft.com/office/powerpoint/2010/main" val="4085703863"/>
       </p:ext>
     </p:extLst>
   </p:cSld>
@@ -21033,7 +21740,7 @@
           <p:cNvPr id="2" name="Title 1">
             <a:extLst>
               <a:ext uri="{FF2B5EF4-FFF2-40B4-BE49-F238E27FC236}">
-                <a16:creationId xmlns:a16="http://schemas.microsoft.com/office/drawing/2014/main" id="{F5BB69CF-0430-C72F-E158-7D4576E1893D}"/>
+                <a16:creationId xmlns:a16="http://schemas.microsoft.com/office/drawing/2014/main" id="{B32C3EEF-AB22-5FAD-E7FB-766816AE7007}"/>
               </a:ext>
             </a:extLst>
           </p:cNvPr>
@@ -21046,19 +21753,17 @@
         </p:nvSpPr>
         <p:spPr>
           <a:xfrm>
-            <a:off x="913795" y="46654"/>
-            <a:ext cx="10353762" cy="659024"/>
-          </a:xfrm>
-        </p:spPr>
-        <p:txBody>
-          <a:bodyPr>
-            <a:normAutofit fontScale="90000"/>
-          </a:bodyPr>
+            <a:off x="913795" y="0"/>
+            <a:ext cx="10353762" cy="737419"/>
+          </a:xfrm>
+        </p:spPr>
+        <p:txBody>
+          <a:bodyPr/>
           <a:lstStyle/>
           <a:p>
             <a:r>
               <a:rPr lang="en-US" b="1"/>
-              <a:t>Micro Login Sequence</a:t>
+              <a:t>Front Places</a:t>
             </a:r>
           </a:p>
         </p:txBody>
@@ -21068,7 +21773,7 @@
           <p:cNvPr id="3" name="Content Placeholder 2">
             <a:extLst>
               <a:ext uri="{FF2B5EF4-FFF2-40B4-BE49-F238E27FC236}">
-                <a16:creationId xmlns:a16="http://schemas.microsoft.com/office/drawing/2014/main" id="{A7E639F0-DFFB-8A01-6FC5-695433537E24}"/>
+                <a16:creationId xmlns:a16="http://schemas.microsoft.com/office/drawing/2014/main" id="{3A6C8A89-D75F-3D76-3338-8061FC380E18}"/>
               </a:ext>
             </a:extLst>
           </p:cNvPr>
@@ -21081,97 +21786,36 @@
         </p:nvSpPr>
         <p:spPr>
           <a:xfrm>
-            <a:off x="258417" y="705678"/>
-            <a:ext cx="11009140" cy="6033051"/>
+            <a:off x="294968" y="737419"/>
+            <a:ext cx="11700387" cy="5958349"/>
           </a:xfrm>
         </p:spPr>
         <p:txBody>
           <a:bodyPr/>
           <a:lstStyle/>
           <a:p>
+            <a:r>
+              <a:rPr lang="en-US"/>
+              <a:t>app\Modules\Transaction\funding\</a:t>
+            </a:r>
+            <a:r>
+              <a:rPr lang="en-US" b="1">
+                <a:solidFill>
+                  <a:srgbClr val="FFFF00"/>
+                </a:solidFill>
+              </a:rPr>
+              <a:t>funding.component.ts</a:t>
+            </a:r>
+          </a:p>
+          <a:p>
             <a:endParaRPr lang="en-US"/>
           </a:p>
-          <a:p>
-            <a:endParaRPr lang="en-US"/>
-          </a:p>
-          <a:p>
-            <a:endParaRPr lang="en-US"/>
-          </a:p>
-          <a:p>
-            <a:r>
-              <a:rPr lang="en-US"/>
-              <a:t>Then go to loginService</a:t>
-            </a:r>
-          </a:p>
-          <a:p>
-            <a:endParaRPr lang="en-US"/>
-          </a:p>
-        </p:txBody>
-      </p:sp>
-      <p:pic>
-        <p:nvPicPr>
-          <p:cNvPr id="7" name="Picture 6">
-            <a:extLst>
-              <a:ext uri="{FF2B5EF4-FFF2-40B4-BE49-F238E27FC236}">
-                <a16:creationId xmlns:a16="http://schemas.microsoft.com/office/drawing/2014/main" id="{9949445F-5D8F-6554-A6F3-73F4D9DADB18}"/>
-              </a:ext>
-            </a:extLst>
-          </p:cNvPr>
-          <p:cNvPicPr>
-            <a:picLocks noChangeAspect="1"/>
-          </p:cNvPicPr>
-          <p:nvPr/>
-        </p:nvPicPr>
-        <p:blipFill>
-          <a:blip r:embed="rId2"/>
-          <a:stretch>
-            <a:fillRect/>
-          </a:stretch>
-        </p:blipFill>
-        <p:spPr>
-          <a:xfrm>
-            <a:off x="195592" y="799824"/>
-            <a:ext cx="5895084" cy="1129756"/>
-          </a:xfrm>
-          <a:prstGeom prst="rect">
-            <a:avLst/>
-          </a:prstGeom>
-        </p:spPr>
-      </p:pic>
-      <p:pic>
-        <p:nvPicPr>
-          <p:cNvPr id="9" name="Picture 8">
-            <a:extLst>
-              <a:ext uri="{FF2B5EF4-FFF2-40B4-BE49-F238E27FC236}">
-                <a16:creationId xmlns:a16="http://schemas.microsoft.com/office/drawing/2014/main" id="{7D96E95C-6FD8-AD7C-7E21-F0E9E7B05C9D}"/>
-              </a:ext>
-            </a:extLst>
-          </p:cNvPr>
-          <p:cNvPicPr>
-            <a:picLocks noChangeAspect="1"/>
-          </p:cNvPicPr>
-          <p:nvPr/>
-        </p:nvPicPr>
-        <p:blipFill>
-          <a:blip r:embed="rId3"/>
-          <a:stretch>
-            <a:fillRect/>
-          </a:stretch>
-        </p:blipFill>
-        <p:spPr>
-          <a:xfrm>
-            <a:off x="3450237" y="2023726"/>
-            <a:ext cx="4669377" cy="352850"/>
-          </a:xfrm>
-          <a:prstGeom prst="rect">
-            <a:avLst/>
-          </a:prstGeom>
-        </p:spPr>
-      </p:pic>
+        </p:txBody>
+      </p:sp>
     </p:spTree>
     <p:extLst>
       <p:ext uri="{BB962C8B-B14F-4D97-AF65-F5344CB8AC3E}">
-        <p14:creationId xmlns:p14="http://schemas.microsoft.com/office/powerpoint/2010/main" val="1842946377"/>
+        <p14:creationId xmlns:p14="http://schemas.microsoft.com/office/powerpoint/2010/main" val="2806931338"/>
       </p:ext>
     </p:extLst>
   </p:cSld>
@@ -21203,7 +21847,7 @@
           <p:cNvPr id="2" name="Title 1">
             <a:extLst>
               <a:ext uri="{FF2B5EF4-FFF2-40B4-BE49-F238E27FC236}">
-                <a16:creationId xmlns:a16="http://schemas.microsoft.com/office/drawing/2014/main" id="{272D7C44-A13E-6833-7D6F-1BAB07BEC642}"/>
+                <a16:creationId xmlns:a16="http://schemas.microsoft.com/office/drawing/2014/main" id="{D2099F25-69DD-0B59-E12E-FF349DBC35DE}"/>
               </a:ext>
             </a:extLst>
           </p:cNvPr>
@@ -21214,21 +21858,14 @@
             <p:ph type="title"/>
           </p:nvPr>
         </p:nvSpPr>
-        <p:spPr>
-          <a:xfrm>
-            <a:off x="834282" y="0"/>
-            <a:ext cx="10353762" cy="642730"/>
-          </a:xfrm>
-        </p:spPr>
-        <p:txBody>
-          <a:bodyPr>
-            <a:normAutofit fontScale="90000"/>
-          </a:bodyPr>
+        <p:spPr/>
+        <p:txBody>
+          <a:bodyPr/>
           <a:lstStyle/>
           <a:p>
             <a:r>
-              <a:rPr lang="en-US" b="1"/>
-              <a:t>When CO reject the FundingRequest</a:t>
+              <a:rPr lang="en-US"/>
+              <a:t>Places</a:t>
             </a:r>
           </a:p>
         </p:txBody>
@@ -21238,7 +21875,7 @@
           <p:cNvPr id="3" name="Content Placeholder 2">
             <a:extLst>
               <a:ext uri="{FF2B5EF4-FFF2-40B4-BE49-F238E27FC236}">
-                <a16:creationId xmlns:a16="http://schemas.microsoft.com/office/drawing/2014/main" id="{4284F2B7-37DF-CFDD-2EEF-4ACC0B3D094B}"/>
+                <a16:creationId xmlns:a16="http://schemas.microsoft.com/office/drawing/2014/main" id="{BE834885-BB5E-ED54-5976-BF14D866F797}"/>
               </a:ext>
             </a:extLst>
           </p:cNvPr>
@@ -21249,24 +21886,15 @@
             <p:ph idx="1"/>
           </p:nvPr>
         </p:nvSpPr>
-        <p:spPr>
-          <a:xfrm>
-            <a:off x="198783" y="642730"/>
-            <a:ext cx="11068774" cy="5877339"/>
-          </a:xfrm>
-        </p:spPr>
+        <p:spPr/>
         <p:txBody>
           <a:bodyPr/>
           <a:lstStyle/>
           <a:p>
             <a:r>
               <a:rPr lang="en-US"/>
-              <a:t>TDWF.Flow_Request_Deportation</a:t>
-            </a:r>
-          </a:p>
-          <a:p>
-            <a:pPr lvl="1"/>
-            <a:endParaRPr lang="en-US"/>
+              <a:t>_Flow_Rejections_mainService.GetAllRejectionFieldsByRequest_id(Request_id)</a:t>
+            </a:r>
           </a:p>
           <a:p>
             <a:endParaRPr lang="en-US"/>
@@ -21276,7 +21904,7 @@
     </p:spTree>
     <p:extLst>
       <p:ext uri="{BB962C8B-B14F-4D97-AF65-F5344CB8AC3E}">
-        <p14:creationId xmlns:p14="http://schemas.microsoft.com/office/powerpoint/2010/main" val="4085703863"/>
+        <p14:creationId xmlns:p14="http://schemas.microsoft.com/office/powerpoint/2010/main" val="3204393959"/>
       </p:ext>
     </p:extLst>
   </p:cSld>
@@ -21308,7 +21936,7 @@
           <p:cNvPr id="2" name="Title 1">
             <a:extLst>
               <a:ext uri="{FF2B5EF4-FFF2-40B4-BE49-F238E27FC236}">
-                <a16:creationId xmlns:a16="http://schemas.microsoft.com/office/drawing/2014/main" id="{D2099F25-69DD-0B59-E12E-FF349DBC35DE}"/>
+                <a16:creationId xmlns:a16="http://schemas.microsoft.com/office/drawing/2014/main" id="{F5BB69CF-0430-C72F-E158-7D4576E1893D}"/>
               </a:ext>
             </a:extLst>
           </p:cNvPr>
@@ -21319,12 +21947,22 @@
             <p:ph type="title"/>
           </p:nvPr>
         </p:nvSpPr>
-        <p:spPr/>
-        <p:txBody>
-          <a:bodyPr/>
+        <p:spPr>
+          <a:xfrm>
+            <a:off x="913795" y="46654"/>
+            <a:ext cx="10353762" cy="659024"/>
+          </a:xfrm>
+        </p:spPr>
+        <p:txBody>
+          <a:bodyPr>
+            <a:normAutofit fontScale="90000"/>
+          </a:bodyPr>
           <a:lstStyle/>
           <a:p>
-            <a:endParaRPr lang="en-US"/>
+            <a:r>
+              <a:rPr lang="en-US" b="1"/>
+              <a:t>Micro Login Sequence</a:t>
+            </a:r>
           </a:p>
         </p:txBody>
       </p:sp>
@@ -21333,7 +21971,7 @@
           <p:cNvPr id="3" name="Content Placeholder 2">
             <a:extLst>
               <a:ext uri="{FF2B5EF4-FFF2-40B4-BE49-F238E27FC236}">
-                <a16:creationId xmlns:a16="http://schemas.microsoft.com/office/drawing/2014/main" id="{BE834885-BB5E-ED54-5976-BF14D866F797}"/>
+                <a16:creationId xmlns:a16="http://schemas.microsoft.com/office/drawing/2014/main" id="{A7E639F0-DFFB-8A01-6FC5-695433537E24}"/>
               </a:ext>
             </a:extLst>
           </p:cNvPr>
@@ -21344,25 +21982,1085 @@
             <p:ph idx="1"/>
           </p:nvPr>
         </p:nvSpPr>
-        <p:spPr/>
+        <p:spPr>
+          <a:xfrm>
+            <a:off x="258417" y="705678"/>
+            <a:ext cx="11009140" cy="6033051"/>
+          </a:xfrm>
+        </p:spPr>
         <p:txBody>
           <a:bodyPr/>
           <a:lstStyle/>
           <a:p>
-            <a:r>
-              <a:rPr lang="en-US"/>
-              <a:t>_Flow_Rejections_mainService.GetAllRejectionFieldsByRequest_id(Request_id)</a:t>
-            </a:r>
-          </a:p>
-          <a:p>
             <a:endParaRPr lang="en-US"/>
           </a:p>
-        </p:txBody>
-      </p:sp>
+          <a:p>
+            <a:endParaRPr lang="en-US"/>
+          </a:p>
+          <a:p>
+            <a:endParaRPr lang="en-US"/>
+          </a:p>
+          <a:p>
+            <a:r>
+              <a:rPr lang="en-US"/>
+              <a:t>Then go to loginService</a:t>
+            </a:r>
+          </a:p>
+          <a:p>
+            <a:endParaRPr lang="en-US"/>
+          </a:p>
+        </p:txBody>
+      </p:sp>
+      <p:pic>
+        <p:nvPicPr>
+          <p:cNvPr id="7" name="Picture 6">
+            <a:extLst>
+              <a:ext uri="{FF2B5EF4-FFF2-40B4-BE49-F238E27FC236}">
+                <a16:creationId xmlns:a16="http://schemas.microsoft.com/office/drawing/2014/main" id="{9949445F-5D8F-6554-A6F3-73F4D9DADB18}"/>
+              </a:ext>
+            </a:extLst>
+          </p:cNvPr>
+          <p:cNvPicPr>
+            <a:picLocks noChangeAspect="1"/>
+          </p:cNvPicPr>
+          <p:nvPr/>
+        </p:nvPicPr>
+        <p:blipFill>
+          <a:blip r:embed="rId2"/>
+          <a:stretch>
+            <a:fillRect/>
+          </a:stretch>
+        </p:blipFill>
+        <p:spPr>
+          <a:xfrm>
+            <a:off x="195592" y="799824"/>
+            <a:ext cx="5895084" cy="1129756"/>
+          </a:xfrm>
+          <a:prstGeom prst="rect">
+            <a:avLst/>
+          </a:prstGeom>
+        </p:spPr>
+      </p:pic>
+      <p:pic>
+        <p:nvPicPr>
+          <p:cNvPr id="9" name="Picture 8">
+            <a:extLst>
+              <a:ext uri="{FF2B5EF4-FFF2-40B4-BE49-F238E27FC236}">
+                <a16:creationId xmlns:a16="http://schemas.microsoft.com/office/drawing/2014/main" id="{7D96E95C-6FD8-AD7C-7E21-F0E9E7B05C9D}"/>
+              </a:ext>
+            </a:extLst>
+          </p:cNvPr>
+          <p:cNvPicPr>
+            <a:picLocks noChangeAspect="1"/>
+          </p:cNvPicPr>
+          <p:nvPr/>
+        </p:nvPicPr>
+        <p:blipFill>
+          <a:blip r:embed="rId3"/>
+          <a:stretch>
+            <a:fillRect/>
+          </a:stretch>
+        </p:blipFill>
+        <p:spPr>
+          <a:xfrm>
+            <a:off x="3450237" y="2023726"/>
+            <a:ext cx="4669377" cy="352850"/>
+          </a:xfrm>
+          <a:prstGeom prst="rect">
+            <a:avLst/>
+          </a:prstGeom>
+        </p:spPr>
+      </p:pic>
     </p:spTree>
     <p:extLst>
       <p:ext uri="{BB962C8B-B14F-4D97-AF65-F5344CB8AC3E}">
-        <p14:creationId xmlns:p14="http://schemas.microsoft.com/office/powerpoint/2010/main" val="3204393959"/>
+        <p14:creationId xmlns:p14="http://schemas.microsoft.com/office/powerpoint/2010/main" val="1842946377"/>
+      </p:ext>
+    </p:extLst>
+  </p:cSld>
+  <p:clrMapOvr>
+    <a:masterClrMapping/>
+  </p:clrMapOvr>
+</p:sld>
+</file>
+
+<file path=ppt/slides/slide74.xml><?xml version="1.0" encoding="utf-8"?>
+<p:sld xmlns:a="http://schemas.openxmlformats.org/drawingml/2006/main" xmlns:r="http://schemas.openxmlformats.org/officeDocument/2006/relationships" xmlns:p="http://schemas.openxmlformats.org/presentationml/2006/main">
+  <p:cSld>
+    <p:spTree>
+      <p:nvGrpSpPr>
+        <p:cNvPr id="1" name=""/>
+        <p:cNvGrpSpPr/>
+        <p:nvPr/>
+      </p:nvGrpSpPr>
+      <p:grpSpPr>
+        <a:xfrm>
+          <a:off x="0" y="0"/>
+          <a:ext cx="0" cy="0"/>
+          <a:chOff x="0" y="0"/>
+          <a:chExt cx="0" cy="0"/>
+        </a:xfrm>
+      </p:grpSpPr>
+      <p:sp>
+        <p:nvSpPr>
+          <p:cNvPr id="2" name="Title 1">
+            <a:extLst>
+              <a:ext uri="{FF2B5EF4-FFF2-40B4-BE49-F238E27FC236}">
+                <a16:creationId xmlns:a16="http://schemas.microsoft.com/office/drawing/2014/main" id="{12BC1E88-436E-358B-0172-0873ADFF98D4}"/>
+              </a:ext>
+            </a:extLst>
+          </p:cNvPr>
+          <p:cNvSpPr>
+            <a:spLocks noGrp="1"/>
+          </p:cNvSpPr>
+          <p:nvPr>
+            <p:ph type="title"/>
+          </p:nvPr>
+        </p:nvSpPr>
+        <p:spPr>
+          <a:xfrm>
+            <a:off x="344129" y="2104103"/>
+            <a:ext cx="11503742" cy="1445342"/>
+          </a:xfrm>
+        </p:spPr>
+        <p:txBody>
+          <a:bodyPr>
+            <a:normAutofit/>
+          </a:bodyPr>
+          <a:lstStyle/>
+          <a:p>
+            <a:r>
+              <a:rPr lang="en-US" sz="5400" b="1">
+                <a:solidFill>
+                  <a:srgbClr val="FF0000"/>
+                </a:solidFill>
+              </a:rPr>
+              <a:t>View Models</a:t>
+            </a:r>
+          </a:p>
+        </p:txBody>
+      </p:sp>
+    </p:spTree>
+    <p:extLst>
+      <p:ext uri="{BB962C8B-B14F-4D97-AF65-F5344CB8AC3E}">
+        <p14:creationId xmlns:p14="http://schemas.microsoft.com/office/powerpoint/2010/main" val="319315269"/>
+      </p:ext>
+    </p:extLst>
+  </p:cSld>
+  <p:clrMapOvr>
+    <a:masterClrMapping/>
+  </p:clrMapOvr>
+</p:sld>
+</file>
+
+<file path=ppt/slides/slide75.xml><?xml version="1.0" encoding="utf-8"?>
+<p:sld xmlns:a="http://schemas.openxmlformats.org/drawingml/2006/main" xmlns:r="http://schemas.openxmlformats.org/officeDocument/2006/relationships" xmlns:p="http://schemas.openxmlformats.org/presentationml/2006/main">
+  <p:cSld>
+    <p:spTree>
+      <p:nvGrpSpPr>
+        <p:cNvPr id="1" name=""/>
+        <p:cNvGrpSpPr/>
+        <p:nvPr/>
+      </p:nvGrpSpPr>
+      <p:grpSpPr>
+        <a:xfrm>
+          <a:off x="0" y="0"/>
+          <a:ext cx="0" cy="0"/>
+          <a:chOff x="0" y="0"/>
+          <a:chExt cx="0" cy="0"/>
+        </a:xfrm>
+      </p:grpSpPr>
+      <p:sp>
+        <p:nvSpPr>
+          <p:cNvPr id="2" name="Title 1">
+            <a:extLst>
+              <a:ext uri="{FF2B5EF4-FFF2-40B4-BE49-F238E27FC236}">
+                <a16:creationId xmlns:a16="http://schemas.microsoft.com/office/drawing/2014/main" id="{34146355-124E-3796-C27E-50B1FEE9ADD5}"/>
+              </a:ext>
+            </a:extLst>
+          </p:cNvPr>
+          <p:cNvSpPr>
+            <a:spLocks noGrp="1"/>
+          </p:cNvSpPr>
+          <p:nvPr>
+            <p:ph type="title"/>
+          </p:nvPr>
+        </p:nvSpPr>
+        <p:spPr>
+          <a:xfrm>
+            <a:off x="913795" y="0"/>
+            <a:ext cx="10353762" cy="688258"/>
+          </a:xfrm>
+        </p:spPr>
+        <p:txBody>
+          <a:bodyPr>
+            <a:normAutofit fontScale="90000"/>
+          </a:bodyPr>
+          <a:lstStyle/>
+          <a:p>
+            <a:r>
+              <a:rPr lang="en-US" b="1">
+                <a:solidFill>
+                  <a:srgbClr val="FF0000"/>
+                </a:solidFill>
+              </a:rPr>
+              <a:t>ProdVM</a:t>
+            </a:r>
+          </a:p>
+        </p:txBody>
+      </p:sp>
+      <p:sp>
+        <p:nvSpPr>
+          <p:cNvPr id="3" name="Content Placeholder 2">
+            <a:extLst>
+              <a:ext uri="{FF2B5EF4-FFF2-40B4-BE49-F238E27FC236}">
+                <a16:creationId xmlns:a16="http://schemas.microsoft.com/office/drawing/2014/main" id="{E2533BB6-2BA2-1C59-7D9D-054CC9AB8FB7}"/>
+              </a:ext>
+            </a:extLst>
+          </p:cNvPr>
+          <p:cNvSpPr>
+            <a:spLocks noGrp="1"/>
+          </p:cNvSpPr>
+          <p:nvPr>
+            <p:ph idx="1"/>
+          </p:nvPr>
+        </p:nvSpPr>
+        <p:spPr>
+          <a:xfrm>
+            <a:off x="363794" y="688257"/>
+            <a:ext cx="11602064" cy="5928853"/>
+          </a:xfrm>
+        </p:spPr>
+        <p:txBody>
+          <a:bodyPr>
+            <a:normAutofit/>
+          </a:bodyPr>
+          <a:lstStyle/>
+          <a:p>
+            <a:pPr marL="36900" indent="0">
+              <a:buNone/>
+            </a:pPr>
+            <a:r>
+              <a:rPr lang="en-US"/>
+              <a:t>public class ProdVM {</a:t>
+            </a:r>
+          </a:p>
+          <a:p>
+            <a:pPr marL="36900" indent="0">
+              <a:buNone/>
+            </a:pPr>
+            <a:r>
+              <a:rPr lang="en-US"/>
+              <a:t>        public </a:t>
+            </a:r>
+            <a:r>
+              <a:rPr lang="en-US">
+                <a:solidFill>
+                  <a:srgbClr val="00B0F0"/>
+                </a:solidFill>
+              </a:rPr>
+              <a:t>IQueryable</a:t>
+            </a:r>
+            <a:r>
+              <a:rPr lang="en-US"/>
+              <a:t>&lt;Flow_branch_product&gt; </a:t>
+            </a:r>
+            <a:r>
+              <a:rPr lang="en-US" b="1">
+                <a:solidFill>
+                  <a:srgbClr val="FFFF00"/>
+                </a:solidFill>
+              </a:rPr>
+              <a:t>BranchProduct</a:t>
+            </a:r>
+            <a:r>
+              <a:rPr lang="en-US"/>
+              <a:t> { get; set; }</a:t>
+            </a:r>
+          </a:p>
+          <a:p>
+            <a:pPr marL="36900" indent="0">
+              <a:buNone/>
+            </a:pPr>
+            <a:r>
+              <a:rPr lang="en-US"/>
+              <a:t>        public </a:t>
+            </a:r>
+            <a:r>
+              <a:rPr lang="en-US">
+                <a:solidFill>
+                  <a:srgbClr val="00B0F0"/>
+                </a:solidFill>
+              </a:rPr>
+              <a:t>IQueryable</a:t>
+            </a:r>
+            <a:r>
+              <a:rPr lang="en-US"/>
+              <a:t>&lt;Flow_Products&gt; </a:t>
+            </a:r>
+            <a:r>
+              <a:rPr lang="en-US" b="1">
+                <a:solidFill>
+                  <a:srgbClr val="FFFF00"/>
+                </a:solidFill>
+              </a:rPr>
+              <a:t>Products</a:t>
+            </a:r>
+            <a:r>
+              <a:rPr lang="en-US"/>
+              <a:t> { get; set; }</a:t>
+            </a:r>
+          </a:p>
+          <a:p>
+            <a:pPr marL="36900" indent="0">
+              <a:buNone/>
+            </a:pPr>
+            <a:r>
+              <a:rPr lang="en-US"/>
+              <a:t>        public </a:t>
+            </a:r>
+            <a:r>
+              <a:rPr lang="en-US">
+                <a:solidFill>
+                  <a:srgbClr val="00B0F0"/>
+                </a:solidFill>
+              </a:rPr>
+              <a:t>IQueryable</a:t>
+            </a:r>
+            <a:r>
+              <a:rPr lang="en-US"/>
+              <a:t>&lt;Flow_Emp_Product&gt; </a:t>
+            </a:r>
+            <a:r>
+              <a:rPr lang="en-US" b="1">
+                <a:solidFill>
+                  <a:srgbClr val="FFFF00"/>
+                </a:solidFill>
+              </a:rPr>
+              <a:t>EmpProduct</a:t>
+            </a:r>
+            <a:r>
+              <a:rPr lang="en-US"/>
+              <a:t> { get; set; }</a:t>
+            </a:r>
+          </a:p>
+          <a:p>
+            <a:pPr marL="36900" indent="0">
+              <a:buNone/>
+            </a:pPr>
+            <a:r>
+              <a:rPr lang="en-US"/>
+              <a:t>}</a:t>
+            </a:r>
+          </a:p>
+          <a:p>
+            <a:pPr marL="36900" indent="0">
+              <a:buNone/>
+            </a:pPr>
+            <a:r>
+              <a:rPr lang="en-US"/>
+              <a:t>public class FundindPageLoadVM  {</a:t>
+            </a:r>
+          </a:p>
+          <a:p>
+            <a:pPr marL="36900" indent="0">
+              <a:buNone/>
+            </a:pPr>
+            <a:r>
+              <a:rPr lang="en-US"/>
+              <a:t>	public IQueryable&lt;Flow_Purpose_loan&gt; </a:t>
+            </a:r>
+            <a:r>
+              <a:rPr lang="en-US" b="1">
+                <a:solidFill>
+                  <a:srgbClr val="FFFF00"/>
+                </a:solidFill>
+              </a:rPr>
+              <a:t>Purpose_loan </a:t>
+            </a:r>
+            <a:r>
+              <a:rPr lang="en-US"/>
+              <a:t>{ get; set; }</a:t>
+            </a:r>
+          </a:p>
+          <a:p>
+            <a:pPr marL="36900" indent="0">
+              <a:buNone/>
+            </a:pPr>
+            <a:r>
+              <a:rPr lang="en-US"/>
+              <a:t>      	public IQueryable&lt;Flow_Relationships&gt; </a:t>
+            </a:r>
+            <a:r>
+              <a:rPr lang="en-US" b="1">
+                <a:solidFill>
+                  <a:srgbClr val="FFFF00"/>
+                </a:solidFill>
+              </a:rPr>
+              <a:t>Relationships</a:t>
+            </a:r>
+            <a:r>
+              <a:rPr lang="en-US"/>
+              <a:t> { get; set; }</a:t>
+            </a:r>
+          </a:p>
+          <a:p>
+            <a:pPr marL="36900" indent="0">
+              <a:buNone/>
+            </a:pPr>
+            <a:r>
+              <a:rPr lang="en-US"/>
+              <a:t>      	public IQueryable&lt;Flow_Exempted_Products&gt; </a:t>
+            </a:r>
+            <a:r>
+              <a:rPr lang="en-US" b="1">
+                <a:solidFill>
+                  <a:srgbClr val="FFFF00"/>
+                </a:solidFill>
+              </a:rPr>
+              <a:t>flow_exempted_products</a:t>
+            </a:r>
+            <a:r>
+              <a:rPr lang="en-US"/>
+              <a:t> { get; set; }     </a:t>
+            </a:r>
+          </a:p>
+          <a:p>
+            <a:pPr marL="36900" indent="0">
+              <a:buNone/>
+            </a:pPr>
+            <a:r>
+              <a:rPr lang="en-US"/>
+              <a:t>	public decimal </a:t>
+            </a:r>
+            <a:r>
+              <a:rPr lang="en-US" b="1">
+                <a:solidFill>
+                  <a:srgbClr val="FFFF00"/>
+                </a:solidFill>
+              </a:rPr>
+              <a:t>Approximation</a:t>
+            </a:r>
+            <a:r>
+              <a:rPr lang="en-US"/>
+              <a:t> { get; set; }</a:t>
+            </a:r>
+          </a:p>
+          <a:p>
+            <a:pPr marL="36900" indent="0">
+              <a:buNone/>
+            </a:pPr>
+            <a:r>
+              <a:rPr lang="en-US"/>
+              <a:t>       public decimal </a:t>
+            </a:r>
+            <a:r>
+              <a:rPr lang="en-US" b="1">
+                <a:solidFill>
+                  <a:srgbClr val="FFFF00"/>
+                </a:solidFill>
+              </a:rPr>
+              <a:t>FinanceAmount_Approximation</a:t>
+            </a:r>
+            <a:r>
+              <a:rPr lang="en-US"/>
+              <a:t> { get; set; }</a:t>
+            </a:r>
+          </a:p>
+          <a:p>
+            <a:pPr marL="36900" indent="0">
+              <a:buNone/>
+            </a:pPr>
+            <a:r>
+              <a:rPr lang="en-US"/>
+              <a:t>	public ProdVM </a:t>
+            </a:r>
+            <a:r>
+              <a:rPr lang="en-US" b="1">
+                <a:solidFill>
+                  <a:srgbClr val="FFFF00"/>
+                </a:solidFill>
+              </a:rPr>
+              <a:t>ProdVM</a:t>
+            </a:r>
+            <a:r>
+              <a:rPr lang="en-US"/>
+              <a:t> { get; set; }</a:t>
+            </a:r>
+          </a:p>
+          <a:p>
+            <a:pPr marL="36900" indent="0">
+              <a:buNone/>
+            </a:pPr>
+            <a:r>
+              <a:rPr lang="en-US"/>
+              <a:t>}</a:t>
+            </a:r>
+          </a:p>
+        </p:txBody>
+      </p:sp>
+    </p:spTree>
+    <p:extLst>
+      <p:ext uri="{BB962C8B-B14F-4D97-AF65-F5344CB8AC3E}">
+        <p14:creationId xmlns:p14="http://schemas.microsoft.com/office/powerpoint/2010/main" val="811143626"/>
+      </p:ext>
+    </p:extLst>
+  </p:cSld>
+  <p:clrMapOvr>
+    <a:masterClrMapping/>
+  </p:clrMapOvr>
+</p:sld>
+</file>
+
+<file path=ppt/slides/slide76.xml><?xml version="1.0" encoding="utf-8"?>
+<p:sld xmlns:a="http://schemas.openxmlformats.org/drawingml/2006/main" xmlns:r="http://schemas.openxmlformats.org/officeDocument/2006/relationships" xmlns:p="http://schemas.openxmlformats.org/presentationml/2006/main">
+  <p:cSld>
+    <p:spTree>
+      <p:nvGrpSpPr>
+        <p:cNvPr id="1" name=""/>
+        <p:cNvGrpSpPr/>
+        <p:nvPr/>
+      </p:nvGrpSpPr>
+      <p:grpSpPr>
+        <a:xfrm>
+          <a:off x="0" y="0"/>
+          <a:ext cx="0" cy="0"/>
+          <a:chOff x="0" y="0"/>
+          <a:chExt cx="0" cy="0"/>
+        </a:xfrm>
+      </p:grpSpPr>
+      <p:sp>
+        <p:nvSpPr>
+          <p:cNvPr id="2" name="Title 1">
+            <a:extLst>
+              <a:ext uri="{FF2B5EF4-FFF2-40B4-BE49-F238E27FC236}">
+                <a16:creationId xmlns:a16="http://schemas.microsoft.com/office/drawing/2014/main" id="{2350B4D8-7F7B-C582-0D5B-818D3EBCB3C7}"/>
+              </a:ext>
+            </a:extLst>
+          </p:cNvPr>
+          <p:cNvSpPr>
+            <a:spLocks noGrp="1"/>
+          </p:cNvSpPr>
+          <p:nvPr>
+            <p:ph type="title"/>
+          </p:nvPr>
+        </p:nvSpPr>
+        <p:spPr/>
+        <p:txBody>
+          <a:bodyPr/>
+          <a:lstStyle/>
+          <a:p>
+            <a:endParaRPr lang="en-US"/>
+          </a:p>
+        </p:txBody>
+      </p:sp>
+      <p:sp>
+        <p:nvSpPr>
+          <p:cNvPr id="3" name="Content Placeholder 2">
+            <a:extLst>
+              <a:ext uri="{FF2B5EF4-FFF2-40B4-BE49-F238E27FC236}">
+                <a16:creationId xmlns:a16="http://schemas.microsoft.com/office/drawing/2014/main" id="{FBEBDDC3-EAEC-EFFC-2A0C-7E22E2707850}"/>
+              </a:ext>
+            </a:extLst>
+          </p:cNvPr>
+          <p:cNvSpPr>
+            <a:spLocks noGrp="1"/>
+          </p:cNvSpPr>
+          <p:nvPr>
+            <p:ph idx="1"/>
+          </p:nvPr>
+        </p:nvSpPr>
+        <p:spPr>
+          <a:xfrm>
+            <a:off x="913795" y="1732449"/>
+            <a:ext cx="10353762" cy="4982983"/>
+          </a:xfrm>
+        </p:spPr>
+        <p:txBody>
+          <a:bodyPr>
+            <a:normAutofit fontScale="92500" lnSpcReduction="20000"/>
+          </a:bodyPr>
+          <a:lstStyle/>
+          <a:p>
+            <a:pPr marL="36900" indent="0">
+              <a:buNone/>
+            </a:pPr>
+            <a:r>
+              <a:rPr lang="en-US"/>
+              <a:t>public class </a:t>
+            </a:r>
+            <a:r>
+              <a:rPr lang="en-US" b="1">
+                <a:solidFill>
+                  <a:srgbClr val="00B0F0"/>
+                </a:solidFill>
+              </a:rPr>
+              <a:t>FundingVM</a:t>
+            </a:r>
+          </a:p>
+          <a:p>
+            <a:pPr marL="36900" indent="0">
+              <a:buNone/>
+            </a:pPr>
+            <a:r>
+              <a:rPr lang="en-US"/>
+              <a:t>    {</a:t>
+            </a:r>
+          </a:p>
+          <a:p>
+            <a:pPr marL="36900" indent="0">
+              <a:buNone/>
+            </a:pPr>
+            <a:r>
+              <a:rPr lang="en-US"/>
+              <a:t>        public Flow_Funding_request Funding_request { get; set; }</a:t>
+            </a:r>
+          </a:p>
+          <a:p>
+            <a:pPr marL="36900" indent="0">
+              <a:buNone/>
+            </a:pPr>
+            <a:r>
+              <a:rPr lang="en-US"/>
+              <a:t>        public IQueryable&lt;JoinMandatoryDocAndTypeDocuments&gt; Documents { get; set; }</a:t>
+            </a:r>
+          </a:p>
+          <a:p>
+            <a:pPr marL="36900" indent="0">
+              <a:buNone/>
+            </a:pPr>
+            <a:r>
+              <a:rPr lang="en-US"/>
+              <a:t>        public IQueryable&lt;Flow_Rejections_mainVM&gt; Comments { get; set; }</a:t>
+            </a:r>
+          </a:p>
+          <a:p>
+            <a:pPr marL="36900" indent="0">
+              <a:buNone/>
+            </a:pPr>
+            <a:r>
+              <a:rPr lang="en-US"/>
+              <a:t>        public IQueryable&lt;Flow_Rejections_mainFieldVM&gt; RejectedFields { get; set; }</a:t>
+            </a:r>
+          </a:p>
+          <a:p>
+            <a:pPr marL="36900" indent="0">
+              <a:buNone/>
+            </a:pPr>
+            <a:r>
+              <a:rPr lang="en-US"/>
+              <a:t>        public IQueryable&lt;GuarVM&gt; Guaranters { get; set; }</a:t>
+            </a:r>
+          </a:p>
+          <a:p>
+            <a:pPr marL="36900" indent="0">
+              <a:buNone/>
+            </a:pPr>
+            <a:r>
+              <a:rPr lang="en-US"/>
+              <a:t>        //public Flow_Enterprises Flow_Enterprise { get; set; }</a:t>
+            </a:r>
+          </a:p>
+          <a:p>
+            <a:pPr marL="36900" indent="0">
+              <a:buNone/>
+            </a:pPr>
+            <a:r>
+              <a:rPr lang="en-US"/>
+              <a:t>        public IEnumerable&lt;Product_destinationVM&gt; Flow_Product_destinations { get; set; }</a:t>
+            </a:r>
+          </a:p>
+          <a:p>
+            <a:pPr marL="36900" indent="0">
+              <a:buNone/>
+            </a:pPr>
+            <a:r>
+              <a:rPr lang="en-US"/>
+              <a:t>        public IQueryable&lt;Cheque_InformationDTO&gt; cheque_Information { get; set; }</a:t>
+            </a:r>
+          </a:p>
+          <a:p>
+            <a:pPr marL="36900" indent="0">
+              <a:buNone/>
+            </a:pPr>
+            <a:r>
+              <a:rPr lang="en-US"/>
+              <a:t>        public int Flag { get; set; }</a:t>
+            </a:r>
+          </a:p>
+          <a:p>
+            <a:pPr marL="36900" indent="0">
+              <a:buNone/>
+            </a:pPr>
+            <a:endParaRPr lang="en-US"/>
+          </a:p>
+          <a:p>
+            <a:pPr marL="36900" indent="0">
+              <a:buNone/>
+            </a:pPr>
+            <a:r>
+              <a:rPr lang="en-US"/>
+              <a:t>    }</a:t>
+            </a:r>
+          </a:p>
+        </p:txBody>
+      </p:sp>
+    </p:spTree>
+    <p:extLst>
+      <p:ext uri="{BB962C8B-B14F-4D97-AF65-F5344CB8AC3E}">
+        <p14:creationId xmlns:p14="http://schemas.microsoft.com/office/powerpoint/2010/main" val="1713578323"/>
+      </p:ext>
+    </p:extLst>
+  </p:cSld>
+  <p:clrMapOvr>
+    <a:masterClrMapping/>
+  </p:clrMapOvr>
+</p:sld>
+</file>
+
+<file path=ppt/slides/slide77.xml><?xml version="1.0" encoding="utf-8"?>
+<p:sld xmlns:a="http://schemas.openxmlformats.org/drawingml/2006/main" xmlns:r="http://schemas.openxmlformats.org/officeDocument/2006/relationships" xmlns:p="http://schemas.openxmlformats.org/presentationml/2006/main">
+  <p:cSld>
+    <p:spTree>
+      <p:nvGrpSpPr>
+        <p:cNvPr id="1" name=""/>
+        <p:cNvGrpSpPr/>
+        <p:nvPr/>
+      </p:nvGrpSpPr>
+      <p:grpSpPr>
+        <a:xfrm>
+          <a:off x="0" y="0"/>
+          <a:ext cx="0" cy="0"/>
+          <a:chOff x="0" y="0"/>
+          <a:chExt cx="0" cy="0"/>
+        </a:xfrm>
+      </p:grpSpPr>
+      <p:sp>
+        <p:nvSpPr>
+          <p:cNvPr id="2" name="Title 1">
+            <a:extLst>
+              <a:ext uri="{FF2B5EF4-FFF2-40B4-BE49-F238E27FC236}">
+                <a16:creationId xmlns:a16="http://schemas.microsoft.com/office/drawing/2014/main" id="{2D479AA4-7A27-F7BB-18CC-807B27549E5F}"/>
+              </a:ext>
+            </a:extLst>
+          </p:cNvPr>
+          <p:cNvSpPr>
+            <a:spLocks noGrp="1"/>
+          </p:cNvSpPr>
+          <p:nvPr>
+            <p:ph type="title"/>
+          </p:nvPr>
+        </p:nvSpPr>
+        <p:spPr>
+          <a:xfrm>
+            <a:off x="992453" y="0"/>
+            <a:ext cx="10353762" cy="570271"/>
+          </a:xfrm>
+        </p:spPr>
+        <p:txBody>
+          <a:bodyPr>
+            <a:normAutofit fontScale="90000"/>
+          </a:bodyPr>
+          <a:lstStyle/>
+          <a:p>
+            <a:r>
+              <a:rPr lang="en-US" b="1">
+                <a:solidFill>
+                  <a:srgbClr val="00B0F0"/>
+                </a:solidFill>
+              </a:rPr>
+              <a:t>TransactionVM</a:t>
+            </a:r>
+          </a:p>
+        </p:txBody>
+      </p:sp>
+      <p:pic>
+        <p:nvPicPr>
+          <p:cNvPr id="5" name="Content Placeholder 4">
+            <a:extLst>
+              <a:ext uri="{FF2B5EF4-FFF2-40B4-BE49-F238E27FC236}">
+                <a16:creationId xmlns:a16="http://schemas.microsoft.com/office/drawing/2014/main" id="{551D13E4-7622-8C7C-0DCB-AF259538F592}"/>
+              </a:ext>
+            </a:extLst>
+          </p:cNvPr>
+          <p:cNvPicPr>
+            <a:picLocks noGrp="1" noChangeAspect="1"/>
+          </p:cNvPicPr>
+          <p:nvPr>
+            <p:ph idx="1"/>
+          </p:nvPr>
+        </p:nvPicPr>
+        <p:blipFill>
+          <a:blip r:embed="rId2"/>
+          <a:stretch>
+            <a:fillRect/>
+          </a:stretch>
+        </p:blipFill>
+        <p:spPr>
+          <a:xfrm>
+            <a:off x="167951" y="570271"/>
+            <a:ext cx="3342165" cy="2003594"/>
+          </a:xfrm>
+          <a:prstGeom prst="rect">
+            <a:avLst/>
+          </a:prstGeom>
+          <a:effectLst>
+            <a:outerShdw blurRad="25400" dir="17880000">
+              <a:srgbClr val="000000">
+                <a:alpha val="46000"/>
+              </a:srgbClr>
+            </a:outerShdw>
+          </a:effectLst>
+        </p:spPr>
+      </p:pic>
+      <p:pic>
+        <p:nvPicPr>
+          <p:cNvPr id="7" name="Picture 6">
+            <a:extLst>
+              <a:ext uri="{FF2B5EF4-FFF2-40B4-BE49-F238E27FC236}">
+                <a16:creationId xmlns:a16="http://schemas.microsoft.com/office/drawing/2014/main" id="{B2000730-5033-72F2-C16F-B5D5DFF5876B}"/>
+              </a:ext>
+            </a:extLst>
+          </p:cNvPr>
+          <p:cNvPicPr>
+            <a:picLocks noChangeAspect="1"/>
+          </p:cNvPicPr>
+          <p:nvPr/>
+        </p:nvPicPr>
+        <p:blipFill>
+          <a:blip r:embed="rId3"/>
+          <a:stretch>
+            <a:fillRect/>
+          </a:stretch>
+        </p:blipFill>
+        <p:spPr>
+          <a:xfrm>
+            <a:off x="167950" y="2682469"/>
+            <a:ext cx="6055263" cy="3605260"/>
+          </a:xfrm>
+          <a:prstGeom prst="rect">
+            <a:avLst/>
+          </a:prstGeom>
+        </p:spPr>
+      </p:pic>
+    </p:spTree>
+    <p:extLst>
+      <p:ext uri="{BB962C8B-B14F-4D97-AF65-F5344CB8AC3E}">
+        <p14:creationId xmlns:p14="http://schemas.microsoft.com/office/powerpoint/2010/main" val="4049467895"/>
+      </p:ext>
+    </p:extLst>
+  </p:cSld>
+  <p:clrMapOvr>
+    <a:masterClrMapping/>
+  </p:clrMapOvr>
+</p:sld>
+</file>
+
+<file path=ppt/slides/slide78.xml><?xml version="1.0" encoding="utf-8"?>
+<p:sld xmlns:a="http://schemas.openxmlformats.org/drawingml/2006/main" xmlns:r="http://schemas.openxmlformats.org/officeDocument/2006/relationships" xmlns:p="http://schemas.openxmlformats.org/presentationml/2006/main">
+  <p:cSld>
+    <p:spTree>
+      <p:nvGrpSpPr>
+        <p:cNvPr id="1" name=""/>
+        <p:cNvGrpSpPr/>
+        <p:nvPr/>
+      </p:nvGrpSpPr>
+      <p:grpSpPr>
+        <a:xfrm>
+          <a:off x="0" y="0"/>
+          <a:ext cx="0" cy="0"/>
+          <a:chOff x="0" y="0"/>
+          <a:chExt cx="0" cy="0"/>
+        </a:xfrm>
+      </p:grpSpPr>
+      <p:sp>
+        <p:nvSpPr>
+          <p:cNvPr id="2" name="Title 1">
+            <a:extLst>
+              <a:ext uri="{FF2B5EF4-FFF2-40B4-BE49-F238E27FC236}">
+                <a16:creationId xmlns:a16="http://schemas.microsoft.com/office/drawing/2014/main" id="{CF1E26FB-A5E8-3CCA-EA68-AC697347FD56}"/>
+              </a:ext>
+            </a:extLst>
+          </p:cNvPr>
+          <p:cNvSpPr>
+            <a:spLocks noGrp="1"/>
+          </p:cNvSpPr>
+          <p:nvPr>
+            <p:ph type="title"/>
+          </p:nvPr>
+        </p:nvSpPr>
+        <p:spPr>
+          <a:xfrm>
+            <a:off x="835137" y="0"/>
+            <a:ext cx="10353762" cy="970450"/>
+          </a:xfrm>
+        </p:spPr>
+        <p:txBody>
+          <a:bodyPr/>
+          <a:lstStyle/>
+          <a:p>
+            <a:r>
+              <a:rPr lang="en-US"/>
+              <a:t>LoginVM</a:t>
+            </a:r>
+          </a:p>
+        </p:txBody>
+      </p:sp>
+      <p:sp>
+        <p:nvSpPr>
+          <p:cNvPr id="3" name="Content Placeholder 2">
+            <a:extLst>
+              <a:ext uri="{FF2B5EF4-FFF2-40B4-BE49-F238E27FC236}">
+                <a16:creationId xmlns:a16="http://schemas.microsoft.com/office/drawing/2014/main" id="{B5F1CE3E-8FBA-4720-E027-74C182BEE6B6}"/>
+              </a:ext>
+            </a:extLst>
+          </p:cNvPr>
+          <p:cNvSpPr>
+            <a:spLocks noGrp="1"/>
+          </p:cNvSpPr>
+          <p:nvPr>
+            <p:ph idx="1"/>
+          </p:nvPr>
+        </p:nvSpPr>
+        <p:spPr>
+          <a:xfrm>
+            <a:off x="324464" y="970450"/>
+            <a:ext cx="11631561" cy="5794143"/>
+          </a:xfrm>
+        </p:spPr>
+        <p:txBody>
+          <a:bodyPr>
+            <a:normAutofit/>
+          </a:bodyPr>
+          <a:lstStyle/>
+          <a:p>
+            <a:r>
+              <a:rPr lang="en-US" sz="1600">
+                <a:effectLst/>
+              </a:rPr>
+              <a:t>UserId</a:t>
+            </a:r>
+          </a:p>
+          <a:p>
+            <a:r>
+              <a:rPr lang="en-US" sz="1600">
+                <a:effectLst/>
+              </a:rPr>
+              <a:t>UserNameAR</a:t>
+            </a:r>
+          </a:p>
+          <a:p>
+            <a:r>
+              <a:rPr lang="en-US" sz="1600">
+                <a:effectLst/>
+              </a:rPr>
+              <a:t>UserNameEng</a:t>
+            </a:r>
+          </a:p>
+          <a:p>
+            <a:r>
+              <a:rPr lang="en-US" sz="1600">
+                <a:effectLst/>
+              </a:rPr>
+              <a:t>BranchNameAR</a:t>
+            </a:r>
+          </a:p>
+          <a:p>
+            <a:r>
+              <a:rPr lang="en-US" sz="1600">
+                <a:effectLst/>
+              </a:rPr>
+              <a:t>BranchNameEN</a:t>
+            </a:r>
+          </a:p>
+          <a:p>
+            <a:r>
+              <a:rPr lang="en-US" sz="1600">
+                <a:effectLst/>
+              </a:rPr>
+              <a:t>JobNameAR</a:t>
+            </a:r>
+          </a:p>
+          <a:p>
+            <a:r>
+              <a:rPr lang="en-US" sz="1600">
+                <a:effectLst/>
+              </a:rPr>
+              <a:t>BranchId</a:t>
+            </a:r>
+          </a:p>
+          <a:p>
+            <a:r>
+              <a:rPr lang="en-US" sz="1600">
+                <a:effectLst/>
+              </a:rPr>
+              <a:t>RegionId</a:t>
+            </a:r>
+          </a:p>
+          <a:p>
+            <a:r>
+              <a:rPr lang="en-US" sz="1600">
+                <a:effectLst/>
+              </a:rPr>
+              <a:t>Branch_code</a:t>
+            </a:r>
+          </a:p>
+          <a:p>
+            <a:r>
+              <a:rPr lang="en-US" sz="1600">
+                <a:effectLst/>
+              </a:rPr>
+              <a:t>ComId</a:t>
+            </a:r>
+          </a:p>
+          <a:p>
+            <a:r>
+              <a:rPr lang="en-US" sz="1600">
+                <a:effectLst/>
+              </a:rPr>
+              <a:t>JobId</a:t>
+            </a:r>
+          </a:p>
+          <a:p>
+            <a:r>
+              <a:rPr lang="en-US" sz="1600">
+                <a:effectLst/>
+              </a:rPr>
+              <a:t>JobCode</a:t>
+            </a:r>
+          </a:p>
+          <a:p>
+            <a:r>
+              <a:rPr lang="en-US" sz="1600">
+                <a:effectLst/>
+              </a:rPr>
+              <a:t>UserCode</a:t>
+            </a:r>
+          </a:p>
+          <a:p>
+            <a:r>
+              <a:rPr lang="en-US" sz="1600">
+                <a:effectLst/>
+              </a:rPr>
+              <a:t>Numberofmonthsofappointment</a:t>
+            </a:r>
+          </a:p>
+          <a:p>
+            <a:endParaRPr lang="en-US" sz="1600">
+              <a:effectLst/>
+            </a:endParaRPr>
+          </a:p>
+          <a:p>
+            <a:endParaRPr lang="en-US" sz="1600">
+              <a:effectLst/>
+            </a:endParaRPr>
+          </a:p>
+        </p:txBody>
+      </p:sp>
+    </p:spTree>
+    <p:extLst>
+      <p:ext uri="{BB962C8B-B14F-4D97-AF65-F5344CB8AC3E}">
+        <p14:creationId xmlns:p14="http://schemas.microsoft.com/office/powerpoint/2010/main" val="3033957200"/>
       </p:ext>
     </p:extLst>
   </p:cSld>

--- a/Dot Net/Business.pptx
+++ b/Dot Net/Business.pptx
@@ -71,18 +71,21 @@
     <p:sldId id="301" r:id="rId65"/>
     <p:sldId id="319" r:id="rId66"/>
     <p:sldId id="303" r:id="rId67"/>
-    <p:sldId id="276" r:id="rId68"/>
-    <p:sldId id="289" r:id="rId69"/>
-    <p:sldId id="290" r:id="rId70"/>
-    <p:sldId id="321" r:id="rId71"/>
-    <p:sldId id="333" r:id="rId72"/>
-    <p:sldId id="332" r:id="rId73"/>
-    <p:sldId id="320" r:id="rId74"/>
-    <p:sldId id="335" r:id="rId75"/>
-    <p:sldId id="336" r:id="rId76"/>
-    <p:sldId id="337" r:id="rId77"/>
-    <p:sldId id="295" r:id="rId78"/>
-    <p:sldId id="302" r:id="rId79"/>
+    <p:sldId id="338" r:id="rId68"/>
+    <p:sldId id="339" r:id="rId69"/>
+    <p:sldId id="276" r:id="rId70"/>
+    <p:sldId id="289" r:id="rId71"/>
+    <p:sldId id="290" r:id="rId72"/>
+    <p:sldId id="321" r:id="rId73"/>
+    <p:sldId id="333" r:id="rId74"/>
+    <p:sldId id="332" r:id="rId75"/>
+    <p:sldId id="320" r:id="rId76"/>
+    <p:sldId id="335" r:id="rId77"/>
+    <p:sldId id="340" r:id="rId78"/>
+    <p:sldId id="336" r:id="rId79"/>
+    <p:sldId id="337" r:id="rId80"/>
+    <p:sldId id="295" r:id="rId81"/>
+    <p:sldId id="302" r:id="rId82"/>
   </p:sldIdLst>
   <p:sldSz cx="12192000" cy="6858000"/>
   <p:notesSz cx="6858000" cy="9144000"/>
@@ -374,7 +377,7 @@
           <a:p>
             <a:fld id="{C744FA5D-EF1D-489D-8D8F-1FF7B7B6D702}" type="datetimeFigureOut">
               <a:rPr lang="en-US" smtClean="0"/>
-              <a:t>2/26/2026</a:t>
+              <a:t>3/3/2026</a:t>
             </a:fld>
             <a:endParaRPr lang="en-US"/>
           </a:p>
@@ -671,7 +674,7 @@
           <a:p>
             <a:fld id="{C744FA5D-EF1D-489D-8D8F-1FF7B7B6D702}" type="datetimeFigureOut">
               <a:rPr lang="en-US" smtClean="0"/>
-              <a:t>2/26/2026</a:t>
+              <a:t>3/3/2026</a:t>
             </a:fld>
             <a:endParaRPr lang="en-US"/>
           </a:p>
@@ -863,7 +866,7 @@
           <a:p>
             <a:fld id="{C744FA5D-EF1D-489D-8D8F-1FF7B7B6D702}" type="datetimeFigureOut">
               <a:rPr lang="en-US" smtClean="0"/>
-              <a:t>2/26/2026</a:t>
+              <a:t>3/3/2026</a:t>
             </a:fld>
             <a:endParaRPr lang="en-US"/>
           </a:p>
@@ -1124,7 +1127,7 @@
           <a:p>
             <a:fld id="{C744FA5D-EF1D-489D-8D8F-1FF7B7B6D702}" type="datetimeFigureOut">
               <a:rPr lang="en-US" smtClean="0"/>
-              <a:t>2/26/2026</a:t>
+              <a:t>3/3/2026</a:t>
             </a:fld>
             <a:endParaRPr lang="en-US"/>
           </a:p>
@@ -1548,7 +1551,7 @@
           <a:p>
             <a:fld id="{C744FA5D-EF1D-489D-8D8F-1FF7B7B6D702}" type="datetimeFigureOut">
               <a:rPr lang="en-US" smtClean="0"/>
-              <a:t>2/26/2026</a:t>
+              <a:t>3/3/2026</a:t>
             </a:fld>
             <a:endParaRPr lang="en-US"/>
           </a:p>
@@ -2085,7 +2088,7 @@
           <a:p>
             <a:fld id="{C744FA5D-EF1D-489D-8D8F-1FF7B7B6D702}" type="datetimeFigureOut">
               <a:rPr lang="en-US" smtClean="0"/>
-              <a:t>2/26/2026</a:t>
+              <a:t>3/3/2026</a:t>
             </a:fld>
             <a:endParaRPr lang="en-US"/>
           </a:p>
@@ -2946,7 +2949,7 @@
           <a:p>
             <a:fld id="{C744FA5D-EF1D-489D-8D8F-1FF7B7B6D702}" type="datetimeFigureOut">
               <a:rPr lang="en-US" smtClean="0"/>
-              <a:t>2/26/2026</a:t>
+              <a:t>3/3/2026</a:t>
             </a:fld>
             <a:endParaRPr lang="en-US"/>
           </a:p>
@@ -3116,7 +3119,7 @@
           <a:p>
             <a:fld id="{C744FA5D-EF1D-489D-8D8F-1FF7B7B6D702}" type="datetimeFigureOut">
               <a:rPr lang="en-US" smtClean="0"/>
-              <a:t>2/26/2026</a:t>
+              <a:t>3/3/2026</a:t>
             </a:fld>
             <a:endParaRPr lang="en-US"/>
           </a:p>
@@ -3300,7 +3303,7 @@
           <a:p>
             <a:fld id="{C744FA5D-EF1D-489D-8D8F-1FF7B7B6D702}" type="datetimeFigureOut">
               <a:rPr lang="en-US" smtClean="0"/>
-              <a:t>2/26/2026</a:t>
+              <a:t>3/3/2026</a:t>
             </a:fld>
             <a:endParaRPr lang="en-US"/>
           </a:p>
@@ -3470,7 +3473,7 @@
           <a:p>
             <a:fld id="{C744FA5D-EF1D-489D-8D8F-1FF7B7B6D702}" type="datetimeFigureOut">
               <a:rPr lang="en-US" smtClean="0"/>
-              <a:t>2/26/2026</a:t>
+              <a:t>3/3/2026</a:t>
             </a:fld>
             <a:endParaRPr lang="en-US"/>
           </a:p>
@@ -3714,7 +3717,7 @@
           <a:p>
             <a:fld id="{C744FA5D-EF1D-489D-8D8F-1FF7B7B6D702}" type="datetimeFigureOut">
               <a:rPr lang="en-US" smtClean="0"/>
-              <a:t>2/26/2026</a:t>
+              <a:t>3/3/2026</a:t>
             </a:fld>
             <a:endParaRPr lang="en-US"/>
           </a:p>
@@ -3950,7 +3953,7 @@
           <a:p>
             <a:fld id="{C744FA5D-EF1D-489D-8D8F-1FF7B7B6D702}" type="datetimeFigureOut">
               <a:rPr lang="en-US" smtClean="0"/>
-              <a:t>2/26/2026</a:t>
+              <a:t>3/3/2026</a:t>
             </a:fld>
             <a:endParaRPr lang="en-US"/>
           </a:p>
@@ -4416,7 +4419,7 @@
           <a:p>
             <a:fld id="{C744FA5D-EF1D-489D-8D8F-1FF7B7B6D702}" type="datetimeFigureOut">
               <a:rPr lang="en-US" smtClean="0"/>
-              <a:t>2/26/2026</a:t>
+              <a:t>3/3/2026</a:t>
             </a:fld>
             <a:endParaRPr lang="en-US"/>
           </a:p>
@@ -4534,7 +4537,7 @@
           <a:p>
             <a:fld id="{C744FA5D-EF1D-489D-8D8F-1FF7B7B6D702}" type="datetimeFigureOut">
               <a:rPr lang="en-US" smtClean="0"/>
-              <a:t>2/26/2026</a:t>
+              <a:t>3/3/2026</a:t>
             </a:fld>
             <a:endParaRPr lang="en-US"/>
           </a:p>
@@ -4629,7 +4632,7 @@
           <a:p>
             <a:fld id="{C744FA5D-EF1D-489D-8D8F-1FF7B7B6D702}" type="datetimeFigureOut">
               <a:rPr lang="en-US" smtClean="0"/>
-              <a:t>2/26/2026</a:t>
+              <a:t>3/3/2026</a:t>
             </a:fld>
             <a:endParaRPr lang="en-US"/>
           </a:p>
@@ -4884,7 +4887,7 @@
           <a:p>
             <a:fld id="{C744FA5D-EF1D-489D-8D8F-1FF7B7B6D702}" type="datetimeFigureOut">
               <a:rPr lang="en-US" smtClean="0"/>
-              <a:t>2/26/2026</a:t>
+              <a:t>3/3/2026</a:t>
             </a:fld>
             <a:endParaRPr lang="en-US"/>
           </a:p>
@@ -5183,7 +5186,7 @@
           <a:p>
             <a:fld id="{C744FA5D-EF1D-489D-8D8F-1FF7B7B6D702}" type="datetimeFigureOut">
               <a:rPr lang="en-US" smtClean="0"/>
-              <a:t>2/26/2026</a:t>
+              <a:t>3/3/2026</a:t>
             </a:fld>
             <a:endParaRPr lang="en-US"/>
           </a:p>
@@ -5417,7 +5420,7 @@
           <a:p>
             <a:fld id="{C744FA5D-EF1D-489D-8D8F-1FF7B7B6D702}" type="datetimeFigureOut">
               <a:rPr lang="en-US" smtClean="0"/>
-              <a:t>2/26/2026</a:t>
+              <a:t>3/3/2026</a:t>
             </a:fld>
             <a:endParaRPr lang="en-US"/>
           </a:p>
@@ -11814,10 +11817,18 @@
               <a:t> // LO just create the Request  </a:t>
             </a:r>
             <a:r>
-              <a:rPr lang="ar-EG"/>
+              <a:rPr lang="ar-EG" b="1">
+                <a:solidFill>
+                  <a:srgbClr val="92D050"/>
+                </a:solidFill>
+              </a:rPr>
               <a:t>طلبات غير مرسلة</a:t>
             </a:r>
-            <a:endParaRPr lang="en-US" sz="1600"/>
+            <a:endParaRPr lang="en-US" sz="1600" b="1">
+              <a:solidFill>
+                <a:srgbClr val="92D050"/>
+              </a:solidFill>
+            </a:endParaRPr>
           </a:p>
           <a:p>
             <a:pPr lvl="1"/>
@@ -14219,8 +14230,8 @@
         </p:nvSpPr>
         <p:spPr>
           <a:xfrm>
-            <a:off x="913794" y="619432"/>
-            <a:ext cx="10904579" cy="5928851"/>
+            <a:off x="24172" y="619432"/>
+            <a:ext cx="12167828" cy="5928851"/>
           </a:xfrm>
         </p:spPr>
         <p:txBody>
@@ -14272,13 +14283,13 @@
           <p:nvPr>
             <p:extLst>
               <p:ext uri="{D42A27DB-BD31-4B8C-83A1-F6EECF244321}">
-                <p14:modId xmlns:p14="http://schemas.microsoft.com/office/powerpoint/2010/main" val="2489808205"/>
+                <p14:modId xmlns:p14="http://schemas.microsoft.com/office/powerpoint/2010/main" val="649893934"/>
               </p:ext>
             </p:extLst>
           </p:nvPr>
         </p:nvGraphicFramePr>
         <p:xfrm>
-          <a:off x="7590500" y="965472"/>
+          <a:off x="7295532" y="1014110"/>
           <a:ext cx="4601500" cy="1752600"/>
         </p:xfrm>
         <a:graphic>
@@ -14854,22 +14865,12 @@
               <a:t>FRM_ID </a:t>
             </a:r>
             <a:r>
-              <a:rPr lang="en-US">
+              <a:rPr lang="en-US" b="1">
                 <a:solidFill>
                   <a:srgbClr val="FFFF00"/>
                 </a:solidFill>
               </a:rPr>
               <a:t>[FK] from Flow_Rejection_Main</a:t>
-            </a:r>
-          </a:p>
-          <a:p>
-            <a:r>
-              <a:rPr lang="en-US">
-                <a:solidFill>
-                  <a:srgbClr val="FFFF00"/>
-                </a:solidFill>
-              </a:rPr>
-              <a:t> </a:t>
             </a:r>
           </a:p>
         </p:txBody>
@@ -15812,8 +15813,13 @@
           <a:p>
             <a:r>
               <a:rPr lang="en-US"/>
-              <a:t>Scr_DefCode: string</a:t>
-            </a:r>
+              <a:t>Scr_DefCode: string </a:t>
+            </a:r>
+            <a:r>
+              <a:rPr lang="en-US" sz="1800"/>
+              <a:t>// screen definition code</a:t>
+            </a:r>
+            <a:endParaRPr lang="en-US"/>
           </a:p>
           <a:p>
             <a:endParaRPr lang="ar-EG"/>
@@ -16004,6 +16010,42 @@
             <a:endParaRPr lang="en-US"/>
           </a:p>
           <a:p>
+            <a:r>
+              <a:rPr lang="en-US"/>
+              <a:t>Note: tabs_code refer to the screen</a:t>
+            </a:r>
+          </a:p>
+          <a:p>
+            <a:r>
+              <a:rPr lang="en-US"/>
+              <a:t>The </a:t>
+            </a:r>
+            <a:r>
+              <a:rPr lang="en-US" b="1">
+                <a:solidFill>
+                  <a:srgbClr val="00B050"/>
+                </a:solidFill>
+              </a:rPr>
+              <a:t>field_code</a:t>
+            </a:r>
+            <a:r>
+              <a:rPr lang="en-US"/>
+              <a:t>, </a:t>
+            </a:r>
+            <a:r>
+              <a:rPr lang="en-US" b="1">
+                <a:solidFill>
+                  <a:srgbClr val="00B050"/>
+                </a:solidFill>
+              </a:rPr>
+              <a:t>tabs_code </a:t>
+            </a:r>
+            <a:r>
+              <a:rPr lang="en-US"/>
+              <a:t>are together unique</a:t>
+            </a:r>
+          </a:p>
+          <a:p>
             <a:endParaRPr lang="en-US"/>
           </a:p>
           <a:p>
@@ -16033,7 +16075,7 @@
         </p:blipFill>
         <p:spPr>
           <a:xfrm>
-            <a:off x="6220836" y="648929"/>
+            <a:off x="6479458" y="833284"/>
             <a:ext cx="4555318" cy="2595716"/>
           </a:xfrm>
           <a:prstGeom prst="rect">
@@ -20198,7 +20240,7 @@
         <p:spPr>
           <a:xfrm>
             <a:off x="913795" y="0"/>
-            <a:ext cx="10353762" cy="626165"/>
+            <a:ext cx="10487022" cy="626165"/>
           </a:xfrm>
         </p:spPr>
         <p:txBody>
@@ -20225,19 +20267,23 @@
                   <a:srgbClr val="FF0000"/>
                 </a:solidFill>
               </a:rPr>
-              <a:t>Trans_BusDate [</a:t>
+              <a:t>Trans_BusDate [ </a:t>
             </a:r>
             <a:r>
               <a:rPr lang="ar-EG"/>
               <a:t>تاريخ اليومية</a:t>
             </a:r>
             <a:r>
+              <a:rPr lang="en-US"/>
+              <a:t> </a:t>
+            </a:r>
+            <a:r>
               <a:rPr lang="en-US" b="1">
                 <a:solidFill>
                   <a:srgbClr val="FF0000"/>
                 </a:solidFill>
               </a:rPr>
-              <a:t>]</a:t>
+              <a:t>] </a:t>
             </a:r>
           </a:p>
         </p:txBody>
@@ -20260,8 +20306,8 @@
         </p:nvSpPr>
         <p:spPr>
           <a:xfrm>
-            <a:off x="308113" y="983975"/>
-            <a:ext cx="10959444" cy="4807226"/>
+            <a:off x="308112" y="983975"/>
+            <a:ext cx="11705547" cy="4807226"/>
           </a:xfrm>
         </p:spPr>
         <p:txBody>
@@ -20297,8 +20343,8 @@
         </p:blipFill>
         <p:spPr>
           <a:xfrm>
-            <a:off x="8380822" y="2364465"/>
-            <a:ext cx="2886735" cy="1932442"/>
+            <a:off x="7687349" y="626165"/>
+            <a:ext cx="4326310" cy="2896124"/>
           </a:xfrm>
           <a:prstGeom prst="rect">
             <a:avLst/>
@@ -20619,7 +20665,7 @@
           <p:cNvPr id="2" name="Title 1">
             <a:extLst>
               <a:ext uri="{FF2B5EF4-FFF2-40B4-BE49-F238E27FC236}">
-                <a16:creationId xmlns:a16="http://schemas.microsoft.com/office/drawing/2014/main" id="{09B9A69E-06CE-97FD-204E-1EAB56654B9A}"/>
+                <a16:creationId xmlns:a16="http://schemas.microsoft.com/office/drawing/2014/main" id="{B15497A2-FFAE-D9AC-77D1-7693D633169B}"/>
               </a:ext>
             </a:extLst>
           </p:cNvPr>
@@ -20632,31 +20678,33 @@
         </p:nvSpPr>
         <p:spPr>
           <a:xfrm>
-            <a:off x="795808" y="0"/>
-            <a:ext cx="10353762" cy="530942"/>
-          </a:xfrm>
-        </p:spPr>
-        <p:txBody>
-          <a:bodyPr>
-            <a:normAutofit fontScale="90000"/>
-          </a:bodyPr>
+            <a:off x="913795" y="0"/>
+            <a:ext cx="10353762" cy="713362"/>
+          </a:xfrm>
+        </p:spPr>
+        <p:txBody>
+          <a:bodyPr/>
           <a:lstStyle/>
           <a:p>
             <a:r>
-              <a:rPr lang="en-US" b="1" err="1">
+              <a:rPr lang="en-US" b="1">
+                <a:solidFill>
+                  <a:srgbClr val="FFFF00"/>
+                </a:solidFill>
+              </a:rPr>
+              <a:t>TWF</a:t>
+            </a:r>
+            <a:r>
+              <a:rPr lang="en-US"/>
+              <a:t>. </a:t>
+            </a:r>
+            <a:r>
+              <a:rPr lang="en-US" b="1">
                 <a:solidFill>
                   <a:srgbClr val="FF0000"/>
                 </a:solidFill>
               </a:rPr>
-              <a:t>BranchGovernRegion</a:t>
-            </a:r>
-            <a:r>
-              <a:rPr lang="en-US" b="1">
-                <a:solidFill>
-                  <a:srgbClr val="FF0000"/>
-                </a:solidFill>
-              </a:rPr>
-              <a:t> VM</a:t>
+              <a:t>Flow_Risks</a:t>
             </a:r>
           </a:p>
         </p:txBody>
@@ -20666,7 +20714,7 @@
           <p:cNvPr id="3" name="Content Placeholder 2">
             <a:extLst>
               <a:ext uri="{FF2B5EF4-FFF2-40B4-BE49-F238E27FC236}">
-                <a16:creationId xmlns:a16="http://schemas.microsoft.com/office/drawing/2014/main" id="{8C64C52F-88D2-D45B-14B5-1C9472A1F8DB}"/>
+                <a16:creationId xmlns:a16="http://schemas.microsoft.com/office/drawing/2014/main" id="{DC432B2B-8018-12BE-79D4-D635FAD8512D}"/>
               </a:ext>
             </a:extLst>
           </p:cNvPr>
@@ -20679,8 +20727,8 @@
         </p:nvSpPr>
         <p:spPr>
           <a:xfrm>
-            <a:off x="353960" y="530943"/>
-            <a:ext cx="11533239" cy="6135328"/>
+            <a:off x="350196" y="713363"/>
+            <a:ext cx="11682919" cy="5998722"/>
           </a:xfrm>
         </p:spPr>
         <p:txBody>
@@ -20691,38 +20739,75 @@
           <a:p>
             <a:r>
               <a:rPr lang="en-US" sz="1800"/>
-              <a:t>BranchId     		// From Table branch</a:t>
-            </a:r>
-          </a:p>
-          <a:p>
-            <a:r>
-              <a:rPr lang="en-US" sz="1800" err="1"/>
-              <a:t>Branch_code</a:t>
-            </a:r>
+              <a:t>R_code: int ,  [PK]</a:t>
+            </a:r>
+          </a:p>
+          <a:p>
             <a:r>
               <a:rPr lang="en-US" sz="1800"/>
-              <a:t>		// From Table branch</a:t>
-            </a:r>
-          </a:p>
-          <a:p>
-            <a:r>
-              <a:rPr lang="en-US" sz="1800" err="1"/>
-              <a:t>ExterNum</a:t>
-            </a:r>
+              <a:t>R_code_Identity: int,  [identity]</a:t>
+            </a:r>
+          </a:p>
+          <a:p>
             <a:r>
               <a:rPr lang="en-US" sz="1800"/>
-              <a:t>		// From Table branch</a:t>
-            </a:r>
-          </a:p>
-          <a:p>
-            <a:endParaRPr lang="en-US" sz="1800"/>
+              <a:t>product_Id: int, [FK] </a:t>
+            </a:r>
+          </a:p>
+          <a:p>
+            <a:r>
+              <a:rPr lang="en-US" sz="1800"/>
+              <a:t>Number: int,</a:t>
+            </a:r>
+          </a:p>
+          <a:p>
+            <a:r>
+              <a:rPr lang="en-US" sz="1800"/>
+              <a:t>From_day: decimal</a:t>
+            </a:r>
+          </a:p>
+          <a:p>
+            <a:r>
+              <a:rPr lang="en-US" sz="1800"/>
+              <a:t>To_day: decimal</a:t>
+            </a:r>
+          </a:p>
+          <a:p>
+            <a:r>
+              <a:rPr lang="en-US" sz="1800"/>
+              <a:t>Name_AR: string</a:t>
+            </a:r>
+          </a:p>
+          <a:p>
+            <a:r>
+              <a:rPr lang="en-US" sz="1800"/>
+              <a:t>Name_Eng: string</a:t>
+            </a:r>
+          </a:p>
+          <a:p>
+            <a:r>
+              <a:rPr lang="en-US" sz="1800"/>
+              <a:t>Payment_way: int</a:t>
+            </a:r>
+          </a:p>
+          <a:p>
+            <a:r>
+              <a:rPr lang="en-US" sz="1800"/>
+              <a:t>Days: int</a:t>
+            </a:r>
+          </a:p>
+          <a:p>
+            <a:r>
+              <a:rPr lang="en-US" sz="1800"/>
+              <a:t>Ratio_risk: int</a:t>
+            </a:r>
           </a:p>
         </p:txBody>
       </p:sp>
     </p:spTree>
     <p:extLst>
       <p:ext uri="{BB962C8B-B14F-4D97-AF65-F5344CB8AC3E}">
-        <p14:creationId xmlns:p14="http://schemas.microsoft.com/office/powerpoint/2010/main" val="1678316031"/>
+        <p14:creationId xmlns:p14="http://schemas.microsoft.com/office/powerpoint/2010/main" val="820837227"/>
       </p:ext>
     </p:extLst>
   </p:cSld>
@@ -20754,6 +20839,388 @@
           <p:cNvPr id="2" name="Title 1">
             <a:extLst>
               <a:ext uri="{FF2B5EF4-FFF2-40B4-BE49-F238E27FC236}">
+                <a16:creationId xmlns:a16="http://schemas.microsoft.com/office/drawing/2014/main" id="{062ED61C-376F-A7C9-08F6-0C7B767D2FD6}"/>
+              </a:ext>
+            </a:extLst>
+          </p:cNvPr>
+          <p:cNvSpPr>
+            <a:spLocks noGrp="1"/>
+          </p:cNvSpPr>
+          <p:nvPr>
+            <p:ph type="title"/>
+          </p:nvPr>
+        </p:nvSpPr>
+        <p:spPr>
+          <a:xfrm>
+            <a:off x="913795" y="0"/>
+            <a:ext cx="10353762" cy="603115"/>
+          </a:xfrm>
+        </p:spPr>
+        <p:txBody>
+          <a:bodyPr>
+            <a:normAutofit fontScale="90000"/>
+          </a:bodyPr>
+          <a:lstStyle/>
+          <a:p>
+            <a:r>
+              <a:rPr lang="en-US" b="1">
+                <a:solidFill>
+                  <a:srgbClr val="FFFF00"/>
+                </a:solidFill>
+              </a:rPr>
+              <a:t>Security.</a:t>
+            </a:r>
+            <a:r>
+              <a:rPr lang="en-US"/>
+              <a:t> </a:t>
+            </a:r>
+            <a:r>
+              <a:rPr lang="en-US" b="1">
+                <a:solidFill>
+                  <a:srgbClr val="FF0000"/>
+                </a:solidFill>
+              </a:rPr>
+              <a:t>SEC_Access_tokens</a:t>
+            </a:r>
+          </a:p>
+        </p:txBody>
+      </p:sp>
+      <p:sp>
+        <p:nvSpPr>
+          <p:cNvPr id="3" name="Content Placeholder 2">
+            <a:extLst>
+              <a:ext uri="{FF2B5EF4-FFF2-40B4-BE49-F238E27FC236}">
+                <a16:creationId xmlns:a16="http://schemas.microsoft.com/office/drawing/2014/main" id="{6BBC543C-6C1F-7A11-F5D3-A371EC677E43}"/>
+              </a:ext>
+            </a:extLst>
+          </p:cNvPr>
+          <p:cNvSpPr>
+            <a:spLocks noGrp="1"/>
+          </p:cNvSpPr>
+          <p:nvPr>
+            <p:ph idx="1"/>
+          </p:nvPr>
+        </p:nvSpPr>
+        <p:spPr>
+          <a:xfrm>
+            <a:off x="145915" y="603115"/>
+            <a:ext cx="11828834" cy="6138153"/>
+          </a:xfrm>
+        </p:spPr>
+        <p:txBody>
+          <a:bodyPr/>
+          <a:lstStyle/>
+          <a:p>
+            <a:r>
+              <a:rPr lang="en-US"/>
+              <a:t>string Token </a:t>
+            </a:r>
+            <a:r>
+              <a:rPr lang="en-US" b="1">
+                <a:solidFill>
+                  <a:srgbClr val="FFFF00"/>
+                </a:solidFill>
+              </a:rPr>
+              <a:t>[PK]</a:t>
+            </a:r>
+          </a:p>
+          <a:p>
+            <a:r>
+              <a:rPr lang="en-US"/>
+              <a:t>int UserId </a:t>
+            </a:r>
+            <a:r>
+              <a:rPr lang="en-US" b="1">
+                <a:solidFill>
+                  <a:srgbClr val="FFFF00"/>
+                </a:solidFill>
+              </a:rPr>
+              <a:t>[FK]</a:t>
+            </a:r>
+            <a:endParaRPr lang="en-US"/>
+          </a:p>
+          <a:p>
+            <a:r>
+              <a:rPr lang="en-US"/>
+              <a:t>Virtual User User</a:t>
+            </a:r>
+            <a:endParaRPr lang="en-US" b="1">
+              <a:solidFill>
+                <a:srgbClr val="FFFF00"/>
+              </a:solidFill>
+            </a:endParaRPr>
+          </a:p>
+        </p:txBody>
+      </p:sp>
+      <p:pic>
+        <p:nvPicPr>
+          <p:cNvPr id="5" name="Picture 4">
+            <a:extLst>
+              <a:ext uri="{FF2B5EF4-FFF2-40B4-BE49-F238E27FC236}">
+                <a16:creationId xmlns:a16="http://schemas.microsoft.com/office/drawing/2014/main" id="{BF26DA70-7F36-0A78-66D2-D9DB99232805}"/>
+              </a:ext>
+            </a:extLst>
+          </p:cNvPr>
+          <p:cNvPicPr>
+            <a:picLocks noChangeAspect="1"/>
+          </p:cNvPicPr>
+          <p:nvPr/>
+        </p:nvPicPr>
+        <p:blipFill>
+          <a:blip r:embed="rId2"/>
+          <a:stretch>
+            <a:fillRect/>
+          </a:stretch>
+        </p:blipFill>
+        <p:spPr>
+          <a:xfrm>
+            <a:off x="7118640" y="603115"/>
+            <a:ext cx="4502513" cy="1483897"/>
+          </a:xfrm>
+          <a:prstGeom prst="rect">
+            <a:avLst/>
+          </a:prstGeom>
+        </p:spPr>
+      </p:pic>
+    </p:spTree>
+    <p:extLst>
+      <p:ext uri="{BB962C8B-B14F-4D97-AF65-F5344CB8AC3E}">
+        <p14:creationId xmlns:p14="http://schemas.microsoft.com/office/powerpoint/2010/main" val="1407702080"/>
+      </p:ext>
+    </p:extLst>
+  </p:cSld>
+  <p:clrMapOvr>
+    <a:masterClrMapping/>
+  </p:clrMapOvr>
+</p:sld>
+</file>
+
+<file path=ppt/slides/slide69.xml><?xml version="1.0" encoding="utf-8"?>
+<p:sld xmlns:a="http://schemas.openxmlformats.org/drawingml/2006/main" xmlns:r="http://schemas.openxmlformats.org/officeDocument/2006/relationships" xmlns:p="http://schemas.openxmlformats.org/presentationml/2006/main">
+  <p:cSld>
+    <p:spTree>
+      <p:nvGrpSpPr>
+        <p:cNvPr id="1" name=""/>
+        <p:cNvGrpSpPr/>
+        <p:nvPr/>
+      </p:nvGrpSpPr>
+      <p:grpSpPr>
+        <a:xfrm>
+          <a:off x="0" y="0"/>
+          <a:ext cx="0" cy="0"/>
+          <a:chOff x="0" y="0"/>
+          <a:chExt cx="0" cy="0"/>
+        </a:xfrm>
+      </p:grpSpPr>
+      <p:sp>
+        <p:nvSpPr>
+          <p:cNvPr id="2" name="Title 1">
+            <a:extLst>
+              <a:ext uri="{FF2B5EF4-FFF2-40B4-BE49-F238E27FC236}">
+                <a16:creationId xmlns:a16="http://schemas.microsoft.com/office/drawing/2014/main" id="{09B9A69E-06CE-97FD-204E-1EAB56654B9A}"/>
+              </a:ext>
+            </a:extLst>
+          </p:cNvPr>
+          <p:cNvSpPr>
+            <a:spLocks noGrp="1"/>
+          </p:cNvSpPr>
+          <p:nvPr>
+            <p:ph type="title"/>
+          </p:nvPr>
+        </p:nvSpPr>
+        <p:spPr>
+          <a:xfrm>
+            <a:off x="795808" y="0"/>
+            <a:ext cx="10353762" cy="530942"/>
+          </a:xfrm>
+        </p:spPr>
+        <p:txBody>
+          <a:bodyPr>
+            <a:normAutofit fontScale="90000"/>
+          </a:bodyPr>
+          <a:lstStyle/>
+          <a:p>
+            <a:r>
+              <a:rPr lang="en-US" b="1" err="1">
+                <a:solidFill>
+                  <a:srgbClr val="FF0000"/>
+                </a:solidFill>
+              </a:rPr>
+              <a:t>BranchGovernRegion</a:t>
+            </a:r>
+            <a:r>
+              <a:rPr lang="en-US" b="1">
+                <a:solidFill>
+                  <a:srgbClr val="FF0000"/>
+                </a:solidFill>
+              </a:rPr>
+              <a:t> VM</a:t>
+            </a:r>
+          </a:p>
+        </p:txBody>
+      </p:sp>
+      <p:sp>
+        <p:nvSpPr>
+          <p:cNvPr id="3" name="Content Placeholder 2">
+            <a:extLst>
+              <a:ext uri="{FF2B5EF4-FFF2-40B4-BE49-F238E27FC236}">
+                <a16:creationId xmlns:a16="http://schemas.microsoft.com/office/drawing/2014/main" id="{8C64C52F-88D2-D45B-14B5-1C9472A1F8DB}"/>
+              </a:ext>
+            </a:extLst>
+          </p:cNvPr>
+          <p:cNvSpPr>
+            <a:spLocks noGrp="1"/>
+          </p:cNvSpPr>
+          <p:nvPr>
+            <p:ph idx="1"/>
+          </p:nvPr>
+        </p:nvSpPr>
+        <p:spPr>
+          <a:xfrm>
+            <a:off x="353960" y="530943"/>
+            <a:ext cx="11533239" cy="6135328"/>
+          </a:xfrm>
+        </p:spPr>
+        <p:txBody>
+          <a:bodyPr>
+            <a:normAutofit/>
+          </a:bodyPr>
+          <a:lstStyle/>
+          <a:p>
+            <a:r>
+              <a:rPr lang="en-US" sz="1800"/>
+              <a:t>BranchId     		// From Table branch</a:t>
+            </a:r>
+          </a:p>
+          <a:p>
+            <a:r>
+              <a:rPr lang="en-US" sz="1800" err="1"/>
+              <a:t>Branch_code</a:t>
+            </a:r>
+            <a:r>
+              <a:rPr lang="en-US" sz="1800"/>
+              <a:t>		// From Table branch</a:t>
+            </a:r>
+          </a:p>
+          <a:p>
+            <a:r>
+              <a:rPr lang="en-US" sz="1800" err="1"/>
+              <a:t>ExterNum</a:t>
+            </a:r>
+            <a:r>
+              <a:rPr lang="en-US" sz="1800"/>
+              <a:t>		// From Table branch</a:t>
+            </a:r>
+          </a:p>
+          <a:p>
+            <a:endParaRPr lang="en-US" sz="1800"/>
+          </a:p>
+        </p:txBody>
+      </p:sp>
+    </p:spTree>
+    <p:extLst>
+      <p:ext uri="{BB962C8B-B14F-4D97-AF65-F5344CB8AC3E}">
+        <p14:creationId xmlns:p14="http://schemas.microsoft.com/office/powerpoint/2010/main" val="1678316031"/>
+      </p:ext>
+    </p:extLst>
+  </p:cSld>
+  <p:clrMapOvr>
+    <a:masterClrMapping/>
+  </p:clrMapOvr>
+</p:sld>
+</file>
+
+<file path=ppt/slides/slide7.xml><?xml version="1.0" encoding="utf-8"?>
+<p:sld xmlns:a="http://schemas.openxmlformats.org/drawingml/2006/main" xmlns:r="http://schemas.openxmlformats.org/officeDocument/2006/relationships" xmlns:p="http://schemas.openxmlformats.org/presentationml/2006/main">
+  <p:cSld>
+    <p:spTree>
+      <p:nvGrpSpPr>
+        <p:cNvPr id="1" name=""/>
+        <p:cNvGrpSpPr/>
+        <p:nvPr/>
+      </p:nvGrpSpPr>
+      <p:grpSpPr>
+        <a:xfrm>
+          <a:off x="0" y="0"/>
+          <a:ext cx="0" cy="0"/>
+          <a:chOff x="0" y="0"/>
+          <a:chExt cx="0" cy="0"/>
+        </a:xfrm>
+      </p:grpSpPr>
+      <p:sp>
+        <p:nvSpPr>
+          <p:cNvPr id="2" name="Title 1">
+            <a:extLst>
+              <a:ext uri="{FF2B5EF4-FFF2-40B4-BE49-F238E27FC236}">
+                <a16:creationId xmlns:a16="http://schemas.microsoft.com/office/drawing/2014/main" id="{DF26BFB9-CD17-9F48-9D2D-CDB2C527E941}"/>
+              </a:ext>
+            </a:extLst>
+          </p:cNvPr>
+          <p:cNvSpPr>
+            <a:spLocks noGrp="1"/>
+          </p:cNvSpPr>
+          <p:nvPr>
+            <p:ph type="title"/>
+          </p:nvPr>
+        </p:nvSpPr>
+        <p:spPr>
+          <a:xfrm>
+            <a:off x="1031782" y="2458550"/>
+            <a:ext cx="10353762" cy="970450"/>
+          </a:xfrm>
+        </p:spPr>
+        <p:txBody>
+          <a:bodyPr>
+            <a:normAutofit/>
+          </a:bodyPr>
+          <a:lstStyle/>
+          <a:p>
+            <a:r>
+              <a:rPr lang="en-US" sz="4400" b="1">
+                <a:solidFill>
+                  <a:srgbClr val="FF0000"/>
+                </a:solidFill>
+              </a:rPr>
+              <a:t>MICRO, Core, Master</a:t>
+            </a:r>
+          </a:p>
+        </p:txBody>
+      </p:sp>
+    </p:spTree>
+    <p:extLst>
+      <p:ext uri="{BB962C8B-B14F-4D97-AF65-F5344CB8AC3E}">
+        <p14:creationId xmlns:p14="http://schemas.microsoft.com/office/powerpoint/2010/main" val="1029230028"/>
+      </p:ext>
+    </p:extLst>
+  </p:cSld>
+  <p:clrMapOvr>
+    <a:masterClrMapping/>
+  </p:clrMapOvr>
+</p:sld>
+</file>
+
+<file path=ppt/slides/slide70.xml><?xml version="1.0" encoding="utf-8"?>
+<p:sld xmlns:a="http://schemas.openxmlformats.org/drawingml/2006/main" xmlns:r="http://schemas.openxmlformats.org/officeDocument/2006/relationships" xmlns:p="http://schemas.openxmlformats.org/presentationml/2006/main">
+  <p:cSld>
+    <p:spTree>
+      <p:nvGrpSpPr>
+        <p:cNvPr id="1" name=""/>
+        <p:cNvGrpSpPr/>
+        <p:nvPr/>
+      </p:nvGrpSpPr>
+      <p:grpSpPr>
+        <a:xfrm>
+          <a:off x="0" y="0"/>
+          <a:ext cx="0" cy="0"/>
+          <a:chOff x="0" y="0"/>
+          <a:chExt cx="0" cy="0"/>
+        </a:xfrm>
+      </p:grpSpPr>
+      <p:sp>
+        <p:nvSpPr>
+          <p:cNvPr id="2" name="Title 1">
+            <a:extLst>
+              <a:ext uri="{FF2B5EF4-FFF2-40B4-BE49-F238E27FC236}">
                 <a16:creationId xmlns:a16="http://schemas.microsoft.com/office/drawing/2014/main" id="{4EF5FE32-DD82-CBD6-386F-93F17B98F119}"/>
               </a:ext>
             </a:extLst>
@@ -21104,7 +21571,7 @@
 </p:sld>
 </file>
 
-<file path=ppt/slides/slide69.xml><?xml version="1.0" encoding="utf-8"?>
+<file path=ppt/slides/slide71.xml><?xml version="1.0" encoding="utf-8"?>
 <p:sld xmlns:a="http://schemas.openxmlformats.org/drawingml/2006/main" xmlns:r="http://schemas.openxmlformats.org/officeDocument/2006/relationships" xmlns:p="http://schemas.openxmlformats.org/presentationml/2006/main">
   <p:cSld>
     <p:spTree>
@@ -21544,287 +22011,6 @@
 </p:sld>
 </file>
 
-<file path=ppt/slides/slide7.xml><?xml version="1.0" encoding="utf-8"?>
-<p:sld xmlns:a="http://schemas.openxmlformats.org/drawingml/2006/main" xmlns:r="http://schemas.openxmlformats.org/officeDocument/2006/relationships" xmlns:p="http://schemas.openxmlformats.org/presentationml/2006/main">
-  <p:cSld>
-    <p:spTree>
-      <p:nvGrpSpPr>
-        <p:cNvPr id="1" name=""/>
-        <p:cNvGrpSpPr/>
-        <p:nvPr/>
-      </p:nvGrpSpPr>
-      <p:grpSpPr>
-        <a:xfrm>
-          <a:off x="0" y="0"/>
-          <a:ext cx="0" cy="0"/>
-          <a:chOff x="0" y="0"/>
-          <a:chExt cx="0" cy="0"/>
-        </a:xfrm>
-      </p:grpSpPr>
-      <p:sp>
-        <p:nvSpPr>
-          <p:cNvPr id="2" name="Title 1">
-            <a:extLst>
-              <a:ext uri="{FF2B5EF4-FFF2-40B4-BE49-F238E27FC236}">
-                <a16:creationId xmlns:a16="http://schemas.microsoft.com/office/drawing/2014/main" id="{DF26BFB9-CD17-9F48-9D2D-CDB2C527E941}"/>
-              </a:ext>
-            </a:extLst>
-          </p:cNvPr>
-          <p:cNvSpPr>
-            <a:spLocks noGrp="1"/>
-          </p:cNvSpPr>
-          <p:nvPr>
-            <p:ph type="title"/>
-          </p:nvPr>
-        </p:nvSpPr>
-        <p:spPr>
-          <a:xfrm>
-            <a:off x="1031782" y="2458550"/>
-            <a:ext cx="10353762" cy="970450"/>
-          </a:xfrm>
-        </p:spPr>
-        <p:txBody>
-          <a:bodyPr>
-            <a:normAutofit/>
-          </a:bodyPr>
-          <a:lstStyle/>
-          <a:p>
-            <a:r>
-              <a:rPr lang="en-US" sz="4400" b="1">
-                <a:solidFill>
-                  <a:srgbClr val="FF0000"/>
-                </a:solidFill>
-              </a:rPr>
-              <a:t>MICRO, Core, Master</a:t>
-            </a:r>
-          </a:p>
-        </p:txBody>
-      </p:sp>
-    </p:spTree>
-    <p:extLst>
-      <p:ext uri="{BB962C8B-B14F-4D97-AF65-F5344CB8AC3E}">
-        <p14:creationId xmlns:p14="http://schemas.microsoft.com/office/powerpoint/2010/main" val="1029230028"/>
-      </p:ext>
-    </p:extLst>
-  </p:cSld>
-  <p:clrMapOvr>
-    <a:masterClrMapping/>
-  </p:clrMapOvr>
-</p:sld>
-</file>
-
-<file path=ppt/slides/slide70.xml><?xml version="1.0" encoding="utf-8"?>
-<p:sld xmlns:a="http://schemas.openxmlformats.org/drawingml/2006/main" xmlns:r="http://schemas.openxmlformats.org/officeDocument/2006/relationships" xmlns:p="http://schemas.openxmlformats.org/presentationml/2006/main">
-  <p:cSld>
-    <p:spTree>
-      <p:nvGrpSpPr>
-        <p:cNvPr id="1" name=""/>
-        <p:cNvGrpSpPr/>
-        <p:nvPr/>
-      </p:nvGrpSpPr>
-      <p:grpSpPr>
-        <a:xfrm>
-          <a:off x="0" y="0"/>
-          <a:ext cx="0" cy="0"/>
-          <a:chOff x="0" y="0"/>
-          <a:chExt cx="0" cy="0"/>
-        </a:xfrm>
-      </p:grpSpPr>
-      <p:sp>
-        <p:nvSpPr>
-          <p:cNvPr id="2" name="Title 1">
-            <a:extLst>
-              <a:ext uri="{FF2B5EF4-FFF2-40B4-BE49-F238E27FC236}">
-                <a16:creationId xmlns:a16="http://schemas.microsoft.com/office/drawing/2014/main" id="{272D7C44-A13E-6833-7D6F-1BAB07BEC642}"/>
-              </a:ext>
-            </a:extLst>
-          </p:cNvPr>
-          <p:cNvSpPr>
-            <a:spLocks noGrp="1"/>
-          </p:cNvSpPr>
-          <p:nvPr>
-            <p:ph type="title"/>
-          </p:nvPr>
-        </p:nvSpPr>
-        <p:spPr>
-          <a:xfrm>
-            <a:off x="834282" y="0"/>
-            <a:ext cx="10353762" cy="642730"/>
-          </a:xfrm>
-        </p:spPr>
-        <p:txBody>
-          <a:bodyPr>
-            <a:normAutofit fontScale="90000"/>
-          </a:bodyPr>
-          <a:lstStyle/>
-          <a:p>
-            <a:r>
-              <a:rPr lang="en-US" b="1"/>
-              <a:t>When CO reject the FundingRequest</a:t>
-            </a:r>
-          </a:p>
-        </p:txBody>
-      </p:sp>
-      <p:sp>
-        <p:nvSpPr>
-          <p:cNvPr id="3" name="Content Placeholder 2">
-            <a:extLst>
-              <a:ext uri="{FF2B5EF4-FFF2-40B4-BE49-F238E27FC236}">
-                <a16:creationId xmlns:a16="http://schemas.microsoft.com/office/drawing/2014/main" id="{4284F2B7-37DF-CFDD-2EEF-4ACC0B3D094B}"/>
-              </a:ext>
-            </a:extLst>
-          </p:cNvPr>
-          <p:cNvSpPr>
-            <a:spLocks noGrp="1"/>
-          </p:cNvSpPr>
-          <p:nvPr>
-            <p:ph idx="1"/>
-          </p:nvPr>
-        </p:nvSpPr>
-        <p:spPr>
-          <a:xfrm>
-            <a:off x="198783" y="642730"/>
-            <a:ext cx="11068774" cy="5877339"/>
-          </a:xfrm>
-        </p:spPr>
-        <p:txBody>
-          <a:bodyPr/>
-          <a:lstStyle/>
-          <a:p>
-            <a:r>
-              <a:rPr lang="en-US"/>
-              <a:t>TDWF.Flow_Request_Deportation</a:t>
-            </a:r>
-          </a:p>
-          <a:p>
-            <a:pPr lvl="1"/>
-            <a:endParaRPr lang="en-US"/>
-          </a:p>
-          <a:p>
-            <a:endParaRPr lang="en-US"/>
-          </a:p>
-        </p:txBody>
-      </p:sp>
-    </p:spTree>
-    <p:extLst>
-      <p:ext uri="{BB962C8B-B14F-4D97-AF65-F5344CB8AC3E}">
-        <p14:creationId xmlns:p14="http://schemas.microsoft.com/office/powerpoint/2010/main" val="4085703863"/>
-      </p:ext>
-    </p:extLst>
-  </p:cSld>
-  <p:clrMapOvr>
-    <a:masterClrMapping/>
-  </p:clrMapOvr>
-</p:sld>
-</file>
-
-<file path=ppt/slides/slide71.xml><?xml version="1.0" encoding="utf-8"?>
-<p:sld xmlns:a="http://schemas.openxmlformats.org/drawingml/2006/main" xmlns:r="http://schemas.openxmlformats.org/officeDocument/2006/relationships" xmlns:p="http://schemas.openxmlformats.org/presentationml/2006/main">
-  <p:cSld>
-    <p:spTree>
-      <p:nvGrpSpPr>
-        <p:cNvPr id="1" name=""/>
-        <p:cNvGrpSpPr/>
-        <p:nvPr/>
-      </p:nvGrpSpPr>
-      <p:grpSpPr>
-        <a:xfrm>
-          <a:off x="0" y="0"/>
-          <a:ext cx="0" cy="0"/>
-          <a:chOff x="0" y="0"/>
-          <a:chExt cx="0" cy="0"/>
-        </a:xfrm>
-      </p:grpSpPr>
-      <p:sp>
-        <p:nvSpPr>
-          <p:cNvPr id="2" name="Title 1">
-            <a:extLst>
-              <a:ext uri="{FF2B5EF4-FFF2-40B4-BE49-F238E27FC236}">
-                <a16:creationId xmlns:a16="http://schemas.microsoft.com/office/drawing/2014/main" id="{B32C3EEF-AB22-5FAD-E7FB-766816AE7007}"/>
-              </a:ext>
-            </a:extLst>
-          </p:cNvPr>
-          <p:cNvSpPr>
-            <a:spLocks noGrp="1"/>
-          </p:cNvSpPr>
-          <p:nvPr>
-            <p:ph type="title"/>
-          </p:nvPr>
-        </p:nvSpPr>
-        <p:spPr>
-          <a:xfrm>
-            <a:off x="913795" y="0"/>
-            <a:ext cx="10353762" cy="737419"/>
-          </a:xfrm>
-        </p:spPr>
-        <p:txBody>
-          <a:bodyPr/>
-          <a:lstStyle/>
-          <a:p>
-            <a:r>
-              <a:rPr lang="en-US" b="1"/>
-              <a:t>Front Places</a:t>
-            </a:r>
-          </a:p>
-        </p:txBody>
-      </p:sp>
-      <p:sp>
-        <p:nvSpPr>
-          <p:cNvPr id="3" name="Content Placeholder 2">
-            <a:extLst>
-              <a:ext uri="{FF2B5EF4-FFF2-40B4-BE49-F238E27FC236}">
-                <a16:creationId xmlns:a16="http://schemas.microsoft.com/office/drawing/2014/main" id="{3A6C8A89-D75F-3D76-3338-8061FC380E18}"/>
-              </a:ext>
-            </a:extLst>
-          </p:cNvPr>
-          <p:cNvSpPr>
-            <a:spLocks noGrp="1"/>
-          </p:cNvSpPr>
-          <p:nvPr>
-            <p:ph idx="1"/>
-          </p:nvPr>
-        </p:nvSpPr>
-        <p:spPr>
-          <a:xfrm>
-            <a:off x="294968" y="737419"/>
-            <a:ext cx="11700387" cy="5958349"/>
-          </a:xfrm>
-        </p:spPr>
-        <p:txBody>
-          <a:bodyPr/>
-          <a:lstStyle/>
-          <a:p>
-            <a:r>
-              <a:rPr lang="en-US"/>
-              <a:t>app\Modules\Transaction\funding\</a:t>
-            </a:r>
-            <a:r>
-              <a:rPr lang="en-US" b="1">
-                <a:solidFill>
-                  <a:srgbClr val="FFFF00"/>
-                </a:solidFill>
-              </a:rPr>
-              <a:t>funding.component.ts</a:t>
-            </a:r>
-          </a:p>
-          <a:p>
-            <a:endParaRPr lang="en-US"/>
-          </a:p>
-        </p:txBody>
-      </p:sp>
-    </p:spTree>
-    <p:extLst>
-      <p:ext uri="{BB962C8B-B14F-4D97-AF65-F5344CB8AC3E}">
-        <p14:creationId xmlns:p14="http://schemas.microsoft.com/office/powerpoint/2010/main" val="2806931338"/>
-      </p:ext>
-    </p:extLst>
-  </p:cSld>
-  <p:clrMapOvr>
-    <a:masterClrMapping/>
-  </p:clrMapOvr>
-</p:sld>
-</file>
-
 <file path=ppt/slides/slide72.xml><?xml version="1.0" encoding="utf-8"?>
 <p:sld xmlns:a="http://schemas.openxmlformats.org/drawingml/2006/main" xmlns:r="http://schemas.openxmlformats.org/officeDocument/2006/relationships" xmlns:p="http://schemas.openxmlformats.org/presentationml/2006/main">
   <p:cSld>
@@ -21847,7 +22033,7 @@
           <p:cNvPr id="2" name="Title 1">
             <a:extLst>
               <a:ext uri="{FF2B5EF4-FFF2-40B4-BE49-F238E27FC236}">
-                <a16:creationId xmlns:a16="http://schemas.microsoft.com/office/drawing/2014/main" id="{D2099F25-69DD-0B59-E12E-FF349DBC35DE}"/>
+                <a16:creationId xmlns:a16="http://schemas.microsoft.com/office/drawing/2014/main" id="{272D7C44-A13E-6833-7D6F-1BAB07BEC642}"/>
               </a:ext>
             </a:extLst>
           </p:cNvPr>
@@ -21858,14 +22044,21 @@
             <p:ph type="title"/>
           </p:nvPr>
         </p:nvSpPr>
-        <p:spPr/>
-        <p:txBody>
-          <a:bodyPr/>
+        <p:spPr>
+          <a:xfrm>
+            <a:off x="834282" y="0"/>
+            <a:ext cx="10353762" cy="642730"/>
+          </a:xfrm>
+        </p:spPr>
+        <p:txBody>
+          <a:bodyPr>
+            <a:normAutofit fontScale="90000"/>
+          </a:bodyPr>
           <a:lstStyle/>
           <a:p>
             <a:r>
-              <a:rPr lang="en-US"/>
-              <a:t>Places</a:t>
+              <a:rPr lang="en-US" b="1"/>
+              <a:t>When CO reject the FundingRequest</a:t>
             </a:r>
           </a:p>
         </p:txBody>
@@ -21875,7 +22068,7 @@
           <p:cNvPr id="3" name="Content Placeholder 2">
             <a:extLst>
               <a:ext uri="{FF2B5EF4-FFF2-40B4-BE49-F238E27FC236}">
-                <a16:creationId xmlns:a16="http://schemas.microsoft.com/office/drawing/2014/main" id="{BE834885-BB5E-ED54-5976-BF14D866F797}"/>
+                <a16:creationId xmlns:a16="http://schemas.microsoft.com/office/drawing/2014/main" id="{4284F2B7-37DF-CFDD-2EEF-4ACC0B3D094B}"/>
               </a:ext>
             </a:extLst>
           </p:cNvPr>
@@ -21886,15 +22079,24 @@
             <p:ph idx="1"/>
           </p:nvPr>
         </p:nvSpPr>
-        <p:spPr/>
+        <p:spPr>
+          <a:xfrm>
+            <a:off x="198783" y="642730"/>
+            <a:ext cx="11068774" cy="5877339"/>
+          </a:xfrm>
+        </p:spPr>
         <p:txBody>
           <a:bodyPr/>
           <a:lstStyle/>
           <a:p>
             <a:r>
               <a:rPr lang="en-US"/>
-              <a:t>_Flow_Rejections_mainService.GetAllRejectionFieldsByRequest_id(Request_id)</a:t>
-            </a:r>
+              <a:t>TDWF.Flow_Request_Deportation</a:t>
+            </a:r>
+          </a:p>
+          <a:p>
+            <a:pPr lvl="1"/>
+            <a:endParaRPr lang="en-US"/>
           </a:p>
           <a:p>
             <a:endParaRPr lang="en-US"/>
@@ -21904,7 +22106,7 @@
     </p:spTree>
     <p:extLst>
       <p:ext uri="{BB962C8B-B14F-4D97-AF65-F5344CB8AC3E}">
-        <p14:creationId xmlns:p14="http://schemas.microsoft.com/office/powerpoint/2010/main" val="3204393959"/>
+        <p14:creationId xmlns:p14="http://schemas.microsoft.com/office/powerpoint/2010/main" val="4085703863"/>
       </p:ext>
     </p:extLst>
   </p:cSld>
@@ -21936,7 +22138,7 @@
           <p:cNvPr id="2" name="Title 1">
             <a:extLst>
               <a:ext uri="{FF2B5EF4-FFF2-40B4-BE49-F238E27FC236}">
-                <a16:creationId xmlns:a16="http://schemas.microsoft.com/office/drawing/2014/main" id="{F5BB69CF-0430-C72F-E158-7D4576E1893D}"/>
+                <a16:creationId xmlns:a16="http://schemas.microsoft.com/office/drawing/2014/main" id="{B32C3EEF-AB22-5FAD-E7FB-766816AE7007}"/>
               </a:ext>
             </a:extLst>
           </p:cNvPr>
@@ -21949,19 +22151,17 @@
         </p:nvSpPr>
         <p:spPr>
           <a:xfrm>
-            <a:off x="913795" y="46654"/>
-            <a:ext cx="10353762" cy="659024"/>
-          </a:xfrm>
-        </p:spPr>
-        <p:txBody>
-          <a:bodyPr>
-            <a:normAutofit fontScale="90000"/>
-          </a:bodyPr>
+            <a:off x="913795" y="0"/>
+            <a:ext cx="10353762" cy="737419"/>
+          </a:xfrm>
+        </p:spPr>
+        <p:txBody>
+          <a:bodyPr/>
           <a:lstStyle/>
           <a:p>
             <a:r>
               <a:rPr lang="en-US" b="1"/>
-              <a:t>Micro Login Sequence</a:t>
+              <a:t>Front Places</a:t>
             </a:r>
           </a:p>
         </p:txBody>
@@ -21971,7 +22171,7 @@
           <p:cNvPr id="3" name="Content Placeholder 2">
             <a:extLst>
               <a:ext uri="{FF2B5EF4-FFF2-40B4-BE49-F238E27FC236}">
-                <a16:creationId xmlns:a16="http://schemas.microsoft.com/office/drawing/2014/main" id="{A7E639F0-DFFB-8A01-6FC5-695433537E24}"/>
+                <a16:creationId xmlns:a16="http://schemas.microsoft.com/office/drawing/2014/main" id="{3A6C8A89-D75F-3D76-3338-8061FC380E18}"/>
               </a:ext>
             </a:extLst>
           </p:cNvPr>
@@ -21984,97 +22184,36 @@
         </p:nvSpPr>
         <p:spPr>
           <a:xfrm>
-            <a:off x="258417" y="705678"/>
-            <a:ext cx="11009140" cy="6033051"/>
+            <a:off x="294968" y="737419"/>
+            <a:ext cx="11700387" cy="5958349"/>
           </a:xfrm>
         </p:spPr>
         <p:txBody>
           <a:bodyPr/>
           <a:lstStyle/>
           <a:p>
+            <a:r>
+              <a:rPr lang="en-US"/>
+              <a:t>app\Modules\Transaction\funding\</a:t>
+            </a:r>
+            <a:r>
+              <a:rPr lang="en-US" b="1">
+                <a:solidFill>
+                  <a:srgbClr val="FFFF00"/>
+                </a:solidFill>
+              </a:rPr>
+              <a:t>funding.component.ts</a:t>
+            </a:r>
+          </a:p>
+          <a:p>
             <a:endParaRPr lang="en-US"/>
           </a:p>
-          <a:p>
-            <a:endParaRPr lang="en-US"/>
-          </a:p>
-          <a:p>
-            <a:endParaRPr lang="en-US"/>
-          </a:p>
-          <a:p>
-            <a:r>
-              <a:rPr lang="en-US"/>
-              <a:t>Then go to loginService</a:t>
-            </a:r>
-          </a:p>
-          <a:p>
-            <a:endParaRPr lang="en-US"/>
-          </a:p>
-        </p:txBody>
-      </p:sp>
-      <p:pic>
-        <p:nvPicPr>
-          <p:cNvPr id="7" name="Picture 6">
-            <a:extLst>
-              <a:ext uri="{FF2B5EF4-FFF2-40B4-BE49-F238E27FC236}">
-                <a16:creationId xmlns:a16="http://schemas.microsoft.com/office/drawing/2014/main" id="{9949445F-5D8F-6554-A6F3-73F4D9DADB18}"/>
-              </a:ext>
-            </a:extLst>
-          </p:cNvPr>
-          <p:cNvPicPr>
-            <a:picLocks noChangeAspect="1"/>
-          </p:cNvPicPr>
-          <p:nvPr/>
-        </p:nvPicPr>
-        <p:blipFill>
-          <a:blip r:embed="rId2"/>
-          <a:stretch>
-            <a:fillRect/>
-          </a:stretch>
-        </p:blipFill>
-        <p:spPr>
-          <a:xfrm>
-            <a:off x="195592" y="799824"/>
-            <a:ext cx="5895084" cy="1129756"/>
-          </a:xfrm>
-          <a:prstGeom prst="rect">
-            <a:avLst/>
-          </a:prstGeom>
-        </p:spPr>
-      </p:pic>
-      <p:pic>
-        <p:nvPicPr>
-          <p:cNvPr id="9" name="Picture 8">
-            <a:extLst>
-              <a:ext uri="{FF2B5EF4-FFF2-40B4-BE49-F238E27FC236}">
-                <a16:creationId xmlns:a16="http://schemas.microsoft.com/office/drawing/2014/main" id="{7D96E95C-6FD8-AD7C-7E21-F0E9E7B05C9D}"/>
-              </a:ext>
-            </a:extLst>
-          </p:cNvPr>
-          <p:cNvPicPr>
-            <a:picLocks noChangeAspect="1"/>
-          </p:cNvPicPr>
-          <p:nvPr/>
-        </p:nvPicPr>
-        <p:blipFill>
-          <a:blip r:embed="rId3"/>
-          <a:stretch>
-            <a:fillRect/>
-          </a:stretch>
-        </p:blipFill>
-        <p:spPr>
-          <a:xfrm>
-            <a:off x="3450237" y="2023726"/>
-            <a:ext cx="4669377" cy="352850"/>
-          </a:xfrm>
-          <a:prstGeom prst="rect">
-            <a:avLst/>
-          </a:prstGeom>
-        </p:spPr>
-      </p:pic>
+        </p:txBody>
+      </p:sp>
     </p:spTree>
     <p:extLst>
       <p:ext uri="{BB962C8B-B14F-4D97-AF65-F5344CB8AC3E}">
-        <p14:creationId xmlns:p14="http://schemas.microsoft.com/office/powerpoint/2010/main" val="1842946377"/>
+        <p14:creationId xmlns:p14="http://schemas.microsoft.com/office/powerpoint/2010/main" val="2806931338"/>
       </p:ext>
     </p:extLst>
   </p:cSld>
@@ -22106,7 +22245,7 @@
           <p:cNvPr id="2" name="Title 1">
             <a:extLst>
               <a:ext uri="{FF2B5EF4-FFF2-40B4-BE49-F238E27FC236}">
-                <a16:creationId xmlns:a16="http://schemas.microsoft.com/office/drawing/2014/main" id="{12BC1E88-436E-358B-0172-0873ADFF98D4}"/>
+                <a16:creationId xmlns:a16="http://schemas.microsoft.com/office/drawing/2014/main" id="{D2099F25-69DD-0B59-E12E-FF349DBC35DE}"/>
               </a:ext>
             </a:extLst>
           </p:cNvPr>
@@ -22117,33 +22256,53 @@
             <p:ph type="title"/>
           </p:nvPr>
         </p:nvSpPr>
-        <p:spPr>
-          <a:xfrm>
-            <a:off x="344129" y="2104103"/>
-            <a:ext cx="11503742" cy="1445342"/>
-          </a:xfrm>
-        </p:spPr>
-        <p:txBody>
-          <a:bodyPr>
-            <a:normAutofit/>
-          </a:bodyPr>
+        <p:spPr/>
+        <p:txBody>
+          <a:bodyPr/>
           <a:lstStyle/>
           <a:p>
             <a:r>
-              <a:rPr lang="en-US" sz="5400" b="1">
-                <a:solidFill>
-                  <a:srgbClr val="FF0000"/>
-                </a:solidFill>
-              </a:rPr>
-              <a:t>View Models</a:t>
-            </a:r>
+              <a:rPr lang="en-US"/>
+              <a:t>Places</a:t>
+            </a:r>
+          </a:p>
+        </p:txBody>
+      </p:sp>
+      <p:sp>
+        <p:nvSpPr>
+          <p:cNvPr id="3" name="Content Placeholder 2">
+            <a:extLst>
+              <a:ext uri="{FF2B5EF4-FFF2-40B4-BE49-F238E27FC236}">
+                <a16:creationId xmlns:a16="http://schemas.microsoft.com/office/drawing/2014/main" id="{BE834885-BB5E-ED54-5976-BF14D866F797}"/>
+              </a:ext>
+            </a:extLst>
+          </p:cNvPr>
+          <p:cNvSpPr>
+            <a:spLocks noGrp="1"/>
+          </p:cNvSpPr>
+          <p:nvPr>
+            <p:ph idx="1"/>
+          </p:nvPr>
+        </p:nvSpPr>
+        <p:spPr/>
+        <p:txBody>
+          <a:bodyPr/>
+          <a:lstStyle/>
+          <a:p>
+            <a:r>
+              <a:rPr lang="en-US"/>
+              <a:t>_Flow_Rejections_mainService.GetAllRejectionFieldsByRequest_id(Request_id)</a:t>
+            </a:r>
+          </a:p>
+          <a:p>
+            <a:endParaRPr lang="en-US"/>
           </a:p>
         </p:txBody>
       </p:sp>
     </p:spTree>
     <p:extLst>
       <p:ext uri="{BB962C8B-B14F-4D97-AF65-F5344CB8AC3E}">
-        <p14:creationId xmlns:p14="http://schemas.microsoft.com/office/powerpoint/2010/main" val="319315269"/>
+        <p14:creationId xmlns:p14="http://schemas.microsoft.com/office/powerpoint/2010/main" val="3204393959"/>
       </p:ext>
     </p:extLst>
   </p:cSld>
@@ -22175,7 +22334,7 @@
           <p:cNvPr id="2" name="Title 1">
             <a:extLst>
               <a:ext uri="{FF2B5EF4-FFF2-40B4-BE49-F238E27FC236}">
-                <a16:creationId xmlns:a16="http://schemas.microsoft.com/office/drawing/2014/main" id="{34146355-124E-3796-C27E-50B1FEE9ADD5}"/>
+                <a16:creationId xmlns:a16="http://schemas.microsoft.com/office/drawing/2014/main" id="{F5BB69CF-0430-C72F-E158-7D4576E1893D}"/>
               </a:ext>
             </a:extLst>
           </p:cNvPr>
@@ -22188,8 +22347,8 @@
         </p:nvSpPr>
         <p:spPr>
           <a:xfrm>
-            <a:off x="913795" y="0"/>
-            <a:ext cx="10353762" cy="688258"/>
+            <a:off x="913795" y="46654"/>
+            <a:ext cx="10353762" cy="659024"/>
           </a:xfrm>
         </p:spPr>
         <p:txBody>
@@ -22199,12 +22358,8 @@
           <a:lstStyle/>
           <a:p>
             <a:r>
-              <a:rPr lang="en-US" b="1">
-                <a:solidFill>
-                  <a:srgbClr val="FF0000"/>
-                </a:solidFill>
-              </a:rPr>
-              <a:t>ProdVM</a:t>
+              <a:rPr lang="en-US" b="1"/>
+              <a:t>Micro Login Sequence</a:t>
             </a:r>
           </a:p>
         </p:txBody>
@@ -22214,7 +22369,7 @@
           <p:cNvPr id="3" name="Content Placeholder 2">
             <a:extLst>
               <a:ext uri="{FF2B5EF4-FFF2-40B4-BE49-F238E27FC236}">
-                <a16:creationId xmlns:a16="http://schemas.microsoft.com/office/drawing/2014/main" id="{E2533BB6-2BA2-1C59-7D9D-054CC9AB8FB7}"/>
+                <a16:creationId xmlns:a16="http://schemas.microsoft.com/office/drawing/2014/main" id="{A7E639F0-DFFB-8A01-6FC5-695433537E24}"/>
               </a:ext>
             </a:extLst>
           </p:cNvPr>
@@ -22227,282 +22382,97 @@
         </p:nvSpPr>
         <p:spPr>
           <a:xfrm>
-            <a:off x="363794" y="688257"/>
-            <a:ext cx="11602064" cy="5928853"/>
-          </a:xfrm>
-        </p:spPr>
-        <p:txBody>
-          <a:bodyPr>
-            <a:normAutofit/>
-          </a:bodyPr>
+            <a:off x="258417" y="705678"/>
+            <a:ext cx="11009140" cy="6033051"/>
+          </a:xfrm>
+        </p:spPr>
+        <p:txBody>
+          <a:bodyPr/>
           <a:lstStyle/>
           <a:p>
-            <a:pPr marL="36900" indent="0">
-              <a:buNone/>
-            </a:pPr>
-            <a:r>
-              <a:rPr lang="en-US"/>
-              <a:t>public class ProdVM {</a:t>
-            </a:r>
-          </a:p>
-          <a:p>
-            <a:pPr marL="36900" indent="0">
-              <a:buNone/>
-            </a:pPr>
-            <a:r>
-              <a:rPr lang="en-US"/>
-              <a:t>        public </a:t>
-            </a:r>
-            <a:r>
-              <a:rPr lang="en-US">
-                <a:solidFill>
-                  <a:srgbClr val="00B0F0"/>
-                </a:solidFill>
-              </a:rPr>
-              <a:t>IQueryable</a:t>
-            </a:r>
-            <a:r>
-              <a:rPr lang="en-US"/>
-              <a:t>&lt;Flow_branch_product&gt; </a:t>
-            </a:r>
-            <a:r>
-              <a:rPr lang="en-US" b="1">
-                <a:solidFill>
-                  <a:srgbClr val="FFFF00"/>
-                </a:solidFill>
-              </a:rPr>
-              <a:t>BranchProduct</a:t>
-            </a:r>
-            <a:r>
-              <a:rPr lang="en-US"/>
-              <a:t> { get; set; }</a:t>
-            </a:r>
-          </a:p>
-          <a:p>
-            <a:pPr marL="36900" indent="0">
-              <a:buNone/>
-            </a:pPr>
-            <a:r>
-              <a:rPr lang="en-US"/>
-              <a:t>        public </a:t>
-            </a:r>
-            <a:r>
-              <a:rPr lang="en-US">
-                <a:solidFill>
-                  <a:srgbClr val="00B0F0"/>
-                </a:solidFill>
-              </a:rPr>
-              <a:t>IQueryable</a:t>
-            </a:r>
-            <a:r>
-              <a:rPr lang="en-US"/>
-              <a:t>&lt;Flow_Products&gt; </a:t>
-            </a:r>
-            <a:r>
-              <a:rPr lang="en-US" b="1">
-                <a:solidFill>
-                  <a:srgbClr val="FFFF00"/>
-                </a:solidFill>
-              </a:rPr>
-              <a:t>Products</a:t>
-            </a:r>
-            <a:r>
-              <a:rPr lang="en-US"/>
-              <a:t> { get; set; }</a:t>
-            </a:r>
-          </a:p>
-          <a:p>
-            <a:pPr marL="36900" indent="0">
-              <a:buNone/>
-            </a:pPr>
-            <a:r>
-              <a:rPr lang="en-US"/>
-              <a:t>        public </a:t>
-            </a:r>
-            <a:r>
-              <a:rPr lang="en-US">
-                <a:solidFill>
-                  <a:srgbClr val="00B0F0"/>
-                </a:solidFill>
-              </a:rPr>
-              <a:t>IQueryable</a:t>
-            </a:r>
-            <a:r>
-              <a:rPr lang="en-US"/>
-              <a:t>&lt;Flow_Emp_Product&gt; </a:t>
-            </a:r>
-            <a:r>
-              <a:rPr lang="en-US" b="1">
-                <a:solidFill>
-                  <a:srgbClr val="FFFF00"/>
-                </a:solidFill>
-              </a:rPr>
-              <a:t>EmpProduct</a:t>
-            </a:r>
-            <a:r>
-              <a:rPr lang="en-US"/>
-              <a:t> { get; set; }</a:t>
-            </a:r>
-          </a:p>
-          <a:p>
-            <a:pPr marL="36900" indent="0">
-              <a:buNone/>
-            </a:pPr>
-            <a:r>
-              <a:rPr lang="en-US"/>
-              <a:t>}</a:t>
-            </a:r>
-          </a:p>
-          <a:p>
-            <a:pPr marL="36900" indent="0">
-              <a:buNone/>
-            </a:pPr>
-            <a:r>
-              <a:rPr lang="en-US"/>
-              <a:t>public class FundindPageLoadVM  {</a:t>
-            </a:r>
-          </a:p>
-          <a:p>
-            <a:pPr marL="36900" indent="0">
-              <a:buNone/>
-            </a:pPr>
-            <a:r>
-              <a:rPr lang="en-US"/>
-              <a:t>	public IQueryable&lt;Flow_Purpose_loan&gt; </a:t>
-            </a:r>
-            <a:r>
-              <a:rPr lang="en-US" b="1">
-                <a:solidFill>
-                  <a:srgbClr val="FFFF00"/>
-                </a:solidFill>
-              </a:rPr>
-              <a:t>Purpose_loan </a:t>
-            </a:r>
-            <a:r>
-              <a:rPr lang="en-US"/>
-              <a:t>{ get; set; }</a:t>
-            </a:r>
-          </a:p>
-          <a:p>
-            <a:pPr marL="36900" indent="0">
-              <a:buNone/>
-            </a:pPr>
-            <a:r>
-              <a:rPr lang="en-US"/>
-              <a:t>      	public IQueryable&lt;Flow_Relationships&gt; </a:t>
-            </a:r>
-            <a:r>
-              <a:rPr lang="en-US" b="1">
-                <a:solidFill>
-                  <a:srgbClr val="FFFF00"/>
-                </a:solidFill>
-              </a:rPr>
-              <a:t>Relationships</a:t>
-            </a:r>
-            <a:r>
-              <a:rPr lang="en-US"/>
-              <a:t> { get; set; }</a:t>
-            </a:r>
-          </a:p>
-          <a:p>
-            <a:pPr marL="36900" indent="0">
-              <a:buNone/>
-            </a:pPr>
-            <a:r>
-              <a:rPr lang="en-US"/>
-              <a:t>      	public IQueryable&lt;Flow_Exempted_Products&gt; </a:t>
-            </a:r>
-            <a:r>
-              <a:rPr lang="en-US" b="1">
-                <a:solidFill>
-                  <a:srgbClr val="FFFF00"/>
-                </a:solidFill>
-              </a:rPr>
-              <a:t>flow_exempted_products</a:t>
-            </a:r>
-            <a:r>
-              <a:rPr lang="en-US"/>
-              <a:t> { get; set; }     </a:t>
-            </a:r>
-          </a:p>
-          <a:p>
-            <a:pPr marL="36900" indent="0">
-              <a:buNone/>
-            </a:pPr>
-            <a:r>
-              <a:rPr lang="en-US"/>
-              <a:t>	public decimal </a:t>
-            </a:r>
-            <a:r>
-              <a:rPr lang="en-US" b="1">
-                <a:solidFill>
-                  <a:srgbClr val="FFFF00"/>
-                </a:solidFill>
-              </a:rPr>
-              <a:t>Approximation</a:t>
-            </a:r>
-            <a:r>
-              <a:rPr lang="en-US"/>
-              <a:t> { get; set; }</a:t>
-            </a:r>
-          </a:p>
-          <a:p>
-            <a:pPr marL="36900" indent="0">
-              <a:buNone/>
-            </a:pPr>
-            <a:r>
-              <a:rPr lang="en-US"/>
-              <a:t>       public decimal </a:t>
-            </a:r>
-            <a:r>
-              <a:rPr lang="en-US" b="1">
-                <a:solidFill>
-                  <a:srgbClr val="FFFF00"/>
-                </a:solidFill>
-              </a:rPr>
-              <a:t>FinanceAmount_Approximation</a:t>
-            </a:r>
-            <a:r>
-              <a:rPr lang="en-US"/>
-              <a:t> { get; set; }</a:t>
-            </a:r>
-          </a:p>
-          <a:p>
-            <a:pPr marL="36900" indent="0">
-              <a:buNone/>
-            </a:pPr>
-            <a:r>
-              <a:rPr lang="en-US"/>
-              <a:t>	public ProdVM </a:t>
-            </a:r>
-            <a:r>
-              <a:rPr lang="en-US" b="1">
-                <a:solidFill>
-                  <a:srgbClr val="FFFF00"/>
-                </a:solidFill>
-              </a:rPr>
-              <a:t>ProdVM</a:t>
-            </a:r>
-            <a:r>
-              <a:rPr lang="en-US"/>
-              <a:t> { get; set; }</a:t>
-            </a:r>
-          </a:p>
-          <a:p>
-            <a:pPr marL="36900" indent="0">
-              <a:buNone/>
-            </a:pPr>
-            <a:r>
-              <a:rPr lang="en-US"/>
-              <a:t>}</a:t>
-            </a:r>
-          </a:p>
-        </p:txBody>
-      </p:sp>
+            <a:endParaRPr lang="en-US"/>
+          </a:p>
+          <a:p>
+            <a:endParaRPr lang="en-US"/>
+          </a:p>
+          <a:p>
+            <a:endParaRPr lang="en-US"/>
+          </a:p>
+          <a:p>
+            <a:r>
+              <a:rPr lang="en-US"/>
+              <a:t>Then go to loginService</a:t>
+            </a:r>
+          </a:p>
+          <a:p>
+            <a:endParaRPr lang="en-US"/>
+          </a:p>
+        </p:txBody>
+      </p:sp>
+      <p:pic>
+        <p:nvPicPr>
+          <p:cNvPr id="7" name="Picture 6">
+            <a:extLst>
+              <a:ext uri="{FF2B5EF4-FFF2-40B4-BE49-F238E27FC236}">
+                <a16:creationId xmlns:a16="http://schemas.microsoft.com/office/drawing/2014/main" id="{9949445F-5D8F-6554-A6F3-73F4D9DADB18}"/>
+              </a:ext>
+            </a:extLst>
+          </p:cNvPr>
+          <p:cNvPicPr>
+            <a:picLocks noChangeAspect="1"/>
+          </p:cNvPicPr>
+          <p:nvPr/>
+        </p:nvPicPr>
+        <p:blipFill>
+          <a:blip r:embed="rId2"/>
+          <a:stretch>
+            <a:fillRect/>
+          </a:stretch>
+        </p:blipFill>
+        <p:spPr>
+          <a:xfrm>
+            <a:off x="195592" y="799824"/>
+            <a:ext cx="5895084" cy="1129756"/>
+          </a:xfrm>
+          <a:prstGeom prst="rect">
+            <a:avLst/>
+          </a:prstGeom>
+        </p:spPr>
+      </p:pic>
+      <p:pic>
+        <p:nvPicPr>
+          <p:cNvPr id="9" name="Picture 8">
+            <a:extLst>
+              <a:ext uri="{FF2B5EF4-FFF2-40B4-BE49-F238E27FC236}">
+                <a16:creationId xmlns:a16="http://schemas.microsoft.com/office/drawing/2014/main" id="{7D96E95C-6FD8-AD7C-7E21-F0E9E7B05C9D}"/>
+              </a:ext>
+            </a:extLst>
+          </p:cNvPr>
+          <p:cNvPicPr>
+            <a:picLocks noChangeAspect="1"/>
+          </p:cNvPicPr>
+          <p:nvPr/>
+        </p:nvPicPr>
+        <p:blipFill>
+          <a:blip r:embed="rId3"/>
+          <a:stretch>
+            <a:fillRect/>
+          </a:stretch>
+        </p:blipFill>
+        <p:spPr>
+          <a:xfrm>
+            <a:off x="3450237" y="2023726"/>
+            <a:ext cx="4669377" cy="352850"/>
+          </a:xfrm>
+          <a:prstGeom prst="rect">
+            <a:avLst/>
+          </a:prstGeom>
+        </p:spPr>
+      </p:pic>
     </p:spTree>
     <p:extLst>
       <p:ext uri="{BB962C8B-B14F-4D97-AF65-F5344CB8AC3E}">
-        <p14:creationId xmlns:p14="http://schemas.microsoft.com/office/powerpoint/2010/main" val="811143626"/>
+        <p14:creationId xmlns:p14="http://schemas.microsoft.com/office/powerpoint/2010/main" val="1842946377"/>
       </p:ext>
     </p:extLst>
   </p:cSld>
@@ -22534,7 +22504,7 @@
           <p:cNvPr id="2" name="Title 1">
             <a:extLst>
               <a:ext uri="{FF2B5EF4-FFF2-40B4-BE49-F238E27FC236}">
-                <a16:creationId xmlns:a16="http://schemas.microsoft.com/office/drawing/2014/main" id="{2350B4D8-7F7B-C582-0D5B-818D3EBCB3C7}"/>
+                <a16:creationId xmlns:a16="http://schemas.microsoft.com/office/drawing/2014/main" id="{12BC1E88-436E-358B-0172-0873ADFF98D4}"/>
               </a:ext>
             </a:extLst>
           </p:cNvPr>
@@ -22545,162 +22515,25 @@
             <p:ph type="title"/>
           </p:nvPr>
         </p:nvSpPr>
-        <p:spPr/>
-        <p:txBody>
-          <a:bodyPr/>
-          <a:lstStyle/>
-          <a:p>
-            <a:endParaRPr lang="en-US"/>
-          </a:p>
-        </p:txBody>
-      </p:sp>
-      <p:sp>
-        <p:nvSpPr>
-          <p:cNvPr id="3" name="Content Placeholder 2">
-            <a:extLst>
-              <a:ext uri="{FF2B5EF4-FFF2-40B4-BE49-F238E27FC236}">
-                <a16:creationId xmlns:a16="http://schemas.microsoft.com/office/drawing/2014/main" id="{FBEBDDC3-EAEC-EFFC-2A0C-7E22E2707850}"/>
-              </a:ext>
-            </a:extLst>
-          </p:cNvPr>
-          <p:cNvSpPr>
-            <a:spLocks noGrp="1"/>
-          </p:cNvSpPr>
-          <p:nvPr>
-            <p:ph idx="1"/>
-          </p:nvPr>
-        </p:nvSpPr>
-        <p:spPr>
-          <a:xfrm>
-            <a:off x="913795" y="1732449"/>
-            <a:ext cx="10353762" cy="4982983"/>
+        <p:spPr>
+          <a:xfrm>
+            <a:off x="344129" y="2104103"/>
+            <a:ext cx="11503742" cy="1445342"/>
           </a:xfrm>
         </p:spPr>
         <p:txBody>
           <a:bodyPr>
-            <a:normAutofit fontScale="92500" lnSpcReduction="20000"/>
+            <a:normAutofit/>
           </a:bodyPr>
           <a:lstStyle/>
           <a:p>
-            <a:pPr marL="36900" indent="0">
-              <a:buNone/>
-            </a:pPr>
-            <a:r>
-              <a:rPr lang="en-US"/>
-              <a:t>public class </a:t>
-            </a:r>
-            <a:r>
-              <a:rPr lang="en-US" b="1">
-                <a:solidFill>
-                  <a:srgbClr val="00B0F0"/>
-                </a:solidFill>
-              </a:rPr>
-              <a:t>FundingVM</a:t>
-            </a:r>
-          </a:p>
-          <a:p>
-            <a:pPr marL="36900" indent="0">
-              <a:buNone/>
-            </a:pPr>
-            <a:r>
-              <a:rPr lang="en-US"/>
-              <a:t>    {</a:t>
-            </a:r>
-          </a:p>
-          <a:p>
-            <a:pPr marL="36900" indent="0">
-              <a:buNone/>
-            </a:pPr>
-            <a:r>
-              <a:rPr lang="en-US"/>
-              <a:t>        public Flow_Funding_request Funding_request { get; set; }</a:t>
-            </a:r>
-          </a:p>
-          <a:p>
-            <a:pPr marL="36900" indent="0">
-              <a:buNone/>
-            </a:pPr>
-            <a:r>
-              <a:rPr lang="en-US"/>
-              <a:t>        public IQueryable&lt;JoinMandatoryDocAndTypeDocuments&gt; Documents { get; set; }</a:t>
-            </a:r>
-          </a:p>
-          <a:p>
-            <a:pPr marL="36900" indent="0">
-              <a:buNone/>
-            </a:pPr>
-            <a:r>
-              <a:rPr lang="en-US"/>
-              <a:t>        public IQueryable&lt;Flow_Rejections_mainVM&gt; Comments { get; set; }</a:t>
-            </a:r>
-          </a:p>
-          <a:p>
-            <a:pPr marL="36900" indent="0">
-              <a:buNone/>
-            </a:pPr>
-            <a:r>
-              <a:rPr lang="en-US"/>
-              <a:t>        public IQueryable&lt;Flow_Rejections_mainFieldVM&gt; RejectedFields { get; set; }</a:t>
-            </a:r>
-          </a:p>
-          <a:p>
-            <a:pPr marL="36900" indent="0">
-              <a:buNone/>
-            </a:pPr>
-            <a:r>
-              <a:rPr lang="en-US"/>
-              <a:t>        public IQueryable&lt;GuarVM&gt; Guaranters { get; set; }</a:t>
-            </a:r>
-          </a:p>
-          <a:p>
-            <a:pPr marL="36900" indent="0">
-              <a:buNone/>
-            </a:pPr>
-            <a:r>
-              <a:rPr lang="en-US"/>
-              <a:t>        //public Flow_Enterprises Flow_Enterprise { get; set; }</a:t>
-            </a:r>
-          </a:p>
-          <a:p>
-            <a:pPr marL="36900" indent="0">
-              <a:buNone/>
-            </a:pPr>
-            <a:r>
-              <a:rPr lang="en-US"/>
-              <a:t>        public IEnumerable&lt;Product_destinationVM&gt; Flow_Product_destinations { get; set; }</a:t>
-            </a:r>
-          </a:p>
-          <a:p>
-            <a:pPr marL="36900" indent="0">
-              <a:buNone/>
-            </a:pPr>
-            <a:r>
-              <a:rPr lang="en-US"/>
-              <a:t>        public IQueryable&lt;Cheque_InformationDTO&gt; cheque_Information { get; set; }</a:t>
-            </a:r>
-          </a:p>
-          <a:p>
-            <a:pPr marL="36900" indent="0">
-              <a:buNone/>
-            </a:pPr>
-            <a:r>
-              <a:rPr lang="en-US"/>
-              <a:t>        public int Flag { get; set; }</a:t>
-            </a:r>
-          </a:p>
-          <a:p>
-            <a:pPr marL="36900" indent="0">
-              <a:buNone/>
-            </a:pPr>
-            <a:endParaRPr lang="en-US"/>
-          </a:p>
-          <a:p>
-            <a:pPr marL="36900" indent="0">
-              <a:buNone/>
-            </a:pPr>
-            <a:r>
-              <a:rPr lang="en-US"/>
-              <a:t>    }</a:t>
+            <a:r>
+              <a:rPr lang="en-US" sz="5400" b="1">
+                <a:solidFill>
+                  <a:srgbClr val="FF0000"/>
+                </a:solidFill>
+              </a:rPr>
+              <a:t>View Models</a:t>
             </a:r>
           </a:p>
         </p:txBody>
@@ -22708,7 +22541,7 @@
     </p:spTree>
     <p:extLst>
       <p:ext uri="{BB962C8B-B14F-4D97-AF65-F5344CB8AC3E}">
-        <p14:creationId xmlns:p14="http://schemas.microsoft.com/office/powerpoint/2010/main" val="1713578323"/>
+        <p14:creationId xmlns:p14="http://schemas.microsoft.com/office/powerpoint/2010/main" val="319315269"/>
       </p:ext>
     </p:extLst>
   </p:cSld>
@@ -22740,7 +22573,7 @@
           <p:cNvPr id="2" name="Title 1">
             <a:extLst>
               <a:ext uri="{FF2B5EF4-FFF2-40B4-BE49-F238E27FC236}">
-                <a16:creationId xmlns:a16="http://schemas.microsoft.com/office/drawing/2014/main" id="{2D479AA4-7A27-F7BB-18CC-807B27549E5F}"/>
+                <a16:creationId xmlns:a16="http://schemas.microsoft.com/office/drawing/2014/main" id="{54F2869F-AEE9-B9E1-894D-0E5F9A4F135E}"/>
               </a:ext>
             </a:extLst>
           </p:cNvPr>
@@ -22753,8 +22586,8 @@
         </p:nvSpPr>
         <p:spPr>
           <a:xfrm>
-            <a:off x="992453" y="0"/>
-            <a:ext cx="10353762" cy="570271"/>
+            <a:off x="913795" y="0"/>
+            <a:ext cx="10353762" cy="616085"/>
           </a:xfrm>
         </p:spPr>
         <p:txBody>
@@ -22769,84 +22602,333 @@
                   <a:srgbClr val="00B0F0"/>
                 </a:solidFill>
               </a:rPr>
-              <a:t>TransactionVM</a:t>
-            </a:r>
-          </a:p>
-        </p:txBody>
-      </p:sp>
-      <p:pic>
-        <p:nvPicPr>
-          <p:cNvPr id="5" name="Content Placeholder 4">
+              <a:t>FundingData</a:t>
+            </a:r>
+          </a:p>
+        </p:txBody>
+      </p:sp>
+      <p:sp>
+        <p:nvSpPr>
+          <p:cNvPr id="3" name="Content Placeholder 2">
             <a:extLst>
               <a:ext uri="{FF2B5EF4-FFF2-40B4-BE49-F238E27FC236}">
-                <a16:creationId xmlns:a16="http://schemas.microsoft.com/office/drawing/2014/main" id="{551D13E4-7622-8C7C-0DCB-AF259538F592}"/>
+                <a16:creationId xmlns:a16="http://schemas.microsoft.com/office/drawing/2014/main" id="{F35E5826-09F5-EDF6-ED1F-949D33282C40}"/>
               </a:ext>
             </a:extLst>
           </p:cNvPr>
-          <p:cNvPicPr>
-            <a:picLocks noGrp="1" noChangeAspect="1"/>
-          </p:cNvPicPr>
+          <p:cNvSpPr>
+            <a:spLocks noGrp="1"/>
+          </p:cNvSpPr>
           <p:nvPr>
             <p:ph idx="1"/>
           </p:nvPr>
-        </p:nvPicPr>
-        <p:blipFill>
-          <a:blip r:embed="rId2"/>
-          <a:stretch>
-            <a:fillRect/>
-          </a:stretch>
-        </p:blipFill>
-        <p:spPr>
-          <a:xfrm>
-            <a:off x="167951" y="570271"/>
-            <a:ext cx="3342165" cy="2003594"/>
-          </a:xfrm>
-          <a:prstGeom prst="rect">
-            <a:avLst/>
-          </a:prstGeom>
-          <a:effectLst>
-            <a:outerShdw blurRad="25400" dir="17880000">
-              <a:srgbClr val="000000">
-                <a:alpha val="46000"/>
-              </a:srgbClr>
-            </a:outerShdw>
-          </a:effectLst>
-        </p:spPr>
-      </p:pic>
-      <p:pic>
-        <p:nvPicPr>
-          <p:cNvPr id="7" name="Picture 6">
-            <a:extLst>
-              <a:ext uri="{FF2B5EF4-FFF2-40B4-BE49-F238E27FC236}">
-                <a16:creationId xmlns:a16="http://schemas.microsoft.com/office/drawing/2014/main" id="{B2000730-5033-72F2-C16F-B5D5DFF5876B}"/>
-              </a:ext>
-            </a:extLst>
-          </p:cNvPr>
-          <p:cNvPicPr>
-            <a:picLocks noChangeAspect="1"/>
-          </p:cNvPicPr>
-          <p:nvPr/>
-        </p:nvPicPr>
-        <p:blipFill>
-          <a:blip r:embed="rId3"/>
-          <a:stretch>
-            <a:fillRect/>
-          </a:stretch>
-        </p:blipFill>
-        <p:spPr>
-          <a:xfrm>
-            <a:off x="167950" y="2682469"/>
-            <a:ext cx="6055263" cy="3605260"/>
-          </a:xfrm>
-          <a:prstGeom prst="rect">
-            <a:avLst/>
-          </a:prstGeom>
-        </p:spPr>
-      </p:pic>
+        </p:nvSpPr>
+        <p:spPr>
+          <a:xfrm>
+            <a:off x="107004" y="616085"/>
+            <a:ext cx="11160553" cy="6086272"/>
+          </a:xfrm>
+        </p:spPr>
+        <p:txBody>
+          <a:bodyPr numCol="2"/>
+          <a:lstStyle/>
+          <a:p>
+            <a:r>
+              <a:rPr lang="en-US"/>
+              <a:t>decimal </a:t>
+            </a:r>
+            <a:r>
+              <a:rPr lang="en-US" b="1">
+                <a:solidFill>
+                  <a:srgbClr val="00B050"/>
+                </a:solidFill>
+              </a:rPr>
+              <a:t>Request_id</a:t>
+            </a:r>
+          </a:p>
+          <a:p>
+            <a:r>
+              <a:rPr lang="en-US"/>
+              <a:t>DateTime </a:t>
+            </a:r>
+            <a:r>
+              <a:rPr lang="en-US" b="1">
+                <a:solidFill>
+                  <a:srgbClr val="00B050"/>
+                </a:solidFill>
+              </a:rPr>
+              <a:t>Date_creation_request</a:t>
+            </a:r>
+          </a:p>
+          <a:p>
+            <a:r>
+              <a:rPr lang="en-US"/>
+              <a:t>string </a:t>
+            </a:r>
+            <a:r>
+              <a:rPr lang="en-US" b="1">
+                <a:solidFill>
+                  <a:srgbClr val="00B050"/>
+                </a:solidFill>
+              </a:rPr>
+              <a:t>Name_step_to</a:t>
+            </a:r>
+          </a:p>
+          <a:p>
+            <a:r>
+              <a:rPr lang="en-US"/>
+              <a:t>string </a:t>
+            </a:r>
+            <a:r>
+              <a:rPr lang="en-US" b="1">
+                <a:solidFill>
+                  <a:srgbClr val="00B050"/>
+                </a:solidFill>
+              </a:rPr>
+              <a:t>Status_two</a:t>
+            </a:r>
+          </a:p>
+          <a:p>
+            <a:r>
+              <a:rPr lang="en-US"/>
+              <a:t>int </a:t>
+            </a:r>
+            <a:r>
+              <a:rPr lang="en-US" b="1">
+                <a:solidFill>
+                  <a:srgbClr val="00B050"/>
+                </a:solidFill>
+              </a:rPr>
+              <a:t>product_Id</a:t>
+            </a:r>
+          </a:p>
+          <a:p>
+            <a:r>
+              <a:rPr lang="en-US"/>
+              <a:t>string </a:t>
+            </a:r>
+            <a:r>
+              <a:rPr lang="en-US" b="1">
+                <a:solidFill>
+                  <a:srgbClr val="00B050"/>
+                </a:solidFill>
+              </a:rPr>
+              <a:t>product_name_AR</a:t>
+            </a:r>
+          </a:p>
+          <a:p>
+            <a:r>
+              <a:rPr lang="en-US"/>
+              <a:t>string </a:t>
+            </a:r>
+            <a:r>
+              <a:rPr lang="en-US" b="1">
+                <a:solidFill>
+                  <a:srgbClr val="00B050"/>
+                </a:solidFill>
+              </a:rPr>
+              <a:t>product_name_Eng</a:t>
+            </a:r>
+          </a:p>
+          <a:p>
+            <a:r>
+              <a:rPr lang="en-US"/>
+              <a:t>decimal </a:t>
+            </a:r>
+            <a:r>
+              <a:rPr lang="en-US" b="1">
+                <a:solidFill>
+                  <a:srgbClr val="00B050"/>
+                </a:solidFill>
+              </a:rPr>
+              <a:t>Customer_ID_C</a:t>
+            </a:r>
+          </a:p>
+          <a:p>
+            <a:r>
+              <a:rPr lang="en-US"/>
+              <a:t>string</a:t>
+            </a:r>
+            <a:r>
+              <a:rPr lang="en-US" b="1">
+                <a:solidFill>
+                  <a:srgbClr val="00B050"/>
+                </a:solidFill>
+              </a:rPr>
+              <a:t> CustomerFullName</a:t>
+            </a:r>
+          </a:p>
+          <a:p>
+            <a:r>
+              <a:rPr lang="en-US"/>
+              <a:t>decimal </a:t>
+            </a:r>
+            <a:r>
+              <a:rPr lang="en-US" b="1">
+                <a:solidFill>
+                  <a:srgbClr val="00B050"/>
+                </a:solidFill>
+              </a:rPr>
+              <a:t>CustomerQID</a:t>
+            </a:r>
+          </a:p>
+          <a:p>
+            <a:r>
+              <a:rPr lang="en-US"/>
+              <a:t>string </a:t>
+            </a:r>
+            <a:r>
+              <a:rPr lang="en-US" b="1">
+                <a:solidFill>
+                  <a:srgbClr val="00B050"/>
+                </a:solidFill>
+              </a:rPr>
+              <a:t>Enterprise_ID</a:t>
+            </a:r>
+          </a:p>
+          <a:p>
+            <a:r>
+              <a:rPr lang="en-US"/>
+              <a:t>string </a:t>
+            </a:r>
+            <a:r>
+              <a:rPr lang="en-US" b="1">
+                <a:solidFill>
+                  <a:srgbClr val="00B050"/>
+                </a:solidFill>
+              </a:rPr>
+              <a:t>Brand_name</a:t>
+            </a:r>
+          </a:p>
+          <a:p>
+            <a:r>
+              <a:rPr lang="en-US" b="1"/>
+              <a:t>int?</a:t>
+            </a:r>
+            <a:r>
+              <a:rPr lang="en-US" b="1">
+                <a:solidFill>
+                  <a:srgbClr val="00B050"/>
+                </a:solidFill>
+              </a:rPr>
+              <a:t> UserId_from</a:t>
+            </a:r>
+          </a:p>
+          <a:p>
+            <a:r>
+              <a:rPr lang="en-US" b="1">
+                <a:solidFill>
+                  <a:srgbClr val="00B050"/>
+                </a:solidFill>
+              </a:rPr>
+              <a:t>UserfromNameAR</a:t>
+            </a:r>
+          </a:p>
+          <a:p>
+            <a:r>
+              <a:rPr lang="en-US" b="1">
+                <a:solidFill>
+                  <a:srgbClr val="00B050"/>
+                </a:solidFill>
+              </a:rPr>
+              <a:t>UserfromNameEng</a:t>
+            </a:r>
+          </a:p>
+          <a:p>
+            <a:r>
+              <a:rPr lang="en-US"/>
+              <a:t>List&lt;</a:t>
+            </a:r>
+            <a:r>
+              <a:rPr lang="en-US" b="1">
+                <a:solidFill>
+                  <a:srgbClr val="00B0F0"/>
+                </a:solidFill>
+              </a:rPr>
+              <a:t>GuarVM</a:t>
+            </a:r>
+            <a:r>
+              <a:rPr lang="en-US"/>
+              <a:t>&gt; </a:t>
+            </a:r>
+            <a:r>
+              <a:rPr lang="en-US" b="1">
+                <a:solidFill>
+                  <a:srgbClr val="00B050"/>
+                </a:solidFill>
+              </a:rPr>
+              <a:t>Guaranters</a:t>
+            </a:r>
+          </a:p>
+          <a:p>
+            <a:pPr lvl="1"/>
+            <a:r>
+              <a:rPr lang="en-US" sz="1600"/>
+              <a:t>decimal Guaranter_ID</a:t>
+            </a:r>
+          </a:p>
+          <a:p>
+            <a:pPr lvl="1"/>
+            <a:r>
+              <a:rPr lang="en-US" sz="1600"/>
+              <a:t>string GuaranterQID</a:t>
+            </a:r>
+          </a:p>
+          <a:p>
+            <a:pPr lvl="1"/>
+            <a:r>
+              <a:rPr lang="en-US" sz="1600"/>
+              <a:t>string GuaranterName</a:t>
+            </a:r>
+          </a:p>
+          <a:p>
+            <a:pPr lvl="1"/>
+            <a:r>
+              <a:rPr lang="en-US" sz="1600"/>
+              <a:t>int Serial</a:t>
+            </a:r>
+          </a:p>
+          <a:p>
+            <a:pPr lvl="1"/>
+            <a:r>
+              <a:rPr lang="en-US" sz="1600"/>
+              <a:t>int code_relation</a:t>
+            </a:r>
+          </a:p>
+          <a:p>
+            <a:r>
+              <a:rPr lang="en-US" b="1">
+                <a:solidFill>
+                  <a:srgbClr val="00B050"/>
+                </a:solidFill>
+              </a:rPr>
+              <a:t>BranchId</a:t>
+            </a:r>
+          </a:p>
+          <a:p>
+            <a:r>
+              <a:rPr lang="en-US" b="1">
+                <a:solidFill>
+                  <a:schemeClr val="tx1"/>
+                </a:solidFill>
+              </a:rPr>
+              <a:t>DateTime?</a:t>
+            </a:r>
+            <a:r>
+              <a:rPr lang="en-US" b="1">
+                <a:solidFill>
+                  <a:srgbClr val="00B050"/>
+                </a:solidFill>
+              </a:rPr>
+              <a:t> Date_Assigned</a:t>
+            </a:r>
+          </a:p>
+        </p:txBody>
+      </p:sp>
     </p:spTree>
     <p:extLst>
       <p:ext uri="{BB962C8B-B14F-4D97-AF65-F5344CB8AC3E}">
-        <p14:creationId xmlns:p14="http://schemas.microsoft.com/office/powerpoint/2010/main" val="4049467895"/>
+        <p14:creationId xmlns:p14="http://schemas.microsoft.com/office/powerpoint/2010/main" val="1617673991"/>
       </p:ext>
     </p:extLst>
   </p:cSld>
@@ -22878,7 +22960,7 @@
           <p:cNvPr id="2" name="Title 1">
             <a:extLst>
               <a:ext uri="{FF2B5EF4-FFF2-40B4-BE49-F238E27FC236}">
-                <a16:creationId xmlns:a16="http://schemas.microsoft.com/office/drawing/2014/main" id="{CF1E26FB-A5E8-3CCA-EA68-AC697347FD56}"/>
+                <a16:creationId xmlns:a16="http://schemas.microsoft.com/office/drawing/2014/main" id="{34146355-124E-3796-C27E-50B1FEE9ADD5}"/>
               </a:ext>
             </a:extLst>
           </p:cNvPr>
@@ -22891,17 +22973,23 @@
         </p:nvSpPr>
         <p:spPr>
           <a:xfrm>
-            <a:off x="835137" y="0"/>
-            <a:ext cx="10353762" cy="970450"/>
-          </a:xfrm>
-        </p:spPr>
-        <p:txBody>
-          <a:bodyPr/>
+            <a:off x="913795" y="0"/>
+            <a:ext cx="10353762" cy="688258"/>
+          </a:xfrm>
+        </p:spPr>
+        <p:txBody>
+          <a:bodyPr>
+            <a:normAutofit fontScale="90000"/>
+          </a:bodyPr>
           <a:lstStyle/>
           <a:p>
             <a:r>
-              <a:rPr lang="en-US"/>
-              <a:t>LoginVM</a:t>
+              <a:rPr lang="en-US" b="1">
+                <a:solidFill>
+                  <a:srgbClr val="FF0000"/>
+                </a:solidFill>
+              </a:rPr>
+              <a:t>ProdVM</a:t>
             </a:r>
           </a:p>
         </p:txBody>
@@ -22911,7 +22999,7 @@
           <p:cNvPr id="3" name="Content Placeholder 2">
             <a:extLst>
               <a:ext uri="{FF2B5EF4-FFF2-40B4-BE49-F238E27FC236}">
-                <a16:creationId xmlns:a16="http://schemas.microsoft.com/office/drawing/2014/main" id="{B5F1CE3E-8FBA-4720-E027-74C182BEE6B6}"/>
+                <a16:creationId xmlns:a16="http://schemas.microsoft.com/office/drawing/2014/main" id="{E2533BB6-2BA2-1C59-7D9D-054CC9AB8FB7}"/>
               </a:ext>
             </a:extLst>
           </p:cNvPr>
@@ -22924,8 +23012,8 @@
         </p:nvSpPr>
         <p:spPr>
           <a:xfrm>
-            <a:off x="324464" y="970450"/>
-            <a:ext cx="11631561" cy="5794143"/>
+            <a:off x="363794" y="688257"/>
+            <a:ext cx="11602064" cy="5928853"/>
           </a:xfrm>
         </p:spPr>
         <p:txBody>
@@ -22934,133 +23022,478 @@
           </a:bodyPr>
           <a:lstStyle/>
           <a:p>
-            <a:r>
-              <a:rPr lang="en-US" sz="1600">
-                <a:effectLst/>
-              </a:rPr>
-              <a:t>UserId</a:t>
-            </a:r>
-          </a:p>
-          <a:p>
-            <a:r>
-              <a:rPr lang="en-US" sz="1600">
-                <a:effectLst/>
-              </a:rPr>
-              <a:t>UserNameAR</a:t>
-            </a:r>
-          </a:p>
-          <a:p>
-            <a:r>
-              <a:rPr lang="en-US" sz="1600">
-                <a:effectLst/>
-              </a:rPr>
-              <a:t>UserNameEng</a:t>
-            </a:r>
-          </a:p>
-          <a:p>
-            <a:r>
-              <a:rPr lang="en-US" sz="1600">
-                <a:effectLst/>
-              </a:rPr>
-              <a:t>BranchNameAR</a:t>
-            </a:r>
-          </a:p>
-          <a:p>
-            <a:r>
-              <a:rPr lang="en-US" sz="1600">
-                <a:effectLst/>
-              </a:rPr>
-              <a:t>BranchNameEN</a:t>
-            </a:r>
-          </a:p>
-          <a:p>
-            <a:r>
-              <a:rPr lang="en-US" sz="1600">
-                <a:effectLst/>
-              </a:rPr>
-              <a:t>JobNameAR</a:t>
-            </a:r>
-          </a:p>
-          <a:p>
-            <a:r>
-              <a:rPr lang="en-US" sz="1600">
-                <a:effectLst/>
-              </a:rPr>
-              <a:t>BranchId</a:t>
-            </a:r>
-          </a:p>
-          <a:p>
-            <a:r>
-              <a:rPr lang="en-US" sz="1600">
-                <a:effectLst/>
-              </a:rPr>
-              <a:t>RegionId</a:t>
-            </a:r>
-          </a:p>
-          <a:p>
-            <a:r>
-              <a:rPr lang="en-US" sz="1600">
-                <a:effectLst/>
-              </a:rPr>
-              <a:t>Branch_code</a:t>
-            </a:r>
-          </a:p>
-          <a:p>
-            <a:r>
-              <a:rPr lang="en-US" sz="1600">
-                <a:effectLst/>
-              </a:rPr>
-              <a:t>ComId</a:t>
-            </a:r>
-          </a:p>
-          <a:p>
-            <a:r>
-              <a:rPr lang="en-US" sz="1600">
-                <a:effectLst/>
-              </a:rPr>
-              <a:t>JobId</a:t>
-            </a:r>
-          </a:p>
-          <a:p>
-            <a:r>
-              <a:rPr lang="en-US" sz="1600">
-                <a:effectLst/>
-              </a:rPr>
-              <a:t>JobCode</a:t>
-            </a:r>
-          </a:p>
-          <a:p>
-            <a:r>
-              <a:rPr lang="en-US" sz="1600">
-                <a:effectLst/>
-              </a:rPr>
-              <a:t>UserCode</a:t>
-            </a:r>
-          </a:p>
-          <a:p>
-            <a:r>
-              <a:rPr lang="en-US" sz="1600">
-                <a:effectLst/>
-              </a:rPr>
-              <a:t>Numberofmonthsofappointment</a:t>
-            </a:r>
-          </a:p>
-          <a:p>
-            <a:endParaRPr lang="en-US" sz="1600">
-              <a:effectLst/>
-            </a:endParaRPr>
-          </a:p>
-          <a:p>
-            <a:endParaRPr lang="en-US" sz="1600">
-              <a:effectLst/>
-            </a:endParaRPr>
+            <a:pPr marL="36900" indent="0">
+              <a:buNone/>
+            </a:pPr>
+            <a:r>
+              <a:rPr lang="en-US"/>
+              <a:t>public class ProdVM {</a:t>
+            </a:r>
+          </a:p>
+          <a:p>
+            <a:pPr marL="36900" indent="0">
+              <a:buNone/>
+            </a:pPr>
+            <a:r>
+              <a:rPr lang="en-US"/>
+              <a:t>        public </a:t>
+            </a:r>
+            <a:r>
+              <a:rPr lang="en-US">
+                <a:solidFill>
+                  <a:srgbClr val="00B0F0"/>
+                </a:solidFill>
+              </a:rPr>
+              <a:t>IQueryable</a:t>
+            </a:r>
+            <a:r>
+              <a:rPr lang="en-US"/>
+              <a:t>&lt;Flow_branch_product&gt; </a:t>
+            </a:r>
+            <a:r>
+              <a:rPr lang="en-US" b="1">
+                <a:solidFill>
+                  <a:srgbClr val="FFFF00"/>
+                </a:solidFill>
+              </a:rPr>
+              <a:t>BranchProduct</a:t>
+            </a:r>
+            <a:r>
+              <a:rPr lang="en-US"/>
+              <a:t> { get; set; }</a:t>
+            </a:r>
+          </a:p>
+          <a:p>
+            <a:pPr marL="36900" indent="0">
+              <a:buNone/>
+            </a:pPr>
+            <a:r>
+              <a:rPr lang="en-US"/>
+              <a:t>        public </a:t>
+            </a:r>
+            <a:r>
+              <a:rPr lang="en-US">
+                <a:solidFill>
+                  <a:srgbClr val="00B0F0"/>
+                </a:solidFill>
+              </a:rPr>
+              <a:t>IQueryable</a:t>
+            </a:r>
+            <a:r>
+              <a:rPr lang="en-US"/>
+              <a:t>&lt;Flow_Products&gt; </a:t>
+            </a:r>
+            <a:r>
+              <a:rPr lang="en-US" b="1">
+                <a:solidFill>
+                  <a:srgbClr val="FFFF00"/>
+                </a:solidFill>
+              </a:rPr>
+              <a:t>Products</a:t>
+            </a:r>
+            <a:r>
+              <a:rPr lang="en-US"/>
+              <a:t> { get; set; }</a:t>
+            </a:r>
+          </a:p>
+          <a:p>
+            <a:pPr marL="36900" indent="0">
+              <a:buNone/>
+            </a:pPr>
+            <a:r>
+              <a:rPr lang="en-US"/>
+              <a:t>        public </a:t>
+            </a:r>
+            <a:r>
+              <a:rPr lang="en-US">
+                <a:solidFill>
+                  <a:srgbClr val="00B0F0"/>
+                </a:solidFill>
+              </a:rPr>
+              <a:t>IQueryable</a:t>
+            </a:r>
+            <a:r>
+              <a:rPr lang="en-US"/>
+              <a:t>&lt;Flow_Emp_Product&gt; </a:t>
+            </a:r>
+            <a:r>
+              <a:rPr lang="en-US" b="1">
+                <a:solidFill>
+                  <a:srgbClr val="FFFF00"/>
+                </a:solidFill>
+              </a:rPr>
+              <a:t>EmpProduct</a:t>
+            </a:r>
+            <a:r>
+              <a:rPr lang="en-US"/>
+              <a:t> { get; set; }</a:t>
+            </a:r>
+          </a:p>
+          <a:p>
+            <a:pPr marL="36900" indent="0">
+              <a:buNone/>
+            </a:pPr>
+            <a:r>
+              <a:rPr lang="en-US"/>
+              <a:t>}</a:t>
+            </a:r>
+          </a:p>
+          <a:p>
+            <a:pPr marL="36900" indent="0">
+              <a:buNone/>
+            </a:pPr>
+            <a:r>
+              <a:rPr lang="en-US"/>
+              <a:t>public class FundindPageLoadVM  {</a:t>
+            </a:r>
+          </a:p>
+          <a:p>
+            <a:pPr marL="36900" indent="0">
+              <a:buNone/>
+            </a:pPr>
+            <a:r>
+              <a:rPr lang="en-US"/>
+              <a:t>	public IQueryable&lt;Flow_Purpose_loan&gt; </a:t>
+            </a:r>
+            <a:r>
+              <a:rPr lang="en-US" b="1">
+                <a:solidFill>
+                  <a:srgbClr val="FFFF00"/>
+                </a:solidFill>
+              </a:rPr>
+              <a:t>Purpose_loan </a:t>
+            </a:r>
+            <a:r>
+              <a:rPr lang="en-US"/>
+              <a:t>{ get; set; }</a:t>
+            </a:r>
+          </a:p>
+          <a:p>
+            <a:pPr marL="36900" indent="0">
+              <a:buNone/>
+            </a:pPr>
+            <a:r>
+              <a:rPr lang="en-US"/>
+              <a:t>      	public IQueryable&lt;Flow_Relationships&gt; </a:t>
+            </a:r>
+            <a:r>
+              <a:rPr lang="en-US" b="1">
+                <a:solidFill>
+                  <a:srgbClr val="FFFF00"/>
+                </a:solidFill>
+              </a:rPr>
+              <a:t>Relationships</a:t>
+            </a:r>
+            <a:r>
+              <a:rPr lang="en-US"/>
+              <a:t> { get; set; }</a:t>
+            </a:r>
+          </a:p>
+          <a:p>
+            <a:pPr marL="36900" indent="0">
+              <a:buNone/>
+            </a:pPr>
+            <a:r>
+              <a:rPr lang="en-US"/>
+              <a:t>      	public IQueryable&lt;Flow_Exempted_Products&gt; </a:t>
+            </a:r>
+            <a:r>
+              <a:rPr lang="en-US" b="1">
+                <a:solidFill>
+                  <a:srgbClr val="FFFF00"/>
+                </a:solidFill>
+              </a:rPr>
+              <a:t>flow_exempted_products</a:t>
+            </a:r>
+            <a:r>
+              <a:rPr lang="en-US"/>
+              <a:t> { get; set; }     </a:t>
+            </a:r>
+          </a:p>
+          <a:p>
+            <a:pPr marL="36900" indent="0">
+              <a:buNone/>
+            </a:pPr>
+            <a:r>
+              <a:rPr lang="en-US"/>
+              <a:t>	public decimal </a:t>
+            </a:r>
+            <a:r>
+              <a:rPr lang="en-US" b="1">
+                <a:solidFill>
+                  <a:srgbClr val="FFFF00"/>
+                </a:solidFill>
+              </a:rPr>
+              <a:t>Approximation</a:t>
+            </a:r>
+            <a:r>
+              <a:rPr lang="en-US"/>
+              <a:t> { get; set; }</a:t>
+            </a:r>
+          </a:p>
+          <a:p>
+            <a:pPr marL="36900" indent="0">
+              <a:buNone/>
+            </a:pPr>
+            <a:r>
+              <a:rPr lang="en-US"/>
+              <a:t>       public decimal </a:t>
+            </a:r>
+            <a:r>
+              <a:rPr lang="en-US" b="1">
+                <a:solidFill>
+                  <a:srgbClr val="FFFF00"/>
+                </a:solidFill>
+              </a:rPr>
+              <a:t>FinanceAmount_Approximation</a:t>
+            </a:r>
+            <a:r>
+              <a:rPr lang="en-US"/>
+              <a:t> { get; set; }</a:t>
+            </a:r>
+          </a:p>
+          <a:p>
+            <a:pPr marL="36900" indent="0">
+              <a:buNone/>
+            </a:pPr>
+            <a:r>
+              <a:rPr lang="en-US"/>
+              <a:t>	public ProdVM </a:t>
+            </a:r>
+            <a:r>
+              <a:rPr lang="en-US" b="1">
+                <a:solidFill>
+                  <a:srgbClr val="FFFF00"/>
+                </a:solidFill>
+              </a:rPr>
+              <a:t>ProdVM</a:t>
+            </a:r>
+            <a:r>
+              <a:rPr lang="en-US"/>
+              <a:t> { get; set; }</a:t>
+            </a:r>
+          </a:p>
+          <a:p>
+            <a:pPr marL="36900" indent="0">
+              <a:buNone/>
+            </a:pPr>
+            <a:r>
+              <a:rPr lang="en-US"/>
+              <a:t>}</a:t>
+            </a:r>
           </a:p>
         </p:txBody>
       </p:sp>
     </p:spTree>
     <p:extLst>
       <p:ext uri="{BB962C8B-B14F-4D97-AF65-F5344CB8AC3E}">
-        <p14:creationId xmlns:p14="http://schemas.microsoft.com/office/powerpoint/2010/main" val="3033957200"/>
+        <p14:creationId xmlns:p14="http://schemas.microsoft.com/office/powerpoint/2010/main" val="811143626"/>
+      </p:ext>
+    </p:extLst>
+  </p:cSld>
+  <p:clrMapOvr>
+    <a:masterClrMapping/>
+  </p:clrMapOvr>
+</p:sld>
+</file>
+
+<file path=ppt/slides/slide79.xml><?xml version="1.0" encoding="utf-8"?>
+<p:sld xmlns:a="http://schemas.openxmlformats.org/drawingml/2006/main" xmlns:r="http://schemas.openxmlformats.org/officeDocument/2006/relationships" xmlns:p="http://schemas.openxmlformats.org/presentationml/2006/main">
+  <p:cSld>
+    <p:spTree>
+      <p:nvGrpSpPr>
+        <p:cNvPr id="1" name=""/>
+        <p:cNvGrpSpPr/>
+        <p:nvPr/>
+      </p:nvGrpSpPr>
+      <p:grpSpPr>
+        <a:xfrm>
+          <a:off x="0" y="0"/>
+          <a:ext cx="0" cy="0"/>
+          <a:chOff x="0" y="0"/>
+          <a:chExt cx="0" cy="0"/>
+        </a:xfrm>
+      </p:grpSpPr>
+      <p:sp>
+        <p:nvSpPr>
+          <p:cNvPr id="2" name="Title 1">
+            <a:extLst>
+              <a:ext uri="{FF2B5EF4-FFF2-40B4-BE49-F238E27FC236}">
+                <a16:creationId xmlns:a16="http://schemas.microsoft.com/office/drawing/2014/main" id="{2350B4D8-7F7B-C582-0D5B-818D3EBCB3C7}"/>
+              </a:ext>
+            </a:extLst>
+          </p:cNvPr>
+          <p:cNvSpPr>
+            <a:spLocks noGrp="1"/>
+          </p:cNvSpPr>
+          <p:nvPr>
+            <p:ph type="title"/>
+          </p:nvPr>
+        </p:nvSpPr>
+        <p:spPr/>
+        <p:txBody>
+          <a:bodyPr/>
+          <a:lstStyle/>
+          <a:p>
+            <a:endParaRPr lang="en-US"/>
+          </a:p>
+        </p:txBody>
+      </p:sp>
+      <p:sp>
+        <p:nvSpPr>
+          <p:cNvPr id="3" name="Content Placeholder 2">
+            <a:extLst>
+              <a:ext uri="{FF2B5EF4-FFF2-40B4-BE49-F238E27FC236}">
+                <a16:creationId xmlns:a16="http://schemas.microsoft.com/office/drawing/2014/main" id="{FBEBDDC3-EAEC-EFFC-2A0C-7E22E2707850}"/>
+              </a:ext>
+            </a:extLst>
+          </p:cNvPr>
+          <p:cNvSpPr>
+            <a:spLocks noGrp="1"/>
+          </p:cNvSpPr>
+          <p:nvPr>
+            <p:ph idx="1"/>
+          </p:nvPr>
+        </p:nvSpPr>
+        <p:spPr>
+          <a:xfrm>
+            <a:off x="913795" y="1732449"/>
+            <a:ext cx="10353762" cy="4982983"/>
+          </a:xfrm>
+        </p:spPr>
+        <p:txBody>
+          <a:bodyPr>
+            <a:normAutofit fontScale="92500" lnSpcReduction="20000"/>
+          </a:bodyPr>
+          <a:lstStyle/>
+          <a:p>
+            <a:pPr marL="36900" indent="0">
+              <a:buNone/>
+            </a:pPr>
+            <a:r>
+              <a:rPr lang="en-US"/>
+              <a:t>public class </a:t>
+            </a:r>
+            <a:r>
+              <a:rPr lang="en-US" b="1">
+                <a:solidFill>
+                  <a:srgbClr val="00B0F0"/>
+                </a:solidFill>
+              </a:rPr>
+              <a:t>FundingVM</a:t>
+            </a:r>
+          </a:p>
+          <a:p>
+            <a:pPr marL="36900" indent="0">
+              <a:buNone/>
+            </a:pPr>
+            <a:r>
+              <a:rPr lang="en-US"/>
+              <a:t>    {</a:t>
+            </a:r>
+          </a:p>
+          <a:p>
+            <a:pPr marL="36900" indent="0">
+              <a:buNone/>
+            </a:pPr>
+            <a:r>
+              <a:rPr lang="en-US"/>
+              <a:t>        public Flow_Funding_request Funding_request { get; set; }</a:t>
+            </a:r>
+          </a:p>
+          <a:p>
+            <a:pPr marL="36900" indent="0">
+              <a:buNone/>
+            </a:pPr>
+            <a:r>
+              <a:rPr lang="en-US"/>
+              <a:t>        public IQueryable&lt;JoinMandatoryDocAndTypeDocuments&gt; Documents { get; set; }</a:t>
+            </a:r>
+          </a:p>
+          <a:p>
+            <a:pPr marL="36900" indent="0">
+              <a:buNone/>
+            </a:pPr>
+            <a:r>
+              <a:rPr lang="en-US"/>
+              <a:t>        public IQueryable&lt;Flow_Rejections_mainVM&gt; Comments { get; set; }</a:t>
+            </a:r>
+          </a:p>
+          <a:p>
+            <a:pPr marL="36900" indent="0">
+              <a:buNone/>
+            </a:pPr>
+            <a:r>
+              <a:rPr lang="en-US"/>
+              <a:t>        public IQueryable&lt;Flow_Rejections_mainFieldVM&gt; RejectedFields { get; set; }</a:t>
+            </a:r>
+          </a:p>
+          <a:p>
+            <a:pPr marL="36900" indent="0">
+              <a:buNone/>
+            </a:pPr>
+            <a:r>
+              <a:rPr lang="en-US"/>
+              <a:t>        public IQueryable&lt;GuarVM&gt; Guaranters { get; set; }</a:t>
+            </a:r>
+          </a:p>
+          <a:p>
+            <a:pPr marL="36900" indent="0">
+              <a:buNone/>
+            </a:pPr>
+            <a:r>
+              <a:rPr lang="en-US"/>
+              <a:t>        //public Flow_Enterprises Flow_Enterprise { get; set; }</a:t>
+            </a:r>
+          </a:p>
+          <a:p>
+            <a:pPr marL="36900" indent="0">
+              <a:buNone/>
+            </a:pPr>
+            <a:r>
+              <a:rPr lang="en-US"/>
+              <a:t>        public IEnumerable&lt;Product_destinationVM&gt; Flow_Product_destinations { get; set; }</a:t>
+            </a:r>
+          </a:p>
+          <a:p>
+            <a:pPr marL="36900" indent="0">
+              <a:buNone/>
+            </a:pPr>
+            <a:r>
+              <a:rPr lang="en-US"/>
+              <a:t>        public IQueryable&lt;Cheque_InformationDTO&gt; cheque_Information { get; set; }</a:t>
+            </a:r>
+          </a:p>
+          <a:p>
+            <a:pPr marL="36900" indent="0">
+              <a:buNone/>
+            </a:pPr>
+            <a:r>
+              <a:rPr lang="en-US"/>
+              <a:t>        public int Flag { get; set; }</a:t>
+            </a:r>
+          </a:p>
+          <a:p>
+            <a:pPr marL="36900" indent="0">
+              <a:buNone/>
+            </a:pPr>
+            <a:endParaRPr lang="en-US"/>
+          </a:p>
+          <a:p>
+            <a:pPr marL="36900" indent="0">
+              <a:buNone/>
+            </a:pPr>
+            <a:r>
+              <a:rPr lang="en-US"/>
+              <a:t>    }</a:t>
+            </a:r>
+          </a:p>
+        </p:txBody>
+      </p:sp>
+    </p:spTree>
+    <p:extLst>
+      <p:ext uri="{BB962C8B-B14F-4D97-AF65-F5344CB8AC3E}">
+        <p14:creationId xmlns:p14="http://schemas.microsoft.com/office/powerpoint/2010/main" val="1713578323"/>
       </p:ext>
     </p:extLst>
   </p:cSld>
@@ -23329,6 +23762,358 @@
     <p:extLst>
       <p:ext uri="{BB962C8B-B14F-4D97-AF65-F5344CB8AC3E}">
         <p14:creationId xmlns:p14="http://schemas.microsoft.com/office/powerpoint/2010/main" val="2591581950"/>
+      </p:ext>
+    </p:extLst>
+  </p:cSld>
+  <p:clrMapOvr>
+    <a:masterClrMapping/>
+  </p:clrMapOvr>
+</p:sld>
+</file>
+
+<file path=ppt/slides/slide80.xml><?xml version="1.0" encoding="utf-8"?>
+<p:sld xmlns:a="http://schemas.openxmlformats.org/drawingml/2006/main" xmlns:r="http://schemas.openxmlformats.org/officeDocument/2006/relationships" xmlns:p="http://schemas.openxmlformats.org/presentationml/2006/main">
+  <p:cSld>
+    <p:spTree>
+      <p:nvGrpSpPr>
+        <p:cNvPr id="1" name=""/>
+        <p:cNvGrpSpPr/>
+        <p:nvPr/>
+      </p:nvGrpSpPr>
+      <p:grpSpPr>
+        <a:xfrm>
+          <a:off x="0" y="0"/>
+          <a:ext cx="0" cy="0"/>
+          <a:chOff x="0" y="0"/>
+          <a:chExt cx="0" cy="0"/>
+        </a:xfrm>
+      </p:grpSpPr>
+      <p:sp>
+        <p:nvSpPr>
+          <p:cNvPr id="2" name="Title 1">
+            <a:extLst>
+              <a:ext uri="{FF2B5EF4-FFF2-40B4-BE49-F238E27FC236}">
+                <a16:creationId xmlns:a16="http://schemas.microsoft.com/office/drawing/2014/main" id="{2D479AA4-7A27-F7BB-18CC-807B27549E5F}"/>
+              </a:ext>
+            </a:extLst>
+          </p:cNvPr>
+          <p:cNvSpPr>
+            <a:spLocks noGrp="1"/>
+          </p:cNvSpPr>
+          <p:nvPr>
+            <p:ph type="title"/>
+          </p:nvPr>
+        </p:nvSpPr>
+        <p:spPr>
+          <a:xfrm>
+            <a:off x="992453" y="0"/>
+            <a:ext cx="10353762" cy="570271"/>
+          </a:xfrm>
+        </p:spPr>
+        <p:txBody>
+          <a:bodyPr>
+            <a:normAutofit fontScale="90000"/>
+          </a:bodyPr>
+          <a:lstStyle/>
+          <a:p>
+            <a:r>
+              <a:rPr lang="en-US" b="1">
+                <a:solidFill>
+                  <a:srgbClr val="00B0F0"/>
+                </a:solidFill>
+              </a:rPr>
+              <a:t>TransactionVM</a:t>
+            </a:r>
+          </a:p>
+        </p:txBody>
+      </p:sp>
+      <p:pic>
+        <p:nvPicPr>
+          <p:cNvPr id="5" name="Content Placeholder 4">
+            <a:extLst>
+              <a:ext uri="{FF2B5EF4-FFF2-40B4-BE49-F238E27FC236}">
+                <a16:creationId xmlns:a16="http://schemas.microsoft.com/office/drawing/2014/main" id="{551D13E4-7622-8C7C-0DCB-AF259538F592}"/>
+              </a:ext>
+            </a:extLst>
+          </p:cNvPr>
+          <p:cNvPicPr>
+            <a:picLocks noGrp="1" noChangeAspect="1"/>
+          </p:cNvPicPr>
+          <p:nvPr>
+            <p:ph idx="1"/>
+          </p:nvPr>
+        </p:nvPicPr>
+        <p:blipFill>
+          <a:blip r:embed="rId2"/>
+          <a:stretch>
+            <a:fillRect/>
+          </a:stretch>
+        </p:blipFill>
+        <p:spPr>
+          <a:xfrm>
+            <a:off x="167951" y="570271"/>
+            <a:ext cx="3342165" cy="2003594"/>
+          </a:xfrm>
+          <a:prstGeom prst="rect">
+            <a:avLst/>
+          </a:prstGeom>
+          <a:effectLst>
+            <a:outerShdw blurRad="25400" dir="17880000">
+              <a:srgbClr val="000000">
+                <a:alpha val="46000"/>
+              </a:srgbClr>
+            </a:outerShdw>
+          </a:effectLst>
+        </p:spPr>
+      </p:pic>
+      <p:pic>
+        <p:nvPicPr>
+          <p:cNvPr id="7" name="Picture 6">
+            <a:extLst>
+              <a:ext uri="{FF2B5EF4-FFF2-40B4-BE49-F238E27FC236}">
+                <a16:creationId xmlns:a16="http://schemas.microsoft.com/office/drawing/2014/main" id="{B2000730-5033-72F2-C16F-B5D5DFF5876B}"/>
+              </a:ext>
+            </a:extLst>
+          </p:cNvPr>
+          <p:cNvPicPr>
+            <a:picLocks noChangeAspect="1"/>
+          </p:cNvPicPr>
+          <p:nvPr/>
+        </p:nvPicPr>
+        <p:blipFill>
+          <a:blip r:embed="rId3"/>
+          <a:stretch>
+            <a:fillRect/>
+          </a:stretch>
+        </p:blipFill>
+        <p:spPr>
+          <a:xfrm>
+            <a:off x="167950" y="2682469"/>
+            <a:ext cx="6055263" cy="3605260"/>
+          </a:xfrm>
+          <a:prstGeom prst="rect">
+            <a:avLst/>
+          </a:prstGeom>
+        </p:spPr>
+      </p:pic>
+    </p:spTree>
+    <p:extLst>
+      <p:ext uri="{BB962C8B-B14F-4D97-AF65-F5344CB8AC3E}">
+        <p14:creationId xmlns:p14="http://schemas.microsoft.com/office/powerpoint/2010/main" val="4049467895"/>
+      </p:ext>
+    </p:extLst>
+  </p:cSld>
+  <p:clrMapOvr>
+    <a:masterClrMapping/>
+  </p:clrMapOvr>
+</p:sld>
+</file>
+
+<file path=ppt/slides/slide81.xml><?xml version="1.0" encoding="utf-8"?>
+<p:sld xmlns:a="http://schemas.openxmlformats.org/drawingml/2006/main" xmlns:r="http://schemas.openxmlformats.org/officeDocument/2006/relationships" xmlns:p="http://schemas.openxmlformats.org/presentationml/2006/main">
+  <p:cSld>
+    <p:spTree>
+      <p:nvGrpSpPr>
+        <p:cNvPr id="1" name=""/>
+        <p:cNvGrpSpPr/>
+        <p:nvPr/>
+      </p:nvGrpSpPr>
+      <p:grpSpPr>
+        <a:xfrm>
+          <a:off x="0" y="0"/>
+          <a:ext cx="0" cy="0"/>
+          <a:chOff x="0" y="0"/>
+          <a:chExt cx="0" cy="0"/>
+        </a:xfrm>
+      </p:grpSpPr>
+      <p:sp>
+        <p:nvSpPr>
+          <p:cNvPr id="2" name="Title 1">
+            <a:extLst>
+              <a:ext uri="{FF2B5EF4-FFF2-40B4-BE49-F238E27FC236}">
+                <a16:creationId xmlns:a16="http://schemas.microsoft.com/office/drawing/2014/main" id="{CF1E26FB-A5E8-3CCA-EA68-AC697347FD56}"/>
+              </a:ext>
+            </a:extLst>
+          </p:cNvPr>
+          <p:cNvSpPr>
+            <a:spLocks noGrp="1"/>
+          </p:cNvSpPr>
+          <p:nvPr>
+            <p:ph type="title"/>
+          </p:nvPr>
+        </p:nvSpPr>
+        <p:spPr>
+          <a:xfrm>
+            <a:off x="835137" y="0"/>
+            <a:ext cx="10353762" cy="970450"/>
+          </a:xfrm>
+        </p:spPr>
+        <p:txBody>
+          <a:bodyPr/>
+          <a:lstStyle/>
+          <a:p>
+            <a:r>
+              <a:rPr lang="en-US"/>
+              <a:t>LoginVM</a:t>
+            </a:r>
+          </a:p>
+        </p:txBody>
+      </p:sp>
+      <p:sp>
+        <p:nvSpPr>
+          <p:cNvPr id="3" name="Content Placeholder 2">
+            <a:extLst>
+              <a:ext uri="{FF2B5EF4-FFF2-40B4-BE49-F238E27FC236}">
+                <a16:creationId xmlns:a16="http://schemas.microsoft.com/office/drawing/2014/main" id="{B5F1CE3E-8FBA-4720-E027-74C182BEE6B6}"/>
+              </a:ext>
+            </a:extLst>
+          </p:cNvPr>
+          <p:cNvSpPr>
+            <a:spLocks noGrp="1"/>
+          </p:cNvSpPr>
+          <p:nvPr>
+            <p:ph idx="1"/>
+          </p:nvPr>
+        </p:nvSpPr>
+        <p:spPr>
+          <a:xfrm>
+            <a:off x="324464" y="970450"/>
+            <a:ext cx="11631561" cy="5794143"/>
+          </a:xfrm>
+        </p:spPr>
+        <p:txBody>
+          <a:bodyPr>
+            <a:normAutofit/>
+          </a:bodyPr>
+          <a:lstStyle/>
+          <a:p>
+            <a:r>
+              <a:rPr lang="en-US" sz="1600">
+                <a:effectLst/>
+              </a:rPr>
+              <a:t>UserId</a:t>
+            </a:r>
+          </a:p>
+          <a:p>
+            <a:r>
+              <a:rPr lang="en-US" sz="1600">
+                <a:effectLst/>
+              </a:rPr>
+              <a:t>UserNameAR</a:t>
+            </a:r>
+          </a:p>
+          <a:p>
+            <a:r>
+              <a:rPr lang="en-US" sz="1600">
+                <a:effectLst/>
+              </a:rPr>
+              <a:t>UserNameEng</a:t>
+            </a:r>
+          </a:p>
+          <a:p>
+            <a:r>
+              <a:rPr lang="en-US" sz="1600">
+                <a:effectLst/>
+              </a:rPr>
+              <a:t>BranchNameAR</a:t>
+            </a:r>
+          </a:p>
+          <a:p>
+            <a:r>
+              <a:rPr lang="en-US" sz="1600">
+                <a:effectLst/>
+              </a:rPr>
+              <a:t>BranchNameEN</a:t>
+            </a:r>
+          </a:p>
+          <a:p>
+            <a:r>
+              <a:rPr lang="en-US" sz="1600">
+                <a:effectLst/>
+              </a:rPr>
+              <a:t>JobNameAR</a:t>
+            </a:r>
+          </a:p>
+          <a:p>
+            <a:r>
+              <a:rPr lang="en-US" sz="1600">
+                <a:effectLst/>
+              </a:rPr>
+              <a:t>BranchId</a:t>
+            </a:r>
+          </a:p>
+          <a:p>
+            <a:r>
+              <a:rPr lang="en-US" sz="1600">
+                <a:effectLst/>
+              </a:rPr>
+              <a:t>RegionId</a:t>
+            </a:r>
+          </a:p>
+          <a:p>
+            <a:r>
+              <a:rPr lang="en-US" sz="1600">
+                <a:effectLst/>
+              </a:rPr>
+              <a:t>Branch_code</a:t>
+            </a:r>
+          </a:p>
+          <a:p>
+            <a:r>
+              <a:rPr lang="en-US" sz="1600">
+                <a:effectLst/>
+              </a:rPr>
+              <a:t>ComId</a:t>
+            </a:r>
+          </a:p>
+          <a:p>
+            <a:r>
+              <a:rPr lang="en-US" sz="1600">
+                <a:effectLst/>
+              </a:rPr>
+              <a:t>JobId</a:t>
+            </a:r>
+          </a:p>
+          <a:p>
+            <a:r>
+              <a:rPr lang="en-US" sz="1600">
+                <a:effectLst/>
+              </a:rPr>
+              <a:t>JobCode</a:t>
+            </a:r>
+          </a:p>
+          <a:p>
+            <a:r>
+              <a:rPr lang="en-US" sz="1600">
+                <a:effectLst/>
+              </a:rPr>
+              <a:t>UserCode</a:t>
+            </a:r>
+          </a:p>
+          <a:p>
+            <a:r>
+              <a:rPr lang="en-US" sz="1600">
+                <a:effectLst/>
+              </a:rPr>
+              <a:t>Numberofmonthsofappointment</a:t>
+            </a:r>
+          </a:p>
+          <a:p>
+            <a:endParaRPr lang="en-US" sz="1600">
+              <a:effectLst/>
+            </a:endParaRPr>
+          </a:p>
+          <a:p>
+            <a:endParaRPr lang="en-US" sz="1600">
+              <a:effectLst/>
+            </a:endParaRPr>
+          </a:p>
+        </p:txBody>
+      </p:sp>
+    </p:spTree>
+    <p:extLst>
+      <p:ext uri="{BB962C8B-B14F-4D97-AF65-F5344CB8AC3E}">
+        <p14:creationId xmlns:p14="http://schemas.microsoft.com/office/powerpoint/2010/main" val="3033957200"/>
       </p:ext>
     </p:extLst>
   </p:cSld>

--- a/Dot Net/Business.pptx
+++ b/Dot Net/Business.pptx
@@ -205,25 +205,27 @@
     <p:sldId id="530" r:id="rId199"/>
     <p:sldId id="525" r:id="rId200"/>
     <p:sldId id="531" r:id="rId201"/>
-    <p:sldId id="527" r:id="rId202"/>
-    <p:sldId id="532" r:id="rId203"/>
-    <p:sldId id="529" r:id="rId204"/>
-    <p:sldId id="533" r:id="rId205"/>
-    <p:sldId id="526" r:id="rId206"/>
-    <p:sldId id="539" r:id="rId207"/>
-    <p:sldId id="538" r:id="rId208"/>
-    <p:sldId id="541" r:id="rId209"/>
-    <p:sldId id="540" r:id="rId210"/>
-    <p:sldId id="335" r:id="rId211"/>
-    <p:sldId id="375" r:id="rId212"/>
-    <p:sldId id="340" r:id="rId213"/>
-    <p:sldId id="345" r:id="rId214"/>
-    <p:sldId id="336" r:id="rId215"/>
-    <p:sldId id="341" r:id="rId216"/>
-    <p:sldId id="337" r:id="rId217"/>
-    <p:sldId id="295" r:id="rId218"/>
-    <p:sldId id="344" r:id="rId219"/>
-    <p:sldId id="363" r:id="rId220"/>
+    <p:sldId id="544" r:id="rId202"/>
+    <p:sldId id="543" r:id="rId203"/>
+    <p:sldId id="527" r:id="rId204"/>
+    <p:sldId id="532" r:id="rId205"/>
+    <p:sldId id="529" r:id="rId206"/>
+    <p:sldId id="533" r:id="rId207"/>
+    <p:sldId id="526" r:id="rId208"/>
+    <p:sldId id="539" r:id="rId209"/>
+    <p:sldId id="538" r:id="rId210"/>
+    <p:sldId id="541" r:id="rId211"/>
+    <p:sldId id="540" r:id="rId212"/>
+    <p:sldId id="335" r:id="rId213"/>
+    <p:sldId id="375" r:id="rId214"/>
+    <p:sldId id="340" r:id="rId215"/>
+    <p:sldId id="345" r:id="rId216"/>
+    <p:sldId id="336" r:id="rId217"/>
+    <p:sldId id="341" r:id="rId218"/>
+    <p:sldId id="337" r:id="rId219"/>
+    <p:sldId id="295" r:id="rId220"/>
+    <p:sldId id="344" r:id="rId221"/>
+    <p:sldId id="363" r:id="rId222"/>
   </p:sldIdLst>
   <p:sldSz cx="12192000" cy="6858000"/>
   <p:notesSz cx="6858000" cy="9144000"/>
@@ -515,7 +517,7 @@
           <a:p>
             <a:fld id="{C744FA5D-EF1D-489D-8D8F-1FF7B7B6D702}" type="datetimeFigureOut">
               <a:rPr lang="en-US" smtClean="0"/>
-              <a:t>5/17/2026</a:t>
+              <a:t>6/4/2026</a:t>
             </a:fld>
             <a:endParaRPr lang="en-US"/>
           </a:p>
@@ -812,7 +814,7 @@
           <a:p>
             <a:fld id="{C744FA5D-EF1D-489D-8D8F-1FF7B7B6D702}" type="datetimeFigureOut">
               <a:rPr lang="en-US" smtClean="0"/>
-              <a:t>5/17/2026</a:t>
+              <a:t>6/4/2026</a:t>
             </a:fld>
             <a:endParaRPr lang="en-US"/>
           </a:p>
@@ -1004,7 +1006,7 @@
           <a:p>
             <a:fld id="{C744FA5D-EF1D-489D-8D8F-1FF7B7B6D702}" type="datetimeFigureOut">
               <a:rPr lang="en-US" smtClean="0"/>
-              <a:t>5/17/2026</a:t>
+              <a:t>6/4/2026</a:t>
             </a:fld>
             <a:endParaRPr lang="en-US"/>
           </a:p>
@@ -1265,7 +1267,7 @@
           <a:p>
             <a:fld id="{C744FA5D-EF1D-489D-8D8F-1FF7B7B6D702}" type="datetimeFigureOut">
               <a:rPr lang="en-US" smtClean="0"/>
-              <a:t>5/17/2026</a:t>
+              <a:t>6/4/2026</a:t>
             </a:fld>
             <a:endParaRPr lang="en-US"/>
           </a:p>
@@ -1689,7 +1691,7 @@
           <a:p>
             <a:fld id="{C744FA5D-EF1D-489D-8D8F-1FF7B7B6D702}" type="datetimeFigureOut">
               <a:rPr lang="en-US" smtClean="0"/>
-              <a:t>5/17/2026</a:t>
+              <a:t>6/4/2026</a:t>
             </a:fld>
             <a:endParaRPr lang="en-US"/>
           </a:p>
@@ -2226,7 +2228,7 @@
           <a:p>
             <a:fld id="{C744FA5D-EF1D-489D-8D8F-1FF7B7B6D702}" type="datetimeFigureOut">
               <a:rPr lang="en-US" smtClean="0"/>
-              <a:t>5/17/2026</a:t>
+              <a:t>6/4/2026</a:t>
             </a:fld>
             <a:endParaRPr lang="en-US"/>
           </a:p>
@@ -3087,7 +3089,7 @@
           <a:p>
             <a:fld id="{C744FA5D-EF1D-489D-8D8F-1FF7B7B6D702}" type="datetimeFigureOut">
               <a:rPr lang="en-US" smtClean="0"/>
-              <a:t>5/17/2026</a:t>
+              <a:t>6/4/2026</a:t>
             </a:fld>
             <a:endParaRPr lang="en-US"/>
           </a:p>
@@ -3257,7 +3259,7 @@
           <a:p>
             <a:fld id="{C744FA5D-EF1D-489D-8D8F-1FF7B7B6D702}" type="datetimeFigureOut">
               <a:rPr lang="en-US" smtClean="0"/>
-              <a:t>5/17/2026</a:t>
+              <a:t>6/4/2026</a:t>
             </a:fld>
             <a:endParaRPr lang="en-US"/>
           </a:p>
@@ -3441,7 +3443,7 @@
           <a:p>
             <a:fld id="{C744FA5D-EF1D-489D-8D8F-1FF7B7B6D702}" type="datetimeFigureOut">
               <a:rPr lang="en-US" smtClean="0"/>
-              <a:t>5/17/2026</a:t>
+              <a:t>6/4/2026</a:t>
             </a:fld>
             <a:endParaRPr lang="en-US"/>
           </a:p>
@@ -3611,7 +3613,7 @@
           <a:p>
             <a:fld id="{C744FA5D-EF1D-489D-8D8F-1FF7B7B6D702}" type="datetimeFigureOut">
               <a:rPr lang="en-US" smtClean="0"/>
-              <a:t>5/17/2026</a:t>
+              <a:t>6/4/2026</a:t>
             </a:fld>
             <a:endParaRPr lang="en-US"/>
           </a:p>
@@ -3855,7 +3857,7 @@
           <a:p>
             <a:fld id="{C744FA5D-EF1D-489D-8D8F-1FF7B7B6D702}" type="datetimeFigureOut">
               <a:rPr lang="en-US" smtClean="0"/>
-              <a:t>5/17/2026</a:t>
+              <a:t>6/4/2026</a:t>
             </a:fld>
             <a:endParaRPr lang="en-US"/>
           </a:p>
@@ -4091,7 +4093,7 @@
           <a:p>
             <a:fld id="{C744FA5D-EF1D-489D-8D8F-1FF7B7B6D702}" type="datetimeFigureOut">
               <a:rPr lang="en-US" smtClean="0"/>
-              <a:t>5/17/2026</a:t>
+              <a:t>6/4/2026</a:t>
             </a:fld>
             <a:endParaRPr lang="en-US"/>
           </a:p>
@@ -4557,7 +4559,7 @@
           <a:p>
             <a:fld id="{C744FA5D-EF1D-489D-8D8F-1FF7B7B6D702}" type="datetimeFigureOut">
               <a:rPr lang="en-US" smtClean="0"/>
-              <a:t>5/17/2026</a:t>
+              <a:t>6/4/2026</a:t>
             </a:fld>
             <a:endParaRPr lang="en-US"/>
           </a:p>
@@ -4675,7 +4677,7 @@
           <a:p>
             <a:fld id="{C744FA5D-EF1D-489D-8D8F-1FF7B7B6D702}" type="datetimeFigureOut">
               <a:rPr lang="en-US" smtClean="0"/>
-              <a:t>5/17/2026</a:t>
+              <a:t>6/4/2026</a:t>
             </a:fld>
             <a:endParaRPr lang="en-US"/>
           </a:p>
@@ -4770,7 +4772,7 @@
           <a:p>
             <a:fld id="{C744FA5D-EF1D-489D-8D8F-1FF7B7B6D702}" type="datetimeFigureOut">
               <a:rPr lang="en-US" smtClean="0"/>
-              <a:t>5/17/2026</a:t>
+              <a:t>6/4/2026</a:t>
             </a:fld>
             <a:endParaRPr lang="en-US"/>
           </a:p>
@@ -5025,7 +5027,7 @@
           <a:p>
             <a:fld id="{C744FA5D-EF1D-489D-8D8F-1FF7B7B6D702}" type="datetimeFigureOut">
               <a:rPr lang="en-US" smtClean="0"/>
-              <a:t>5/17/2026</a:t>
+              <a:t>6/4/2026</a:t>
             </a:fld>
             <a:endParaRPr lang="en-US"/>
           </a:p>
@@ -5324,7 +5326,7 @@
           <a:p>
             <a:fld id="{C744FA5D-EF1D-489D-8D8F-1FF7B7B6D702}" type="datetimeFigureOut">
               <a:rPr lang="en-US" smtClean="0"/>
-              <a:t>5/17/2026</a:t>
+              <a:t>6/4/2026</a:t>
             </a:fld>
             <a:endParaRPr lang="en-US"/>
           </a:p>
@@ -5558,7 +5560,7 @@
           <a:p>
             <a:fld id="{C744FA5D-EF1D-489D-8D8F-1FF7B7B6D702}" type="datetimeFigureOut">
               <a:rPr lang="en-US" smtClean="0"/>
-              <a:t>5/17/2026</a:t>
+              <a:t>6/4/2026</a:t>
             </a:fld>
             <a:endParaRPr lang="en-US"/>
           </a:p>
@@ -28336,13 +28338,35 @@
         <p:spPr>
           <a:xfrm>
             <a:off x="457200" y="0"/>
-            <a:ext cx="11382375" cy="970450"/>
+            <a:ext cx="11382375" cy="619125"/>
           </a:xfrm>
         </p:spPr>
         <p:txBody>
-          <a:bodyPr/>
+          <a:bodyPr>
+            <a:normAutofit fontScale="90000"/>
+          </a:bodyPr>
           <a:lstStyle/>
           <a:p>
+            <a:r>
+              <a:rPr lang="en-US" b="1">
+                <a:solidFill>
+                  <a:srgbClr val="FFFF00"/>
+                </a:solidFill>
+              </a:rPr>
+              <a:t>RSC</a:t>
+            </a:r>
+            <a:r>
+              <a:rPr lang="en-US" b="1"/>
+              <a:t>.</a:t>
+            </a:r>
+            <a:r>
+              <a:rPr lang="en-US" b="1">
+                <a:solidFill>
+                  <a:srgbClr val="FF0000"/>
+                </a:solidFill>
+              </a:rPr>
+              <a:t>ReschedulingStatus</a:t>
+            </a:r>
             <a:endParaRPr lang="en-US"/>
           </a:p>
         </p:txBody>
@@ -28365,8 +28389,8 @@
         </p:nvSpPr>
         <p:spPr>
           <a:xfrm>
-            <a:off x="219075" y="970451"/>
-            <a:ext cx="11525250" cy="5506550"/>
+            <a:off x="219075" y="619125"/>
+            <a:ext cx="11837458" cy="5857876"/>
           </a:xfrm>
         </p:spPr>
         <p:txBody>
@@ -28374,28 +28398,6 @@
             <a:normAutofit/>
           </a:bodyPr>
           <a:lstStyle/>
-          <a:p>
-            <a:r>
-              <a:rPr lang="en-US" sz="2400" b="1">
-                <a:solidFill>
-                  <a:srgbClr val="FFFF00"/>
-                </a:solidFill>
-              </a:rPr>
-              <a:t>RSC</a:t>
-            </a:r>
-            <a:r>
-              <a:rPr lang="en-US" sz="2400" b="1"/>
-              <a:t>.</a:t>
-            </a:r>
-            <a:r>
-              <a:rPr lang="en-US" sz="2400" b="1">
-                <a:solidFill>
-                  <a:srgbClr val="FF0000"/>
-                </a:solidFill>
-              </a:rPr>
-              <a:t>ReschedulingStatus</a:t>
-            </a:r>
-          </a:p>
           <a:p>
             <a:endParaRPr lang="en-US" sz="2400"/>
           </a:p>
@@ -28426,8 +28428,8 @@
         </p:blipFill>
         <p:spPr>
           <a:xfrm>
-            <a:off x="4015585" y="1954468"/>
-            <a:ext cx="5810754" cy="2331782"/>
+            <a:off x="6032154" y="784184"/>
+            <a:ext cx="6024379" cy="2331549"/>
           </a:xfrm>
           <a:prstGeom prst="rect">
             <a:avLst/>
@@ -28469,7 +28471,7 @@
           <p:cNvPr id="2" name="Title 1">
             <a:extLst>
               <a:ext uri="{FF2B5EF4-FFF2-40B4-BE49-F238E27FC236}">
-                <a16:creationId xmlns:a16="http://schemas.microsoft.com/office/drawing/2014/main" id="{FA2D23B9-E8C5-304B-F154-AFBB3424B28C}"/>
+                <a16:creationId xmlns:a16="http://schemas.microsoft.com/office/drawing/2014/main" id="{B8EF1814-C196-C0EC-59BC-302657CC09C6}"/>
               </a:ext>
             </a:extLst>
           </p:cNvPr>
@@ -28483,16 +28485,34 @@
         <p:spPr>
           <a:xfrm>
             <a:off x="913795" y="0"/>
-            <a:ext cx="10353762" cy="723900"/>
+            <a:ext cx="10353762" cy="474133"/>
           </a:xfrm>
         </p:spPr>
         <p:txBody>
-          <a:bodyPr/>
+          <a:bodyPr>
+            <a:normAutofit fontScale="90000"/>
+          </a:bodyPr>
           <a:lstStyle/>
           <a:p>
             <a:r>
+              <a:rPr lang="en-US" b="1">
+                <a:solidFill>
+                  <a:srgbClr val="FFFF00"/>
+                </a:solidFill>
+              </a:rPr>
+              <a:t>RSC</a:t>
+            </a:r>
+            <a:r>
               <a:rPr lang="en-US" b="1"/>
-              <a:t>RSC.ReschedulingCustomers</a:t>
+              <a:t>.</a:t>
+            </a:r>
+            <a:r>
+              <a:rPr lang="en-US" b="1">
+                <a:solidFill>
+                  <a:srgbClr val="00B0F0"/>
+                </a:solidFill>
+              </a:rPr>
+              <a:t>RscCalculation</a:t>
             </a:r>
           </a:p>
         </p:txBody>
@@ -28502,7 +28522,7 @@
           <p:cNvPr id="3" name="Content Placeholder 2">
             <a:extLst>
               <a:ext uri="{FF2B5EF4-FFF2-40B4-BE49-F238E27FC236}">
-                <a16:creationId xmlns:a16="http://schemas.microsoft.com/office/drawing/2014/main" id="{E347DC07-390D-DBA0-BAD0-F9BB4515BCD6}"/>
+                <a16:creationId xmlns:a16="http://schemas.microsoft.com/office/drawing/2014/main" id="{969F36C7-F139-24BE-E20B-FCA1EE0F3115}"/>
               </a:ext>
             </a:extLst>
           </p:cNvPr>
@@ -28515,8 +28535,8 @@
         </p:nvSpPr>
         <p:spPr>
           <a:xfrm>
-            <a:off x="104775" y="723901"/>
-            <a:ext cx="11944350" cy="5991224"/>
+            <a:off x="160867" y="804333"/>
+            <a:ext cx="11870266" cy="5943600"/>
           </a:xfrm>
         </p:spPr>
         <p:txBody>
@@ -28524,22 +28544,58 @@
           <a:lstStyle/>
           <a:p>
             <a:r>
-              <a:rPr lang="en-US" b="1"/>
-              <a:t>RC_ID: PK</a:t>
-            </a:r>
-          </a:p>
-          <a:p>
-            <a:r>
-              <a:rPr lang="en-US" b="1"/>
-              <a:t>RequestId: FK from Request</a:t>
-            </a:r>
+              <a:rPr lang="en-US"/>
+              <a:t>RC_ID: int,  PK</a:t>
+            </a:r>
+          </a:p>
+          <a:p>
+            <a:r>
+              <a:rPr lang="en-US"/>
+              <a:t>Calculation_Way: string</a:t>
+            </a:r>
+          </a:p>
+          <a:p>
+            <a:pPr marL="36900" indent="0">
+              <a:buNone/>
+            </a:pPr>
+            <a:endParaRPr lang="en-US"/>
           </a:p>
         </p:txBody>
       </p:sp>
+      <p:pic>
+        <p:nvPicPr>
+          <p:cNvPr id="7" name="Picture 6">
+            <a:extLst>
+              <a:ext uri="{FF2B5EF4-FFF2-40B4-BE49-F238E27FC236}">
+                <a16:creationId xmlns:a16="http://schemas.microsoft.com/office/drawing/2014/main" id="{B8FDDC66-2F63-6364-57E3-D615C24B5BD1}"/>
+              </a:ext>
+            </a:extLst>
+          </p:cNvPr>
+          <p:cNvPicPr>
+            <a:picLocks noChangeAspect="1"/>
+          </p:cNvPicPr>
+          <p:nvPr/>
+        </p:nvPicPr>
+        <p:blipFill>
+          <a:blip r:embed="rId2"/>
+          <a:stretch>
+            <a:fillRect/>
+          </a:stretch>
+        </p:blipFill>
+        <p:spPr>
+          <a:xfrm>
+            <a:off x="8805687" y="804333"/>
+            <a:ext cx="2556580" cy="1332815"/>
+          </a:xfrm>
+          <a:prstGeom prst="rect">
+            <a:avLst/>
+          </a:prstGeom>
+        </p:spPr>
+      </p:pic>
     </p:spTree>
     <p:extLst>
       <p:ext uri="{BB962C8B-B14F-4D97-AF65-F5344CB8AC3E}">
-        <p14:creationId xmlns:p14="http://schemas.microsoft.com/office/powerpoint/2010/main" val="1228773398"/>
+        <p14:creationId xmlns:p14="http://schemas.microsoft.com/office/powerpoint/2010/main" val="3125055794"/>
       </p:ext>
     </p:extLst>
   </p:cSld>
@@ -28571,7 +28627,7 @@
           <p:cNvPr id="2" name="Title 1">
             <a:extLst>
               <a:ext uri="{FF2B5EF4-FFF2-40B4-BE49-F238E27FC236}">
-                <a16:creationId xmlns:a16="http://schemas.microsoft.com/office/drawing/2014/main" id="{8C7D69E1-8549-3945-3074-ADD9ECC48C58}"/>
+                <a16:creationId xmlns:a16="http://schemas.microsoft.com/office/drawing/2014/main" id="{8C3B7F92-E46E-76AC-1477-DD3A6DC8E6CF}"/>
               </a:ext>
             </a:extLst>
           </p:cNvPr>
@@ -28582,21 +28638,43 @@
             <p:ph type="title"/>
           </p:nvPr>
         </p:nvSpPr>
-        <p:spPr/>
+        <p:spPr>
+          <a:xfrm>
+            <a:off x="913795" y="0"/>
+            <a:ext cx="10353762" cy="575733"/>
+          </a:xfrm>
+        </p:spPr>
         <p:txBody>
-          <a:bodyPr/>
+          <a:bodyPr>
+            <a:normAutofit fontScale="90000"/>
+          </a:bodyPr>
           <a:lstStyle/>
           <a:p>
-            <a:endParaRPr lang="en-US"/>
+            <a:r>
+              <a:rPr lang="en-US" b="1">
+                <a:solidFill>
+                  <a:srgbClr val="FFFF00"/>
+                </a:solidFill>
+              </a:rPr>
+              <a:t>RSC.</a:t>
+            </a:r>
+            <a:r>
+              <a:rPr lang="en-US" b="1">
+                <a:solidFill>
+                  <a:srgbClr val="00B0F0"/>
+                </a:solidFill>
+              </a:rPr>
+              <a:t>RscSetup</a:t>
+            </a:r>
           </a:p>
         </p:txBody>
       </p:sp>
       <p:sp>
         <p:nvSpPr>
-          <p:cNvPr id="3" name="Content Placeholder 2">
-            <a:extLst>
-              <a:ext uri="{FF2B5EF4-FFF2-40B4-BE49-F238E27FC236}">
-                <a16:creationId xmlns:a16="http://schemas.microsoft.com/office/drawing/2014/main" id="{616D4400-9700-CA84-906A-997ACEC7AA59}"/>
+          <p:cNvPr id="7" name="Content Placeholder 6">
+            <a:extLst>
+              <a:ext uri="{FF2B5EF4-FFF2-40B4-BE49-F238E27FC236}">
+                <a16:creationId xmlns:a16="http://schemas.microsoft.com/office/drawing/2014/main" id="{CE623E09-404D-0A42-B52E-CC14683BE5F4}"/>
               </a:ext>
             </a:extLst>
           </p:cNvPr>
@@ -28607,25 +28685,189 @@
             <p:ph idx="1"/>
           </p:nvPr>
         </p:nvSpPr>
-        <p:spPr/>
+        <p:spPr>
+          <a:xfrm>
+            <a:off x="152401" y="575732"/>
+            <a:ext cx="11980333" cy="5698067"/>
+          </a:xfrm>
+        </p:spPr>
         <p:txBody>
-          <a:bodyPr/>
+          <a:bodyPr>
+            <a:normAutofit/>
+          </a:bodyPr>
           <a:lstStyle/>
           <a:p>
-            <a:r>
-              <a:rPr lang="en-US"/>
-              <a:t>We have customer and guarantor rescheduling</a:t>
-            </a:r>
-          </a:p>
-          <a:p>
-            <a:endParaRPr lang="en-US"/>
+            <a:endParaRPr lang="en-US" sz="1600" b="1"/>
+          </a:p>
+          <a:p>
+            <a:pPr marL="36900" indent="0">
+              <a:buNone/>
+            </a:pPr>
+            <a:endParaRPr lang="en-US" sz="1600" b="1"/>
+          </a:p>
+          <a:p>
+            <a:r>
+              <a:rPr lang="en-US" sz="1600" b="1"/>
+              <a:t>RS_ID: PK</a:t>
+            </a:r>
+          </a:p>
+          <a:p>
+            <a:r>
+              <a:rPr lang="en-US" sz="1600" b="1"/>
+              <a:t>Type: string</a:t>
+            </a:r>
+          </a:p>
+          <a:p>
+            <a:r>
+              <a:rPr lang="en-US" sz="1600" b="1"/>
+              <a:t>Max_Resc_Months: int, </a:t>
+            </a:r>
+            <a:r>
+              <a:rPr lang="ar-EG" sz="1600" b="1"/>
+              <a:t>الحد الأقصى لمدة الجدولة</a:t>
+            </a:r>
+          </a:p>
+          <a:p>
+            <a:r>
+              <a:rPr lang="en-US" sz="1600" b="1"/>
+              <a:t>Grace_Period: int,  </a:t>
+            </a:r>
+            <a:r>
+              <a:rPr lang="ar-EG" sz="1600" b="1"/>
+              <a:t>فترة السماح</a:t>
+            </a:r>
+          </a:p>
+          <a:p>
+            <a:r>
+              <a:rPr lang="en-US" sz="1600" b="1"/>
+              <a:t>Resc_Commission: int,  </a:t>
+            </a:r>
+            <a:r>
+              <a:rPr lang="ar-EG" sz="1600" b="1"/>
+              <a:t>عمولة إعادة الجدولة</a:t>
+            </a:r>
+            <a:endParaRPr lang="en-US" sz="1600" b="1"/>
+          </a:p>
+          <a:p>
+            <a:r>
+              <a:rPr lang="en-US" sz="1600" b="1"/>
+              <a:t>Resc_expenses: decimal, </a:t>
+            </a:r>
+            <a:r>
+              <a:rPr lang="ar-EG" sz="1600" b="1"/>
+              <a:t>مصروفات إعادة الجدولة</a:t>
+            </a:r>
+          </a:p>
+          <a:p>
+            <a:r>
+              <a:rPr lang="en-US" sz="1600" b="1"/>
+              <a:t>Resc_Return_Ratio: decimal, </a:t>
+            </a:r>
+            <a:r>
+              <a:rPr lang="ar-EG" sz="1600" b="1"/>
+              <a:t>نسبة عائد إعاد ة الجدولة</a:t>
+            </a:r>
+            <a:endParaRPr lang="en-US" sz="1600" b="1"/>
+          </a:p>
+          <a:p>
+            <a:r>
+              <a:rPr lang="en-US" sz="1600" b="1"/>
+              <a:t>Min_Premium_Num: int, </a:t>
+            </a:r>
+            <a:r>
+              <a:rPr lang="ar-EG" sz="1600" b="1"/>
+              <a:t>الحد الأدني لعددالأقساط المتبقية</a:t>
+            </a:r>
+            <a:endParaRPr lang="en-US" sz="1600" b="1"/>
+          </a:p>
+          <a:p>
+            <a:r>
+              <a:rPr lang="en-US" sz="1600" b="1"/>
+              <a:t>Max_Premium_Num: int, </a:t>
+            </a:r>
+            <a:r>
+              <a:rPr lang="ar-EG" sz="1600" b="1"/>
+              <a:t>الحد الأقصى لعدد الأقساط المتبقية</a:t>
+            </a:r>
+            <a:endParaRPr lang="en-US" sz="1600" b="1"/>
+          </a:p>
+          <a:p>
+            <a:r>
+              <a:rPr lang="en-US" sz="1600" b="1"/>
+              <a:t>Cust_Guar: int </a:t>
+            </a:r>
+          </a:p>
+          <a:p>
+            <a:r>
+              <a:rPr lang="en-US" sz="1600" b="1"/>
+              <a:t>RscCalculations: FK from </a:t>
+            </a:r>
+            <a:r>
+              <a:rPr lang="en-US" sz="1600" b="1">
+                <a:solidFill>
+                  <a:srgbClr val="FFFF00"/>
+                </a:solidFill>
+              </a:rPr>
+              <a:t>RscCalculation</a:t>
+            </a:r>
+          </a:p>
+          <a:p>
+            <a:r>
+              <a:rPr lang="en-US" sz="1600" b="1"/>
+              <a:t>FRC_Id: FK from </a:t>
+            </a:r>
+            <a:r>
+              <a:rPr lang="en-US" sz="1600" b="1">
+                <a:solidFill>
+                  <a:srgbClr val="FFFF00"/>
+                </a:solidFill>
+              </a:rPr>
+              <a:t>Flow_Repayment_Cycles</a:t>
+            </a:r>
           </a:p>
         </p:txBody>
       </p:sp>
+      <p:pic>
+        <p:nvPicPr>
+          <p:cNvPr id="8" name="Content Placeholder 4">
+            <a:extLst>
+              <a:ext uri="{FF2B5EF4-FFF2-40B4-BE49-F238E27FC236}">
+                <a16:creationId xmlns:a16="http://schemas.microsoft.com/office/drawing/2014/main" id="{438232D4-C597-18CA-9087-8E9A1298206A}"/>
+              </a:ext>
+            </a:extLst>
+          </p:cNvPr>
+          <p:cNvPicPr>
+            <a:picLocks noChangeAspect="1"/>
+          </p:cNvPicPr>
+          <p:nvPr/>
+        </p:nvPicPr>
+        <p:blipFill>
+          <a:blip r:embed="rId2"/>
+          <a:stretch>
+            <a:fillRect/>
+          </a:stretch>
+        </p:blipFill>
+        <p:spPr>
+          <a:xfrm>
+            <a:off x="2310581" y="575733"/>
+            <a:ext cx="9822153" cy="1032934"/>
+          </a:xfrm>
+          <a:prstGeom prst="rect">
+            <a:avLst/>
+          </a:prstGeom>
+          <a:effectLst>
+            <a:outerShdw blurRad="25400" dir="17880000">
+              <a:srgbClr val="000000">
+                <a:alpha val="46000"/>
+              </a:srgbClr>
+            </a:outerShdw>
+          </a:effectLst>
+        </p:spPr>
+      </p:pic>
     </p:spTree>
     <p:extLst>
       <p:ext uri="{BB962C8B-B14F-4D97-AF65-F5344CB8AC3E}">
-        <p14:creationId xmlns:p14="http://schemas.microsoft.com/office/powerpoint/2010/main" val="1558383398"/>
+        <p14:creationId xmlns:p14="http://schemas.microsoft.com/office/powerpoint/2010/main" val="3404768165"/>
       </p:ext>
     </p:extLst>
   </p:cSld>
@@ -28657,7 +28899,7 @@
           <p:cNvPr id="2" name="Title 1">
             <a:extLst>
               <a:ext uri="{FF2B5EF4-FFF2-40B4-BE49-F238E27FC236}">
-                <a16:creationId xmlns:a16="http://schemas.microsoft.com/office/drawing/2014/main" id="{4BB95E24-384E-0743-3718-89B3183842D0}"/>
+                <a16:creationId xmlns:a16="http://schemas.microsoft.com/office/drawing/2014/main" id="{FA2D23B9-E8C5-304B-F154-AFBB3424B28C}"/>
               </a:ext>
             </a:extLst>
           </p:cNvPr>
@@ -28670,17 +28912,34 @@
         </p:nvSpPr>
         <p:spPr>
           <a:xfrm>
-            <a:off x="919119" y="1"/>
-            <a:ext cx="10353762" cy="609600"/>
+            <a:off x="913795" y="0"/>
+            <a:ext cx="10353762" cy="723900"/>
           </a:xfrm>
         </p:spPr>
         <p:txBody>
-          <a:bodyPr>
-            <a:normAutofit fontScale="90000"/>
-          </a:bodyPr>
+          <a:bodyPr/>
           <a:lstStyle/>
           <a:p>
-            <a:endParaRPr lang="en-US"/>
+            <a:r>
+              <a:rPr lang="en-US" b="1">
+                <a:solidFill>
+                  <a:srgbClr val="FFFF00"/>
+                </a:solidFill>
+              </a:rPr>
+              <a:t>RSC</a:t>
+            </a:r>
+            <a:r>
+              <a:rPr lang="en-US" b="1"/>
+              <a:t>.</a:t>
+            </a:r>
+            <a:r>
+              <a:rPr lang="en-US" b="1">
+                <a:solidFill>
+                  <a:srgbClr val="00B0F0"/>
+                </a:solidFill>
+              </a:rPr>
+              <a:t>ReschedulingCustomers</a:t>
+            </a:r>
           </a:p>
         </p:txBody>
       </p:sp>
@@ -28689,7 +28948,7 @@
           <p:cNvPr id="3" name="Content Placeholder 2">
             <a:extLst>
               <a:ext uri="{FF2B5EF4-FFF2-40B4-BE49-F238E27FC236}">
-                <a16:creationId xmlns:a16="http://schemas.microsoft.com/office/drawing/2014/main" id="{5F4DE71E-CAC6-3368-A7B0-C765AC618938}"/>
+                <a16:creationId xmlns:a16="http://schemas.microsoft.com/office/drawing/2014/main" id="{E347DC07-390D-DBA0-BAD0-F9BB4515BCD6}"/>
               </a:ext>
             </a:extLst>
           </p:cNvPr>
@@ -28702,90 +28961,171 @@
         </p:nvSpPr>
         <p:spPr>
           <a:xfrm>
-            <a:off x="913795" y="857250"/>
-            <a:ext cx="10353762" cy="5791199"/>
+            <a:off x="104774" y="723901"/>
+            <a:ext cx="12087225" cy="5991224"/>
           </a:xfrm>
         </p:spPr>
         <p:txBody>
-          <a:bodyPr/>
+          <a:bodyPr>
+            <a:normAutofit/>
+          </a:bodyPr>
           <a:lstStyle/>
           <a:p>
             <a:r>
-              <a:rPr lang="en-US" sz="2200" b="1">
+              <a:rPr lang="en-US" sz="1800" b="1"/>
+              <a:t>RC_ID: PK</a:t>
+            </a:r>
+          </a:p>
+          <a:p>
+            <a:r>
+              <a:rPr lang="en-US" sz="1800" b="1"/>
+              <a:t>CustomerId: FK from </a:t>
+            </a:r>
+            <a:r>
+              <a:rPr lang="en-US" sz="1800" b="1">
                 <a:solidFill>
                   <a:srgbClr val="FFFF00"/>
                 </a:solidFill>
               </a:rPr>
-              <a:t>RSC</a:t>
-            </a:r>
-            <a:r>
-              <a:rPr lang="en-US" sz="2200"/>
-              <a:t>.</a:t>
-            </a:r>
-            <a:r>
-              <a:rPr lang="en-US" sz="2200" b="1">
+              <a:t>customer</a:t>
+            </a:r>
+          </a:p>
+          <a:p>
+            <a:r>
+              <a:rPr lang="en-US" sz="1800" b="1"/>
+              <a:t>RequestId: FK from </a:t>
+            </a:r>
+            <a:r>
+              <a:rPr lang="en-US" sz="1800" b="1">
+                <a:solidFill>
+                  <a:srgbClr val="FFFF00"/>
+                </a:solidFill>
+              </a:rPr>
+              <a:t>Request</a:t>
+            </a:r>
+          </a:p>
+          <a:p>
+            <a:r>
+              <a:rPr lang="en-US" sz="1800" b="1"/>
+              <a:t>Status: FK from </a:t>
+            </a:r>
+            <a:r>
+              <a:rPr lang="en-US" sz="1800" b="1">
+                <a:solidFill>
+                  <a:srgbClr val="FFFF00"/>
+                </a:solidFill>
+              </a:rPr>
+              <a:t>ReschedulingStatus</a:t>
+            </a:r>
+          </a:p>
+          <a:p>
+            <a:r>
+              <a:rPr lang="en-US" sz="1800" b="1"/>
+              <a:t>RS_ID: FK from </a:t>
+            </a:r>
+            <a:r>
+              <a:rPr lang="en-US" sz="1800" b="1">
+                <a:solidFill>
+                  <a:srgbClr val="FFFF00"/>
+                </a:solidFill>
+              </a:rPr>
+              <a:t>RscSetup</a:t>
+            </a:r>
+          </a:p>
+          <a:p>
+            <a:r>
+              <a:rPr lang="en-US" sz="1800" b="1"/>
+              <a:t>BranchId: FK from </a:t>
+            </a:r>
+            <a:r>
+              <a:rPr lang="en-US" sz="1800" b="1">
+                <a:solidFill>
+                  <a:srgbClr val="FFFF00"/>
+                </a:solidFill>
+              </a:rPr>
+              <a:t>BranchId</a:t>
+            </a:r>
+          </a:p>
+          <a:p>
+            <a:r>
+              <a:rPr lang="en-US" sz="1800" b="1"/>
+              <a:t>UserID: FK from </a:t>
+            </a:r>
+            <a:r>
+              <a:rPr lang="en-US" sz="1800" b="1">
+                <a:solidFill>
+                  <a:srgbClr val="FFFF00"/>
+                </a:solidFill>
+              </a:rPr>
+              <a:t>User</a:t>
+            </a:r>
+          </a:p>
+          <a:p>
+            <a:r>
+              <a:rPr lang="en-US" sz="1800" b="1"/>
+              <a:t>creationDate: </a:t>
+            </a:r>
+            <a:r>
+              <a:rPr lang="en-US"/>
+              <a:t>DateTime</a:t>
+            </a:r>
+            <a:endParaRPr lang="en-US" sz="1800" b="1">
+              <a:solidFill>
+                <a:srgbClr val="00B0F0"/>
+              </a:solidFill>
+            </a:endParaRPr>
+          </a:p>
+          <a:p>
+            <a:r>
+              <a:rPr lang="en-US" sz="1800" b="1">
                 <a:solidFill>
                   <a:srgbClr val="00B0F0"/>
                 </a:solidFill>
               </a:rPr>
               <a:t>ReschedulingCustomers</a:t>
             </a:r>
-          </a:p>
-          <a:p>
-            <a:r>
-              <a:rPr lang="en-US"/>
-              <a:t>cust_guar:</a:t>
-            </a:r>
-          </a:p>
-          <a:p>
-            <a:pPr lvl="1"/>
-            <a:r>
-              <a:rPr lang="en-US" b="1"/>
-              <a:t>1 [ </a:t>
-            </a:r>
-            <a:r>
-              <a:rPr lang="ar-EG" b="1"/>
-              <a:t>عميل</a:t>
-            </a:r>
-            <a:r>
-              <a:rPr lang="en-US" b="1"/>
-              <a:t> ]</a:t>
-            </a:r>
-            <a:endParaRPr lang="ar-EG" b="1"/>
-          </a:p>
-          <a:p>
-            <a:pPr lvl="1"/>
-            <a:r>
-              <a:rPr lang="en-US" b="1"/>
-              <a:t>2 [ </a:t>
-            </a:r>
-            <a:r>
-              <a:rPr lang="ar-EG" b="1"/>
-              <a:t>ضامن</a:t>
-            </a:r>
-            <a:r>
-              <a:rPr lang="en-US" b="1"/>
-              <a:t> ]</a:t>
-            </a:r>
-          </a:p>
-          <a:p>
-            <a:endParaRPr lang="en-US"/>
-          </a:p>
-          <a:p>
-            <a:endParaRPr lang="en-US"/>
-          </a:p>
-          <a:p>
-            <a:endParaRPr lang="en-US"/>
-          </a:p>
-          <a:p>
-            <a:endParaRPr lang="en-US"/>
+            <a:endParaRPr lang="en-US" sz="1800" b="1">
+              <a:solidFill>
+                <a:srgbClr val="FFFF00"/>
+              </a:solidFill>
+            </a:endParaRPr>
           </a:p>
         </p:txBody>
       </p:sp>
+      <p:pic>
+        <p:nvPicPr>
+          <p:cNvPr id="5" name="Picture 4">
+            <a:extLst>
+              <a:ext uri="{FF2B5EF4-FFF2-40B4-BE49-F238E27FC236}">
+                <a16:creationId xmlns:a16="http://schemas.microsoft.com/office/drawing/2014/main" id="{BF029F3C-0680-92AE-DAA8-A6A6CE2621EB}"/>
+              </a:ext>
+            </a:extLst>
+          </p:cNvPr>
+          <p:cNvPicPr>
+            <a:picLocks noChangeAspect="1"/>
+          </p:cNvPicPr>
+          <p:nvPr/>
+        </p:nvPicPr>
+        <p:blipFill>
+          <a:blip r:embed="rId2"/>
+          <a:stretch>
+            <a:fillRect/>
+          </a:stretch>
+        </p:blipFill>
+        <p:spPr>
+          <a:xfrm>
+            <a:off x="4204759" y="792405"/>
+            <a:ext cx="7882467" cy="1739130"/>
+          </a:xfrm>
+          <a:prstGeom prst="rect">
+            <a:avLst/>
+          </a:prstGeom>
+        </p:spPr>
+      </p:pic>
     </p:spTree>
     <p:extLst>
       <p:ext uri="{BB962C8B-B14F-4D97-AF65-F5344CB8AC3E}">
-        <p14:creationId xmlns:p14="http://schemas.microsoft.com/office/powerpoint/2010/main" val="2951473903"/>
+        <p14:creationId xmlns:p14="http://schemas.microsoft.com/office/powerpoint/2010/main" val="1228773398"/>
       </p:ext>
     </p:extLst>
   </p:cSld>
@@ -28817,6 +29157,252 @@
           <p:cNvPr id="2" name="Title 1">
             <a:extLst>
               <a:ext uri="{FF2B5EF4-FFF2-40B4-BE49-F238E27FC236}">
+                <a16:creationId xmlns:a16="http://schemas.microsoft.com/office/drawing/2014/main" id="{8C7D69E1-8549-3945-3074-ADD9ECC48C58}"/>
+              </a:ext>
+            </a:extLst>
+          </p:cNvPr>
+          <p:cNvSpPr>
+            <a:spLocks noGrp="1"/>
+          </p:cNvSpPr>
+          <p:nvPr>
+            <p:ph type="title"/>
+          </p:nvPr>
+        </p:nvSpPr>
+        <p:spPr/>
+        <p:txBody>
+          <a:bodyPr/>
+          <a:lstStyle/>
+          <a:p>
+            <a:endParaRPr lang="en-US"/>
+          </a:p>
+        </p:txBody>
+      </p:sp>
+      <p:sp>
+        <p:nvSpPr>
+          <p:cNvPr id="3" name="Content Placeholder 2">
+            <a:extLst>
+              <a:ext uri="{FF2B5EF4-FFF2-40B4-BE49-F238E27FC236}">
+                <a16:creationId xmlns:a16="http://schemas.microsoft.com/office/drawing/2014/main" id="{616D4400-9700-CA84-906A-997ACEC7AA59}"/>
+              </a:ext>
+            </a:extLst>
+          </p:cNvPr>
+          <p:cNvSpPr>
+            <a:spLocks noGrp="1"/>
+          </p:cNvSpPr>
+          <p:nvPr>
+            <p:ph idx="1"/>
+          </p:nvPr>
+        </p:nvSpPr>
+        <p:spPr/>
+        <p:txBody>
+          <a:bodyPr/>
+          <a:lstStyle/>
+          <a:p>
+            <a:r>
+              <a:rPr lang="en-US"/>
+              <a:t>We have customer and guarantor rescheduling</a:t>
+            </a:r>
+          </a:p>
+          <a:p>
+            <a:endParaRPr lang="en-US"/>
+          </a:p>
+        </p:txBody>
+      </p:sp>
+    </p:spTree>
+    <p:extLst>
+      <p:ext uri="{BB962C8B-B14F-4D97-AF65-F5344CB8AC3E}">
+        <p14:creationId xmlns:p14="http://schemas.microsoft.com/office/powerpoint/2010/main" val="1558383398"/>
+      </p:ext>
+    </p:extLst>
+  </p:cSld>
+  <p:clrMapOvr>
+    <a:masterClrMapping/>
+  </p:clrMapOvr>
+</p:sld>
+</file>
+
+<file path=ppt/slides/slide205.xml><?xml version="1.0" encoding="utf-8"?>
+<p:sld xmlns:a="http://schemas.openxmlformats.org/drawingml/2006/main" xmlns:r="http://schemas.openxmlformats.org/officeDocument/2006/relationships" xmlns:p="http://schemas.openxmlformats.org/presentationml/2006/main">
+  <p:cSld>
+    <p:spTree>
+      <p:nvGrpSpPr>
+        <p:cNvPr id="1" name=""/>
+        <p:cNvGrpSpPr/>
+        <p:nvPr/>
+      </p:nvGrpSpPr>
+      <p:grpSpPr>
+        <a:xfrm>
+          <a:off x="0" y="0"/>
+          <a:ext cx="0" cy="0"/>
+          <a:chOff x="0" y="0"/>
+          <a:chExt cx="0" cy="0"/>
+        </a:xfrm>
+      </p:grpSpPr>
+      <p:sp>
+        <p:nvSpPr>
+          <p:cNvPr id="2" name="Title 1">
+            <a:extLst>
+              <a:ext uri="{FF2B5EF4-FFF2-40B4-BE49-F238E27FC236}">
+                <a16:creationId xmlns:a16="http://schemas.microsoft.com/office/drawing/2014/main" id="{4BB95E24-384E-0743-3718-89B3183842D0}"/>
+              </a:ext>
+            </a:extLst>
+          </p:cNvPr>
+          <p:cNvSpPr>
+            <a:spLocks noGrp="1"/>
+          </p:cNvSpPr>
+          <p:nvPr>
+            <p:ph type="title"/>
+          </p:nvPr>
+        </p:nvSpPr>
+        <p:spPr>
+          <a:xfrm>
+            <a:off x="919119" y="1"/>
+            <a:ext cx="10353762" cy="609600"/>
+          </a:xfrm>
+        </p:spPr>
+        <p:txBody>
+          <a:bodyPr>
+            <a:normAutofit fontScale="90000"/>
+          </a:bodyPr>
+          <a:lstStyle/>
+          <a:p>
+            <a:endParaRPr lang="en-US"/>
+          </a:p>
+        </p:txBody>
+      </p:sp>
+      <p:sp>
+        <p:nvSpPr>
+          <p:cNvPr id="3" name="Content Placeholder 2">
+            <a:extLst>
+              <a:ext uri="{FF2B5EF4-FFF2-40B4-BE49-F238E27FC236}">
+                <a16:creationId xmlns:a16="http://schemas.microsoft.com/office/drawing/2014/main" id="{5F4DE71E-CAC6-3368-A7B0-C765AC618938}"/>
+              </a:ext>
+            </a:extLst>
+          </p:cNvPr>
+          <p:cNvSpPr>
+            <a:spLocks noGrp="1"/>
+          </p:cNvSpPr>
+          <p:nvPr>
+            <p:ph idx="1"/>
+          </p:nvPr>
+        </p:nvSpPr>
+        <p:spPr>
+          <a:xfrm>
+            <a:off x="913795" y="857250"/>
+            <a:ext cx="10353762" cy="5791199"/>
+          </a:xfrm>
+        </p:spPr>
+        <p:txBody>
+          <a:bodyPr/>
+          <a:lstStyle/>
+          <a:p>
+            <a:r>
+              <a:rPr lang="en-US" sz="2200" b="1">
+                <a:solidFill>
+                  <a:srgbClr val="FFFF00"/>
+                </a:solidFill>
+              </a:rPr>
+              <a:t>RSC</a:t>
+            </a:r>
+            <a:r>
+              <a:rPr lang="en-US" sz="2200"/>
+              <a:t>.</a:t>
+            </a:r>
+            <a:r>
+              <a:rPr lang="en-US" sz="2200" b="1">
+                <a:solidFill>
+                  <a:srgbClr val="00B0F0"/>
+                </a:solidFill>
+              </a:rPr>
+              <a:t>ReschedulingCustomers</a:t>
+            </a:r>
+          </a:p>
+          <a:p>
+            <a:r>
+              <a:rPr lang="en-US"/>
+              <a:t>cust_guar:</a:t>
+            </a:r>
+          </a:p>
+          <a:p>
+            <a:pPr lvl="1"/>
+            <a:r>
+              <a:rPr lang="en-US" b="1"/>
+              <a:t>1 [ </a:t>
+            </a:r>
+            <a:r>
+              <a:rPr lang="ar-EG" b="1"/>
+              <a:t>عميل</a:t>
+            </a:r>
+            <a:r>
+              <a:rPr lang="en-US" b="1"/>
+              <a:t> ]</a:t>
+            </a:r>
+            <a:endParaRPr lang="ar-EG" b="1"/>
+          </a:p>
+          <a:p>
+            <a:pPr lvl="1"/>
+            <a:r>
+              <a:rPr lang="en-US" b="1"/>
+              <a:t>2 [ </a:t>
+            </a:r>
+            <a:r>
+              <a:rPr lang="ar-EG" b="1"/>
+              <a:t>ضامن</a:t>
+            </a:r>
+            <a:r>
+              <a:rPr lang="en-US" b="1"/>
+              <a:t> ]</a:t>
+            </a:r>
+          </a:p>
+          <a:p>
+            <a:endParaRPr lang="en-US"/>
+          </a:p>
+          <a:p>
+            <a:endParaRPr lang="en-US"/>
+          </a:p>
+          <a:p>
+            <a:endParaRPr lang="en-US"/>
+          </a:p>
+          <a:p>
+            <a:endParaRPr lang="en-US"/>
+          </a:p>
+        </p:txBody>
+      </p:sp>
+    </p:spTree>
+    <p:extLst>
+      <p:ext uri="{BB962C8B-B14F-4D97-AF65-F5344CB8AC3E}">
+        <p14:creationId xmlns:p14="http://schemas.microsoft.com/office/powerpoint/2010/main" val="2951473903"/>
+      </p:ext>
+    </p:extLst>
+  </p:cSld>
+  <p:clrMapOvr>
+    <a:masterClrMapping/>
+  </p:clrMapOvr>
+</p:sld>
+</file>
+
+<file path=ppt/slides/slide206.xml><?xml version="1.0" encoding="utf-8"?>
+<p:sld xmlns:a="http://schemas.openxmlformats.org/drawingml/2006/main" xmlns:r="http://schemas.openxmlformats.org/officeDocument/2006/relationships" xmlns:p="http://schemas.openxmlformats.org/presentationml/2006/main">
+  <p:cSld>
+    <p:spTree>
+      <p:nvGrpSpPr>
+        <p:cNvPr id="1" name=""/>
+        <p:cNvGrpSpPr/>
+        <p:nvPr/>
+      </p:nvGrpSpPr>
+      <p:grpSpPr>
+        <a:xfrm>
+          <a:off x="0" y="0"/>
+          <a:ext cx="0" cy="0"/>
+          <a:chOff x="0" y="0"/>
+          <a:chExt cx="0" cy="0"/>
+        </a:xfrm>
+      </p:grpSpPr>
+      <p:sp>
+        <p:nvSpPr>
+          <p:cNvPr id="2" name="Title 1">
+            <a:extLst>
+              <a:ext uri="{FF2B5EF4-FFF2-40B4-BE49-F238E27FC236}">
                 <a16:creationId xmlns:a16="http://schemas.microsoft.com/office/drawing/2014/main" id="{8373F17D-684B-4848-F94F-3638FEDFF5C7}"/>
               </a:ext>
             </a:extLst>
@@ -28963,7 +29549,7 @@
 </p:sld>
 </file>
 
-<file path=ppt/slides/slide205.xml><?xml version="1.0" encoding="utf-8"?>
+<file path=ppt/slides/slide207.xml><?xml version="1.0" encoding="utf-8"?>
 <p:sld xmlns:a="http://schemas.openxmlformats.org/drawingml/2006/main" xmlns:r="http://schemas.openxmlformats.org/officeDocument/2006/relationships" xmlns:p="http://schemas.openxmlformats.org/presentationml/2006/main">
   <p:cSld>
     <p:spTree>
@@ -29051,7 +29637,7 @@
 </p:sld>
 </file>
 
-<file path=ppt/slides/slide206.xml><?xml version="1.0" encoding="utf-8"?>
+<file path=ppt/slides/slide208.xml><?xml version="1.0" encoding="utf-8"?>
 <p:sld xmlns:a="http://schemas.openxmlformats.org/drawingml/2006/main" xmlns:r="http://schemas.openxmlformats.org/officeDocument/2006/relationships" xmlns:p="http://schemas.openxmlformats.org/presentationml/2006/main">
   <p:cSld>
     <p:spTree>
@@ -29126,7 +29712,7 @@
 </p:sld>
 </file>
 
-<file path=ppt/slides/slide207.xml><?xml version="1.0" encoding="utf-8"?>
+<file path=ppt/slides/slide209.xml><?xml version="1.0" encoding="utf-8"?>
 <p:sld xmlns:a="http://schemas.openxmlformats.org/drawingml/2006/main" xmlns:r="http://schemas.openxmlformats.org/officeDocument/2006/relationships" xmlns:p="http://schemas.openxmlformats.org/presentationml/2006/main">
   <p:cSld>
     <p:spTree>
@@ -29203,193 +29789,6 @@
     <p:extLst>
       <p:ext uri="{BB962C8B-B14F-4D97-AF65-F5344CB8AC3E}">
         <p14:creationId xmlns:p14="http://schemas.microsoft.com/office/powerpoint/2010/main" val="3994903743"/>
-      </p:ext>
-    </p:extLst>
-  </p:cSld>
-  <p:clrMapOvr>
-    <a:masterClrMapping/>
-  </p:clrMapOvr>
-</p:sld>
-</file>
-
-<file path=ppt/slides/slide208.xml><?xml version="1.0" encoding="utf-8"?>
-<p:sld xmlns:a="http://schemas.openxmlformats.org/drawingml/2006/main" xmlns:r="http://schemas.openxmlformats.org/officeDocument/2006/relationships" xmlns:p="http://schemas.openxmlformats.org/presentationml/2006/main">
-  <p:cSld>
-    <p:spTree>
-      <p:nvGrpSpPr>
-        <p:cNvPr id="1" name=""/>
-        <p:cNvGrpSpPr/>
-        <p:nvPr/>
-      </p:nvGrpSpPr>
-      <p:grpSpPr>
-        <a:xfrm>
-          <a:off x="0" y="0"/>
-          <a:ext cx="0" cy="0"/>
-          <a:chOff x="0" y="0"/>
-          <a:chExt cx="0" cy="0"/>
-        </a:xfrm>
-      </p:grpSpPr>
-      <p:sp>
-        <p:nvSpPr>
-          <p:cNvPr id="2" name="Title 1">
-            <a:extLst>
-              <a:ext uri="{FF2B5EF4-FFF2-40B4-BE49-F238E27FC236}">
-                <a16:creationId xmlns:a16="http://schemas.microsoft.com/office/drawing/2014/main" id="{F71F99C4-C2C7-A9E0-92BB-1085913C6A2F}"/>
-              </a:ext>
-            </a:extLst>
-          </p:cNvPr>
-          <p:cNvSpPr>
-            <a:spLocks noGrp="1"/>
-          </p:cNvSpPr>
-          <p:nvPr>
-            <p:ph type="title"/>
-          </p:nvPr>
-        </p:nvSpPr>
-        <p:spPr>
-          <a:xfrm>
-            <a:off x="913795" y="0"/>
-            <a:ext cx="10353762" cy="970450"/>
-          </a:xfrm>
-        </p:spPr>
-        <p:txBody>
-          <a:bodyPr/>
-          <a:lstStyle/>
-          <a:p>
-            <a:r>
-              <a:rPr lang="en-US" b="1">
-                <a:solidFill>
-                  <a:srgbClr val="FFFF00"/>
-                </a:solidFill>
-              </a:rPr>
-              <a:t>TWF</a:t>
-            </a:r>
-            <a:r>
-              <a:rPr lang="en-US" b="1"/>
-              <a:t>.</a:t>
-            </a:r>
-            <a:r>
-              <a:rPr lang="en-US" b="1">
-                <a:solidFill>
-                  <a:srgbClr val="00B0F0"/>
-                </a:solidFill>
-              </a:rPr>
-              <a:t>Flow_Sanctionscanner_ByID</a:t>
-            </a:r>
-          </a:p>
-        </p:txBody>
-      </p:sp>
-      <p:sp>
-        <p:nvSpPr>
-          <p:cNvPr id="3" name="Content Placeholder 2">
-            <a:extLst>
-              <a:ext uri="{FF2B5EF4-FFF2-40B4-BE49-F238E27FC236}">
-                <a16:creationId xmlns:a16="http://schemas.microsoft.com/office/drawing/2014/main" id="{D442004E-AE66-C2E6-572A-B949B49C0D5D}"/>
-              </a:ext>
-            </a:extLst>
-          </p:cNvPr>
-          <p:cNvSpPr>
-            <a:spLocks noGrp="1"/>
-          </p:cNvSpPr>
-          <p:nvPr>
-            <p:ph idx="1"/>
-          </p:nvPr>
-        </p:nvSpPr>
-        <p:spPr>
-          <a:xfrm>
-            <a:off x="193040" y="863600"/>
-            <a:ext cx="11074517" cy="5506719"/>
-          </a:xfrm>
-        </p:spPr>
-        <p:txBody>
-          <a:bodyPr/>
-          <a:lstStyle/>
-          <a:p>
-            <a:r>
-              <a:rPr lang="en-US" b="1"/>
-              <a:t>This table represents the result of AML </a:t>
-            </a:r>
-          </a:p>
-        </p:txBody>
-      </p:sp>
-    </p:spTree>
-    <p:extLst>
-      <p:ext uri="{BB962C8B-B14F-4D97-AF65-F5344CB8AC3E}">
-        <p14:creationId xmlns:p14="http://schemas.microsoft.com/office/powerpoint/2010/main" val="2029403942"/>
-      </p:ext>
-    </p:extLst>
-  </p:cSld>
-  <p:clrMapOvr>
-    <a:masterClrMapping/>
-  </p:clrMapOvr>
-</p:sld>
-</file>
-
-<file path=ppt/slides/slide209.xml><?xml version="1.0" encoding="utf-8"?>
-<p:sld xmlns:a="http://schemas.openxmlformats.org/drawingml/2006/main" xmlns:r="http://schemas.openxmlformats.org/officeDocument/2006/relationships" xmlns:p="http://schemas.openxmlformats.org/presentationml/2006/main">
-  <p:cSld>
-    <p:spTree>
-      <p:nvGrpSpPr>
-        <p:cNvPr id="1" name="">
-          <a:extLst>
-            <a:ext uri="{FF2B5EF4-FFF2-40B4-BE49-F238E27FC236}">
-              <a16:creationId xmlns:a16="http://schemas.microsoft.com/office/drawing/2014/main" id="{026EC314-3C68-09E4-C3BD-CFEDD763CB1D}"/>
-            </a:ext>
-          </a:extLst>
-        </p:cNvPr>
-        <p:cNvGrpSpPr/>
-        <p:nvPr/>
-      </p:nvGrpSpPr>
-      <p:grpSpPr>
-        <a:xfrm>
-          <a:off x="0" y="0"/>
-          <a:ext cx="0" cy="0"/>
-          <a:chOff x="0" y="0"/>
-          <a:chExt cx="0" cy="0"/>
-        </a:xfrm>
-      </p:grpSpPr>
-      <p:sp>
-        <p:nvSpPr>
-          <p:cNvPr id="2" name="Title 1">
-            <a:extLst>
-              <a:ext uri="{FF2B5EF4-FFF2-40B4-BE49-F238E27FC236}">
-                <a16:creationId xmlns:a16="http://schemas.microsoft.com/office/drawing/2014/main" id="{A469C956-03BC-201C-5865-88EFAC2FAA47}"/>
-              </a:ext>
-            </a:extLst>
-          </p:cNvPr>
-          <p:cNvSpPr>
-            <a:spLocks noGrp="1"/>
-          </p:cNvSpPr>
-          <p:nvPr>
-            <p:ph type="title"/>
-          </p:nvPr>
-        </p:nvSpPr>
-        <p:spPr>
-          <a:xfrm>
-            <a:off x="913795" y="609600"/>
-            <a:ext cx="10353762" cy="5008880"/>
-          </a:xfrm>
-        </p:spPr>
-        <p:txBody>
-          <a:bodyPr>
-            <a:normAutofit/>
-          </a:bodyPr>
-          <a:lstStyle/>
-          <a:p>
-            <a:r>
-              <a:rPr lang="en-US" sz="6600" b="1">
-                <a:solidFill>
-                  <a:srgbClr val="FF0000"/>
-                </a:solidFill>
-              </a:rPr>
-              <a:t>End AML</a:t>
-            </a:r>
-          </a:p>
-        </p:txBody>
-      </p:sp>
-    </p:spTree>
-    <p:extLst>
-      <p:ext uri="{BB962C8B-B14F-4D97-AF65-F5344CB8AC3E}">
-        <p14:creationId xmlns:p14="http://schemas.microsoft.com/office/powerpoint/2010/main" val="2432522804"/>
       </p:ext>
     </p:extLst>
   </p:cSld>
@@ -29799,7 +30198,7 @@
           <p:cNvPr id="2" name="Title 1">
             <a:extLst>
               <a:ext uri="{FF2B5EF4-FFF2-40B4-BE49-F238E27FC236}">
-                <a16:creationId xmlns:a16="http://schemas.microsoft.com/office/drawing/2014/main" id="{12BC1E88-436E-358B-0172-0873ADFF98D4}"/>
+                <a16:creationId xmlns:a16="http://schemas.microsoft.com/office/drawing/2014/main" id="{F71F99C4-C2C7-A9E0-92BB-1085913C6A2F}"/>
               </a:ext>
             </a:extLst>
           </p:cNvPr>
@@ -29812,23 +30211,66 @@
         </p:nvSpPr>
         <p:spPr>
           <a:xfrm>
-            <a:off x="344129" y="2104103"/>
-            <a:ext cx="11503742" cy="1445342"/>
+            <a:off x="913795" y="0"/>
+            <a:ext cx="10353762" cy="970450"/>
           </a:xfrm>
         </p:spPr>
         <p:txBody>
-          <a:bodyPr>
-            <a:normAutofit/>
-          </a:bodyPr>
+          <a:bodyPr/>
           <a:lstStyle/>
           <a:p>
             <a:r>
-              <a:rPr lang="en-US" sz="5400" b="1">
-                <a:solidFill>
-                  <a:srgbClr val="FF0000"/>
-                </a:solidFill>
-              </a:rPr>
-              <a:t>View Models</a:t>
+              <a:rPr lang="en-US" b="1">
+                <a:solidFill>
+                  <a:srgbClr val="FFFF00"/>
+                </a:solidFill>
+              </a:rPr>
+              <a:t>TWF</a:t>
+            </a:r>
+            <a:r>
+              <a:rPr lang="en-US" b="1"/>
+              <a:t>.</a:t>
+            </a:r>
+            <a:r>
+              <a:rPr lang="en-US" b="1">
+                <a:solidFill>
+                  <a:srgbClr val="00B0F0"/>
+                </a:solidFill>
+              </a:rPr>
+              <a:t>Flow_Sanctionscanner_ByID</a:t>
+            </a:r>
+          </a:p>
+        </p:txBody>
+      </p:sp>
+      <p:sp>
+        <p:nvSpPr>
+          <p:cNvPr id="3" name="Content Placeholder 2">
+            <a:extLst>
+              <a:ext uri="{FF2B5EF4-FFF2-40B4-BE49-F238E27FC236}">
+                <a16:creationId xmlns:a16="http://schemas.microsoft.com/office/drawing/2014/main" id="{D442004E-AE66-C2E6-572A-B949B49C0D5D}"/>
+              </a:ext>
+            </a:extLst>
+          </p:cNvPr>
+          <p:cNvSpPr>
+            <a:spLocks noGrp="1"/>
+          </p:cNvSpPr>
+          <p:nvPr>
+            <p:ph idx="1"/>
+          </p:nvPr>
+        </p:nvSpPr>
+        <p:spPr>
+          <a:xfrm>
+            <a:off x="193040" y="863600"/>
+            <a:ext cx="11074517" cy="5506719"/>
+          </a:xfrm>
+        </p:spPr>
+        <p:txBody>
+          <a:bodyPr/>
+          <a:lstStyle/>
+          <a:p>
+            <a:r>
+              <a:rPr lang="en-US" b="1"/>
+              <a:t>This table represents the result of AML </a:t>
             </a:r>
           </a:p>
         </p:txBody>
@@ -29836,7 +30278,7 @@
     </p:spTree>
     <p:extLst>
       <p:ext uri="{BB962C8B-B14F-4D97-AF65-F5344CB8AC3E}">
-        <p14:creationId xmlns:p14="http://schemas.microsoft.com/office/powerpoint/2010/main" val="319315269"/>
+        <p14:creationId xmlns:p14="http://schemas.microsoft.com/office/powerpoint/2010/main" val="2029403942"/>
       </p:ext>
     </p:extLst>
   </p:cSld>
@@ -29851,7 +30293,13 @@
   <p:cSld>
     <p:spTree>
       <p:nvGrpSpPr>
-        <p:cNvPr id="1" name=""/>
+        <p:cNvPr id="1" name="">
+          <a:extLst>
+            <a:ext uri="{FF2B5EF4-FFF2-40B4-BE49-F238E27FC236}">
+              <a16:creationId xmlns:a16="http://schemas.microsoft.com/office/drawing/2014/main" id="{026EC314-3C68-09E4-C3BD-CFEDD763CB1D}"/>
+            </a:ext>
+          </a:extLst>
+        </p:cNvPr>
         <p:cNvGrpSpPr/>
         <p:nvPr/>
       </p:nvGrpSpPr>
@@ -29868,7 +30316,7 @@
           <p:cNvPr id="2" name="Title 1">
             <a:extLst>
               <a:ext uri="{FF2B5EF4-FFF2-40B4-BE49-F238E27FC236}">
-                <a16:creationId xmlns:a16="http://schemas.microsoft.com/office/drawing/2014/main" id="{15CF4AA3-7E79-717B-411A-17118B60AF4F}"/>
+                <a16:creationId xmlns:a16="http://schemas.microsoft.com/office/drawing/2014/main" id="{A469C956-03BC-201C-5865-88EFAC2FAA47}"/>
               </a:ext>
             </a:extLst>
           </p:cNvPr>
@@ -29881,164 +30329,23 @@
         </p:nvSpPr>
         <p:spPr>
           <a:xfrm>
-            <a:off x="919119" y="0"/>
-            <a:ext cx="10353762" cy="609600"/>
+            <a:off x="913795" y="609600"/>
+            <a:ext cx="10353762" cy="5008880"/>
           </a:xfrm>
         </p:spPr>
         <p:txBody>
           <a:bodyPr>
-            <a:normAutofit fontScale="90000"/>
+            <a:normAutofit/>
           </a:bodyPr>
           <a:lstStyle/>
           <a:p>
             <a:r>
-              <a:rPr lang="en-US" b="1">
-                <a:solidFill>
-                  <a:srgbClr val="00B0F0"/>
-                </a:solidFill>
-              </a:rPr>
-              <a:t>FlowActionsNameStepFromTo</a:t>
-            </a:r>
-          </a:p>
-        </p:txBody>
-      </p:sp>
-      <p:sp>
-        <p:nvSpPr>
-          <p:cNvPr id="3" name="Content Placeholder 2">
-            <a:extLst>
-              <a:ext uri="{FF2B5EF4-FFF2-40B4-BE49-F238E27FC236}">
-                <a16:creationId xmlns:a16="http://schemas.microsoft.com/office/drawing/2014/main" id="{E961D5DF-7A65-7C3F-03D0-4C2653EC27D1}"/>
-              </a:ext>
-            </a:extLst>
-          </p:cNvPr>
-          <p:cNvSpPr>
-            <a:spLocks noGrp="1"/>
-          </p:cNvSpPr>
-          <p:nvPr>
-            <p:ph idx="1"/>
-          </p:nvPr>
-        </p:nvSpPr>
-        <p:spPr>
-          <a:xfrm>
-            <a:off x="176980" y="609601"/>
-            <a:ext cx="11857703" cy="6145160"/>
-          </a:xfrm>
-        </p:spPr>
-        <p:txBody>
-          <a:bodyPr>
-            <a:normAutofit fontScale="92500" lnSpcReduction="10000"/>
-          </a:bodyPr>
-          <a:lstStyle/>
-          <a:p>
-            <a:r>
-              <a:rPr lang="en-US" sz="1800" b="1">
-                <a:solidFill>
-                  <a:srgbClr val="00B0F0"/>
-                </a:solidFill>
-              </a:rPr>
-              <a:t>Code_FA_from</a:t>
-            </a:r>
-            <a:r>
-              <a:rPr lang="en-US" sz="1800"/>
-              <a:t>: int  </a:t>
-            </a:r>
-          </a:p>
-          <a:p>
-            <a:r>
-              <a:rPr lang="en-US" sz="1800" b="1">
-                <a:solidFill>
-                  <a:srgbClr val="00B0F0"/>
-                </a:solidFill>
-              </a:rPr>
-              <a:t>Name_stepARFrom</a:t>
-            </a:r>
-            <a:r>
-              <a:rPr lang="en-US" sz="1800"/>
-              <a:t>: string  </a:t>
-            </a:r>
-          </a:p>
-          <a:p>
-            <a:r>
-              <a:rPr lang="en-US" sz="1800"/>
-              <a:t>Name_stepENFrom: string  </a:t>
-            </a:r>
-          </a:p>
-          <a:p>
-            <a:r>
-              <a:rPr lang="en-US" sz="1800"/>
-              <a:t>Definition_numberFrom: string  </a:t>
-            </a:r>
-          </a:p>
-          <a:p>
-            <a:r>
-              <a:rPr lang="en-US" sz="1800"/>
-              <a:t>Code_FA_to: int  </a:t>
-            </a:r>
-          </a:p>
-          <a:p>
-            <a:r>
-              <a:rPr lang="en-US" sz="1800"/>
-              <a:t>Name_stepARTo: string  </a:t>
-            </a:r>
-          </a:p>
-          <a:p>
-            <a:r>
-              <a:rPr lang="en-US" sz="1800"/>
-              <a:t>Name_stepENTo: string  </a:t>
-            </a:r>
-          </a:p>
-          <a:p>
-            <a:r>
-              <a:rPr lang="en-US" sz="1800"/>
-              <a:t>Definition_numberTo: string  </a:t>
-            </a:r>
-          </a:p>
-          <a:p>
-            <a:r>
-              <a:rPr lang="en-US" sz="1800"/>
-              <a:t>Type_code: int  </a:t>
-            </a:r>
-          </a:p>
-          <a:p>
-            <a:r>
-              <a:rPr lang="en-US" sz="1800"/>
-              <a:t>JobCode_FA_From: int  </a:t>
-            </a:r>
-          </a:p>
-          <a:p>
-            <a:r>
-              <a:rPr lang="en-US" sz="1800"/>
-              <a:t>JobCode_FA_to: int  </a:t>
-            </a:r>
-          </a:p>
-          <a:p>
-            <a:r>
-              <a:rPr lang="en-US" sz="1800"/>
-              <a:t>Accept: bool  </a:t>
-            </a:r>
-          </a:p>
-          <a:p>
-            <a:r>
-              <a:rPr lang="en-US" sz="1800"/>
-              <a:t>Reject: bool  </a:t>
-            </a:r>
-          </a:p>
-          <a:p>
-            <a:r>
-              <a:rPr lang="en-US" sz="1800"/>
-              <a:t>Final_Reject: bool  </a:t>
-            </a:r>
-          </a:p>
-          <a:p>
-            <a:r>
-              <a:rPr lang="en-US" sz="1800"/>
-              <a:t>Reject_Guaranter: bool  </a:t>
-            </a:r>
-          </a:p>
-          <a:p>
-            <a:r>
-              <a:rPr lang="en-US" sz="1800"/>
-              <a:t>Num_StepOrder: int</a:t>
+              <a:rPr lang="en-US" sz="6600" b="1">
+                <a:solidFill>
+                  <a:srgbClr val="FF0000"/>
+                </a:solidFill>
+              </a:rPr>
+              <a:t>End AML</a:t>
             </a:r>
           </a:p>
         </p:txBody>
@@ -30046,7 +30353,7 @@
     </p:spTree>
     <p:extLst>
       <p:ext uri="{BB962C8B-B14F-4D97-AF65-F5344CB8AC3E}">
-        <p14:creationId xmlns:p14="http://schemas.microsoft.com/office/powerpoint/2010/main" val="953628559"/>
+        <p14:creationId xmlns:p14="http://schemas.microsoft.com/office/powerpoint/2010/main" val="2432522804"/>
       </p:ext>
     </p:extLst>
   </p:cSld>
@@ -30078,7 +30385,7 @@
           <p:cNvPr id="2" name="Title 1">
             <a:extLst>
               <a:ext uri="{FF2B5EF4-FFF2-40B4-BE49-F238E27FC236}">
-                <a16:creationId xmlns:a16="http://schemas.microsoft.com/office/drawing/2014/main" id="{54F2869F-AEE9-B9E1-894D-0E5F9A4F135E}"/>
+                <a16:creationId xmlns:a16="http://schemas.microsoft.com/office/drawing/2014/main" id="{12BC1E88-436E-358B-0172-0873ADFF98D4}"/>
               </a:ext>
             </a:extLst>
           </p:cNvPr>
@@ -30091,341 +30398,23 @@
         </p:nvSpPr>
         <p:spPr>
           <a:xfrm>
-            <a:off x="913795" y="0"/>
-            <a:ext cx="10353762" cy="616085"/>
+            <a:off x="344129" y="2104103"/>
+            <a:ext cx="11503742" cy="1445342"/>
           </a:xfrm>
         </p:spPr>
         <p:txBody>
           <a:bodyPr>
-            <a:normAutofit fontScale="90000"/>
+            <a:normAutofit/>
           </a:bodyPr>
           <a:lstStyle/>
           <a:p>
             <a:r>
-              <a:rPr lang="en-US" b="1">
-                <a:solidFill>
-                  <a:srgbClr val="00B0F0"/>
-                </a:solidFill>
-              </a:rPr>
-              <a:t>FundingData</a:t>
-            </a:r>
-          </a:p>
-        </p:txBody>
-      </p:sp>
-      <p:sp>
-        <p:nvSpPr>
-          <p:cNvPr id="3" name="Content Placeholder 2">
-            <a:extLst>
-              <a:ext uri="{FF2B5EF4-FFF2-40B4-BE49-F238E27FC236}">
-                <a16:creationId xmlns:a16="http://schemas.microsoft.com/office/drawing/2014/main" id="{F35E5826-09F5-EDF6-ED1F-949D33282C40}"/>
-              </a:ext>
-            </a:extLst>
-          </p:cNvPr>
-          <p:cNvSpPr>
-            <a:spLocks noGrp="1"/>
-          </p:cNvSpPr>
-          <p:nvPr>
-            <p:ph idx="1"/>
-          </p:nvPr>
-        </p:nvSpPr>
-        <p:spPr>
-          <a:xfrm>
-            <a:off x="107004" y="616085"/>
-            <a:ext cx="11160553" cy="6086272"/>
-          </a:xfrm>
-        </p:spPr>
-        <p:txBody>
-          <a:bodyPr numCol="2"/>
-          <a:lstStyle/>
-          <a:p>
-            <a:r>
-              <a:rPr lang="en-US"/>
-              <a:t>decimal </a:t>
-            </a:r>
-            <a:r>
-              <a:rPr lang="en-US" b="1">
-                <a:solidFill>
-                  <a:srgbClr val="00B050"/>
-                </a:solidFill>
-              </a:rPr>
-              <a:t>Request_id</a:t>
-            </a:r>
-          </a:p>
-          <a:p>
-            <a:r>
-              <a:rPr lang="en-US"/>
-              <a:t>DateTime </a:t>
-            </a:r>
-            <a:r>
-              <a:rPr lang="en-US" b="1">
-                <a:solidFill>
-                  <a:srgbClr val="00B050"/>
-                </a:solidFill>
-              </a:rPr>
-              <a:t>Date_creation_request</a:t>
-            </a:r>
-          </a:p>
-          <a:p>
-            <a:r>
-              <a:rPr lang="en-US"/>
-              <a:t>string </a:t>
-            </a:r>
-            <a:r>
-              <a:rPr lang="en-US" b="1">
-                <a:solidFill>
-                  <a:srgbClr val="00B050"/>
-                </a:solidFill>
-              </a:rPr>
-              <a:t>Name_step_to</a:t>
-            </a:r>
-          </a:p>
-          <a:p>
-            <a:r>
-              <a:rPr lang="en-US"/>
-              <a:t>string </a:t>
-            </a:r>
-            <a:r>
-              <a:rPr lang="en-US" b="1">
-                <a:solidFill>
-                  <a:srgbClr val="00B050"/>
-                </a:solidFill>
-              </a:rPr>
-              <a:t>Status_two</a:t>
-            </a:r>
-          </a:p>
-          <a:p>
-            <a:r>
-              <a:rPr lang="en-US"/>
-              <a:t>int </a:t>
-            </a:r>
-            <a:r>
-              <a:rPr lang="en-US" b="1">
-                <a:solidFill>
-                  <a:srgbClr val="00B050"/>
-                </a:solidFill>
-              </a:rPr>
-              <a:t>product_Id</a:t>
-            </a:r>
-          </a:p>
-          <a:p>
-            <a:r>
-              <a:rPr lang="en-US"/>
-              <a:t>string </a:t>
-            </a:r>
-            <a:r>
-              <a:rPr lang="en-US" b="1">
-                <a:solidFill>
-                  <a:srgbClr val="00B050"/>
-                </a:solidFill>
-              </a:rPr>
-              <a:t>product_name_AR</a:t>
-            </a:r>
-          </a:p>
-          <a:p>
-            <a:r>
-              <a:rPr lang="en-US"/>
-              <a:t>string </a:t>
-            </a:r>
-            <a:r>
-              <a:rPr lang="en-US" b="1">
-                <a:solidFill>
-                  <a:srgbClr val="00B050"/>
-                </a:solidFill>
-              </a:rPr>
-              <a:t>product_name_Eng</a:t>
-            </a:r>
-          </a:p>
-          <a:p>
-            <a:r>
-              <a:rPr lang="en-US"/>
-              <a:t>decimal </a:t>
-            </a:r>
-            <a:r>
-              <a:rPr lang="en-US" b="1">
-                <a:solidFill>
-                  <a:srgbClr val="00B050"/>
-                </a:solidFill>
-              </a:rPr>
-              <a:t>Customer_ID_C</a:t>
-            </a:r>
-          </a:p>
-          <a:p>
-            <a:r>
-              <a:rPr lang="en-US"/>
-              <a:t>string</a:t>
-            </a:r>
-            <a:r>
-              <a:rPr lang="en-US" b="1">
-                <a:solidFill>
-                  <a:srgbClr val="00B050"/>
-                </a:solidFill>
-              </a:rPr>
-              <a:t> CustomerFullName</a:t>
-            </a:r>
-          </a:p>
-          <a:p>
-            <a:r>
-              <a:rPr lang="en-US"/>
-              <a:t>decimal </a:t>
-            </a:r>
-            <a:r>
-              <a:rPr lang="en-US" b="1">
-                <a:solidFill>
-                  <a:srgbClr val="00B050"/>
-                </a:solidFill>
-              </a:rPr>
-              <a:t>CustomerQID</a:t>
-            </a:r>
-          </a:p>
-          <a:p>
-            <a:r>
-              <a:rPr lang="en-US"/>
-              <a:t>string </a:t>
-            </a:r>
-            <a:r>
-              <a:rPr lang="en-US" b="1">
-                <a:solidFill>
-                  <a:srgbClr val="00B050"/>
-                </a:solidFill>
-              </a:rPr>
-              <a:t>Enterprise_ID</a:t>
-            </a:r>
-          </a:p>
-          <a:p>
-            <a:r>
-              <a:rPr lang="en-US"/>
-              <a:t>string </a:t>
-            </a:r>
-            <a:r>
-              <a:rPr lang="en-US" b="1">
-                <a:solidFill>
-                  <a:srgbClr val="00B050"/>
-                </a:solidFill>
-              </a:rPr>
-              <a:t>Brand_name</a:t>
-            </a:r>
-          </a:p>
-          <a:p>
-            <a:r>
-              <a:rPr lang="en-US" b="1"/>
-              <a:t>int?</a:t>
-            </a:r>
-            <a:r>
-              <a:rPr lang="en-US" b="1">
-                <a:solidFill>
-                  <a:srgbClr val="00B050"/>
-                </a:solidFill>
-              </a:rPr>
-              <a:t> UserId_from</a:t>
-            </a:r>
-          </a:p>
-          <a:p>
-            <a:r>
-              <a:rPr lang="en-US" b="1">
-                <a:solidFill>
-                  <a:srgbClr val="00B050"/>
-                </a:solidFill>
-              </a:rPr>
-              <a:t>UserfromNameAR</a:t>
-            </a:r>
-          </a:p>
-          <a:p>
-            <a:r>
-              <a:rPr lang="en-US" b="1">
-                <a:solidFill>
-                  <a:srgbClr val="00B050"/>
-                </a:solidFill>
-              </a:rPr>
-              <a:t>UserfromNameEng</a:t>
-            </a:r>
-          </a:p>
-          <a:p>
-            <a:r>
-              <a:rPr lang="en-US"/>
-              <a:t>List&lt;</a:t>
-            </a:r>
-            <a:r>
-              <a:rPr lang="en-US" b="1">
-                <a:solidFill>
-                  <a:srgbClr val="00B0F0"/>
-                </a:solidFill>
-              </a:rPr>
-              <a:t>GuarVM</a:t>
-            </a:r>
-            <a:r>
-              <a:rPr lang="en-US"/>
-              <a:t>&gt; </a:t>
-            </a:r>
-            <a:r>
-              <a:rPr lang="en-US" b="1">
-                <a:solidFill>
-                  <a:srgbClr val="00B050"/>
-                </a:solidFill>
-              </a:rPr>
-              <a:t>Guaranters</a:t>
-            </a:r>
-          </a:p>
-          <a:p>
-            <a:pPr lvl="1"/>
-            <a:r>
-              <a:rPr lang="en-US" sz="1600"/>
-              <a:t>decimal Guaranter_ID</a:t>
-            </a:r>
-          </a:p>
-          <a:p>
-            <a:pPr lvl="1"/>
-            <a:r>
-              <a:rPr lang="en-US" sz="1600"/>
-              <a:t>string GuaranterQID</a:t>
-            </a:r>
-          </a:p>
-          <a:p>
-            <a:pPr lvl="1"/>
-            <a:r>
-              <a:rPr lang="en-US" sz="1600"/>
-              <a:t>string GuaranterName</a:t>
-            </a:r>
-          </a:p>
-          <a:p>
-            <a:pPr lvl="1"/>
-            <a:r>
-              <a:rPr lang="en-US" sz="1600"/>
-              <a:t>int Serial</a:t>
-            </a:r>
-          </a:p>
-          <a:p>
-            <a:pPr lvl="1"/>
-            <a:r>
-              <a:rPr lang="en-US" sz="1600"/>
-              <a:t>int code_relation</a:t>
-            </a:r>
-          </a:p>
-          <a:p>
-            <a:r>
-              <a:rPr lang="en-US" b="1">
-                <a:solidFill>
-                  <a:srgbClr val="00B050"/>
-                </a:solidFill>
-              </a:rPr>
-              <a:t>BranchId</a:t>
-            </a:r>
-          </a:p>
-          <a:p>
-            <a:r>
-              <a:rPr lang="en-US" b="1">
-                <a:solidFill>
-                  <a:schemeClr val="tx1"/>
-                </a:solidFill>
-              </a:rPr>
-              <a:t>DateTime?</a:t>
-            </a:r>
-            <a:r>
-              <a:rPr lang="en-US" b="1">
-                <a:solidFill>
-                  <a:srgbClr val="00B050"/>
-                </a:solidFill>
-              </a:rPr>
-              <a:t> Date_Assigned</a:t>
+              <a:rPr lang="en-US" sz="5400" b="1">
+                <a:solidFill>
+                  <a:srgbClr val="FF0000"/>
+                </a:solidFill>
+              </a:rPr>
+              <a:t>View Models</a:t>
             </a:r>
           </a:p>
         </p:txBody>
@@ -30433,7 +30422,7 @@
     </p:spTree>
     <p:extLst>
       <p:ext uri="{BB962C8B-B14F-4D97-AF65-F5344CB8AC3E}">
-        <p14:creationId xmlns:p14="http://schemas.microsoft.com/office/powerpoint/2010/main" val="1617673991"/>
+        <p14:creationId xmlns:p14="http://schemas.microsoft.com/office/powerpoint/2010/main" val="319315269"/>
       </p:ext>
     </p:extLst>
   </p:cSld>
@@ -30465,7 +30454,7 @@
           <p:cNvPr id="2" name="Title 1">
             <a:extLst>
               <a:ext uri="{FF2B5EF4-FFF2-40B4-BE49-F238E27FC236}">
-                <a16:creationId xmlns:a16="http://schemas.microsoft.com/office/drawing/2014/main" id="{BDB1DEFA-EFC8-8107-9B75-16D527DC2BC7}"/>
+                <a16:creationId xmlns:a16="http://schemas.microsoft.com/office/drawing/2014/main" id="{15CF4AA3-7E79-717B-411A-17118B60AF4F}"/>
               </a:ext>
             </a:extLst>
           </p:cNvPr>
@@ -30478,17 +30467,23 @@
         </p:nvSpPr>
         <p:spPr>
           <a:xfrm>
-            <a:off x="913795" y="0"/>
-            <a:ext cx="10353762" cy="875071"/>
+            <a:off x="919119" y="0"/>
+            <a:ext cx="10353762" cy="609600"/>
           </a:xfrm>
         </p:spPr>
         <p:txBody>
-          <a:bodyPr/>
+          <a:bodyPr>
+            <a:normAutofit fontScale="90000"/>
+          </a:bodyPr>
           <a:lstStyle/>
           <a:p>
             <a:r>
-              <a:rPr lang="en-US" b="1"/>
-              <a:t>FundingDataVM</a:t>
+              <a:rPr lang="en-US" b="1">
+                <a:solidFill>
+                  <a:srgbClr val="00B0F0"/>
+                </a:solidFill>
+              </a:rPr>
+              <a:t>FlowActionsNameStepFromTo</a:t>
             </a:r>
           </a:p>
         </p:txBody>
@@ -30498,7 +30493,7 @@
           <p:cNvPr id="3" name="Content Placeholder 2">
             <a:extLst>
               <a:ext uri="{FF2B5EF4-FFF2-40B4-BE49-F238E27FC236}">
-                <a16:creationId xmlns:a16="http://schemas.microsoft.com/office/drawing/2014/main" id="{5F645AD0-9629-717B-D7CD-C82F6BF6F8D2}"/>
+                <a16:creationId xmlns:a16="http://schemas.microsoft.com/office/drawing/2014/main" id="{E961D5DF-7A65-7C3F-03D0-4C2653EC27D1}"/>
               </a:ext>
             </a:extLst>
           </p:cNvPr>
@@ -30511,58 +30506,133 @@
         </p:nvSpPr>
         <p:spPr>
           <a:xfrm>
-            <a:off x="255638" y="1732449"/>
-            <a:ext cx="11464413" cy="4343886"/>
+            <a:off x="176980" y="609601"/>
+            <a:ext cx="11857703" cy="6145160"/>
           </a:xfrm>
         </p:spPr>
         <p:txBody>
-          <a:bodyPr/>
+          <a:bodyPr>
+            <a:normAutofit fontScale="92500" lnSpcReduction="10000"/>
+          </a:bodyPr>
           <a:lstStyle/>
           <a:p>
-            <a:endParaRPr lang="en-US"/>
-          </a:p>
-          <a:p>
-            <a:endParaRPr lang="en-US"/>
-          </a:p>
-          <a:p>
-            <a:endParaRPr lang="en-US"/>
+            <a:r>
+              <a:rPr lang="en-US" sz="1800" b="1">
+                <a:solidFill>
+                  <a:srgbClr val="00B0F0"/>
+                </a:solidFill>
+              </a:rPr>
+              <a:t>Code_FA_from</a:t>
+            </a:r>
+            <a:r>
+              <a:rPr lang="en-US" sz="1800"/>
+              <a:t>: int  </a:t>
+            </a:r>
+          </a:p>
+          <a:p>
+            <a:r>
+              <a:rPr lang="en-US" sz="1800" b="1">
+                <a:solidFill>
+                  <a:srgbClr val="00B0F0"/>
+                </a:solidFill>
+              </a:rPr>
+              <a:t>Name_stepARFrom</a:t>
+            </a:r>
+            <a:r>
+              <a:rPr lang="en-US" sz="1800"/>
+              <a:t>: string  </a:t>
+            </a:r>
+          </a:p>
+          <a:p>
+            <a:r>
+              <a:rPr lang="en-US" sz="1800"/>
+              <a:t>Name_stepENFrom: string  </a:t>
+            </a:r>
+          </a:p>
+          <a:p>
+            <a:r>
+              <a:rPr lang="en-US" sz="1800"/>
+              <a:t>Definition_numberFrom: string  </a:t>
+            </a:r>
+          </a:p>
+          <a:p>
+            <a:r>
+              <a:rPr lang="en-US" sz="1800"/>
+              <a:t>Code_FA_to: int  </a:t>
+            </a:r>
+          </a:p>
+          <a:p>
+            <a:r>
+              <a:rPr lang="en-US" sz="1800"/>
+              <a:t>Name_stepARTo: string  </a:t>
+            </a:r>
+          </a:p>
+          <a:p>
+            <a:r>
+              <a:rPr lang="en-US" sz="1800"/>
+              <a:t>Name_stepENTo: string  </a:t>
+            </a:r>
+          </a:p>
+          <a:p>
+            <a:r>
+              <a:rPr lang="en-US" sz="1800"/>
+              <a:t>Definition_numberTo: string  </a:t>
+            </a:r>
+          </a:p>
+          <a:p>
+            <a:r>
+              <a:rPr lang="en-US" sz="1800"/>
+              <a:t>Type_code: int  </a:t>
+            </a:r>
+          </a:p>
+          <a:p>
+            <a:r>
+              <a:rPr lang="en-US" sz="1800"/>
+              <a:t>JobCode_FA_From: int  </a:t>
+            </a:r>
+          </a:p>
+          <a:p>
+            <a:r>
+              <a:rPr lang="en-US" sz="1800"/>
+              <a:t>JobCode_FA_to: int  </a:t>
+            </a:r>
+          </a:p>
+          <a:p>
+            <a:r>
+              <a:rPr lang="en-US" sz="1800"/>
+              <a:t>Accept: bool  </a:t>
+            </a:r>
+          </a:p>
+          <a:p>
+            <a:r>
+              <a:rPr lang="en-US" sz="1800"/>
+              <a:t>Reject: bool  </a:t>
+            </a:r>
+          </a:p>
+          <a:p>
+            <a:r>
+              <a:rPr lang="en-US" sz="1800"/>
+              <a:t>Final_Reject: bool  </a:t>
+            </a:r>
+          </a:p>
+          <a:p>
+            <a:r>
+              <a:rPr lang="en-US" sz="1800"/>
+              <a:t>Reject_Guaranter: bool  </a:t>
+            </a:r>
+          </a:p>
+          <a:p>
+            <a:r>
+              <a:rPr lang="en-US" sz="1800"/>
+              <a:t>Num_StepOrder: int</a:t>
+            </a:r>
           </a:p>
         </p:txBody>
       </p:sp>
-      <p:pic>
-        <p:nvPicPr>
-          <p:cNvPr id="5" name="Picture 4">
-            <a:extLst>
-              <a:ext uri="{FF2B5EF4-FFF2-40B4-BE49-F238E27FC236}">
-                <a16:creationId xmlns:a16="http://schemas.microsoft.com/office/drawing/2014/main" id="{EE64999E-B922-445E-935D-34953D92BC50}"/>
-              </a:ext>
-            </a:extLst>
-          </p:cNvPr>
-          <p:cNvPicPr>
-            <a:picLocks noChangeAspect="1"/>
-          </p:cNvPicPr>
-          <p:nvPr/>
-        </p:nvPicPr>
-        <p:blipFill>
-          <a:blip r:embed="rId2"/>
-          <a:stretch>
-            <a:fillRect/>
-          </a:stretch>
-        </p:blipFill>
-        <p:spPr>
-          <a:xfrm>
-            <a:off x="913794" y="2137708"/>
-            <a:ext cx="6062245" cy="3388021"/>
-          </a:xfrm>
-          <a:prstGeom prst="rect">
-            <a:avLst/>
-          </a:prstGeom>
-        </p:spPr>
-      </p:pic>
     </p:spTree>
     <p:extLst>
       <p:ext uri="{BB962C8B-B14F-4D97-AF65-F5344CB8AC3E}">
-        <p14:creationId xmlns:p14="http://schemas.microsoft.com/office/powerpoint/2010/main" val="4026511452"/>
+        <p14:creationId xmlns:p14="http://schemas.microsoft.com/office/powerpoint/2010/main" val="953628559"/>
       </p:ext>
     </p:extLst>
   </p:cSld>
@@ -30594,7 +30664,7 @@
           <p:cNvPr id="2" name="Title 1">
             <a:extLst>
               <a:ext uri="{FF2B5EF4-FFF2-40B4-BE49-F238E27FC236}">
-                <a16:creationId xmlns:a16="http://schemas.microsoft.com/office/drawing/2014/main" id="{34146355-124E-3796-C27E-50B1FEE9ADD5}"/>
+                <a16:creationId xmlns:a16="http://schemas.microsoft.com/office/drawing/2014/main" id="{54F2869F-AEE9-B9E1-894D-0E5F9A4F135E}"/>
               </a:ext>
             </a:extLst>
           </p:cNvPr>
@@ -30608,7 +30678,7 @@
         <p:spPr>
           <a:xfrm>
             <a:off x="913795" y="0"/>
-            <a:ext cx="10353762" cy="688258"/>
+            <a:ext cx="10353762" cy="616085"/>
           </a:xfrm>
         </p:spPr>
         <p:txBody>
@@ -30620,10 +30690,10 @@
             <a:r>
               <a:rPr lang="en-US" b="1">
                 <a:solidFill>
-                  <a:srgbClr val="FF0000"/>
-                </a:solidFill>
-              </a:rPr>
-              <a:t>ProdVM</a:t>
+                  <a:srgbClr val="00B0F0"/>
+                </a:solidFill>
+              </a:rPr>
+              <a:t>FundingData</a:t>
             </a:r>
           </a:p>
         </p:txBody>
@@ -30633,7 +30703,7 @@
           <p:cNvPr id="3" name="Content Placeholder 2">
             <a:extLst>
               <a:ext uri="{FF2B5EF4-FFF2-40B4-BE49-F238E27FC236}">
-                <a16:creationId xmlns:a16="http://schemas.microsoft.com/office/drawing/2014/main" id="{E2533BB6-2BA2-1C59-7D9D-054CC9AB8FB7}"/>
+                <a16:creationId xmlns:a16="http://schemas.microsoft.com/office/drawing/2014/main" id="{F35E5826-09F5-EDF6-ED1F-949D33282C40}"/>
               </a:ext>
             </a:extLst>
           </p:cNvPr>
@@ -30646,142 +30716,302 @@
         </p:nvSpPr>
         <p:spPr>
           <a:xfrm>
-            <a:off x="363794" y="688257"/>
-            <a:ext cx="11602064" cy="5928853"/>
+            <a:off x="107004" y="616085"/>
+            <a:ext cx="11160553" cy="6086272"/>
           </a:xfrm>
         </p:spPr>
         <p:txBody>
-          <a:bodyPr>
-            <a:normAutofit/>
-          </a:bodyPr>
+          <a:bodyPr numCol="2"/>
           <a:lstStyle/>
           <a:p>
-            <a:pPr marL="36900" indent="0">
-              <a:buNone/>
-            </a:pPr>
-            <a:r>
-              <a:rPr lang="en-US"/>
-              <a:t>public class </a:t>
-            </a:r>
-            <a:r>
-              <a:rPr lang="en-US" sz="2400" b="1">
+            <a:r>
+              <a:rPr lang="en-US"/>
+              <a:t>decimal </a:t>
+            </a:r>
+            <a:r>
+              <a:rPr lang="en-US" b="1">
                 <a:solidFill>
                   <a:srgbClr val="00B050"/>
                 </a:solidFill>
               </a:rPr>
-              <a:t>ProdVM</a:t>
-            </a:r>
-            <a:r>
-              <a:rPr lang="en-US"/>
-              <a:t> {</a:t>
-            </a:r>
-          </a:p>
-          <a:p>
-            <a:pPr marL="36900" indent="0">
-              <a:buNone/>
-            </a:pPr>
-            <a:r>
-              <a:rPr lang="en-US"/>
-              <a:t>        public </a:t>
-            </a:r>
-            <a:r>
-              <a:rPr lang="en-US">
+              <a:t>Request_id</a:t>
+            </a:r>
+          </a:p>
+          <a:p>
+            <a:r>
+              <a:rPr lang="en-US"/>
+              <a:t>DateTime </a:t>
+            </a:r>
+            <a:r>
+              <a:rPr lang="en-US" b="1">
+                <a:solidFill>
+                  <a:srgbClr val="00B050"/>
+                </a:solidFill>
+              </a:rPr>
+              <a:t>Date_creation_request</a:t>
+            </a:r>
+          </a:p>
+          <a:p>
+            <a:r>
+              <a:rPr lang="en-US"/>
+              <a:t>string </a:t>
+            </a:r>
+            <a:r>
+              <a:rPr lang="en-US" b="1">
+                <a:solidFill>
+                  <a:srgbClr val="00B050"/>
+                </a:solidFill>
+              </a:rPr>
+              <a:t>Name_step_to</a:t>
+            </a:r>
+          </a:p>
+          <a:p>
+            <a:r>
+              <a:rPr lang="en-US"/>
+              <a:t>string </a:t>
+            </a:r>
+            <a:r>
+              <a:rPr lang="en-US" b="1">
+                <a:solidFill>
+                  <a:srgbClr val="00B050"/>
+                </a:solidFill>
+              </a:rPr>
+              <a:t>Status_two</a:t>
+            </a:r>
+          </a:p>
+          <a:p>
+            <a:r>
+              <a:rPr lang="en-US"/>
+              <a:t>int </a:t>
+            </a:r>
+            <a:r>
+              <a:rPr lang="en-US" b="1">
+                <a:solidFill>
+                  <a:srgbClr val="00B050"/>
+                </a:solidFill>
+              </a:rPr>
+              <a:t>product_Id</a:t>
+            </a:r>
+          </a:p>
+          <a:p>
+            <a:r>
+              <a:rPr lang="en-US"/>
+              <a:t>string </a:t>
+            </a:r>
+            <a:r>
+              <a:rPr lang="en-US" b="1">
+                <a:solidFill>
+                  <a:srgbClr val="00B050"/>
+                </a:solidFill>
+              </a:rPr>
+              <a:t>product_name_AR</a:t>
+            </a:r>
+          </a:p>
+          <a:p>
+            <a:r>
+              <a:rPr lang="en-US"/>
+              <a:t>string </a:t>
+            </a:r>
+            <a:r>
+              <a:rPr lang="en-US" b="1">
+                <a:solidFill>
+                  <a:srgbClr val="00B050"/>
+                </a:solidFill>
+              </a:rPr>
+              <a:t>product_name_Eng</a:t>
+            </a:r>
+          </a:p>
+          <a:p>
+            <a:r>
+              <a:rPr lang="en-US"/>
+              <a:t>decimal </a:t>
+            </a:r>
+            <a:r>
+              <a:rPr lang="en-US" b="1">
+                <a:solidFill>
+                  <a:srgbClr val="00B050"/>
+                </a:solidFill>
+              </a:rPr>
+              <a:t>Customer_ID_C</a:t>
+            </a:r>
+          </a:p>
+          <a:p>
+            <a:r>
+              <a:rPr lang="en-US"/>
+              <a:t>string</a:t>
+            </a:r>
+            <a:r>
+              <a:rPr lang="en-US" b="1">
+                <a:solidFill>
+                  <a:srgbClr val="00B050"/>
+                </a:solidFill>
+              </a:rPr>
+              <a:t> CustomerFullName</a:t>
+            </a:r>
+          </a:p>
+          <a:p>
+            <a:r>
+              <a:rPr lang="en-US"/>
+              <a:t>decimal </a:t>
+            </a:r>
+            <a:r>
+              <a:rPr lang="en-US" b="1">
+                <a:solidFill>
+                  <a:srgbClr val="00B050"/>
+                </a:solidFill>
+              </a:rPr>
+              <a:t>CustomerQID</a:t>
+            </a:r>
+          </a:p>
+          <a:p>
+            <a:r>
+              <a:rPr lang="en-US"/>
+              <a:t>string </a:t>
+            </a:r>
+            <a:r>
+              <a:rPr lang="en-US" b="1">
+                <a:solidFill>
+                  <a:srgbClr val="00B050"/>
+                </a:solidFill>
+              </a:rPr>
+              <a:t>Enterprise_ID</a:t>
+            </a:r>
+          </a:p>
+          <a:p>
+            <a:r>
+              <a:rPr lang="en-US"/>
+              <a:t>string </a:t>
+            </a:r>
+            <a:r>
+              <a:rPr lang="en-US" b="1">
+                <a:solidFill>
+                  <a:srgbClr val="00B050"/>
+                </a:solidFill>
+              </a:rPr>
+              <a:t>Brand_name</a:t>
+            </a:r>
+          </a:p>
+          <a:p>
+            <a:r>
+              <a:rPr lang="en-US" b="1"/>
+              <a:t>int?</a:t>
+            </a:r>
+            <a:r>
+              <a:rPr lang="en-US" b="1">
+                <a:solidFill>
+                  <a:srgbClr val="00B050"/>
+                </a:solidFill>
+              </a:rPr>
+              <a:t> UserId_from</a:t>
+            </a:r>
+          </a:p>
+          <a:p>
+            <a:r>
+              <a:rPr lang="en-US" b="1">
+                <a:solidFill>
+                  <a:srgbClr val="00B050"/>
+                </a:solidFill>
+              </a:rPr>
+              <a:t>UserfromNameAR</a:t>
+            </a:r>
+          </a:p>
+          <a:p>
+            <a:r>
+              <a:rPr lang="en-US" b="1">
+                <a:solidFill>
+                  <a:srgbClr val="00B050"/>
+                </a:solidFill>
+              </a:rPr>
+              <a:t>UserfromNameEng</a:t>
+            </a:r>
+          </a:p>
+          <a:p>
+            <a:r>
+              <a:rPr lang="en-US"/>
+              <a:t>List&lt;</a:t>
+            </a:r>
+            <a:r>
+              <a:rPr lang="en-US" b="1">
                 <a:solidFill>
                   <a:srgbClr val="00B0F0"/>
                 </a:solidFill>
               </a:rPr>
-              <a:t>IQueryable</a:t>
-            </a:r>
-            <a:r>
-              <a:rPr lang="en-US"/>
-              <a:t>&lt;Flow_branch_product&gt; </a:t>
+              <a:t>GuarVM</a:t>
+            </a:r>
+            <a:r>
+              <a:rPr lang="en-US"/>
+              <a:t>&gt; </a:t>
             </a:r>
             <a:r>
               <a:rPr lang="en-US" b="1">
                 <a:solidFill>
-                  <a:srgbClr val="FFFF00"/>
-                </a:solidFill>
-              </a:rPr>
-              <a:t>BranchProduct</a:t>
-            </a:r>
-            <a:r>
-              <a:rPr lang="en-US"/>
-              <a:t> { get; set; }</a:t>
-            </a:r>
-          </a:p>
-          <a:p>
-            <a:pPr marL="36900" indent="0">
-              <a:buNone/>
-            </a:pPr>
-            <a:r>
-              <a:rPr lang="en-US"/>
-              <a:t>        public </a:t>
-            </a:r>
-            <a:r>
-              <a:rPr lang="en-US">
-                <a:solidFill>
-                  <a:srgbClr val="00B0F0"/>
-                </a:solidFill>
-              </a:rPr>
-              <a:t>IQueryable</a:t>
-            </a:r>
-            <a:r>
-              <a:rPr lang="en-US"/>
-              <a:t>&lt;Flow_Products&gt; </a:t>
-            </a:r>
+                  <a:srgbClr val="00B050"/>
+                </a:solidFill>
+              </a:rPr>
+              <a:t>Guaranters</a:t>
+            </a:r>
+          </a:p>
+          <a:p>
+            <a:pPr lvl="1"/>
+            <a:r>
+              <a:rPr lang="en-US" sz="1600"/>
+              <a:t>decimal Guaranter_ID</a:t>
+            </a:r>
+          </a:p>
+          <a:p>
+            <a:pPr lvl="1"/>
+            <a:r>
+              <a:rPr lang="en-US" sz="1600"/>
+              <a:t>string GuaranterQID</a:t>
+            </a:r>
+          </a:p>
+          <a:p>
+            <a:pPr lvl="1"/>
+            <a:r>
+              <a:rPr lang="en-US" sz="1600"/>
+              <a:t>string GuaranterName</a:t>
+            </a:r>
+          </a:p>
+          <a:p>
+            <a:pPr lvl="1"/>
+            <a:r>
+              <a:rPr lang="en-US" sz="1600"/>
+              <a:t>int Serial</a:t>
+            </a:r>
+          </a:p>
+          <a:p>
+            <a:pPr lvl="1"/>
+            <a:r>
+              <a:rPr lang="en-US" sz="1600"/>
+              <a:t>int code_relation</a:t>
+            </a:r>
+          </a:p>
+          <a:p>
             <a:r>
               <a:rPr lang="en-US" b="1">
                 <a:solidFill>
-                  <a:srgbClr val="FFFF00"/>
-                </a:solidFill>
-              </a:rPr>
-              <a:t>Products</a:t>
-            </a:r>
-            <a:r>
-              <a:rPr lang="en-US"/>
-              <a:t> { get; set; }</a:t>
-            </a:r>
-          </a:p>
-          <a:p>
-            <a:pPr marL="36900" indent="0">
-              <a:buNone/>
-            </a:pPr>
-            <a:r>
-              <a:rPr lang="en-US"/>
-              <a:t>        public </a:t>
-            </a:r>
-            <a:r>
-              <a:rPr lang="en-US">
-                <a:solidFill>
-                  <a:srgbClr val="00B0F0"/>
-                </a:solidFill>
-              </a:rPr>
-              <a:t>IQueryable</a:t>
-            </a:r>
-            <a:r>
-              <a:rPr lang="en-US"/>
-              <a:t>&lt;Flow_Emp_Product&gt; </a:t>
-            </a:r>
+                  <a:srgbClr val="00B050"/>
+                </a:solidFill>
+              </a:rPr>
+              <a:t>BranchId</a:t>
+            </a:r>
+          </a:p>
+          <a:p>
             <a:r>
               <a:rPr lang="en-US" b="1">
                 <a:solidFill>
-                  <a:srgbClr val="FFFF00"/>
-                </a:solidFill>
-              </a:rPr>
-              <a:t>EmpProduct</a:t>
-            </a:r>
-            <a:r>
-              <a:rPr lang="en-US"/>
-              <a:t> { get; set; }</a:t>
-            </a:r>
-          </a:p>
-          <a:p>
-            <a:pPr marL="36900" indent="0">
-              <a:buNone/>
-            </a:pPr>
-            <a:r>
-              <a:rPr lang="en-US"/>
-              <a:t>}</a:t>
+                  <a:schemeClr val="tx1"/>
+                </a:solidFill>
+              </a:rPr>
+              <a:t>DateTime?</a:t>
+            </a:r>
+            <a:r>
+              <a:rPr lang="en-US" b="1">
+                <a:solidFill>
+                  <a:srgbClr val="00B050"/>
+                </a:solidFill>
+              </a:rPr>
+              <a:t> Date_Assigned</a:t>
             </a:r>
           </a:p>
         </p:txBody>
@@ -30789,7 +31019,7 @@
     </p:spTree>
     <p:extLst>
       <p:ext uri="{BB962C8B-B14F-4D97-AF65-F5344CB8AC3E}">
-        <p14:creationId xmlns:p14="http://schemas.microsoft.com/office/powerpoint/2010/main" val="811143626"/>
+        <p14:creationId xmlns:p14="http://schemas.microsoft.com/office/powerpoint/2010/main" val="1617673991"/>
       </p:ext>
     </p:extLst>
   </p:cSld>
@@ -30821,7 +31051,7 @@
           <p:cNvPr id="2" name="Title 1">
             <a:extLst>
               <a:ext uri="{FF2B5EF4-FFF2-40B4-BE49-F238E27FC236}">
-                <a16:creationId xmlns:a16="http://schemas.microsoft.com/office/drawing/2014/main" id="{CA956C79-5C5A-0937-18A0-FEA8ACA9363A}"/>
+                <a16:creationId xmlns:a16="http://schemas.microsoft.com/office/drawing/2014/main" id="{BDB1DEFA-EFC8-8107-9B75-16D527DC2BC7}"/>
               </a:ext>
             </a:extLst>
           </p:cNvPr>
@@ -30832,12 +31062,20 @@
             <p:ph type="title"/>
           </p:nvPr>
         </p:nvSpPr>
-        <p:spPr/>
+        <p:spPr>
+          <a:xfrm>
+            <a:off x="913795" y="0"/>
+            <a:ext cx="10353762" cy="875071"/>
+          </a:xfrm>
+        </p:spPr>
         <p:txBody>
           <a:bodyPr/>
           <a:lstStyle/>
           <a:p>
-            <a:endParaRPr lang="en-US"/>
+            <a:r>
+              <a:rPr lang="en-US" b="1"/>
+              <a:t>FundingDataVM</a:t>
+            </a:r>
           </a:p>
         </p:txBody>
       </p:sp>
@@ -30846,7 +31084,7 @@
           <p:cNvPr id="3" name="Content Placeholder 2">
             <a:extLst>
               <a:ext uri="{FF2B5EF4-FFF2-40B4-BE49-F238E27FC236}">
-                <a16:creationId xmlns:a16="http://schemas.microsoft.com/office/drawing/2014/main" id="{C1801C87-24E8-7128-2FAA-9FC53573DBCC}"/>
+                <a16:creationId xmlns:a16="http://schemas.microsoft.com/office/drawing/2014/main" id="{5F645AD0-9629-717B-D7CD-C82F6BF6F8D2}"/>
               </a:ext>
             </a:extLst>
           </p:cNvPr>
@@ -30859,166 +31097,58 @@
         </p:nvSpPr>
         <p:spPr>
           <a:xfrm>
-            <a:off x="913795" y="1732449"/>
-            <a:ext cx="10353762" cy="4845332"/>
+            <a:off x="255638" y="1732449"/>
+            <a:ext cx="11464413" cy="4343886"/>
           </a:xfrm>
         </p:spPr>
         <p:txBody>
           <a:bodyPr/>
           <a:lstStyle/>
           <a:p>
-            <a:pPr marL="36900" indent="0">
-              <a:buNone/>
-            </a:pPr>
-            <a:r>
-              <a:rPr lang="en-US"/>
-              <a:t>public class FundindPageLoadVM  {</a:t>
-            </a:r>
-          </a:p>
-          <a:p>
-            <a:pPr marL="36900" indent="0">
-              <a:buNone/>
-            </a:pPr>
-            <a:r>
-              <a:rPr lang="en-US"/>
-              <a:t>	public IQueryable&lt;Flow_Purpose_loan&gt; </a:t>
-            </a:r>
-            <a:r>
-              <a:rPr lang="en-US" b="1">
-                <a:solidFill>
-                  <a:srgbClr val="FFFF00"/>
-                </a:solidFill>
-              </a:rPr>
-              <a:t>Purpose_loan </a:t>
-            </a:r>
-            <a:r>
-              <a:rPr lang="en-US"/>
-              <a:t>{ get; set; }</a:t>
-            </a:r>
-          </a:p>
-          <a:p>
-            <a:pPr marL="36900" indent="0">
-              <a:buNone/>
-            </a:pPr>
-            <a:r>
-              <a:rPr lang="en-US"/>
-              <a:t>      	public IQueryable&lt;Flow_Relationships&gt; </a:t>
-            </a:r>
-            <a:r>
-              <a:rPr lang="en-US" b="1">
-                <a:solidFill>
-                  <a:srgbClr val="FFFF00"/>
-                </a:solidFill>
-              </a:rPr>
-              <a:t>Relationships</a:t>
-            </a:r>
-            <a:r>
-              <a:rPr lang="en-US"/>
-              <a:t> { get; set; }</a:t>
-            </a:r>
-          </a:p>
-          <a:p>
-            <a:pPr marL="36900" indent="0">
-              <a:buNone/>
-            </a:pPr>
-            <a:r>
-              <a:rPr lang="en-US"/>
-              <a:t>      	public IQueryable&lt;Flow_Exempted_Products&gt; </a:t>
-            </a:r>
-            <a:r>
-              <a:rPr lang="en-US" b="1">
-                <a:solidFill>
-                  <a:srgbClr val="FFFF00"/>
-                </a:solidFill>
-              </a:rPr>
-              <a:t>flow_exempted_products</a:t>
-            </a:r>
-            <a:r>
-              <a:rPr lang="en-US"/>
-              <a:t> { get; set; }     </a:t>
-            </a:r>
-          </a:p>
-          <a:p>
-            <a:pPr marL="36900" indent="0">
-              <a:buNone/>
-            </a:pPr>
-            <a:r>
-              <a:rPr lang="en-US"/>
-              <a:t>	public decimal </a:t>
-            </a:r>
-            <a:r>
-              <a:rPr lang="en-US" b="1">
-                <a:solidFill>
-                  <a:srgbClr val="FFFF00"/>
-                </a:solidFill>
-              </a:rPr>
-              <a:t>Approximation</a:t>
-            </a:r>
-            <a:r>
-              <a:rPr lang="en-US"/>
-              <a:t> { get; set; }</a:t>
-            </a:r>
-          </a:p>
-          <a:p>
-            <a:pPr marL="36900" indent="0">
-              <a:buNone/>
-            </a:pPr>
-            <a:r>
-              <a:rPr lang="en-US"/>
-              <a:t>       public decimal </a:t>
-            </a:r>
-            <a:r>
-              <a:rPr lang="en-US" b="1">
-                <a:solidFill>
-                  <a:srgbClr val="FFFF00"/>
-                </a:solidFill>
-              </a:rPr>
-              <a:t>FinanceAmount_Approximation</a:t>
-            </a:r>
-            <a:r>
-              <a:rPr lang="en-US"/>
-              <a:t> { get; set; }</a:t>
-            </a:r>
-          </a:p>
-          <a:p>
-            <a:pPr marL="36900" indent="0">
-              <a:buNone/>
-            </a:pPr>
-            <a:r>
-              <a:rPr lang="en-US"/>
-              <a:t>	public ProdVM </a:t>
-            </a:r>
-            <a:r>
-              <a:rPr lang="en-US" b="1">
-                <a:solidFill>
-                  <a:srgbClr val="FFFF00"/>
-                </a:solidFill>
-              </a:rPr>
-              <a:t>ProdVM</a:t>
-            </a:r>
-            <a:r>
-              <a:rPr lang="en-US"/>
-              <a:t> { get; set; }</a:t>
-            </a:r>
-          </a:p>
-          <a:p>
-            <a:pPr marL="36900" indent="0">
-              <a:buNone/>
-            </a:pPr>
-            <a:r>
-              <a:rPr lang="en-US"/>
-              <a:t>}</a:t>
-            </a:r>
+            <a:endParaRPr lang="en-US"/>
+          </a:p>
+          <a:p>
+            <a:endParaRPr lang="en-US"/>
           </a:p>
           <a:p>
             <a:endParaRPr lang="en-US"/>
           </a:p>
         </p:txBody>
       </p:sp>
+      <p:pic>
+        <p:nvPicPr>
+          <p:cNvPr id="5" name="Picture 4">
+            <a:extLst>
+              <a:ext uri="{FF2B5EF4-FFF2-40B4-BE49-F238E27FC236}">
+                <a16:creationId xmlns:a16="http://schemas.microsoft.com/office/drawing/2014/main" id="{EE64999E-B922-445E-935D-34953D92BC50}"/>
+              </a:ext>
+            </a:extLst>
+          </p:cNvPr>
+          <p:cNvPicPr>
+            <a:picLocks noChangeAspect="1"/>
+          </p:cNvPicPr>
+          <p:nvPr/>
+        </p:nvPicPr>
+        <p:blipFill>
+          <a:blip r:embed="rId2"/>
+          <a:stretch>
+            <a:fillRect/>
+          </a:stretch>
+        </p:blipFill>
+        <p:spPr>
+          <a:xfrm>
+            <a:off x="913794" y="2137708"/>
+            <a:ext cx="6062245" cy="3388021"/>
+          </a:xfrm>
+          <a:prstGeom prst="rect">
+            <a:avLst/>
+          </a:prstGeom>
+        </p:spPr>
+      </p:pic>
     </p:spTree>
     <p:extLst>
       <p:ext uri="{BB962C8B-B14F-4D97-AF65-F5344CB8AC3E}">
-        <p14:creationId xmlns:p14="http://schemas.microsoft.com/office/powerpoint/2010/main" val="754356243"/>
+        <p14:creationId xmlns:p14="http://schemas.microsoft.com/office/powerpoint/2010/main" val="4026511452"/>
       </p:ext>
     </p:extLst>
   </p:cSld>
@@ -31050,7 +31180,7 @@
           <p:cNvPr id="2" name="Title 1">
             <a:extLst>
               <a:ext uri="{FF2B5EF4-FFF2-40B4-BE49-F238E27FC236}">
-                <a16:creationId xmlns:a16="http://schemas.microsoft.com/office/drawing/2014/main" id="{2350B4D8-7F7B-C582-0D5B-818D3EBCB3C7}"/>
+                <a16:creationId xmlns:a16="http://schemas.microsoft.com/office/drawing/2014/main" id="{34146355-124E-3796-C27E-50B1FEE9ADD5}"/>
               </a:ext>
             </a:extLst>
           </p:cNvPr>
@@ -31061,12 +31191,26 @@
             <p:ph type="title"/>
           </p:nvPr>
         </p:nvSpPr>
-        <p:spPr/>
+        <p:spPr>
+          <a:xfrm>
+            <a:off x="913795" y="0"/>
+            <a:ext cx="10353762" cy="688258"/>
+          </a:xfrm>
+        </p:spPr>
         <p:txBody>
-          <a:bodyPr/>
+          <a:bodyPr>
+            <a:normAutofit fontScale="90000"/>
+          </a:bodyPr>
           <a:lstStyle/>
           <a:p>
-            <a:endParaRPr lang="en-US"/>
+            <a:r>
+              <a:rPr lang="en-US" b="1">
+                <a:solidFill>
+                  <a:srgbClr val="FF0000"/>
+                </a:solidFill>
+              </a:rPr>
+              <a:t>ProdVM</a:t>
+            </a:r>
           </a:p>
         </p:txBody>
       </p:sp>
@@ -31075,7 +31219,7 @@
           <p:cNvPr id="3" name="Content Placeholder 2">
             <a:extLst>
               <a:ext uri="{FF2B5EF4-FFF2-40B4-BE49-F238E27FC236}">
-                <a16:creationId xmlns:a16="http://schemas.microsoft.com/office/drawing/2014/main" id="{FBEBDDC3-EAEC-EFFC-2A0C-7E22E2707850}"/>
+                <a16:creationId xmlns:a16="http://schemas.microsoft.com/office/drawing/2014/main" id="{E2533BB6-2BA2-1C59-7D9D-054CC9AB8FB7}"/>
               </a:ext>
             </a:extLst>
           </p:cNvPr>
@@ -31088,13 +31232,13 @@
         </p:nvSpPr>
         <p:spPr>
           <a:xfrm>
-            <a:off x="913795" y="1732449"/>
-            <a:ext cx="10353762" cy="4982983"/>
+            <a:off x="363794" y="688257"/>
+            <a:ext cx="11602064" cy="5928853"/>
           </a:xfrm>
         </p:spPr>
         <p:txBody>
           <a:bodyPr>
-            <a:normAutofit fontScale="92500" lnSpcReduction="20000"/>
+            <a:normAutofit/>
           </a:bodyPr>
           <a:lstStyle/>
           <a:p>
@@ -31106,12 +31250,16 @@
               <a:t>public class </a:t>
             </a:r>
             <a:r>
-              <a:rPr lang="en-US" b="1">
-                <a:solidFill>
-                  <a:srgbClr val="00B0F0"/>
-                </a:solidFill>
-              </a:rPr>
-              <a:t>FundingVM</a:t>
+              <a:rPr lang="en-US" sz="2400" b="1">
+                <a:solidFill>
+                  <a:srgbClr val="00B050"/>
+                </a:solidFill>
+              </a:rPr>
+              <a:t>ProdVM</a:t>
+            </a:r>
+            <a:r>
+              <a:rPr lang="en-US"/>
+              <a:t> {</a:t>
             </a:r>
           </a:p>
           <a:p>
@@ -31120,7 +31268,31 @@
             </a:pPr>
             <a:r>
               <a:rPr lang="en-US"/>
-              <a:t>    {</a:t>
+              <a:t>        public </a:t>
+            </a:r>
+            <a:r>
+              <a:rPr lang="en-US">
+                <a:solidFill>
+                  <a:srgbClr val="00B0F0"/>
+                </a:solidFill>
+              </a:rPr>
+              <a:t>IQueryable</a:t>
+            </a:r>
+            <a:r>
+              <a:rPr lang="en-US"/>
+              <a:t>&lt;Flow_branch_product&gt; </a:t>
+            </a:r>
+            <a:r>
+              <a:rPr lang="en-US" b="1">
+                <a:solidFill>
+                  <a:srgbClr val="FFFF00"/>
+                </a:solidFill>
+              </a:rPr>
+              <a:t>BranchProduct</a:t>
+            </a:r>
+            <a:r>
+              <a:rPr lang="en-US"/>
+              <a:t> { get; set; }</a:t>
             </a:r>
           </a:p>
           <a:p>
@@ -31129,7 +31301,31 @@
             </a:pPr>
             <a:r>
               <a:rPr lang="en-US"/>
-              <a:t>        public Flow_Funding_request Funding_request { get; set; }</a:t>
+              <a:t>        public </a:t>
+            </a:r>
+            <a:r>
+              <a:rPr lang="en-US">
+                <a:solidFill>
+                  <a:srgbClr val="00B0F0"/>
+                </a:solidFill>
+              </a:rPr>
+              <a:t>IQueryable</a:t>
+            </a:r>
+            <a:r>
+              <a:rPr lang="en-US"/>
+              <a:t>&lt;Flow_Products&gt; </a:t>
+            </a:r>
+            <a:r>
+              <a:rPr lang="en-US" b="1">
+                <a:solidFill>
+                  <a:srgbClr val="FFFF00"/>
+                </a:solidFill>
+              </a:rPr>
+              <a:t>Products</a:t>
+            </a:r>
+            <a:r>
+              <a:rPr lang="en-US"/>
+              <a:t> { get; set; }</a:t>
             </a:r>
           </a:p>
           <a:p>
@@ -31138,7 +31334,31 @@
             </a:pPr>
             <a:r>
               <a:rPr lang="en-US"/>
-              <a:t>        public IQueryable&lt;JoinMandatoryDocAndTypeDocuments&gt; Documents { get; set; }</a:t>
+              <a:t>        public </a:t>
+            </a:r>
+            <a:r>
+              <a:rPr lang="en-US">
+                <a:solidFill>
+                  <a:srgbClr val="00B0F0"/>
+                </a:solidFill>
+              </a:rPr>
+              <a:t>IQueryable</a:t>
+            </a:r>
+            <a:r>
+              <a:rPr lang="en-US"/>
+              <a:t>&lt;Flow_Emp_Product&gt; </a:t>
+            </a:r>
+            <a:r>
+              <a:rPr lang="en-US" b="1">
+                <a:solidFill>
+                  <a:srgbClr val="FFFF00"/>
+                </a:solidFill>
+              </a:rPr>
+              <a:t>EmpProduct</a:t>
+            </a:r>
+            <a:r>
+              <a:rPr lang="en-US"/>
+              <a:t> { get; set; }</a:t>
             </a:r>
           </a:p>
           <a:p>
@@ -31147,76 +31367,7 @@
             </a:pPr>
             <a:r>
               <a:rPr lang="en-US"/>
-              <a:t>        public IQueryable&lt;Flow_Rejections_mainVM&gt; Comments { get; set; }</a:t>
-            </a:r>
-          </a:p>
-          <a:p>
-            <a:pPr marL="36900" indent="0">
-              <a:buNone/>
-            </a:pPr>
-            <a:r>
-              <a:rPr lang="en-US"/>
-              <a:t>        public IQueryable&lt;Flow_Rejections_mainFieldVM&gt; RejectedFields { get; set; }</a:t>
-            </a:r>
-          </a:p>
-          <a:p>
-            <a:pPr marL="36900" indent="0">
-              <a:buNone/>
-            </a:pPr>
-            <a:r>
-              <a:rPr lang="en-US"/>
-              <a:t>        public IQueryable&lt;GuarVM&gt; Guaranters { get; set; }</a:t>
-            </a:r>
-          </a:p>
-          <a:p>
-            <a:pPr marL="36900" indent="0">
-              <a:buNone/>
-            </a:pPr>
-            <a:r>
-              <a:rPr lang="en-US"/>
-              <a:t>        //public Flow_Enterprises Flow_Enterprise { get; set; }</a:t>
-            </a:r>
-          </a:p>
-          <a:p>
-            <a:pPr marL="36900" indent="0">
-              <a:buNone/>
-            </a:pPr>
-            <a:r>
-              <a:rPr lang="en-US"/>
-              <a:t>        public IEnumerable&lt;Product_destinationVM&gt; Flow_Product_destinations { get; set; }</a:t>
-            </a:r>
-          </a:p>
-          <a:p>
-            <a:pPr marL="36900" indent="0">
-              <a:buNone/>
-            </a:pPr>
-            <a:r>
-              <a:rPr lang="en-US"/>
-              <a:t>        public IQueryable&lt;Cheque_InformationDTO&gt; cheque_Information { get; set; }</a:t>
-            </a:r>
-          </a:p>
-          <a:p>
-            <a:pPr marL="36900" indent="0">
-              <a:buNone/>
-            </a:pPr>
-            <a:r>
-              <a:rPr lang="en-US"/>
-              <a:t>        public int Flag { get; set; }</a:t>
-            </a:r>
-          </a:p>
-          <a:p>
-            <a:pPr marL="36900" indent="0">
-              <a:buNone/>
-            </a:pPr>
-            <a:endParaRPr lang="en-US"/>
-          </a:p>
-          <a:p>
-            <a:pPr marL="36900" indent="0">
-              <a:buNone/>
-            </a:pPr>
-            <a:r>
-              <a:rPr lang="en-US"/>
-              <a:t>    }</a:t>
+              <a:t>}</a:t>
             </a:r>
           </a:p>
         </p:txBody>
@@ -31224,7 +31375,7 @@
     </p:spTree>
     <p:extLst>
       <p:ext uri="{BB962C8B-B14F-4D97-AF65-F5344CB8AC3E}">
-        <p14:creationId xmlns:p14="http://schemas.microsoft.com/office/powerpoint/2010/main" val="1713578323"/>
+        <p14:creationId xmlns:p14="http://schemas.microsoft.com/office/powerpoint/2010/main" val="811143626"/>
       </p:ext>
     </p:extLst>
   </p:cSld>
@@ -31256,7 +31407,7 @@
           <p:cNvPr id="2" name="Title 1">
             <a:extLst>
               <a:ext uri="{FF2B5EF4-FFF2-40B4-BE49-F238E27FC236}">
-                <a16:creationId xmlns:a16="http://schemas.microsoft.com/office/drawing/2014/main" id="{2D479AA4-7A27-F7BB-18CC-807B27549E5F}"/>
+                <a16:creationId xmlns:a16="http://schemas.microsoft.com/office/drawing/2014/main" id="{CA956C79-5C5A-0937-18A0-FEA8ACA9363A}"/>
               </a:ext>
             </a:extLst>
           </p:cNvPr>
@@ -31267,102 +31418,193 @@
             <p:ph type="title"/>
           </p:nvPr>
         </p:nvSpPr>
-        <p:spPr>
-          <a:xfrm>
-            <a:off x="992453" y="0"/>
-            <a:ext cx="10353762" cy="570271"/>
-          </a:xfrm>
-        </p:spPr>
+        <p:spPr/>
         <p:txBody>
-          <a:bodyPr>
-            <a:normAutofit fontScale="90000"/>
-          </a:bodyPr>
+          <a:bodyPr/>
           <a:lstStyle/>
           <a:p>
-            <a:r>
-              <a:rPr lang="en-US" b="1">
-                <a:solidFill>
-                  <a:srgbClr val="00B0F0"/>
-                </a:solidFill>
-              </a:rPr>
-              <a:t>TransactionVM</a:t>
-            </a:r>
+            <a:endParaRPr lang="en-US"/>
           </a:p>
         </p:txBody>
       </p:sp>
-      <p:pic>
-        <p:nvPicPr>
-          <p:cNvPr id="5" name="Content Placeholder 4">
-            <a:extLst>
-              <a:ext uri="{FF2B5EF4-FFF2-40B4-BE49-F238E27FC236}">
-                <a16:creationId xmlns:a16="http://schemas.microsoft.com/office/drawing/2014/main" id="{551D13E4-7622-8C7C-0DCB-AF259538F592}"/>
-              </a:ext>
-            </a:extLst>
-          </p:cNvPr>
-          <p:cNvPicPr>
-            <a:picLocks noGrp="1" noChangeAspect="1"/>
-          </p:cNvPicPr>
+      <p:sp>
+        <p:nvSpPr>
+          <p:cNvPr id="3" name="Content Placeholder 2">
+            <a:extLst>
+              <a:ext uri="{FF2B5EF4-FFF2-40B4-BE49-F238E27FC236}">
+                <a16:creationId xmlns:a16="http://schemas.microsoft.com/office/drawing/2014/main" id="{C1801C87-24E8-7128-2FAA-9FC53573DBCC}"/>
+              </a:ext>
+            </a:extLst>
+          </p:cNvPr>
+          <p:cNvSpPr>
+            <a:spLocks noGrp="1"/>
+          </p:cNvSpPr>
           <p:nvPr>
             <p:ph idx="1"/>
           </p:nvPr>
-        </p:nvPicPr>
-        <p:blipFill>
-          <a:blip r:embed="rId2"/>
-          <a:stretch>
-            <a:fillRect/>
-          </a:stretch>
-        </p:blipFill>
-        <p:spPr>
-          <a:xfrm>
-            <a:off x="167951" y="570271"/>
-            <a:ext cx="3342165" cy="2003594"/>
-          </a:xfrm>
-          <a:prstGeom prst="rect">
-            <a:avLst/>
-          </a:prstGeom>
-          <a:effectLst>
-            <a:outerShdw blurRad="25400" dir="17880000">
-              <a:srgbClr val="000000">
-                <a:alpha val="46000"/>
-              </a:srgbClr>
-            </a:outerShdw>
-          </a:effectLst>
-        </p:spPr>
-      </p:pic>
-      <p:pic>
-        <p:nvPicPr>
-          <p:cNvPr id="7" name="Picture 6">
-            <a:extLst>
-              <a:ext uri="{FF2B5EF4-FFF2-40B4-BE49-F238E27FC236}">
-                <a16:creationId xmlns:a16="http://schemas.microsoft.com/office/drawing/2014/main" id="{B2000730-5033-72F2-C16F-B5D5DFF5876B}"/>
-              </a:ext>
-            </a:extLst>
-          </p:cNvPr>
-          <p:cNvPicPr>
-            <a:picLocks noChangeAspect="1"/>
-          </p:cNvPicPr>
-          <p:nvPr/>
-        </p:nvPicPr>
-        <p:blipFill>
-          <a:blip r:embed="rId3"/>
-          <a:stretch>
-            <a:fillRect/>
-          </a:stretch>
-        </p:blipFill>
-        <p:spPr>
-          <a:xfrm>
-            <a:off x="167950" y="2682469"/>
-            <a:ext cx="6055263" cy="3605260"/>
-          </a:xfrm>
-          <a:prstGeom prst="rect">
-            <a:avLst/>
-          </a:prstGeom>
-        </p:spPr>
-      </p:pic>
+        </p:nvSpPr>
+        <p:spPr>
+          <a:xfrm>
+            <a:off x="913795" y="1732449"/>
+            <a:ext cx="10353762" cy="4845332"/>
+          </a:xfrm>
+        </p:spPr>
+        <p:txBody>
+          <a:bodyPr/>
+          <a:lstStyle/>
+          <a:p>
+            <a:pPr marL="36900" indent="0">
+              <a:buNone/>
+            </a:pPr>
+            <a:r>
+              <a:rPr lang="en-US"/>
+              <a:t>public class FundindPageLoadVM  {</a:t>
+            </a:r>
+          </a:p>
+          <a:p>
+            <a:pPr marL="36900" indent="0">
+              <a:buNone/>
+            </a:pPr>
+            <a:r>
+              <a:rPr lang="en-US"/>
+              <a:t>	public IQueryable&lt;Flow_Purpose_loan&gt; </a:t>
+            </a:r>
+            <a:r>
+              <a:rPr lang="en-US" b="1">
+                <a:solidFill>
+                  <a:srgbClr val="FFFF00"/>
+                </a:solidFill>
+              </a:rPr>
+              <a:t>Purpose_loan </a:t>
+            </a:r>
+            <a:r>
+              <a:rPr lang="en-US"/>
+              <a:t>{ get; set; }</a:t>
+            </a:r>
+          </a:p>
+          <a:p>
+            <a:pPr marL="36900" indent="0">
+              <a:buNone/>
+            </a:pPr>
+            <a:r>
+              <a:rPr lang="en-US"/>
+              <a:t>      	public IQueryable&lt;Flow_Relationships&gt; </a:t>
+            </a:r>
+            <a:r>
+              <a:rPr lang="en-US" b="1">
+                <a:solidFill>
+                  <a:srgbClr val="FFFF00"/>
+                </a:solidFill>
+              </a:rPr>
+              <a:t>Relationships</a:t>
+            </a:r>
+            <a:r>
+              <a:rPr lang="en-US"/>
+              <a:t> { get; set; }</a:t>
+            </a:r>
+          </a:p>
+          <a:p>
+            <a:pPr marL="36900" indent="0">
+              <a:buNone/>
+            </a:pPr>
+            <a:r>
+              <a:rPr lang="en-US"/>
+              <a:t>      	public IQueryable&lt;Flow_Exempted_Products&gt; </a:t>
+            </a:r>
+            <a:r>
+              <a:rPr lang="en-US" b="1">
+                <a:solidFill>
+                  <a:srgbClr val="FFFF00"/>
+                </a:solidFill>
+              </a:rPr>
+              <a:t>flow_exempted_products</a:t>
+            </a:r>
+            <a:r>
+              <a:rPr lang="en-US"/>
+              <a:t> { get; set; }     </a:t>
+            </a:r>
+          </a:p>
+          <a:p>
+            <a:pPr marL="36900" indent="0">
+              <a:buNone/>
+            </a:pPr>
+            <a:r>
+              <a:rPr lang="en-US"/>
+              <a:t>	public decimal </a:t>
+            </a:r>
+            <a:r>
+              <a:rPr lang="en-US" b="1">
+                <a:solidFill>
+                  <a:srgbClr val="FFFF00"/>
+                </a:solidFill>
+              </a:rPr>
+              <a:t>Approximation</a:t>
+            </a:r>
+            <a:r>
+              <a:rPr lang="en-US"/>
+              <a:t> { get; set; }</a:t>
+            </a:r>
+          </a:p>
+          <a:p>
+            <a:pPr marL="36900" indent="0">
+              <a:buNone/>
+            </a:pPr>
+            <a:r>
+              <a:rPr lang="en-US"/>
+              <a:t>       public decimal </a:t>
+            </a:r>
+            <a:r>
+              <a:rPr lang="en-US" b="1">
+                <a:solidFill>
+                  <a:srgbClr val="FFFF00"/>
+                </a:solidFill>
+              </a:rPr>
+              <a:t>FinanceAmount_Approximation</a:t>
+            </a:r>
+            <a:r>
+              <a:rPr lang="en-US"/>
+              <a:t> { get; set; }</a:t>
+            </a:r>
+          </a:p>
+          <a:p>
+            <a:pPr marL="36900" indent="0">
+              <a:buNone/>
+            </a:pPr>
+            <a:r>
+              <a:rPr lang="en-US"/>
+              <a:t>	public ProdVM </a:t>
+            </a:r>
+            <a:r>
+              <a:rPr lang="en-US" b="1">
+                <a:solidFill>
+                  <a:srgbClr val="FFFF00"/>
+                </a:solidFill>
+              </a:rPr>
+              <a:t>ProdVM</a:t>
+            </a:r>
+            <a:r>
+              <a:rPr lang="en-US"/>
+              <a:t> { get; set; }</a:t>
+            </a:r>
+          </a:p>
+          <a:p>
+            <a:pPr marL="36900" indent="0">
+              <a:buNone/>
+            </a:pPr>
+            <a:r>
+              <a:rPr lang="en-US"/>
+              <a:t>}</a:t>
+            </a:r>
+          </a:p>
+          <a:p>
+            <a:endParaRPr lang="en-US"/>
+          </a:p>
+        </p:txBody>
+      </p:sp>
     </p:spTree>
     <p:extLst>
       <p:ext uri="{BB962C8B-B14F-4D97-AF65-F5344CB8AC3E}">
-        <p14:creationId xmlns:p14="http://schemas.microsoft.com/office/powerpoint/2010/main" val="4049467895"/>
+        <p14:creationId xmlns:p14="http://schemas.microsoft.com/office/powerpoint/2010/main" val="754356243"/>
       </p:ext>
     </p:extLst>
   </p:cSld>
@@ -31394,7 +31636,7 @@
           <p:cNvPr id="2" name="Title 1">
             <a:extLst>
               <a:ext uri="{FF2B5EF4-FFF2-40B4-BE49-F238E27FC236}">
-                <a16:creationId xmlns:a16="http://schemas.microsoft.com/office/drawing/2014/main" id="{64F7A994-CBDD-3869-DFD8-01B774A3E18D}"/>
+                <a16:creationId xmlns:a16="http://schemas.microsoft.com/office/drawing/2014/main" id="{2350B4D8-7F7B-C582-0D5B-818D3EBCB3C7}"/>
               </a:ext>
             </a:extLst>
           </p:cNvPr>
@@ -31419,7 +31661,7 @@
           <p:cNvPr id="3" name="Content Placeholder 2">
             <a:extLst>
               <a:ext uri="{FF2B5EF4-FFF2-40B4-BE49-F238E27FC236}">
-                <a16:creationId xmlns:a16="http://schemas.microsoft.com/office/drawing/2014/main" id="{DC64D57B-77BC-B5EA-09E3-C1C7CE552796}"/>
+                <a16:creationId xmlns:a16="http://schemas.microsoft.com/office/drawing/2014/main" id="{FBEBDDC3-EAEC-EFFC-2A0C-7E22E2707850}"/>
               </a:ext>
             </a:extLst>
           </p:cNvPr>
@@ -31430,52 +31672,145 @@
             <p:ph idx="1"/>
           </p:nvPr>
         </p:nvSpPr>
-        <p:spPr/>
+        <p:spPr>
+          <a:xfrm>
+            <a:off x="913795" y="1732449"/>
+            <a:ext cx="10353762" cy="4982983"/>
+          </a:xfrm>
+        </p:spPr>
         <p:txBody>
-          <a:bodyPr/>
+          <a:bodyPr>
+            <a:normAutofit fontScale="92500" lnSpcReduction="20000"/>
+          </a:bodyPr>
           <a:lstStyle/>
           <a:p>
-            <a:r>
-              <a:rPr lang="en-US"/>
-              <a:t>sd</a:t>
+            <a:pPr marL="36900" indent="0">
+              <a:buNone/>
+            </a:pPr>
+            <a:r>
+              <a:rPr lang="en-US"/>
+              <a:t>public class </a:t>
+            </a:r>
+            <a:r>
+              <a:rPr lang="en-US" b="1">
+                <a:solidFill>
+                  <a:srgbClr val="00B0F0"/>
+                </a:solidFill>
+              </a:rPr>
+              <a:t>FundingVM</a:t>
+            </a:r>
+          </a:p>
+          <a:p>
+            <a:pPr marL="36900" indent="0">
+              <a:buNone/>
+            </a:pPr>
+            <a:r>
+              <a:rPr lang="en-US"/>
+              <a:t>    {</a:t>
+            </a:r>
+          </a:p>
+          <a:p>
+            <a:pPr marL="36900" indent="0">
+              <a:buNone/>
+            </a:pPr>
+            <a:r>
+              <a:rPr lang="en-US"/>
+              <a:t>        public Flow_Funding_request Funding_request { get; set; }</a:t>
+            </a:r>
+          </a:p>
+          <a:p>
+            <a:pPr marL="36900" indent="0">
+              <a:buNone/>
+            </a:pPr>
+            <a:r>
+              <a:rPr lang="en-US"/>
+              <a:t>        public IQueryable&lt;JoinMandatoryDocAndTypeDocuments&gt; Documents { get; set; }</a:t>
+            </a:r>
+          </a:p>
+          <a:p>
+            <a:pPr marL="36900" indent="0">
+              <a:buNone/>
+            </a:pPr>
+            <a:r>
+              <a:rPr lang="en-US"/>
+              <a:t>        public IQueryable&lt;Flow_Rejections_mainVM&gt; Comments { get; set; }</a:t>
+            </a:r>
+          </a:p>
+          <a:p>
+            <a:pPr marL="36900" indent="0">
+              <a:buNone/>
+            </a:pPr>
+            <a:r>
+              <a:rPr lang="en-US"/>
+              <a:t>        public IQueryable&lt;Flow_Rejections_mainFieldVM&gt; RejectedFields { get; set; }</a:t>
+            </a:r>
+          </a:p>
+          <a:p>
+            <a:pPr marL="36900" indent="0">
+              <a:buNone/>
+            </a:pPr>
+            <a:r>
+              <a:rPr lang="en-US"/>
+              <a:t>        public IQueryable&lt;GuarVM&gt; Guaranters { get; set; }</a:t>
+            </a:r>
+          </a:p>
+          <a:p>
+            <a:pPr marL="36900" indent="0">
+              <a:buNone/>
+            </a:pPr>
+            <a:r>
+              <a:rPr lang="en-US"/>
+              <a:t>        //public Flow_Enterprises Flow_Enterprise { get; set; }</a:t>
+            </a:r>
+          </a:p>
+          <a:p>
+            <a:pPr marL="36900" indent="0">
+              <a:buNone/>
+            </a:pPr>
+            <a:r>
+              <a:rPr lang="en-US"/>
+              <a:t>        public IEnumerable&lt;Product_destinationVM&gt; Flow_Product_destinations { get; set; }</a:t>
+            </a:r>
+          </a:p>
+          <a:p>
+            <a:pPr marL="36900" indent="0">
+              <a:buNone/>
+            </a:pPr>
+            <a:r>
+              <a:rPr lang="en-US"/>
+              <a:t>        public IQueryable&lt;Cheque_InformationDTO&gt; cheque_Information { get; set; }</a:t>
+            </a:r>
+          </a:p>
+          <a:p>
+            <a:pPr marL="36900" indent="0">
+              <a:buNone/>
+            </a:pPr>
+            <a:r>
+              <a:rPr lang="en-US"/>
+              <a:t>        public int Flag { get; set; }</a:t>
+            </a:r>
+          </a:p>
+          <a:p>
+            <a:pPr marL="36900" indent="0">
+              <a:buNone/>
+            </a:pPr>
+            <a:endParaRPr lang="en-US"/>
+          </a:p>
+          <a:p>
+            <a:pPr marL="36900" indent="0">
+              <a:buNone/>
+            </a:pPr>
+            <a:r>
+              <a:rPr lang="en-US"/>
+              <a:t>    }</a:t>
             </a:r>
           </a:p>
         </p:txBody>
       </p:sp>
-      <p:pic>
-        <p:nvPicPr>
-          <p:cNvPr id="5" name="Picture 4">
-            <a:extLst>
-              <a:ext uri="{FF2B5EF4-FFF2-40B4-BE49-F238E27FC236}">
-                <a16:creationId xmlns:a16="http://schemas.microsoft.com/office/drawing/2014/main" id="{EF867BBE-3B01-D551-DC98-D1617DD264F4}"/>
-              </a:ext>
-            </a:extLst>
-          </p:cNvPr>
-          <p:cNvPicPr>
-            <a:picLocks noChangeAspect="1"/>
-          </p:cNvPicPr>
-          <p:nvPr/>
-        </p:nvPicPr>
-        <p:blipFill>
-          <a:blip r:embed="rId2"/>
-          <a:stretch>
-            <a:fillRect/>
-          </a:stretch>
-        </p:blipFill>
-        <p:spPr>
-          <a:xfrm>
-            <a:off x="1333912" y="3066435"/>
-            <a:ext cx="9668385" cy="725129"/>
-          </a:xfrm>
-          <a:prstGeom prst="rect">
-            <a:avLst/>
-          </a:prstGeom>
-        </p:spPr>
-      </p:pic>
     </p:spTree>
     <p:extLst>
       <p:ext uri="{BB962C8B-B14F-4D97-AF65-F5344CB8AC3E}">
-        <p14:creationId xmlns:p14="http://schemas.microsoft.com/office/powerpoint/2010/main" val="49620764"/>
+        <p14:creationId xmlns:p14="http://schemas.microsoft.com/office/powerpoint/2010/main" val="1713578323"/>
       </p:ext>
     </p:extLst>
   </p:cSld>
@@ -31507,7 +31842,7 @@
           <p:cNvPr id="2" name="Title 1">
             <a:extLst>
               <a:ext uri="{FF2B5EF4-FFF2-40B4-BE49-F238E27FC236}">
-                <a16:creationId xmlns:a16="http://schemas.microsoft.com/office/drawing/2014/main" id="{B7341C98-E0C9-150A-788A-B3171AEF14A1}"/>
+                <a16:creationId xmlns:a16="http://schemas.microsoft.com/office/drawing/2014/main" id="{2D479AA4-7A27-F7BB-18CC-807B27549E5F}"/>
               </a:ext>
             </a:extLst>
           </p:cNvPr>
@@ -31520,8 +31855,8 @@
         </p:nvSpPr>
         <p:spPr>
           <a:xfrm>
-            <a:off x="913795" y="1"/>
-            <a:ext cx="10353762" cy="685800"/>
+            <a:off x="992453" y="0"/>
+            <a:ext cx="10353762" cy="570271"/>
           </a:xfrm>
         </p:spPr>
         <p:txBody>
@@ -31531,94 +31866,31 @@
           <a:lstStyle/>
           <a:p>
             <a:r>
-              <a:rPr lang="en-US" b="1"/>
-              <a:t>To make migration</a:t>
-            </a:r>
-          </a:p>
-        </p:txBody>
-      </p:sp>
-      <p:sp>
-        <p:nvSpPr>
-          <p:cNvPr id="3" name="Content Placeholder 2">
-            <a:extLst>
-              <a:ext uri="{FF2B5EF4-FFF2-40B4-BE49-F238E27FC236}">
-                <a16:creationId xmlns:a16="http://schemas.microsoft.com/office/drawing/2014/main" id="{5B937FAB-5FF9-1D3C-71B4-AF439FC0DBCA}"/>
-              </a:ext>
-            </a:extLst>
-          </p:cNvPr>
-          <p:cNvSpPr>
-            <a:spLocks noGrp="1"/>
-          </p:cNvSpPr>
-          <p:nvPr>
-            <p:ph idx="1"/>
-          </p:nvPr>
-        </p:nvSpPr>
-        <p:spPr>
-          <a:xfrm>
-            <a:off x="198783" y="685801"/>
-            <a:ext cx="6373467" cy="6172198"/>
-          </a:xfrm>
-        </p:spPr>
-        <p:txBody>
-          <a:bodyPr/>
-          <a:lstStyle/>
-          <a:p>
-            <a:r>
-              <a:rPr lang="en-US"/>
-              <a:t>At Tamweely.Infrastructure.Data / migrations / at Configuration class / constructor</a:t>
-            </a:r>
-          </a:p>
-          <a:p>
-            <a:pPr lvl="1"/>
-            <a:r>
-              <a:rPr lang="en-US"/>
-              <a:t>AutomaticMigrationsEnabled = true;</a:t>
-            </a:r>
-          </a:p>
-          <a:p>
-            <a:pPr lvl="1"/>
-            <a:r>
-              <a:rPr lang="en-US"/>
-              <a:t>AutomaticMigrationDataLossAllowed = true;</a:t>
-            </a:r>
-          </a:p>
-          <a:p>
-            <a:endParaRPr lang="en-US"/>
-          </a:p>
-          <a:p>
-            <a:r>
-              <a:rPr lang="en-US"/>
-              <a:t>At Tamweely.Service.WebAPI / Global.asax.cs</a:t>
-            </a:r>
-          </a:p>
-          <a:p>
-            <a:pPr lvl="1"/>
-            <a:r>
-              <a:rPr lang="en-US"/>
-              <a:t>Uncomment this code</a:t>
-            </a:r>
-          </a:p>
-          <a:p>
-            <a:endParaRPr lang="en-US"/>
-          </a:p>
-          <a:p>
-            <a:endParaRPr lang="en-US"/>
+              <a:rPr lang="en-US" b="1">
+                <a:solidFill>
+                  <a:srgbClr val="00B0F0"/>
+                </a:solidFill>
+              </a:rPr>
+              <a:t>TransactionVM</a:t>
+            </a:r>
           </a:p>
         </p:txBody>
       </p:sp>
       <p:pic>
         <p:nvPicPr>
-          <p:cNvPr id="5" name="Picture 4">
-            <a:extLst>
-              <a:ext uri="{FF2B5EF4-FFF2-40B4-BE49-F238E27FC236}">
-                <a16:creationId xmlns:a16="http://schemas.microsoft.com/office/drawing/2014/main" id="{A80E710F-D6D2-4D6C-8BCB-9691B0411223}"/>
+          <p:cNvPr id="5" name="Content Placeholder 4">
+            <a:extLst>
+              <a:ext uri="{FF2B5EF4-FFF2-40B4-BE49-F238E27FC236}">
+                <a16:creationId xmlns:a16="http://schemas.microsoft.com/office/drawing/2014/main" id="{551D13E4-7622-8C7C-0DCB-AF259538F592}"/>
               </a:ext>
             </a:extLst>
           </p:cNvPr>
           <p:cNvPicPr>
-            <a:picLocks noChangeAspect="1"/>
+            <a:picLocks noGrp="1" noChangeAspect="1"/>
           </p:cNvPicPr>
-          <p:nvPr/>
+          <p:nvPr>
+            <p:ph idx="1"/>
+          </p:nvPr>
         </p:nvPicPr>
         <p:blipFill>
           <a:blip r:embed="rId2"/>
@@ -31628,8 +31900,45 @@
         </p:blipFill>
         <p:spPr>
           <a:xfrm>
-            <a:off x="6766090" y="2270362"/>
-            <a:ext cx="5425910" cy="4587638"/>
+            <a:off x="167951" y="570271"/>
+            <a:ext cx="3342165" cy="2003594"/>
+          </a:xfrm>
+          <a:prstGeom prst="rect">
+            <a:avLst/>
+          </a:prstGeom>
+          <a:effectLst>
+            <a:outerShdw blurRad="25400" dir="17880000">
+              <a:srgbClr val="000000">
+                <a:alpha val="46000"/>
+              </a:srgbClr>
+            </a:outerShdw>
+          </a:effectLst>
+        </p:spPr>
+      </p:pic>
+      <p:pic>
+        <p:nvPicPr>
+          <p:cNvPr id="7" name="Picture 6">
+            <a:extLst>
+              <a:ext uri="{FF2B5EF4-FFF2-40B4-BE49-F238E27FC236}">
+                <a16:creationId xmlns:a16="http://schemas.microsoft.com/office/drawing/2014/main" id="{B2000730-5033-72F2-C16F-B5D5DFF5876B}"/>
+              </a:ext>
+            </a:extLst>
+          </p:cNvPr>
+          <p:cNvPicPr>
+            <a:picLocks noChangeAspect="1"/>
+          </p:cNvPicPr>
+          <p:nvPr/>
+        </p:nvPicPr>
+        <p:blipFill>
+          <a:blip r:embed="rId3"/>
+          <a:stretch>
+            <a:fillRect/>
+          </a:stretch>
+        </p:blipFill>
+        <p:spPr>
+          <a:xfrm>
+            <a:off x="167950" y="2682469"/>
+            <a:ext cx="6055263" cy="3605260"/>
           </a:xfrm>
           <a:prstGeom prst="rect">
             <a:avLst/>
@@ -31639,7 +31948,7 @@
     </p:spTree>
     <p:extLst>
       <p:ext uri="{BB962C8B-B14F-4D97-AF65-F5344CB8AC3E}">
-        <p14:creationId xmlns:p14="http://schemas.microsoft.com/office/powerpoint/2010/main" val="1581286932"/>
+        <p14:creationId xmlns:p14="http://schemas.microsoft.com/office/powerpoint/2010/main" val="4049467895"/>
       </p:ext>
     </p:extLst>
   </p:cSld>
@@ -31744,6 +32053,283 @@
     <p:extLst>
       <p:ext uri="{BB962C8B-B14F-4D97-AF65-F5344CB8AC3E}">
         <p14:creationId xmlns:p14="http://schemas.microsoft.com/office/powerpoint/2010/main" val="1230303712"/>
+      </p:ext>
+    </p:extLst>
+  </p:cSld>
+  <p:clrMapOvr>
+    <a:masterClrMapping/>
+  </p:clrMapOvr>
+</p:sld>
+</file>
+
+<file path=ppt/slides/slide220.xml><?xml version="1.0" encoding="utf-8"?>
+<p:sld xmlns:a="http://schemas.openxmlformats.org/drawingml/2006/main" xmlns:r="http://schemas.openxmlformats.org/officeDocument/2006/relationships" xmlns:p="http://schemas.openxmlformats.org/presentationml/2006/main">
+  <p:cSld>
+    <p:spTree>
+      <p:nvGrpSpPr>
+        <p:cNvPr id="1" name=""/>
+        <p:cNvGrpSpPr/>
+        <p:nvPr/>
+      </p:nvGrpSpPr>
+      <p:grpSpPr>
+        <a:xfrm>
+          <a:off x="0" y="0"/>
+          <a:ext cx="0" cy="0"/>
+          <a:chOff x="0" y="0"/>
+          <a:chExt cx="0" cy="0"/>
+        </a:xfrm>
+      </p:grpSpPr>
+      <p:sp>
+        <p:nvSpPr>
+          <p:cNvPr id="2" name="Title 1">
+            <a:extLst>
+              <a:ext uri="{FF2B5EF4-FFF2-40B4-BE49-F238E27FC236}">
+                <a16:creationId xmlns:a16="http://schemas.microsoft.com/office/drawing/2014/main" id="{64F7A994-CBDD-3869-DFD8-01B774A3E18D}"/>
+              </a:ext>
+            </a:extLst>
+          </p:cNvPr>
+          <p:cNvSpPr>
+            <a:spLocks noGrp="1"/>
+          </p:cNvSpPr>
+          <p:nvPr>
+            <p:ph type="title"/>
+          </p:nvPr>
+        </p:nvSpPr>
+        <p:spPr/>
+        <p:txBody>
+          <a:bodyPr/>
+          <a:lstStyle/>
+          <a:p>
+            <a:endParaRPr lang="en-US"/>
+          </a:p>
+        </p:txBody>
+      </p:sp>
+      <p:sp>
+        <p:nvSpPr>
+          <p:cNvPr id="3" name="Content Placeholder 2">
+            <a:extLst>
+              <a:ext uri="{FF2B5EF4-FFF2-40B4-BE49-F238E27FC236}">
+                <a16:creationId xmlns:a16="http://schemas.microsoft.com/office/drawing/2014/main" id="{DC64D57B-77BC-B5EA-09E3-C1C7CE552796}"/>
+              </a:ext>
+            </a:extLst>
+          </p:cNvPr>
+          <p:cNvSpPr>
+            <a:spLocks noGrp="1"/>
+          </p:cNvSpPr>
+          <p:nvPr>
+            <p:ph idx="1"/>
+          </p:nvPr>
+        </p:nvSpPr>
+        <p:spPr/>
+        <p:txBody>
+          <a:bodyPr/>
+          <a:lstStyle/>
+          <a:p>
+            <a:r>
+              <a:rPr lang="en-US"/>
+              <a:t>sd</a:t>
+            </a:r>
+          </a:p>
+        </p:txBody>
+      </p:sp>
+      <p:pic>
+        <p:nvPicPr>
+          <p:cNvPr id="5" name="Picture 4">
+            <a:extLst>
+              <a:ext uri="{FF2B5EF4-FFF2-40B4-BE49-F238E27FC236}">
+                <a16:creationId xmlns:a16="http://schemas.microsoft.com/office/drawing/2014/main" id="{EF867BBE-3B01-D551-DC98-D1617DD264F4}"/>
+              </a:ext>
+            </a:extLst>
+          </p:cNvPr>
+          <p:cNvPicPr>
+            <a:picLocks noChangeAspect="1"/>
+          </p:cNvPicPr>
+          <p:nvPr/>
+        </p:nvPicPr>
+        <p:blipFill>
+          <a:blip r:embed="rId2"/>
+          <a:stretch>
+            <a:fillRect/>
+          </a:stretch>
+        </p:blipFill>
+        <p:spPr>
+          <a:xfrm>
+            <a:off x="1333912" y="3066435"/>
+            <a:ext cx="9668385" cy="725129"/>
+          </a:xfrm>
+          <a:prstGeom prst="rect">
+            <a:avLst/>
+          </a:prstGeom>
+        </p:spPr>
+      </p:pic>
+    </p:spTree>
+    <p:extLst>
+      <p:ext uri="{BB962C8B-B14F-4D97-AF65-F5344CB8AC3E}">
+        <p14:creationId xmlns:p14="http://schemas.microsoft.com/office/powerpoint/2010/main" val="49620764"/>
+      </p:ext>
+    </p:extLst>
+  </p:cSld>
+  <p:clrMapOvr>
+    <a:masterClrMapping/>
+  </p:clrMapOvr>
+</p:sld>
+</file>
+
+<file path=ppt/slides/slide221.xml><?xml version="1.0" encoding="utf-8"?>
+<p:sld xmlns:a="http://schemas.openxmlformats.org/drawingml/2006/main" xmlns:r="http://schemas.openxmlformats.org/officeDocument/2006/relationships" xmlns:p="http://schemas.openxmlformats.org/presentationml/2006/main">
+  <p:cSld>
+    <p:spTree>
+      <p:nvGrpSpPr>
+        <p:cNvPr id="1" name=""/>
+        <p:cNvGrpSpPr/>
+        <p:nvPr/>
+      </p:nvGrpSpPr>
+      <p:grpSpPr>
+        <a:xfrm>
+          <a:off x="0" y="0"/>
+          <a:ext cx="0" cy="0"/>
+          <a:chOff x="0" y="0"/>
+          <a:chExt cx="0" cy="0"/>
+        </a:xfrm>
+      </p:grpSpPr>
+      <p:sp>
+        <p:nvSpPr>
+          <p:cNvPr id="2" name="Title 1">
+            <a:extLst>
+              <a:ext uri="{FF2B5EF4-FFF2-40B4-BE49-F238E27FC236}">
+                <a16:creationId xmlns:a16="http://schemas.microsoft.com/office/drawing/2014/main" id="{B7341C98-E0C9-150A-788A-B3171AEF14A1}"/>
+              </a:ext>
+            </a:extLst>
+          </p:cNvPr>
+          <p:cNvSpPr>
+            <a:spLocks noGrp="1"/>
+          </p:cNvSpPr>
+          <p:nvPr>
+            <p:ph type="title"/>
+          </p:nvPr>
+        </p:nvSpPr>
+        <p:spPr>
+          <a:xfrm>
+            <a:off x="913795" y="1"/>
+            <a:ext cx="10353762" cy="685800"/>
+          </a:xfrm>
+        </p:spPr>
+        <p:txBody>
+          <a:bodyPr>
+            <a:normAutofit fontScale="90000"/>
+          </a:bodyPr>
+          <a:lstStyle/>
+          <a:p>
+            <a:r>
+              <a:rPr lang="en-US" b="1"/>
+              <a:t>To make migration</a:t>
+            </a:r>
+          </a:p>
+        </p:txBody>
+      </p:sp>
+      <p:sp>
+        <p:nvSpPr>
+          <p:cNvPr id="3" name="Content Placeholder 2">
+            <a:extLst>
+              <a:ext uri="{FF2B5EF4-FFF2-40B4-BE49-F238E27FC236}">
+                <a16:creationId xmlns:a16="http://schemas.microsoft.com/office/drawing/2014/main" id="{5B937FAB-5FF9-1D3C-71B4-AF439FC0DBCA}"/>
+              </a:ext>
+            </a:extLst>
+          </p:cNvPr>
+          <p:cNvSpPr>
+            <a:spLocks noGrp="1"/>
+          </p:cNvSpPr>
+          <p:nvPr>
+            <p:ph idx="1"/>
+          </p:nvPr>
+        </p:nvSpPr>
+        <p:spPr>
+          <a:xfrm>
+            <a:off x="198783" y="685801"/>
+            <a:ext cx="6373467" cy="6172198"/>
+          </a:xfrm>
+        </p:spPr>
+        <p:txBody>
+          <a:bodyPr/>
+          <a:lstStyle/>
+          <a:p>
+            <a:r>
+              <a:rPr lang="en-US"/>
+              <a:t>At Tamweely.Infrastructure.Data / migrations / at Configuration class / constructor</a:t>
+            </a:r>
+          </a:p>
+          <a:p>
+            <a:pPr lvl="1"/>
+            <a:r>
+              <a:rPr lang="en-US"/>
+              <a:t>AutomaticMigrationsEnabled = true;</a:t>
+            </a:r>
+          </a:p>
+          <a:p>
+            <a:pPr lvl="1"/>
+            <a:r>
+              <a:rPr lang="en-US"/>
+              <a:t>AutomaticMigrationDataLossAllowed = true;</a:t>
+            </a:r>
+          </a:p>
+          <a:p>
+            <a:endParaRPr lang="en-US"/>
+          </a:p>
+          <a:p>
+            <a:r>
+              <a:rPr lang="en-US"/>
+              <a:t>At Tamweely.Service.WebAPI / Global.asax.cs</a:t>
+            </a:r>
+          </a:p>
+          <a:p>
+            <a:pPr lvl="1"/>
+            <a:r>
+              <a:rPr lang="en-US"/>
+              <a:t>Uncomment this code</a:t>
+            </a:r>
+          </a:p>
+          <a:p>
+            <a:endParaRPr lang="en-US"/>
+          </a:p>
+          <a:p>
+            <a:endParaRPr lang="en-US"/>
+          </a:p>
+        </p:txBody>
+      </p:sp>
+      <p:pic>
+        <p:nvPicPr>
+          <p:cNvPr id="5" name="Picture 4">
+            <a:extLst>
+              <a:ext uri="{FF2B5EF4-FFF2-40B4-BE49-F238E27FC236}">
+                <a16:creationId xmlns:a16="http://schemas.microsoft.com/office/drawing/2014/main" id="{A80E710F-D6D2-4D6C-8BCB-9691B0411223}"/>
+              </a:ext>
+            </a:extLst>
+          </p:cNvPr>
+          <p:cNvPicPr>
+            <a:picLocks noChangeAspect="1"/>
+          </p:cNvPicPr>
+          <p:nvPr/>
+        </p:nvPicPr>
+        <p:blipFill>
+          <a:blip r:embed="rId2"/>
+          <a:stretch>
+            <a:fillRect/>
+          </a:stretch>
+        </p:blipFill>
+        <p:spPr>
+          <a:xfrm>
+            <a:off x="6766090" y="2270362"/>
+            <a:ext cx="5425910" cy="4587638"/>
+          </a:xfrm>
+          <a:prstGeom prst="rect">
+            <a:avLst/>
+          </a:prstGeom>
+        </p:spPr>
+      </p:pic>
+    </p:spTree>
+    <p:extLst>
+      <p:ext uri="{BB962C8B-B14F-4D97-AF65-F5344CB8AC3E}">
+        <p14:creationId xmlns:p14="http://schemas.microsoft.com/office/powerpoint/2010/main" val="1581286932"/>
       </p:ext>
     </p:extLst>
   </p:cSld>

--- a/Dot Net/Business.pptx
+++ b/Dot Net/Business.pptx
@@ -231,6 +231,9 @@
     <p:sldId id="295" r:id="rId225"/>
     <p:sldId id="344" r:id="rId226"/>
     <p:sldId id="363" r:id="rId227"/>
+    <p:sldId id="550" r:id="rId228"/>
+    <p:sldId id="552" r:id="rId229"/>
+    <p:sldId id="551" r:id="rId230"/>
   </p:sldIdLst>
   <p:sldSz cx="12192000" cy="6858000"/>
   <p:notesSz cx="6858000" cy="9144000"/>
@@ -6886,8 +6889,13 @@
             </a:r>
             <a:r>
               <a:rPr lang="en-US"/>
-              <a:t> ]</a:t>
-            </a:r>
+              <a:t> ] </a:t>
+            </a:r>
+            <a:r>
+              <a:rPr lang="ar-EG"/>
+              <a:t>القطاع</a:t>
+            </a:r>
+            <a:endParaRPr lang="en-US"/>
           </a:p>
           <a:p>
             <a:r>
@@ -7604,18 +7612,18 @@
         </p:nvSpPr>
         <p:spPr>
           <a:xfrm>
-            <a:off x="913795" y="0"/>
-            <a:ext cx="10353762" cy="550606"/>
+            <a:off x="85724" y="0"/>
+            <a:ext cx="12106275" cy="550606"/>
           </a:xfrm>
         </p:spPr>
         <p:txBody>
           <a:bodyPr>
-            <a:normAutofit fontScale="90000"/>
+            <a:noAutofit/>
           </a:bodyPr>
           <a:lstStyle/>
           <a:p>
             <a:r>
-              <a:rPr lang="en-US" b="1">
+              <a:rPr lang="en-US" sz="3200" b="1">
                 <a:solidFill>
                   <a:srgbClr val="FFFF00"/>
                 </a:solidFill>
@@ -7623,11 +7631,11 @@
               <a:t>SWF</a:t>
             </a:r>
             <a:r>
-              <a:rPr lang="en-US"/>
+              <a:rPr lang="en-US" sz="3200"/>
               <a:t>.</a:t>
             </a:r>
             <a:r>
-              <a:rPr lang="en-US" b="1">
+              <a:rPr lang="en-US" sz="3200" b="1">
                 <a:solidFill>
                   <a:srgbClr val="FF0000"/>
                 </a:solidFill>
@@ -7635,7 +7643,7 @@
               <a:t>Flow_districts </a:t>
             </a:r>
             <a:r>
-              <a:rPr lang="en-US" b="1">
+              <a:rPr lang="en-US" sz="3200" b="1">
                 <a:solidFill>
                   <a:srgbClr val="FF0000"/>
                 </a:solidFill>
@@ -7644,24 +7652,42 @@
               <a:t> [</a:t>
             </a:r>
             <a:r>
-              <a:rPr lang="ar-EG" b="1">
+              <a:rPr lang="ar-EG" sz="3200" b="1">
                 <a:solidFill>
                   <a:srgbClr val="FF0000"/>
                 </a:solidFill>
                 <a:sym typeface="Wingdings" panose="05000000000000000000" pitchFamily="2" charset="2"/>
               </a:rPr>
-              <a:t>مدينة أو مركز</a:t>
-            </a:r>
-            <a:r>
-              <a:rPr lang="en-US" b="1">
+              <a:t>مدينة أو مركز او مركز السجل</a:t>
+            </a:r>
+            <a:r>
+              <a:rPr lang="en-US" sz="3200" b="1">
                 <a:solidFill>
                   <a:srgbClr val="FF0000"/>
                 </a:solidFill>
                 <a:sym typeface="Wingdings" panose="05000000000000000000" pitchFamily="2" charset="2"/>
               </a:rPr>
+              <a:t> </a:t>
+            </a:r>
+            <a:r>
+              <a:rPr lang="ar-EG" sz="3200" b="1">
+                <a:solidFill>
+                  <a:srgbClr val="FF0000"/>
+                </a:solidFill>
+                <a:sym typeface="Wingdings" panose="05000000000000000000" pitchFamily="2" charset="2"/>
+              </a:rPr>
+              <a:t>جهة الاصدار أو</a:t>
+            </a:r>
+            <a:r>
+              <a:rPr lang="en-US" sz="3200" b="1">
+                <a:solidFill>
+                  <a:srgbClr val="FF0000"/>
+                </a:solidFill>
+                <a:sym typeface="Wingdings" panose="05000000000000000000" pitchFamily="2" charset="2"/>
+              </a:rPr>
               <a:t>]</a:t>
             </a:r>
-            <a:endParaRPr lang="en-US" b="1">
+            <a:endParaRPr lang="en-US" sz="3200" b="1">
               <a:solidFill>
                 <a:srgbClr val="FF0000"/>
               </a:solidFill>
@@ -30331,6 +30357,12 @@
           <a:p>
             <a:r>
               <a:rPr lang="en-US" sz="1800"/>
+              <a:t>Enterprise_ID [PK], [identity]</a:t>
+            </a:r>
+          </a:p>
+          <a:p>
+            <a:r>
+              <a:rPr lang="en-US" sz="1800"/>
               <a:t>Brand_name: </a:t>
             </a:r>
             <a:r>
@@ -30338,12 +30370,6 @@
               <a:t>اسم الشركة</a:t>
             </a:r>
             <a:endParaRPr lang="en-US" sz="1800"/>
-          </a:p>
-          <a:p>
-            <a:r>
-              <a:rPr lang="en-US" sz="1800"/>
-              <a:t>Enterprise_ID [PK], [identity]</a:t>
-            </a:r>
           </a:p>
           <a:p>
             <a:r>
@@ -33053,6 +33079,414 @@
   </p:cSld>
   <p:clrMapOvr>
     <a:masterClrMapping/>
+  </p:clrMapOvr>
+</p:sld>
+</file>
+
+<file path=ppt/slides/slide227.xml><?xml version="1.0" encoding="utf-8"?>
+<p:sld xmlns:a="http://schemas.openxmlformats.org/drawingml/2006/main" xmlns:r="http://schemas.openxmlformats.org/officeDocument/2006/relationships" xmlns:p="http://schemas.openxmlformats.org/presentationml/2006/main">
+  <p:cSld>
+    <p:spTree>
+      <p:nvGrpSpPr>
+        <p:cNvPr id="1" name=""/>
+        <p:cNvGrpSpPr/>
+        <p:nvPr/>
+      </p:nvGrpSpPr>
+      <p:grpSpPr>
+        <a:xfrm>
+          <a:off x="0" y="0"/>
+          <a:ext cx="0" cy="0"/>
+          <a:chOff x="0" y="0"/>
+          <a:chExt cx="0" cy="0"/>
+        </a:xfrm>
+      </p:grpSpPr>
+      <p:pic>
+        <p:nvPicPr>
+          <p:cNvPr id="5" name="Content Placeholder 4">
+            <a:extLst>
+              <a:ext uri="{FF2B5EF4-FFF2-40B4-BE49-F238E27FC236}">
+                <a16:creationId xmlns:a16="http://schemas.microsoft.com/office/drawing/2014/main" id="{388EC2F1-BECC-A2E4-C19D-E01FDE2ABF84}"/>
+              </a:ext>
+            </a:extLst>
+          </p:cNvPr>
+          <p:cNvPicPr>
+            <a:picLocks noGrp="1" noChangeAspect="1"/>
+          </p:cNvPicPr>
+          <p:nvPr>
+            <p:ph idx="1"/>
+          </p:nvPr>
+        </p:nvPicPr>
+        <p:blipFill>
+          <a:blip r:embed="rId2"/>
+          <a:stretch>
+            <a:fillRect/>
+          </a:stretch>
+        </p:blipFill>
+        <p:spPr>
+          <a:xfrm>
+            <a:off x="1" y="0"/>
+            <a:ext cx="5624594" cy="5444067"/>
+          </a:xfrm>
+          <a:prstGeom prst="rect">
+            <a:avLst/>
+          </a:prstGeom>
+          <a:effectLst>
+            <a:outerShdw blurRad="25400" dir="17880000">
+              <a:srgbClr val="000000">
+                <a:alpha val="46000"/>
+              </a:srgbClr>
+            </a:outerShdw>
+          </a:effectLst>
+        </p:spPr>
+      </p:pic>
+      <p:pic>
+        <p:nvPicPr>
+          <p:cNvPr id="10" name="Content Placeholder 4">
+            <a:extLst>
+              <a:ext uri="{FF2B5EF4-FFF2-40B4-BE49-F238E27FC236}">
+                <a16:creationId xmlns:a16="http://schemas.microsoft.com/office/drawing/2014/main" id="{11C21C42-DFC4-51C0-8A8E-B80AE7DE9559}"/>
+              </a:ext>
+            </a:extLst>
+          </p:cNvPr>
+          <p:cNvPicPr>
+            <a:picLocks noChangeAspect="1"/>
+          </p:cNvPicPr>
+          <p:nvPr/>
+        </p:nvPicPr>
+        <p:blipFill>
+          <a:blip r:embed="rId3"/>
+          <a:stretch>
+            <a:fillRect/>
+          </a:stretch>
+        </p:blipFill>
+        <p:spPr>
+          <a:xfrm>
+            <a:off x="5831416" y="493038"/>
+            <a:ext cx="5587820" cy="4059237"/>
+          </a:xfrm>
+          <a:prstGeom prst="rect">
+            <a:avLst/>
+          </a:prstGeom>
+          <a:effectLst>
+            <a:outerShdw blurRad="25400" dir="17880000">
+              <a:srgbClr val="000000">
+                <a:alpha val="46000"/>
+              </a:srgbClr>
+            </a:outerShdw>
+          </a:effectLst>
+        </p:spPr>
+      </p:pic>
+    </p:spTree>
+    <p:extLst>
+      <p:ext uri="{BB962C8B-B14F-4D97-AF65-F5344CB8AC3E}">
+        <p14:creationId xmlns:p14="http://schemas.microsoft.com/office/powerpoint/2010/main" val="1470055986"/>
+      </p:ext>
+    </p:extLst>
+  </p:cSld>
+  <p:clrMapOvr>
+    <a:masterClrMapping/>
+  </p:clrMapOvr>
+</p:sld>
+</file>
+
+<file path=ppt/slides/slide228.xml><?xml version="1.0" encoding="utf-8"?>
+<p:sld xmlns:a="http://schemas.openxmlformats.org/drawingml/2006/main" xmlns:r="http://schemas.openxmlformats.org/officeDocument/2006/relationships" xmlns:p="http://schemas.openxmlformats.org/presentationml/2006/main">
+  <p:cSld>
+    <p:spTree>
+      <p:nvGrpSpPr>
+        <p:cNvPr id="1" name=""/>
+        <p:cNvGrpSpPr/>
+        <p:nvPr/>
+      </p:nvGrpSpPr>
+      <p:grpSpPr>
+        <a:xfrm>
+          <a:off x="0" y="0"/>
+          <a:ext cx="0" cy="0"/>
+          <a:chOff x="0" y="0"/>
+          <a:chExt cx="0" cy="0"/>
+        </a:xfrm>
+      </p:grpSpPr>
+      <p:sp>
+        <p:nvSpPr>
+          <p:cNvPr id="2" name="Title 1">
+            <a:extLst>
+              <a:ext uri="{FF2B5EF4-FFF2-40B4-BE49-F238E27FC236}">
+                <a16:creationId xmlns:a16="http://schemas.microsoft.com/office/drawing/2014/main" id="{6CB16BE2-0582-DCC4-E9B2-BD0212AAC27E}"/>
+              </a:ext>
+            </a:extLst>
+          </p:cNvPr>
+          <p:cNvSpPr>
+            <a:spLocks noGrp="1"/>
+          </p:cNvSpPr>
+          <p:nvPr>
+            <p:ph type="title"/>
+          </p:nvPr>
+        </p:nvSpPr>
+        <p:spPr/>
+        <p:txBody>
+          <a:bodyPr/>
+          <a:lstStyle/>
+          <a:p>
+            <a:endParaRPr lang="en-US"/>
+          </a:p>
+        </p:txBody>
+      </p:sp>
+      <p:pic>
+        <p:nvPicPr>
+          <p:cNvPr id="5" name="Content Placeholder 4">
+            <a:extLst>
+              <a:ext uri="{FF2B5EF4-FFF2-40B4-BE49-F238E27FC236}">
+                <a16:creationId xmlns:a16="http://schemas.microsoft.com/office/drawing/2014/main" id="{03BA8AF8-06F1-DAC9-446D-874494A5D3E9}"/>
+              </a:ext>
+            </a:extLst>
+          </p:cNvPr>
+          <p:cNvPicPr>
+            <a:picLocks noGrp="1" noChangeAspect="1"/>
+          </p:cNvPicPr>
+          <p:nvPr>
+            <p:ph idx="1"/>
+          </p:nvPr>
+        </p:nvPicPr>
+        <p:blipFill>
+          <a:blip r:embed="rId2"/>
+          <a:stretch>
+            <a:fillRect/>
+          </a:stretch>
+        </p:blipFill>
+        <p:spPr>
+          <a:xfrm>
+            <a:off x="3022600" y="1731963"/>
+            <a:ext cx="5404347" cy="4696116"/>
+          </a:xfrm>
+          <a:prstGeom prst="rect">
+            <a:avLst/>
+          </a:prstGeom>
+        </p:spPr>
+      </p:pic>
+    </p:spTree>
+    <p:extLst>
+      <p:ext uri="{BB962C8B-B14F-4D97-AF65-F5344CB8AC3E}">
+        <p14:creationId xmlns:p14="http://schemas.microsoft.com/office/powerpoint/2010/main" val="2648765840"/>
+      </p:ext>
+    </p:extLst>
+  </p:cSld>
+  <p:clrMapOvr>
+    <a:masterClrMapping/>
+  </p:clrMapOvr>
+</p:sld>
+</file>
+
+<file path=ppt/slides/slide229.xml><?xml version="1.0" encoding="utf-8"?>
+<p:sld xmlns:a="http://schemas.openxmlformats.org/drawingml/2006/main" xmlns:r="http://schemas.openxmlformats.org/officeDocument/2006/relationships" xmlns:p="http://schemas.openxmlformats.org/presentationml/2006/main">
+  <p:cSld>
+    <p:bg>
+      <p:bgPr>
+        <a:solidFill>
+          <a:schemeClr val="bg1"/>
+        </a:solidFill>
+        <a:effectLst/>
+      </p:bgPr>
+    </p:bg>
+    <p:spTree>
+      <p:nvGrpSpPr>
+        <p:cNvPr id="1" name=""/>
+        <p:cNvGrpSpPr/>
+        <p:nvPr/>
+      </p:nvGrpSpPr>
+      <p:grpSpPr>
+        <a:xfrm>
+          <a:off x="0" y="0"/>
+          <a:ext cx="0" cy="0"/>
+          <a:chOff x="0" y="0"/>
+          <a:chExt cx="0" cy="0"/>
+        </a:xfrm>
+      </p:grpSpPr>
+      <p:sp>
+        <p:nvSpPr>
+          <p:cNvPr id="16" name="Rectangle 15">
+            <a:extLst>
+              <a:ext uri="{FF2B5EF4-FFF2-40B4-BE49-F238E27FC236}">
+                <a16:creationId xmlns:a16="http://schemas.microsoft.com/office/drawing/2014/main" id="{95CB840F-8E41-4CA5-B79B-25CC80AD234A}"/>
+              </a:ext>
+              <a:ext uri="{C183D7F6-B498-43B3-948B-1728B52AA6E4}">
+                <adec:decorative xmlns:adec="http://schemas.microsoft.com/office/drawing/2017/decorative" val="1"/>
+              </a:ext>
+            </a:extLst>
+          </p:cNvPr>
+          <p:cNvSpPr>
+            <a:spLocks noGrp="1" noRot="1" noChangeAspect="1" noMove="1" noResize="1" noEditPoints="1" noAdjustHandles="1" noChangeArrowheads="1" noChangeShapeType="1" noTextEdit="1"/>
+          </p:cNvSpPr>
+          <p:nvPr>
+            <p:extLst>
+              <p:ext uri="{386F3935-93C4-4BCD-93E2-E3B085C9AB24}">
+                <p16:designElem xmlns:p16="http://schemas.microsoft.com/office/powerpoint/2015/main" val="1"/>
+              </p:ext>
+            </p:extLst>
+          </p:nvPr>
+        </p:nvSpPr>
+        <p:spPr>
+          <a:xfrm>
+            <a:off x="0" y="0"/>
+            <a:ext cx="12192000" cy="6858000"/>
+          </a:xfrm>
+          <a:prstGeom prst="rect">
+            <a:avLst/>
+          </a:prstGeom>
+          <a:ln>
+            <a:noFill/>
+          </a:ln>
+        </p:spPr>
+        <p:style>
+          <a:lnRef idx="2">
+            <a:schemeClr val="accent1">
+              <a:shade val="50000"/>
+            </a:schemeClr>
+          </a:lnRef>
+          <a:fillRef idx="1003">
+            <a:schemeClr val="dk2"/>
+          </a:fillRef>
+          <a:effectRef idx="0">
+            <a:schemeClr val="accent1"/>
+          </a:effectRef>
+          <a:fontRef idx="minor">
+            <a:schemeClr val="lt1"/>
+          </a:fontRef>
+        </p:style>
+        <p:txBody>
+          <a:bodyPr rtlCol="0" anchor="ctr"/>
+          <a:lstStyle/>
+          <a:p>
+            <a:pPr algn="ctr"/>
+            <a:endParaRPr lang="en-US"/>
+          </a:p>
+        </p:txBody>
+      </p:sp>
+      <p:sp>
+        <p:nvSpPr>
+          <p:cNvPr id="2" name="Title 1">
+            <a:extLst>
+              <a:ext uri="{FF2B5EF4-FFF2-40B4-BE49-F238E27FC236}">
+                <a16:creationId xmlns:a16="http://schemas.microsoft.com/office/drawing/2014/main" id="{6B81BFD1-4672-1A17-0632-493AD79F59BB}"/>
+              </a:ext>
+            </a:extLst>
+          </p:cNvPr>
+          <p:cNvSpPr>
+            <a:spLocks noGrp="1"/>
+          </p:cNvSpPr>
+          <p:nvPr>
+            <p:ph type="title"/>
+          </p:nvPr>
+        </p:nvSpPr>
+        <p:spPr>
+          <a:xfrm>
+            <a:off x="913795" y="609600"/>
+            <a:ext cx="3078749" cy="970450"/>
+          </a:xfrm>
+        </p:spPr>
+        <p:txBody>
+          <a:bodyPr anchor="b">
+            <a:normAutofit/>
+          </a:bodyPr>
+          <a:lstStyle/>
+          <a:p>
+            <a:pPr algn="l"/>
+            <a:endParaRPr lang="en-US" sz="2800">
+              <a:ln>
+                <a:solidFill>
+                  <a:srgbClr val="404040">
+                    <a:alpha val="10000"/>
+                  </a:srgbClr>
+                </a:solidFill>
+              </a:ln>
+              <a:solidFill>
+                <a:srgbClr val="DADADA"/>
+              </a:solidFill>
+            </a:endParaRPr>
+          </a:p>
+        </p:txBody>
+      </p:sp>
+      <p:sp>
+        <p:nvSpPr>
+          <p:cNvPr id="13" name="Content Placeholder 12">
+            <a:extLst>
+              <a:ext uri="{FF2B5EF4-FFF2-40B4-BE49-F238E27FC236}">
+                <a16:creationId xmlns:a16="http://schemas.microsoft.com/office/drawing/2014/main" id="{638DEBEA-0463-FFF1-48F0-E107746FA10B}"/>
+              </a:ext>
+            </a:extLst>
+          </p:cNvPr>
+          <p:cNvSpPr>
+            <a:spLocks noGrp="1"/>
+          </p:cNvSpPr>
+          <p:nvPr>
+            <p:ph idx="1"/>
+          </p:nvPr>
+        </p:nvSpPr>
+        <p:spPr>
+          <a:xfrm>
+            <a:off x="913795" y="1732449"/>
+            <a:ext cx="3078749" cy="4482084"/>
+          </a:xfrm>
+        </p:spPr>
+        <p:txBody>
+          <a:bodyPr anchor="t">
+            <a:normAutofit/>
+          </a:bodyPr>
+          <a:lstStyle/>
+          <a:p>
+            <a:endParaRPr lang="en-US" sz="1600">
+              <a:ln>
+                <a:solidFill>
+                  <a:srgbClr val="404040">
+                    <a:alpha val="10000"/>
+                  </a:srgbClr>
+                </a:solidFill>
+              </a:ln>
+              <a:solidFill>
+                <a:srgbClr val="DADADA"/>
+              </a:solidFill>
+            </a:endParaRPr>
+          </a:p>
+        </p:txBody>
+      </p:sp>
+      <p:pic>
+        <p:nvPicPr>
+          <p:cNvPr id="9" name="Content Placeholder 8">
+            <a:extLst>
+              <a:ext uri="{FF2B5EF4-FFF2-40B4-BE49-F238E27FC236}">
+                <a16:creationId xmlns:a16="http://schemas.microsoft.com/office/drawing/2014/main" id="{1430FBCB-30FE-D5A0-0E81-24AA10B36D91}"/>
+              </a:ext>
+            </a:extLst>
+          </p:cNvPr>
+          <p:cNvPicPr>
+            <a:picLocks noChangeAspect="1"/>
+          </p:cNvPicPr>
+          <p:nvPr/>
+        </p:nvPicPr>
+        <p:blipFill>
+          <a:blip r:embed="rId2"/>
+          <a:stretch>
+            <a:fillRect/>
+          </a:stretch>
+        </p:blipFill>
+        <p:spPr>
+          <a:xfrm>
+            <a:off x="5647266" y="63836"/>
+            <a:ext cx="5300133" cy="6730328"/>
+          </a:xfrm>
+          <a:prstGeom prst="rect">
+            <a:avLst/>
+          </a:prstGeom>
+        </p:spPr>
+      </p:pic>
+    </p:spTree>
+    <p:extLst>
+      <p:ext uri="{BB962C8B-B14F-4D97-AF65-F5344CB8AC3E}">
+        <p14:creationId xmlns:p14="http://schemas.microsoft.com/office/powerpoint/2010/main" val="2769679204"/>
+      </p:ext>
+    </p:extLst>
+  </p:cSld>
+  <p:clrMapOvr>
+    <a:overrideClrMapping bg1="lt1" tx1="dk1" bg2="lt2" tx2="dk2" accent1="accent1" accent2="accent2" accent3="accent3" accent4="accent4" accent5="accent5" accent6="accent6" hlink="hlink" folHlink="folHlink"/>
   </p:clrMapOvr>
 </p:sld>
 </file>
@@ -53721,7 +54155,23 @@
                   <a:srgbClr val="FF0000"/>
                 </a:solidFill>
               </a:rPr>
-              <a:t>Flow_Sectors</a:t>
+              <a:t>Flow_Sectors [ </a:t>
+            </a:r>
+            <a:r>
+              <a:rPr lang="ar-EG" b="1">
+                <a:solidFill>
+                  <a:srgbClr val="FF0000"/>
+                </a:solidFill>
+              </a:rPr>
+              <a:t>القطاع</a:t>
+            </a:r>
+            <a:r>
+              <a:rPr lang="en-US" b="1">
+                <a:solidFill>
+                  <a:srgbClr val="FF0000"/>
+                </a:solidFill>
+              </a:rPr>
+              <a:t> ]</a:t>
             </a:r>
           </a:p>
         </p:txBody>

--- a/Dot Net/Business.pptx
+++ b/Dot Net/Business.pptx
@@ -234,6 +234,14 @@
     <p:sldId id="550" r:id="rId228"/>
     <p:sldId id="552" r:id="rId229"/>
     <p:sldId id="551" r:id="rId230"/>
+    <p:sldId id="553" r:id="rId231"/>
+    <p:sldId id="555" r:id="rId232"/>
+    <p:sldId id="556" r:id="rId233"/>
+    <p:sldId id="557" r:id="rId234"/>
+    <p:sldId id="554" r:id="rId235"/>
+    <p:sldId id="558" r:id="rId236"/>
+    <p:sldId id="559" r:id="rId237"/>
+    <p:sldId id="560" r:id="rId238"/>
   </p:sldIdLst>
   <p:sldSz cx="12192000" cy="6858000"/>
   <p:notesSz cx="6858000" cy="9144000"/>
@@ -525,7 +533,7 @@
           <a:p>
             <a:fld id="{C744FA5D-EF1D-489D-8D8F-1FF7B7B6D702}" type="datetimeFigureOut">
               <a:rPr lang="en-US" smtClean="0"/>
-              <a:t>7/14/2026</a:t>
+              <a:t>7/20/2026</a:t>
             </a:fld>
             <a:endParaRPr lang="en-US"/>
           </a:p>
@@ -822,7 +830,7 @@
           <a:p>
             <a:fld id="{C744FA5D-EF1D-489D-8D8F-1FF7B7B6D702}" type="datetimeFigureOut">
               <a:rPr lang="en-US" smtClean="0"/>
-              <a:t>7/14/2026</a:t>
+              <a:t>7/20/2026</a:t>
             </a:fld>
             <a:endParaRPr lang="en-US"/>
           </a:p>
@@ -1014,7 +1022,7 @@
           <a:p>
             <a:fld id="{C744FA5D-EF1D-489D-8D8F-1FF7B7B6D702}" type="datetimeFigureOut">
               <a:rPr lang="en-US" smtClean="0"/>
-              <a:t>7/14/2026</a:t>
+              <a:t>7/20/2026</a:t>
             </a:fld>
             <a:endParaRPr lang="en-US"/>
           </a:p>
@@ -1275,7 +1283,7 @@
           <a:p>
             <a:fld id="{C744FA5D-EF1D-489D-8D8F-1FF7B7B6D702}" type="datetimeFigureOut">
               <a:rPr lang="en-US" smtClean="0"/>
-              <a:t>7/14/2026</a:t>
+              <a:t>7/20/2026</a:t>
             </a:fld>
             <a:endParaRPr lang="en-US"/>
           </a:p>
@@ -1699,7 +1707,7 @@
           <a:p>
             <a:fld id="{C744FA5D-EF1D-489D-8D8F-1FF7B7B6D702}" type="datetimeFigureOut">
               <a:rPr lang="en-US" smtClean="0"/>
-              <a:t>7/14/2026</a:t>
+              <a:t>7/20/2026</a:t>
             </a:fld>
             <a:endParaRPr lang="en-US"/>
           </a:p>
@@ -2236,7 +2244,7 @@
           <a:p>
             <a:fld id="{C744FA5D-EF1D-489D-8D8F-1FF7B7B6D702}" type="datetimeFigureOut">
               <a:rPr lang="en-US" smtClean="0"/>
-              <a:t>7/14/2026</a:t>
+              <a:t>7/20/2026</a:t>
             </a:fld>
             <a:endParaRPr lang="en-US"/>
           </a:p>
@@ -3097,7 +3105,7 @@
           <a:p>
             <a:fld id="{C744FA5D-EF1D-489D-8D8F-1FF7B7B6D702}" type="datetimeFigureOut">
               <a:rPr lang="en-US" smtClean="0"/>
-              <a:t>7/14/2026</a:t>
+              <a:t>7/20/2026</a:t>
             </a:fld>
             <a:endParaRPr lang="en-US"/>
           </a:p>
@@ -3267,7 +3275,7 @@
           <a:p>
             <a:fld id="{C744FA5D-EF1D-489D-8D8F-1FF7B7B6D702}" type="datetimeFigureOut">
               <a:rPr lang="en-US" smtClean="0"/>
-              <a:t>7/14/2026</a:t>
+              <a:t>7/20/2026</a:t>
             </a:fld>
             <a:endParaRPr lang="en-US"/>
           </a:p>
@@ -3451,7 +3459,7 @@
           <a:p>
             <a:fld id="{C744FA5D-EF1D-489D-8D8F-1FF7B7B6D702}" type="datetimeFigureOut">
               <a:rPr lang="en-US" smtClean="0"/>
-              <a:t>7/14/2026</a:t>
+              <a:t>7/20/2026</a:t>
             </a:fld>
             <a:endParaRPr lang="en-US"/>
           </a:p>
@@ -3621,7 +3629,7 @@
           <a:p>
             <a:fld id="{C744FA5D-EF1D-489D-8D8F-1FF7B7B6D702}" type="datetimeFigureOut">
               <a:rPr lang="en-US" smtClean="0"/>
-              <a:t>7/14/2026</a:t>
+              <a:t>7/20/2026</a:t>
             </a:fld>
             <a:endParaRPr lang="en-US"/>
           </a:p>
@@ -3865,7 +3873,7 @@
           <a:p>
             <a:fld id="{C744FA5D-EF1D-489D-8D8F-1FF7B7B6D702}" type="datetimeFigureOut">
               <a:rPr lang="en-US" smtClean="0"/>
-              <a:t>7/14/2026</a:t>
+              <a:t>7/20/2026</a:t>
             </a:fld>
             <a:endParaRPr lang="en-US"/>
           </a:p>
@@ -4101,7 +4109,7 @@
           <a:p>
             <a:fld id="{C744FA5D-EF1D-489D-8D8F-1FF7B7B6D702}" type="datetimeFigureOut">
               <a:rPr lang="en-US" smtClean="0"/>
-              <a:t>7/14/2026</a:t>
+              <a:t>7/20/2026</a:t>
             </a:fld>
             <a:endParaRPr lang="en-US"/>
           </a:p>
@@ -4567,7 +4575,7 @@
           <a:p>
             <a:fld id="{C744FA5D-EF1D-489D-8D8F-1FF7B7B6D702}" type="datetimeFigureOut">
               <a:rPr lang="en-US" smtClean="0"/>
-              <a:t>7/14/2026</a:t>
+              <a:t>7/20/2026</a:t>
             </a:fld>
             <a:endParaRPr lang="en-US"/>
           </a:p>
@@ -4685,7 +4693,7 @@
           <a:p>
             <a:fld id="{C744FA5D-EF1D-489D-8D8F-1FF7B7B6D702}" type="datetimeFigureOut">
               <a:rPr lang="en-US" smtClean="0"/>
-              <a:t>7/14/2026</a:t>
+              <a:t>7/20/2026</a:t>
             </a:fld>
             <a:endParaRPr lang="en-US"/>
           </a:p>
@@ -4780,7 +4788,7 @@
           <a:p>
             <a:fld id="{C744FA5D-EF1D-489D-8D8F-1FF7B7B6D702}" type="datetimeFigureOut">
               <a:rPr lang="en-US" smtClean="0"/>
-              <a:t>7/14/2026</a:t>
+              <a:t>7/20/2026</a:t>
             </a:fld>
             <a:endParaRPr lang="en-US"/>
           </a:p>
@@ -5035,7 +5043,7 @@
           <a:p>
             <a:fld id="{C744FA5D-EF1D-489D-8D8F-1FF7B7B6D702}" type="datetimeFigureOut">
               <a:rPr lang="en-US" smtClean="0"/>
-              <a:t>7/14/2026</a:t>
+              <a:t>7/20/2026</a:t>
             </a:fld>
             <a:endParaRPr lang="en-US"/>
           </a:p>
@@ -5334,7 +5342,7 @@
           <a:p>
             <a:fld id="{C744FA5D-EF1D-489D-8D8F-1FF7B7B6D702}" type="datetimeFigureOut">
               <a:rPr lang="en-US" smtClean="0"/>
-              <a:t>7/14/2026</a:t>
+              <a:t>7/20/2026</a:t>
             </a:fld>
             <a:endParaRPr lang="en-US"/>
           </a:p>
@@ -5568,7 +5576,7 @@
           <a:p>
             <a:fld id="{C744FA5D-EF1D-489D-8D8F-1FF7B7B6D702}" type="datetimeFigureOut">
               <a:rPr lang="en-US" smtClean="0"/>
-              <a:t>7/14/2026</a:t>
+              <a:t>7/20/2026</a:t>
             </a:fld>
             <a:endParaRPr lang="en-US"/>
           </a:p>
@@ -20070,13 +20078,13 @@
           <a:p>
             <a:r>
               <a:rPr lang="en-US" sz="1800" b="1"/>
-              <a:t>Date_Creation:</a:t>
+              <a:t>Date_Creation: date.now</a:t>
             </a:r>
           </a:p>
           <a:p>
             <a:r>
               <a:rPr lang="en-US" sz="1800" b="1"/>
-              <a:t>Daily_date: </a:t>
+              <a:t>Daily_date: date.now</a:t>
             </a:r>
           </a:p>
           <a:p>
@@ -33623,6 +33631,1008 @@
 </p:sld>
 </file>
 
+<file path=ppt/slides/slide230.xml><?xml version="1.0" encoding="utf-8"?>
+<p:sld xmlns:a="http://schemas.openxmlformats.org/drawingml/2006/main" xmlns:r="http://schemas.openxmlformats.org/officeDocument/2006/relationships" xmlns:p="http://schemas.openxmlformats.org/presentationml/2006/main">
+  <p:cSld>
+    <p:spTree>
+      <p:nvGrpSpPr>
+        <p:cNvPr id="1" name=""/>
+        <p:cNvGrpSpPr/>
+        <p:nvPr/>
+      </p:nvGrpSpPr>
+      <p:grpSpPr>
+        <a:xfrm>
+          <a:off x="0" y="0"/>
+          <a:ext cx="0" cy="0"/>
+          <a:chOff x="0" y="0"/>
+          <a:chExt cx="0" cy="0"/>
+        </a:xfrm>
+      </p:grpSpPr>
+      <p:pic>
+        <p:nvPicPr>
+          <p:cNvPr id="5" name="Content Placeholder 4">
+            <a:extLst>
+              <a:ext uri="{FF2B5EF4-FFF2-40B4-BE49-F238E27FC236}">
+                <a16:creationId xmlns:a16="http://schemas.microsoft.com/office/drawing/2014/main" id="{6C9DF935-E799-C355-44C2-7208EC36EB6A}"/>
+              </a:ext>
+            </a:extLst>
+          </p:cNvPr>
+          <p:cNvPicPr>
+            <a:picLocks noGrp="1" noChangeAspect="1"/>
+          </p:cNvPicPr>
+          <p:nvPr>
+            <p:ph idx="1"/>
+          </p:nvPr>
+        </p:nvPicPr>
+        <p:blipFill>
+          <a:blip r:embed="rId2"/>
+          <a:stretch>
+            <a:fillRect/>
+          </a:stretch>
+        </p:blipFill>
+        <p:spPr>
+          <a:xfrm>
+            <a:off x="389467" y="245533"/>
+            <a:ext cx="7053263" cy="1657350"/>
+          </a:xfrm>
+          <a:prstGeom prst="rect">
+            <a:avLst/>
+          </a:prstGeom>
+          <a:effectLst>
+            <a:outerShdw blurRad="25400" dir="17880000">
+              <a:srgbClr val="000000">
+                <a:alpha val="46000"/>
+              </a:srgbClr>
+            </a:outerShdw>
+          </a:effectLst>
+        </p:spPr>
+      </p:pic>
+      <p:pic>
+        <p:nvPicPr>
+          <p:cNvPr id="7" name="Picture 6">
+            <a:extLst>
+              <a:ext uri="{FF2B5EF4-FFF2-40B4-BE49-F238E27FC236}">
+                <a16:creationId xmlns:a16="http://schemas.microsoft.com/office/drawing/2014/main" id="{1DEBB8D0-C89F-873E-EFD8-C90893DA45EE}"/>
+              </a:ext>
+            </a:extLst>
+          </p:cNvPr>
+          <p:cNvPicPr>
+            <a:picLocks noChangeAspect="1"/>
+          </p:cNvPicPr>
+          <p:nvPr/>
+        </p:nvPicPr>
+        <p:blipFill>
+          <a:blip r:embed="rId3"/>
+          <a:stretch>
+            <a:fillRect/>
+          </a:stretch>
+        </p:blipFill>
+        <p:spPr>
+          <a:xfrm>
+            <a:off x="93133" y="2085463"/>
+            <a:ext cx="11150600" cy="4348461"/>
+          </a:xfrm>
+          <a:prstGeom prst="rect">
+            <a:avLst/>
+          </a:prstGeom>
+        </p:spPr>
+      </p:pic>
+    </p:spTree>
+    <p:extLst>
+      <p:ext uri="{BB962C8B-B14F-4D97-AF65-F5344CB8AC3E}">
+        <p14:creationId xmlns:p14="http://schemas.microsoft.com/office/powerpoint/2010/main" val="390650706"/>
+      </p:ext>
+    </p:extLst>
+  </p:cSld>
+  <p:clrMapOvr>
+    <a:masterClrMapping/>
+  </p:clrMapOvr>
+</p:sld>
+</file>
+
+<file path=ppt/slides/slide231.xml><?xml version="1.0" encoding="utf-8"?>
+<p:sld xmlns:a="http://schemas.openxmlformats.org/drawingml/2006/main" xmlns:r="http://schemas.openxmlformats.org/officeDocument/2006/relationships" xmlns:p="http://schemas.openxmlformats.org/presentationml/2006/main">
+  <p:cSld>
+    <p:spTree>
+      <p:nvGrpSpPr>
+        <p:cNvPr id="1" name=""/>
+        <p:cNvGrpSpPr/>
+        <p:nvPr/>
+      </p:nvGrpSpPr>
+      <p:grpSpPr>
+        <a:xfrm>
+          <a:off x="0" y="0"/>
+          <a:ext cx="0" cy="0"/>
+          <a:chOff x="0" y="0"/>
+          <a:chExt cx="0" cy="0"/>
+        </a:xfrm>
+      </p:grpSpPr>
+      <p:sp>
+        <p:nvSpPr>
+          <p:cNvPr id="2" name="Title 1">
+            <a:extLst>
+              <a:ext uri="{FF2B5EF4-FFF2-40B4-BE49-F238E27FC236}">
+                <a16:creationId xmlns:a16="http://schemas.microsoft.com/office/drawing/2014/main" id="{F23232DB-35E6-24A4-7BBB-88C42BBCC711}"/>
+              </a:ext>
+            </a:extLst>
+          </p:cNvPr>
+          <p:cNvSpPr>
+            <a:spLocks noGrp="1"/>
+          </p:cNvSpPr>
+          <p:nvPr>
+            <p:ph type="title"/>
+          </p:nvPr>
+        </p:nvSpPr>
+        <p:spPr>
+          <a:xfrm>
+            <a:off x="913795" y="0"/>
+            <a:ext cx="10353762" cy="561975"/>
+          </a:xfrm>
+        </p:spPr>
+        <p:txBody>
+          <a:bodyPr>
+            <a:normAutofit fontScale="90000"/>
+          </a:bodyPr>
+          <a:lstStyle/>
+          <a:p>
+            <a:r>
+              <a:rPr lang="en-US"/>
+              <a:t>CO</a:t>
+            </a:r>
+            <a:r>
+              <a:rPr lang="ar-EG"/>
+              <a:t>في المراجعة الأولية عند ال </a:t>
+            </a:r>
+            <a:r>
+              <a:rPr lang="en-US"/>
+              <a:t> </a:t>
+            </a:r>
+          </a:p>
+        </p:txBody>
+      </p:sp>
+      <p:sp>
+        <p:nvSpPr>
+          <p:cNvPr id="3" name="Content Placeholder 2">
+            <a:extLst>
+              <a:ext uri="{FF2B5EF4-FFF2-40B4-BE49-F238E27FC236}">
+                <a16:creationId xmlns:a16="http://schemas.microsoft.com/office/drawing/2014/main" id="{C5C18C95-995B-C309-BEF6-1E998AE8AF2F}"/>
+              </a:ext>
+            </a:extLst>
+          </p:cNvPr>
+          <p:cNvSpPr>
+            <a:spLocks noGrp="1"/>
+          </p:cNvSpPr>
+          <p:nvPr>
+            <p:ph idx="1"/>
+          </p:nvPr>
+        </p:nvSpPr>
+        <p:spPr>
+          <a:xfrm>
+            <a:off x="152400" y="561975"/>
+            <a:ext cx="11896725" cy="6229350"/>
+          </a:xfrm>
+        </p:spPr>
+        <p:txBody>
+          <a:bodyPr/>
+          <a:lstStyle/>
+          <a:p>
+            <a:r>
+              <a:rPr lang="en-US"/>
+              <a:t>The Tab of</a:t>
+            </a:r>
+            <a:r>
+              <a:rPr lang="ar-EG"/>
+              <a:t> </a:t>
+            </a:r>
+            <a:r>
+              <a:rPr lang="en-US"/>
+              <a:t>funding data will be blocked</a:t>
+            </a:r>
+          </a:p>
+          <a:p>
+            <a:endParaRPr lang="en-US"/>
+          </a:p>
+          <a:p>
+            <a:endParaRPr lang="en-US"/>
+          </a:p>
+        </p:txBody>
+      </p:sp>
+      <p:pic>
+        <p:nvPicPr>
+          <p:cNvPr id="5" name="Picture 4">
+            <a:extLst>
+              <a:ext uri="{FF2B5EF4-FFF2-40B4-BE49-F238E27FC236}">
+                <a16:creationId xmlns:a16="http://schemas.microsoft.com/office/drawing/2014/main" id="{CDB2179A-87FE-071A-EAEF-15773A8C1701}"/>
+              </a:ext>
+            </a:extLst>
+          </p:cNvPr>
+          <p:cNvPicPr>
+            <a:picLocks noChangeAspect="1"/>
+          </p:cNvPicPr>
+          <p:nvPr/>
+        </p:nvPicPr>
+        <p:blipFill>
+          <a:blip r:embed="rId2"/>
+          <a:stretch>
+            <a:fillRect/>
+          </a:stretch>
+        </p:blipFill>
+        <p:spPr>
+          <a:xfrm>
+            <a:off x="348088" y="1123950"/>
+            <a:ext cx="8745536" cy="4783743"/>
+          </a:xfrm>
+          <a:prstGeom prst="rect">
+            <a:avLst/>
+          </a:prstGeom>
+        </p:spPr>
+      </p:pic>
+    </p:spTree>
+    <p:extLst>
+      <p:ext uri="{BB962C8B-B14F-4D97-AF65-F5344CB8AC3E}">
+        <p14:creationId xmlns:p14="http://schemas.microsoft.com/office/powerpoint/2010/main" val="1518256285"/>
+      </p:ext>
+    </p:extLst>
+  </p:cSld>
+  <p:clrMapOvr>
+    <a:masterClrMapping/>
+  </p:clrMapOvr>
+</p:sld>
+</file>
+
+<file path=ppt/slides/slide232.xml><?xml version="1.0" encoding="utf-8"?>
+<p:sld xmlns:a="http://schemas.openxmlformats.org/drawingml/2006/main" xmlns:r="http://schemas.openxmlformats.org/officeDocument/2006/relationships" xmlns:p="http://schemas.openxmlformats.org/presentationml/2006/main">
+  <p:cSld>
+    <p:spTree>
+      <p:nvGrpSpPr>
+        <p:cNvPr id="1" name=""/>
+        <p:cNvGrpSpPr/>
+        <p:nvPr/>
+      </p:nvGrpSpPr>
+      <p:grpSpPr>
+        <a:xfrm>
+          <a:off x="0" y="0"/>
+          <a:ext cx="0" cy="0"/>
+          <a:chOff x="0" y="0"/>
+          <a:chExt cx="0" cy="0"/>
+        </a:xfrm>
+      </p:grpSpPr>
+      <p:pic>
+        <p:nvPicPr>
+          <p:cNvPr id="5" name="Content Placeholder 4">
+            <a:extLst>
+              <a:ext uri="{FF2B5EF4-FFF2-40B4-BE49-F238E27FC236}">
+                <a16:creationId xmlns:a16="http://schemas.microsoft.com/office/drawing/2014/main" id="{8664DF23-DE7D-7FD3-7680-C1FA2212D644}"/>
+              </a:ext>
+            </a:extLst>
+          </p:cNvPr>
+          <p:cNvPicPr>
+            <a:picLocks noGrp="1" noChangeAspect="1"/>
+          </p:cNvPicPr>
+          <p:nvPr>
+            <p:ph idx="1"/>
+          </p:nvPr>
+        </p:nvPicPr>
+        <p:blipFill>
+          <a:blip r:embed="rId2"/>
+          <a:stretch>
+            <a:fillRect/>
+          </a:stretch>
+        </p:blipFill>
+        <p:spPr>
+          <a:xfrm>
+            <a:off x="655820" y="309563"/>
+            <a:ext cx="8521756" cy="4897437"/>
+          </a:xfrm>
+          <a:prstGeom prst="rect">
+            <a:avLst/>
+          </a:prstGeom>
+          <a:effectLst>
+            <a:outerShdw blurRad="25400" dir="17880000">
+              <a:srgbClr val="000000">
+                <a:alpha val="46000"/>
+              </a:srgbClr>
+            </a:outerShdw>
+          </a:effectLst>
+        </p:spPr>
+      </p:pic>
+    </p:spTree>
+    <p:extLst>
+      <p:ext uri="{BB962C8B-B14F-4D97-AF65-F5344CB8AC3E}">
+        <p14:creationId xmlns:p14="http://schemas.microsoft.com/office/powerpoint/2010/main" val="1750546067"/>
+      </p:ext>
+    </p:extLst>
+  </p:cSld>
+  <p:clrMapOvr>
+    <a:masterClrMapping/>
+  </p:clrMapOvr>
+</p:sld>
+</file>
+
+<file path=ppt/slides/slide233.xml><?xml version="1.0" encoding="utf-8"?>
+<p:sld xmlns:a="http://schemas.openxmlformats.org/drawingml/2006/main" xmlns:r="http://schemas.openxmlformats.org/officeDocument/2006/relationships" xmlns:p="http://schemas.openxmlformats.org/presentationml/2006/main">
+  <p:cSld>
+    <p:spTree>
+      <p:nvGrpSpPr>
+        <p:cNvPr id="1" name=""/>
+        <p:cNvGrpSpPr/>
+        <p:nvPr/>
+      </p:nvGrpSpPr>
+      <p:grpSpPr>
+        <a:xfrm>
+          <a:off x="0" y="0"/>
+          <a:ext cx="0" cy="0"/>
+          <a:chOff x="0" y="0"/>
+          <a:chExt cx="0" cy="0"/>
+        </a:xfrm>
+      </p:grpSpPr>
+      <p:sp>
+        <p:nvSpPr>
+          <p:cNvPr id="2" name="Title 1">
+            <a:extLst>
+              <a:ext uri="{FF2B5EF4-FFF2-40B4-BE49-F238E27FC236}">
+                <a16:creationId xmlns:a16="http://schemas.microsoft.com/office/drawing/2014/main" id="{BD700E2F-F2E5-0EA9-E462-7388121203E8}"/>
+              </a:ext>
+            </a:extLst>
+          </p:cNvPr>
+          <p:cNvSpPr>
+            <a:spLocks noGrp="1"/>
+          </p:cNvSpPr>
+          <p:nvPr>
+            <p:ph type="title"/>
+          </p:nvPr>
+        </p:nvSpPr>
+        <p:spPr/>
+        <p:txBody>
+          <a:bodyPr/>
+          <a:lstStyle/>
+          <a:p>
+            <a:endParaRPr lang="en-US"/>
+          </a:p>
+        </p:txBody>
+      </p:sp>
+      <p:pic>
+        <p:nvPicPr>
+          <p:cNvPr id="5" name="Content Placeholder 4">
+            <a:extLst>
+              <a:ext uri="{FF2B5EF4-FFF2-40B4-BE49-F238E27FC236}">
+                <a16:creationId xmlns:a16="http://schemas.microsoft.com/office/drawing/2014/main" id="{70810547-B792-B21E-C972-B3587DDBFB52}"/>
+              </a:ext>
+            </a:extLst>
+          </p:cNvPr>
+          <p:cNvPicPr>
+            <a:picLocks noGrp="1" noChangeAspect="1"/>
+          </p:cNvPicPr>
+          <p:nvPr>
+            <p:ph idx="1"/>
+          </p:nvPr>
+        </p:nvPicPr>
+        <p:blipFill>
+          <a:blip r:embed="rId2"/>
+          <a:stretch>
+            <a:fillRect/>
+          </a:stretch>
+        </p:blipFill>
+        <p:spPr>
+          <a:xfrm>
+            <a:off x="410212" y="1731963"/>
+            <a:ext cx="9733284" cy="4516437"/>
+          </a:xfrm>
+          <a:prstGeom prst="rect">
+            <a:avLst/>
+          </a:prstGeom>
+          <a:effectLst>
+            <a:outerShdw blurRad="25400" dir="17880000">
+              <a:srgbClr val="000000">
+                <a:alpha val="46000"/>
+              </a:srgbClr>
+            </a:outerShdw>
+          </a:effectLst>
+        </p:spPr>
+      </p:pic>
+    </p:spTree>
+    <p:extLst>
+      <p:ext uri="{BB962C8B-B14F-4D97-AF65-F5344CB8AC3E}">
+        <p14:creationId xmlns:p14="http://schemas.microsoft.com/office/powerpoint/2010/main" val="1203947331"/>
+      </p:ext>
+    </p:extLst>
+  </p:cSld>
+  <p:clrMapOvr>
+    <a:masterClrMapping/>
+  </p:clrMapOvr>
+</p:sld>
+</file>
+
+<file path=ppt/slides/slide234.xml><?xml version="1.0" encoding="utf-8"?>
+<p:sld xmlns:a="http://schemas.openxmlformats.org/drawingml/2006/main" xmlns:r="http://schemas.openxmlformats.org/officeDocument/2006/relationships" xmlns:p="http://schemas.openxmlformats.org/presentationml/2006/main">
+  <p:cSld>
+    <p:spTree>
+      <p:nvGrpSpPr>
+        <p:cNvPr id="1" name=""/>
+        <p:cNvGrpSpPr/>
+        <p:nvPr/>
+      </p:nvGrpSpPr>
+      <p:grpSpPr>
+        <a:xfrm>
+          <a:off x="0" y="0"/>
+          <a:ext cx="0" cy="0"/>
+          <a:chOff x="0" y="0"/>
+          <a:chExt cx="0" cy="0"/>
+        </a:xfrm>
+      </p:grpSpPr>
+      <p:sp>
+        <p:nvSpPr>
+          <p:cNvPr id="2" name="Title 1">
+            <a:extLst>
+              <a:ext uri="{FF2B5EF4-FFF2-40B4-BE49-F238E27FC236}">
+                <a16:creationId xmlns:a16="http://schemas.microsoft.com/office/drawing/2014/main" id="{C06DDCF2-28B3-2608-2193-110E524EE054}"/>
+              </a:ext>
+            </a:extLst>
+          </p:cNvPr>
+          <p:cNvSpPr>
+            <a:spLocks noGrp="1"/>
+          </p:cNvSpPr>
+          <p:nvPr>
+            <p:ph type="title"/>
+          </p:nvPr>
+        </p:nvSpPr>
+        <p:spPr/>
+        <p:txBody>
+          <a:bodyPr/>
+          <a:lstStyle/>
+          <a:p>
+            <a:endParaRPr lang="en-US"/>
+          </a:p>
+        </p:txBody>
+      </p:sp>
+      <p:sp>
+        <p:nvSpPr>
+          <p:cNvPr id="3" name="Content Placeholder 2">
+            <a:extLst>
+              <a:ext uri="{FF2B5EF4-FFF2-40B4-BE49-F238E27FC236}">
+                <a16:creationId xmlns:a16="http://schemas.microsoft.com/office/drawing/2014/main" id="{AE77FC4D-9C46-C0FB-0845-83ECB0431E3A}"/>
+              </a:ext>
+            </a:extLst>
+          </p:cNvPr>
+          <p:cNvSpPr>
+            <a:spLocks noGrp="1"/>
+          </p:cNvSpPr>
+          <p:nvPr>
+            <p:ph idx="1"/>
+          </p:nvPr>
+        </p:nvSpPr>
+        <p:spPr>
+          <a:xfrm>
+            <a:off x="409575" y="1732449"/>
+            <a:ext cx="10857982" cy="4668351"/>
+          </a:xfrm>
+        </p:spPr>
+        <p:txBody>
+          <a:bodyPr/>
+          <a:lstStyle/>
+          <a:p>
+            <a:r>
+              <a:rPr lang="en-US"/>
+              <a:t>At Save for the first time</a:t>
+            </a:r>
+          </a:p>
+          <a:p>
+            <a:pPr lvl="1"/>
+            <a:r>
+              <a:rPr lang="en-US"/>
+              <a:t>Vendor_Deportation</a:t>
+            </a:r>
+          </a:p>
+          <a:p>
+            <a:pPr lvl="2"/>
+            <a:r>
+              <a:rPr lang="en-US"/>
+              <a:t>From: </a:t>
+            </a:r>
+            <a:r>
+              <a:rPr lang="ar-EG"/>
+              <a:t>تسجيل المورد</a:t>
+            </a:r>
+            <a:endParaRPr lang="en-US"/>
+          </a:p>
+          <a:p>
+            <a:pPr lvl="2"/>
+            <a:r>
+              <a:rPr lang="en-US"/>
+              <a:t>To: </a:t>
+            </a:r>
+            <a:r>
+              <a:rPr lang="ar-EG"/>
+              <a:t>تحميل مستندات المورد</a:t>
+            </a:r>
+            <a:r>
+              <a:rPr lang="en-US"/>
+              <a:t> </a:t>
+            </a:r>
+          </a:p>
+          <a:p>
+            <a:pPr lvl="2"/>
+            <a:r>
+              <a:rPr lang="en-US"/>
+              <a:t>StatusOne: inProcess</a:t>
+            </a:r>
+          </a:p>
+          <a:p>
+            <a:pPr lvl="2"/>
+            <a:r>
+              <a:rPr lang="en-US"/>
+              <a:t>StatusTwo:  </a:t>
+            </a:r>
+          </a:p>
+          <a:p>
+            <a:pPr lvl="1"/>
+            <a:r>
+              <a:rPr lang="en-US"/>
+              <a:t>Vendor_Log</a:t>
+            </a:r>
+          </a:p>
+          <a:p>
+            <a:pPr lvl="2"/>
+            <a:endParaRPr lang="en-US"/>
+          </a:p>
+        </p:txBody>
+      </p:sp>
+    </p:spTree>
+    <p:extLst>
+      <p:ext uri="{BB962C8B-B14F-4D97-AF65-F5344CB8AC3E}">
+        <p14:creationId xmlns:p14="http://schemas.microsoft.com/office/powerpoint/2010/main" val="3494271206"/>
+      </p:ext>
+    </p:extLst>
+  </p:cSld>
+  <p:clrMapOvr>
+    <a:masterClrMapping/>
+  </p:clrMapOvr>
+</p:sld>
+</file>
+
+<file path=ppt/slides/slide235.xml><?xml version="1.0" encoding="utf-8"?>
+<p:sld xmlns:a="http://schemas.openxmlformats.org/drawingml/2006/main" xmlns:r="http://schemas.openxmlformats.org/officeDocument/2006/relationships" xmlns:p="http://schemas.openxmlformats.org/presentationml/2006/main">
+  <p:cSld>
+    <p:spTree>
+      <p:nvGrpSpPr>
+        <p:cNvPr id="1" name=""/>
+        <p:cNvGrpSpPr/>
+        <p:nvPr/>
+      </p:nvGrpSpPr>
+      <p:grpSpPr>
+        <a:xfrm>
+          <a:off x="0" y="0"/>
+          <a:ext cx="0" cy="0"/>
+          <a:chOff x="0" y="0"/>
+          <a:chExt cx="0" cy="0"/>
+        </a:xfrm>
+      </p:grpSpPr>
+      <p:sp>
+        <p:nvSpPr>
+          <p:cNvPr id="2" name="Title 1">
+            <a:extLst>
+              <a:ext uri="{FF2B5EF4-FFF2-40B4-BE49-F238E27FC236}">
+                <a16:creationId xmlns:a16="http://schemas.microsoft.com/office/drawing/2014/main" id="{4E53F1D3-748B-D332-C86E-F9B06BD8C11F}"/>
+              </a:ext>
+            </a:extLst>
+          </p:cNvPr>
+          <p:cNvSpPr>
+            <a:spLocks noGrp="1"/>
+          </p:cNvSpPr>
+          <p:nvPr>
+            <p:ph type="title"/>
+          </p:nvPr>
+        </p:nvSpPr>
+        <p:spPr>
+          <a:xfrm>
+            <a:off x="552449" y="95250"/>
+            <a:ext cx="11277601" cy="970450"/>
+          </a:xfrm>
+        </p:spPr>
+        <p:txBody>
+          <a:bodyPr/>
+          <a:lstStyle/>
+          <a:p>
+            <a:endParaRPr lang="en-US"/>
+          </a:p>
+        </p:txBody>
+      </p:sp>
+      <p:sp>
+        <p:nvSpPr>
+          <p:cNvPr id="3" name="Content Placeholder 2">
+            <a:extLst>
+              <a:ext uri="{FF2B5EF4-FFF2-40B4-BE49-F238E27FC236}">
+                <a16:creationId xmlns:a16="http://schemas.microsoft.com/office/drawing/2014/main" id="{2D24B343-3C58-9934-D78D-84346DD4E02A}"/>
+              </a:ext>
+            </a:extLst>
+          </p:cNvPr>
+          <p:cNvSpPr>
+            <a:spLocks noGrp="1"/>
+          </p:cNvSpPr>
+          <p:nvPr>
+            <p:ph idx="1"/>
+          </p:nvPr>
+        </p:nvSpPr>
+        <p:spPr>
+          <a:xfrm>
+            <a:off x="552450" y="1143000"/>
+            <a:ext cx="10715107" cy="5457825"/>
+          </a:xfrm>
+        </p:spPr>
+        <p:txBody>
+          <a:bodyPr/>
+          <a:lstStyle/>
+          <a:p>
+            <a:endParaRPr lang="ar-EG"/>
+          </a:p>
+          <a:p>
+            <a:endParaRPr lang="ar-EG"/>
+          </a:p>
+          <a:p>
+            <a:r>
+              <a:rPr lang="en-US"/>
+              <a:t>statusCode of vendor</a:t>
+            </a:r>
+          </a:p>
+          <a:p>
+            <a:pPr lvl="1"/>
+            <a:r>
+              <a:rPr lang="en-US"/>
+              <a:t>After Save at Vendor Registeration  the status code will be 1</a:t>
+            </a:r>
+          </a:p>
+          <a:p>
+            <a:pPr lvl="1"/>
+            <a:r>
+              <a:rPr lang="en-US"/>
+              <a:t>After </a:t>
+            </a:r>
+            <a:r>
+              <a:rPr lang="ar-EG"/>
+              <a:t>حفظ وإرسال</a:t>
+            </a:r>
+            <a:r>
+              <a:rPr lang="en-US"/>
+              <a:t> at Vendor Registeration the status code will be 2</a:t>
+            </a:r>
+          </a:p>
+          <a:p>
+            <a:pPr lvl="1"/>
+            <a:r>
+              <a:rPr lang="en-US"/>
+              <a:t>After rejected fields at phase [</a:t>
+            </a:r>
+            <a:r>
+              <a:rPr lang="ar-EG"/>
+              <a:t>المراجعة الائتمانية</a:t>
+            </a:r>
+            <a:r>
+              <a:rPr lang="en-US"/>
+              <a:t>] the status code will be 6</a:t>
+            </a:r>
+          </a:p>
+          <a:p>
+            <a:pPr lvl="1"/>
+            <a:r>
+              <a:rPr lang="en-US"/>
+              <a:t>After Accept at phase [</a:t>
+            </a:r>
+            <a:r>
+              <a:rPr lang="ar-EG"/>
+              <a:t>المراجعة الائتمانية</a:t>
+            </a:r>
+            <a:r>
+              <a:rPr lang="en-US"/>
+              <a:t>]</a:t>
+            </a:r>
+            <a:r>
+              <a:rPr lang="ar-EG"/>
+              <a:t> </a:t>
+            </a:r>
+            <a:r>
+              <a:rPr lang="en-US"/>
+              <a:t>the status code will be 3 [دراسة مكافحة غسل األموال]</a:t>
+            </a:r>
+          </a:p>
+          <a:p>
+            <a:pPr lvl="1"/>
+            <a:r>
+              <a:rPr lang="en-US"/>
+              <a:t>After reject At AML Phase the status code will be 2 [</a:t>
+            </a:r>
+            <a:r>
+              <a:rPr lang="ar-EG"/>
+              <a:t>مراجعة متابعة الائتمان</a:t>
+            </a:r>
+            <a:r>
+              <a:rPr lang="en-US"/>
+              <a:t>]</a:t>
+            </a:r>
+          </a:p>
+          <a:p>
+            <a:pPr lvl="1"/>
+            <a:r>
+              <a:rPr lang="en-US"/>
+              <a:t>After Accept at AML Phase the status code will be 4 [vendor account creation – حساب إنشاء للمورد</a:t>
+            </a:r>
+          </a:p>
+          <a:p>
+            <a:pPr lvl="1"/>
+            <a:endParaRPr lang="en-US"/>
+          </a:p>
+        </p:txBody>
+      </p:sp>
+    </p:spTree>
+    <p:extLst>
+      <p:ext uri="{BB962C8B-B14F-4D97-AF65-F5344CB8AC3E}">
+        <p14:creationId xmlns:p14="http://schemas.microsoft.com/office/powerpoint/2010/main" val="1116381390"/>
+      </p:ext>
+    </p:extLst>
+  </p:cSld>
+  <p:clrMapOvr>
+    <a:masterClrMapping/>
+  </p:clrMapOvr>
+</p:sld>
+</file>
+
+<file path=ppt/slides/slide236.xml><?xml version="1.0" encoding="utf-8"?>
+<p:sld xmlns:a="http://schemas.openxmlformats.org/drawingml/2006/main" xmlns:r="http://schemas.openxmlformats.org/officeDocument/2006/relationships" xmlns:p="http://schemas.openxmlformats.org/presentationml/2006/main">
+  <p:cSld>
+    <p:spTree>
+      <p:nvGrpSpPr>
+        <p:cNvPr id="1" name=""/>
+        <p:cNvGrpSpPr/>
+        <p:nvPr/>
+      </p:nvGrpSpPr>
+      <p:grpSpPr>
+        <a:xfrm>
+          <a:off x="0" y="0"/>
+          <a:ext cx="0" cy="0"/>
+          <a:chOff x="0" y="0"/>
+          <a:chExt cx="0" cy="0"/>
+        </a:xfrm>
+      </p:grpSpPr>
+      <p:sp>
+        <p:nvSpPr>
+          <p:cNvPr id="2" name="Title 1">
+            <a:extLst>
+              <a:ext uri="{FF2B5EF4-FFF2-40B4-BE49-F238E27FC236}">
+                <a16:creationId xmlns:a16="http://schemas.microsoft.com/office/drawing/2014/main" id="{BEDEBA7F-623F-E4BB-4FFE-1A0426AD26DF}"/>
+              </a:ext>
+            </a:extLst>
+          </p:cNvPr>
+          <p:cNvSpPr>
+            <a:spLocks noGrp="1"/>
+          </p:cNvSpPr>
+          <p:nvPr>
+            <p:ph type="title"/>
+          </p:nvPr>
+        </p:nvSpPr>
+        <p:spPr>
+          <a:xfrm>
+            <a:off x="913795" y="0"/>
+            <a:ext cx="10353762" cy="609600"/>
+          </a:xfrm>
+        </p:spPr>
+        <p:txBody>
+          <a:bodyPr>
+            <a:normAutofit fontScale="90000"/>
+          </a:bodyPr>
+          <a:lstStyle/>
+          <a:p>
+            <a:r>
+              <a:rPr lang="en-US"/>
+              <a:t>Deportation At Save </a:t>
+            </a:r>
+            <a:r>
+              <a:rPr lang="ar-EG"/>
+              <a:t>تسجيل بيانات المورد</a:t>
+            </a:r>
+            <a:endParaRPr lang="en-US"/>
+          </a:p>
+        </p:txBody>
+      </p:sp>
+      <p:sp>
+        <p:nvSpPr>
+          <p:cNvPr id="3" name="Content Placeholder 2">
+            <a:extLst>
+              <a:ext uri="{FF2B5EF4-FFF2-40B4-BE49-F238E27FC236}">
+                <a16:creationId xmlns:a16="http://schemas.microsoft.com/office/drawing/2014/main" id="{4448923C-9752-7D2E-2288-03E44B4F9592}"/>
+              </a:ext>
+            </a:extLst>
+          </p:cNvPr>
+          <p:cNvSpPr>
+            <a:spLocks noGrp="1"/>
+          </p:cNvSpPr>
+          <p:nvPr>
+            <p:ph idx="1"/>
+          </p:nvPr>
+        </p:nvSpPr>
+        <p:spPr>
+          <a:xfrm>
+            <a:off x="371474" y="609600"/>
+            <a:ext cx="11820525" cy="6172200"/>
+          </a:xfrm>
+        </p:spPr>
+        <p:txBody>
+          <a:bodyPr/>
+          <a:lstStyle/>
+          <a:p>
+            <a:r>
+              <a:rPr lang="en-US"/>
+              <a:t>Deportation</a:t>
+            </a:r>
+          </a:p>
+          <a:p>
+            <a:pPr lvl="1"/>
+            <a:r>
+              <a:rPr lang="en-US" sz="1700" b="1">
+                <a:solidFill>
+                  <a:srgbClr val="FFFF00"/>
+                </a:solidFill>
+              </a:rPr>
+              <a:t>UserId_from</a:t>
+            </a:r>
+            <a:r>
+              <a:rPr lang="en-US" sz="1700"/>
+              <a:t>: the Id Of BM Who made the vendor reqquest</a:t>
+            </a:r>
+          </a:p>
+          <a:p>
+            <a:pPr lvl="1"/>
+            <a:r>
+              <a:rPr lang="en-US" sz="1700" b="1">
+                <a:solidFill>
+                  <a:srgbClr val="FFFF00"/>
+                </a:solidFill>
+              </a:rPr>
+              <a:t>UserId_TO </a:t>
+            </a:r>
+            <a:r>
+              <a:rPr lang="en-US" sz="1700"/>
+              <a:t>: the Id Of BM Who made the vendor request</a:t>
+            </a:r>
+          </a:p>
+          <a:p>
+            <a:pPr lvl="1"/>
+            <a:r>
+              <a:rPr lang="en-US" sz="1700"/>
+              <a:t>UserId_BM: Queryable().FirstOrDefault(x =&gt; x.BranchId == addVendorDTO.BranchId).Manager_User</a:t>
+            </a:r>
+          </a:p>
+          <a:p>
+            <a:pPr lvl="1"/>
+            <a:r>
+              <a:rPr lang="en-US" sz="1700"/>
+              <a:t>Status_one: Inprocess</a:t>
+            </a:r>
+          </a:p>
+          <a:p>
+            <a:pPr lvl="1"/>
+            <a:r>
+              <a:rPr lang="en-US" sz="1700"/>
+              <a:t>Status_two: BM1010</a:t>
+            </a:r>
+          </a:p>
+          <a:p>
+            <a:pPr lvl="1"/>
+            <a:r>
+              <a:rPr lang="en-US" sz="1700"/>
+              <a:t>Creation_Date: DateTime.Now</a:t>
+            </a:r>
+          </a:p>
+          <a:p>
+            <a:pPr lvl="1"/>
+            <a:r>
+              <a:rPr lang="en-US" sz="1700"/>
+              <a:t>DateAssigned: the date when it is assigned to UserIdTo</a:t>
+            </a:r>
+          </a:p>
+          <a:p>
+            <a:endParaRPr lang="en-US" sz="1800"/>
+          </a:p>
+          <a:p>
+            <a:pPr lvl="1"/>
+            <a:endParaRPr lang="en-US" sz="1600"/>
+          </a:p>
+        </p:txBody>
+      </p:sp>
+    </p:spTree>
+    <p:extLst>
+      <p:ext uri="{BB962C8B-B14F-4D97-AF65-F5344CB8AC3E}">
+        <p14:creationId xmlns:p14="http://schemas.microsoft.com/office/powerpoint/2010/main" val="708019365"/>
+      </p:ext>
+    </p:extLst>
+  </p:cSld>
+  <p:clrMapOvr>
+    <a:masterClrMapping/>
+  </p:clrMapOvr>
+</p:sld>
+</file>
+
+<file path=ppt/slides/slide237.xml><?xml version="1.0" encoding="utf-8"?>
+<p:sld xmlns:a="http://schemas.openxmlformats.org/drawingml/2006/main" xmlns:r="http://schemas.openxmlformats.org/officeDocument/2006/relationships" xmlns:p="http://schemas.openxmlformats.org/presentationml/2006/main">
+  <p:cSld>
+    <p:spTree>
+      <p:nvGrpSpPr>
+        <p:cNvPr id="1" name=""/>
+        <p:cNvGrpSpPr/>
+        <p:nvPr/>
+      </p:nvGrpSpPr>
+      <p:grpSpPr>
+        <a:xfrm>
+          <a:off x="0" y="0"/>
+          <a:ext cx="0" cy="0"/>
+          <a:chOff x="0" y="0"/>
+          <a:chExt cx="0" cy="0"/>
+        </a:xfrm>
+      </p:grpSpPr>
+      <p:sp>
+        <p:nvSpPr>
+          <p:cNvPr id="2" name="Title 1">
+            <a:extLst>
+              <a:ext uri="{FF2B5EF4-FFF2-40B4-BE49-F238E27FC236}">
+                <a16:creationId xmlns:a16="http://schemas.microsoft.com/office/drawing/2014/main" id="{43970A79-EAEE-B345-9E7A-350981B67705}"/>
+              </a:ext>
+            </a:extLst>
+          </p:cNvPr>
+          <p:cNvSpPr>
+            <a:spLocks noGrp="1"/>
+          </p:cNvSpPr>
+          <p:nvPr>
+            <p:ph type="title"/>
+          </p:nvPr>
+        </p:nvSpPr>
+        <p:spPr/>
+        <p:txBody>
+          <a:bodyPr/>
+          <a:lstStyle/>
+          <a:p>
+            <a:r>
+              <a:rPr lang="en-US"/>
+              <a:t>De</a:t>
+            </a:r>
+          </a:p>
+        </p:txBody>
+      </p:sp>
+      <p:sp>
+        <p:nvSpPr>
+          <p:cNvPr id="3" name="Content Placeholder 2">
+            <a:extLst>
+              <a:ext uri="{FF2B5EF4-FFF2-40B4-BE49-F238E27FC236}">
+                <a16:creationId xmlns:a16="http://schemas.microsoft.com/office/drawing/2014/main" id="{9752CDC6-8E3A-9C79-CF45-51E436C03DDF}"/>
+              </a:ext>
+            </a:extLst>
+          </p:cNvPr>
+          <p:cNvSpPr>
+            <a:spLocks noGrp="1"/>
+          </p:cNvSpPr>
+          <p:nvPr>
+            <p:ph idx="1"/>
+          </p:nvPr>
+        </p:nvSpPr>
+        <p:spPr/>
+        <p:txBody>
+          <a:bodyPr/>
+          <a:lstStyle/>
+          <a:p>
+            <a:endParaRPr lang="en-US"/>
+          </a:p>
+        </p:txBody>
+      </p:sp>
+    </p:spTree>
+    <p:extLst>
+      <p:ext uri="{BB962C8B-B14F-4D97-AF65-F5344CB8AC3E}">
+        <p14:creationId xmlns:p14="http://schemas.microsoft.com/office/powerpoint/2010/main" val="4132694482"/>
+      </p:ext>
+    </p:extLst>
+  </p:cSld>
+  <p:clrMapOvr>
+    <a:masterClrMapping/>
+  </p:clrMapOvr>
+</p:sld>
+</file>
+
 <file path=ppt/slides/slide24.xml><?xml version="1.0" encoding="utf-8"?>
 <p:sld xmlns:a="http://schemas.openxmlformats.org/drawingml/2006/main" xmlns:r="http://schemas.openxmlformats.org/officeDocument/2006/relationships" xmlns:p="http://schemas.openxmlformats.org/presentationml/2006/main">
   <p:cSld>
@@ -34213,6 +35223,9 @@
   <p:clrMapOvr>
     <a:masterClrMapping/>
   </p:clrMapOvr>
+  <p:transition spd="slow">
+    <p:wipe/>
+  </p:transition>
 </p:sld>
 </file>
 
